--- a/MCG_Technology_Architecture.pptx
+++ b/MCG_Technology_Architecture.pptx
@@ -5896,7 +5896,7 @@
                 <a:ea typeface="Inter" pitchFamily="34" charset="-122"/>
                 <a:cs typeface="Inter" pitchFamily="34" charset="-120"/>
               </a:rPr>
-              <a:t>2 Qlik Sense apps (10 sheets)  •  MCG Dark Theme  •  Streaming IoT  •  Alerts  •  Reports</a:t>
+              <a:t>2 Qlik Analytics apps (10 sheets)  •  MCG Dark Theme  •  Streaming IoT  •  Alerts  •  Reports</a:t>
             </a:r>
             <a:endParaRPr lang="en-US" sz="1100" dirty="0"/>
           </a:p>
@@ -7898,7 +7898,7 @@
                 <a:ea typeface="Inter" pitchFamily="34" charset="-122"/>
                 <a:cs typeface="Inter" pitchFamily="34" charset="-120"/>
               </a:rPr>
-              <a:t>Qlik Sense</a:t>
+              <a:t>Qlik Analytics</a:t>
             </a:r>
             <a:endParaRPr lang="en-US" sz="1200" dirty="0"/>
           </a:p>
@@ -16615,7 +16615,7 @@
                 <a:ea typeface="Inter" pitchFamily="34" charset="-122"/>
                 <a:cs typeface="Inter" pitchFamily="34" charset="-120"/>
               </a:rPr>
-              <a:t>Qlik Sense  •  Predict  •  Answers  •  Discovery Agent  •  MCP</a:t>
+              <a:t>Qlik Analytics  •  Predict  •  Answers  •  Discovery Agent  •  MCP</a:t>
             </a:r>
             <a:endParaRPr lang="en-US" sz="1600" dirty="0"/>
           </a:p>
@@ -16894,7 +16894,7 @@
                 <a:ea typeface="Inter" pitchFamily="34" charset="-122"/>
                 <a:cs typeface="Inter" pitchFamily="34" charset="-120"/>
               </a:rPr>
-              <a:t>Qlik Sense — 2 Domain Apps</a:t>
+              <a:t>Qlik Analytics — 2 Domain Apps</a:t>
             </a:r>
             <a:endParaRPr lang="en-US" sz="1400" dirty="0"/>
           </a:p>

--- a/MCG_Technology_Architecture.pptx
+++ b/MCG_Technology_Architecture.pptx
@@ -1856,7 +1856,7 @@
       </p:grpSpPr>
       <p:pic>
         <p:nvPicPr>
-          <p:cNvPr id="2" name="Image 0" descr="C:\Claude\End-To-End Demo\generators\assets\qlik_cover_bg.png">    </p:cNvPr>
+          <p:cNvPr id="2" name="Image 0" descr="C:\Claude\MCG Full Stack\generators\assets\qlik_cover_bg.png">    </p:cNvPr>
           <p:cNvPicPr>
             <a:picLocks noChangeAspect="1"/>
           </p:cNvPicPr>
@@ -1880,7 +1880,7 @@
       </p:pic>
       <p:pic>
         <p:nvPicPr>
-          <p:cNvPr id="3" name="Image 1" descr="C:\Claude\End-To-End Demo\generators\assets\qlik_logo.png">    </p:cNvPr>
+          <p:cNvPr id="3" name="Image 1" descr="C:\Claude\MCG Full Stack\generators\assets\qlik_logo.png">    </p:cNvPr>
           <p:cNvPicPr>
             <a:picLocks noChangeAspect="1"/>
           </p:cNvPicPr>
@@ -2422,7 +2422,7 @@
       </p:sp>
       <p:pic>
         <p:nvPicPr>
-          <p:cNvPr id="4" name="Image 0" descr="C:\Claude\End-To-End Demo\generators\assets\qlik_logo.png">    </p:cNvPr>
+          <p:cNvPr id="4" name="Image 0" descr="C:\Claude\MCG Full Stack\generators\assets\qlik_logo.png">    </p:cNvPr>
           <p:cNvPicPr>
             <a:picLocks noChangeAspect="1"/>
           </p:cNvPicPr>
@@ -3987,7 +3987,7 @@
       </p:sp>
       <p:pic>
         <p:nvPicPr>
-          <p:cNvPr id="4" name="Image 0" descr="C:\Claude\End-To-End Demo\generators\assets\qlik_logo.png">    </p:cNvPr>
+          <p:cNvPr id="4" name="Image 0" descr="C:\Claude\MCG Full Stack\generators\assets\qlik_logo.png">    </p:cNvPr>
           <p:cNvPicPr>
             <a:picLocks noChangeAspect="1"/>
           </p:cNvPicPr>
@@ -5363,7 +5363,7 @@
       </p:sp>
       <p:pic>
         <p:nvPicPr>
-          <p:cNvPr id="4" name="Image 0" descr="C:\Claude\End-To-End Demo\generators\assets\qlik_logo.png">    </p:cNvPr>
+          <p:cNvPr id="4" name="Image 0" descr="C:\Claude\MCG Full Stack\generators\assets\qlik_logo.png">    </p:cNvPr>
           <p:cNvPicPr>
             <a:picLocks noChangeAspect="1"/>
           </p:cNvPicPr>
@@ -6337,7 +6337,7 @@
       </p:sp>
       <p:pic>
         <p:nvPicPr>
-          <p:cNvPr id="4" name="Image 0" descr="C:\Claude\End-To-End Demo\generators\assets\qlik_logo.png">    </p:cNvPr>
+          <p:cNvPr id="4" name="Image 0" descr="C:\Claude\MCG Full Stack\generators\assets\qlik_logo.png">    </p:cNvPr>
           <p:cNvPicPr>
             <a:picLocks noChangeAspect="1"/>
           </p:cNvPicPr>
@@ -8991,7 +8991,7 @@
       </p:sp>
       <p:pic>
         <p:nvPicPr>
-          <p:cNvPr id="4" name="Image 0" descr="C:\Claude\End-To-End Demo\generators\assets\qlik_logo.png">    </p:cNvPr>
+          <p:cNvPr id="4" name="Image 0" descr="C:\Claude\MCG Full Stack\generators\assets\qlik_logo.png">    </p:cNvPr>
           <p:cNvPicPr>
             <a:picLocks noChangeAspect="1"/>
           </p:cNvPicPr>
@@ -10802,7 +10802,7 @@
       </p:sp>
       <p:pic>
         <p:nvPicPr>
-          <p:cNvPr id="4" name="Image 0" descr="C:\Claude\End-To-End Demo\generators\assets\qlik_logo.png">    </p:cNvPr>
+          <p:cNvPr id="4" name="Image 0" descr="C:\Claude\MCG Full Stack\generators\assets\qlik_logo.png">    </p:cNvPr>
           <p:cNvPicPr>
             <a:picLocks noChangeAspect="1"/>
           </p:cNvPicPr>
@@ -12518,336 +12518,6 @@
         </p:nvSpPr>
         <p:spPr>
           <a:xfrm>
-            <a:off x="8183880" y="2898648"/>
-            <a:ext cx="3291840" cy="420624"/>
-          </a:xfrm>
-          <a:prstGeom prst="roundRect">
-            <a:avLst>
-              <a:gd name="adj" fmla="val 13043"/>
-            </a:avLst>
-          </a:prstGeom>
-          <a:solidFill>
-            <a:srgbClr val="FFFFFF"/>
-          </a:solidFill>
-          <a:ln w="9525">
-            <a:solidFill>
-              <a:srgbClr val="19416C"/>
-            </a:solidFill>
-            <a:prstDash val="solid"/>
-          </a:ln>
-        </p:spPr>
-      </p:sp>
-      <p:sp>
-        <p:nvSpPr>
-          <p:cNvPr id="57" name="Text 54"/>
-          <p:cNvSpPr/>
-          <p:nvPr/>
-        </p:nvSpPr>
-        <p:spPr>
-          <a:xfrm>
-            <a:off x="8302752" y="2898648"/>
-            <a:ext cx="3054096" cy="420624"/>
-          </a:xfrm>
-          <a:prstGeom prst="rect">
-            <a:avLst/>
-          </a:prstGeom>
-          <a:noFill/>
-          <a:ln/>
-        </p:spPr>
-        <p:txBody>
-          <a:bodyPr wrap="square" rtlCol="0" anchor="ctr"/>
-          <a:lstStyle/>
-          <a:p>
-            <a:pPr indent="0" marL="0">
-              <a:buNone/>
-            </a:pPr>
-            <a:r>
-              <a:rPr lang="en-US" sz="1000" dirty="0">
-                <a:solidFill>
-                  <a:srgbClr val="454659"/>
-                </a:solidFill>
-                <a:latin typeface="Inter" pitchFamily="34" charset="0"/>
-                <a:ea typeface="Inter" pitchFamily="34" charset="-122"/>
-                <a:cs typeface="Inter" pitchFamily="34" charset="-120"/>
-              </a:rPr>
-              <a:t>cold_chain_compliance</a:t>
-            </a:r>
-            <a:endParaRPr lang="en-US" sz="1000" dirty="0"/>
-          </a:p>
-        </p:txBody>
-      </p:sp>
-      <p:sp>
-        <p:nvSpPr>
-          <p:cNvPr id="58" name="Shape 55"/>
-          <p:cNvSpPr/>
-          <p:nvPr/>
-        </p:nvSpPr>
-        <p:spPr>
-          <a:xfrm>
-            <a:off x="8183880" y="3410712"/>
-            <a:ext cx="3291840" cy="420624"/>
-          </a:xfrm>
-          <a:prstGeom prst="roundRect">
-            <a:avLst>
-              <a:gd name="adj" fmla="val 13043"/>
-            </a:avLst>
-          </a:prstGeom>
-          <a:solidFill>
-            <a:srgbClr val="FFFFFF"/>
-          </a:solidFill>
-          <a:ln w="9525">
-            <a:solidFill>
-              <a:srgbClr val="19416C"/>
-            </a:solidFill>
-            <a:prstDash val="solid"/>
-          </a:ln>
-        </p:spPr>
-      </p:sp>
-      <p:sp>
-        <p:nvSpPr>
-          <p:cNvPr id="59" name="Text 56"/>
-          <p:cNvSpPr/>
-          <p:nvPr/>
-        </p:nvSpPr>
-        <p:spPr>
-          <a:xfrm>
-            <a:off x="8302752" y="3410712"/>
-            <a:ext cx="3054096" cy="420624"/>
-          </a:xfrm>
-          <a:prstGeom prst="rect">
-            <a:avLst/>
-          </a:prstGeom>
-          <a:noFill/>
-          <a:ln/>
-        </p:spPr>
-        <p:txBody>
-          <a:bodyPr wrap="square" rtlCol="0" anchor="ctr"/>
-          <a:lstStyle/>
-          <a:p>
-            <a:pPr indent="0" marL="0">
-              <a:buNone/>
-            </a:pPr>
-            <a:r>
-              <a:rPr lang="en-US" sz="1000" dirty="0">
-                <a:solidFill>
-                  <a:srgbClr val="454659"/>
-                </a:solidFill>
-                <a:latin typeface="Inter" pitchFamily="34" charset="0"/>
-                <a:ea typeface="Inter" pitchFamily="34" charset="-122"/>
-                <a:cs typeface="Inter" pitchFamily="34" charset="-120"/>
-              </a:rPr>
-              <a:t>product_master_360</a:t>
-            </a:r>
-            <a:endParaRPr lang="en-US" sz="1000" dirty="0"/>
-          </a:p>
-        </p:txBody>
-      </p:sp>
-      <p:sp>
-        <p:nvSpPr>
-          <p:cNvPr id="60" name="Shape 57"/>
-          <p:cNvSpPr/>
-          <p:nvPr/>
-        </p:nvSpPr>
-        <p:spPr>
-          <a:xfrm>
-            <a:off x="8183880" y="3922776"/>
-            <a:ext cx="3291840" cy="420624"/>
-          </a:xfrm>
-          <a:prstGeom prst="roundRect">
-            <a:avLst>
-              <a:gd name="adj" fmla="val 13043"/>
-            </a:avLst>
-          </a:prstGeom>
-          <a:solidFill>
-            <a:srgbClr val="FFFFFF"/>
-          </a:solidFill>
-          <a:ln w="9525">
-            <a:solidFill>
-              <a:srgbClr val="19416C"/>
-            </a:solidFill>
-            <a:prstDash val="solid"/>
-          </a:ln>
-        </p:spPr>
-      </p:sp>
-      <p:sp>
-        <p:nvSpPr>
-          <p:cNvPr id="61" name="Text 58"/>
-          <p:cNvSpPr/>
-          <p:nvPr/>
-        </p:nvSpPr>
-        <p:spPr>
-          <a:xfrm>
-            <a:off x="8302752" y="3922776"/>
-            <a:ext cx="3054096" cy="420624"/>
-          </a:xfrm>
-          <a:prstGeom prst="rect">
-            <a:avLst/>
-          </a:prstGeom>
-          <a:noFill/>
-          <a:ln/>
-        </p:spPr>
-        <p:txBody>
-          <a:bodyPr wrap="square" rtlCol="0" anchor="ctr"/>
-          <a:lstStyle/>
-          <a:p>
-            <a:pPr indent="0" marL="0">
-              <a:buNone/>
-            </a:pPr>
-            <a:r>
-              <a:rPr lang="en-US" sz="1000" dirty="0">
-                <a:solidFill>
-                  <a:srgbClr val="454659"/>
-                </a:solidFill>
-                <a:latin typeface="Inter" pitchFamily="34" charset="0"/>
-                <a:ea typeface="Inter" pitchFamily="34" charset="-122"/>
-                <a:cs typeface="Inter" pitchFamily="34" charset="-120"/>
-              </a:rPr>
-              <a:t>customer_delivery_experience</a:t>
-            </a:r>
-            <a:endParaRPr lang="en-US" sz="1000" dirty="0"/>
-          </a:p>
-        </p:txBody>
-      </p:sp>
-      <p:sp>
-        <p:nvSpPr>
-          <p:cNvPr id="62" name="Shape 59"/>
-          <p:cNvSpPr/>
-          <p:nvPr/>
-        </p:nvSpPr>
-        <p:spPr>
-          <a:xfrm>
-            <a:off x="8183880" y="4434840"/>
-            <a:ext cx="3291840" cy="420624"/>
-          </a:xfrm>
-          <a:prstGeom prst="roundRect">
-            <a:avLst>
-              <a:gd name="adj" fmla="val 13043"/>
-            </a:avLst>
-          </a:prstGeom>
-          <a:solidFill>
-            <a:srgbClr val="FFFFFF"/>
-          </a:solidFill>
-          <a:ln w="9525">
-            <a:solidFill>
-              <a:srgbClr val="19416C"/>
-            </a:solidFill>
-            <a:prstDash val="solid"/>
-          </a:ln>
-        </p:spPr>
-      </p:sp>
-      <p:sp>
-        <p:nvSpPr>
-          <p:cNvPr id="63" name="Text 60"/>
-          <p:cNvSpPr/>
-          <p:nvPr/>
-        </p:nvSpPr>
-        <p:spPr>
-          <a:xfrm>
-            <a:off x="8302752" y="4434840"/>
-            <a:ext cx="3054096" cy="420624"/>
-          </a:xfrm>
-          <a:prstGeom prst="rect">
-            <a:avLst/>
-          </a:prstGeom>
-          <a:noFill/>
-          <a:ln/>
-        </p:spPr>
-        <p:txBody>
-          <a:bodyPr wrap="square" rtlCol="0" anchor="ctr"/>
-          <a:lstStyle/>
-          <a:p>
-            <a:pPr indent="0" marL="0">
-              <a:buNone/>
-            </a:pPr>
-            <a:r>
-              <a:rPr lang="en-US" sz="1000" dirty="0">
-                <a:solidFill>
-                  <a:srgbClr val="454659"/>
-                </a:solidFill>
-                <a:latin typeface="Inter" pitchFamily="34" charset="0"/>
-                <a:ea typeface="Inter" pitchFamily="34" charset="-122"/>
-                <a:cs typeface="Inter" pitchFamily="34" charset="-120"/>
-              </a:rPr>
-              <a:t>compliance_readiness</a:t>
-            </a:r>
-            <a:endParaRPr lang="en-US" sz="1000" dirty="0"/>
-          </a:p>
-        </p:txBody>
-      </p:sp>
-      <p:sp>
-        <p:nvSpPr>
-          <p:cNvPr id="64" name="Shape 61"/>
-          <p:cNvSpPr/>
-          <p:nvPr/>
-        </p:nvSpPr>
-        <p:spPr>
-          <a:xfrm>
-            <a:off x="8183880" y="4946904"/>
-            <a:ext cx="3291840" cy="420624"/>
-          </a:xfrm>
-          <a:prstGeom prst="roundRect">
-            <a:avLst>
-              <a:gd name="adj" fmla="val 13043"/>
-            </a:avLst>
-          </a:prstGeom>
-          <a:solidFill>
-            <a:srgbClr val="FFFFFF"/>
-          </a:solidFill>
-          <a:ln w="9525">
-            <a:solidFill>
-              <a:srgbClr val="19416C"/>
-            </a:solidFill>
-            <a:prstDash val="solid"/>
-          </a:ln>
-        </p:spPr>
-      </p:sp>
-      <p:sp>
-        <p:nvSpPr>
-          <p:cNvPr id="65" name="Text 62"/>
-          <p:cNvSpPr/>
-          <p:nvPr/>
-        </p:nvSpPr>
-        <p:spPr>
-          <a:xfrm>
-            <a:off x="8302752" y="4946904"/>
-            <a:ext cx="3054096" cy="420624"/>
-          </a:xfrm>
-          <a:prstGeom prst="rect">
-            <a:avLst/>
-          </a:prstGeom>
-          <a:noFill/>
-          <a:ln/>
-        </p:spPr>
-        <p:txBody>
-          <a:bodyPr wrap="square" rtlCol="0" anchor="ctr"/>
-          <a:lstStyle/>
-          <a:p>
-            <a:pPr indent="0" marL="0">
-              <a:buNone/>
-            </a:pPr>
-            <a:r>
-              <a:rPr lang="en-US" sz="1000" dirty="0">
-                <a:solidFill>
-                  <a:srgbClr val="454659"/>
-                </a:solidFill>
-                <a:latin typeface="Inter" pitchFamily="34" charset="0"/>
-                <a:ea typeface="Inter" pitchFamily="34" charset="-122"/>
-                <a:cs typeface="Inter" pitchFamily="34" charset="-120"/>
-              </a:rPr>
-              <a:t>operational_cost_impact</a:t>
-            </a:r>
-            <a:endParaRPr lang="en-US" sz="1000" dirty="0"/>
-          </a:p>
-        </p:txBody>
-      </p:sp>
-      <p:sp>
-        <p:nvSpPr>
-          <p:cNvPr id="66" name="Shape 63"/>
-          <p:cNvSpPr/>
-          <p:nvPr/>
-        </p:nvSpPr>
-        <p:spPr>
-          <a:xfrm>
             <a:off x="3749040" y="3474720"/>
             <a:ext cx="457200" cy="0"/>
           </a:xfrm>
@@ -12866,7 +12536,7 @@
       </p:sp>
       <p:sp>
         <p:nvSpPr>
-          <p:cNvPr id="67" name="Shape 64"/>
+          <p:cNvPr id="57" name="Shape 54"/>
           <p:cNvSpPr/>
           <p:nvPr/>
         </p:nvSpPr>
@@ -12890,7 +12560,7 @@
       </p:sp>
       <p:sp>
         <p:nvSpPr>
-          <p:cNvPr id="68" name="Text 65"/>
+          <p:cNvPr id="58" name="Text 55"/>
           <p:cNvSpPr/>
           <p:nvPr/>
         </p:nvSpPr>
@@ -12946,7 +12616,7 @@
       </p:sp>
       <p:sp>
         <p:nvSpPr>
-          <p:cNvPr id="69" name="Text 66"/>
+          <p:cNvPr id="59" name="Text 56"/>
           <p:cNvSpPr/>
           <p:nvPr/>
         </p:nvSpPr>
@@ -13074,7 +12744,7 @@
       </p:sp>
       <p:pic>
         <p:nvPicPr>
-          <p:cNvPr id="4" name="Image 0" descr="C:\Claude\End-To-End Demo\generators\assets\qlik_logo.png">    </p:cNvPr>
+          <p:cNvPr id="4" name="Image 0" descr="C:\Claude\MCG Full Stack\generators\assets\qlik_logo.png">    </p:cNvPr>
           <p:cNvPicPr>
             <a:picLocks noChangeAspect="1"/>
           </p:cNvPicPr>
@@ -14588,7 +14258,7 @@
       </p:sp>
       <p:pic>
         <p:nvPicPr>
-          <p:cNvPr id="4" name="Image 0" descr="C:\Claude\End-To-End Demo\generators\assets\qlik_logo.png">    </p:cNvPr>
+          <p:cNvPr id="4" name="Image 0" descr="C:\Claude\MCG Full Stack\generators\assets\qlik_logo.png">    </p:cNvPr>
           <p:cNvPicPr>
             <a:picLocks noChangeAspect="1"/>
           </p:cNvPicPr>
@@ -14721,7 +14391,7 @@
                 <a:ea typeface="Inter" pitchFamily="34" charset="-122"/>
                 <a:cs typeface="Inter" pitchFamily="34" charset="-120"/>
               </a:rPr>
-              <a:t>7 Gold-Layer Data Products</a:t>
+              <a:t>2 Gold-Layer Data Products</a:t>
             </a:r>
             <a:endParaRPr lang="en-US" sz="2200" dirty="0"/>
           </a:p>
@@ -15195,1251 +14865,6 @@
         <p:spPr>
           <a:xfrm>
             <a:off x="3337560" y="2743200"/>
-            <a:ext cx="2697480" cy="274320"/>
-          </a:xfrm>
-          <a:prstGeom prst="rect">
-            <a:avLst/>
-          </a:prstGeom>
-          <a:noFill/>
-          <a:ln/>
-        </p:spPr>
-        <p:txBody>
-          <a:bodyPr wrap="square" rtlCol="0" anchor="ctr"/>
-          <a:lstStyle/>
-          <a:p>
-            <a:pPr algn="ctr" indent="0" marL="0">
-              <a:buNone/>
-            </a:pPr>
-            <a:r>
-              <a:rPr lang="en-US" sz="900" i="1" dirty="0">
-                <a:solidFill>
-                  <a:srgbClr val="A9B3B6"/>
-                </a:solidFill>
-                <a:latin typeface="Inter" pitchFamily="34" charset="0"/>
-                <a:ea typeface="Inter" pitchFamily="34" charset="-122"/>
-                <a:cs typeface="Inter" pitchFamily="34" charset="-120"/>
-              </a:rPr>
-              <a:t>Trust Score  •  API Sharing  •  Lineage</a:t>
-            </a:r>
-            <a:endParaRPr lang="en-US" sz="900" dirty="0"/>
-          </a:p>
-        </p:txBody>
-      </p:sp>
-      <p:sp>
-        <p:nvSpPr>
-          <p:cNvPr id="22" name="Shape 19"/>
-          <p:cNvSpPr/>
-          <p:nvPr/>
-        </p:nvSpPr>
-        <p:spPr>
-          <a:xfrm>
-            <a:off x="6217920" y="1005840"/>
-            <a:ext cx="2697480" cy="2331720"/>
-          </a:xfrm>
-          <a:prstGeom prst="roundRect">
-            <a:avLst>
-              <a:gd name="adj" fmla="val 4706"/>
-            </a:avLst>
-          </a:prstGeom>
-          <a:solidFill>
-            <a:srgbClr val="FFFFFF"/>
-          </a:solidFill>
-          <a:ln w="19050">
-            <a:solidFill>
-              <a:srgbClr val="006580"/>
-            </a:solidFill>
-            <a:prstDash val="solid"/>
-          </a:ln>
-          <a:effectLst>
-            <a:outerShdw sx="100000" sy="100000" kx="0" ky="0" algn="bl" rotWithShape="0" blurRad="50800" dist="19050" dir="16200000">
-              <a:srgbClr val="000000">
-                <a:alpha val="8000"/>
-              </a:srgbClr>
-            </a:outerShdw>
-          </a:effectLst>
-        </p:spPr>
-      </p:sp>
-      <p:sp>
-        <p:nvSpPr>
-          <p:cNvPr id="23" name="Shape 20"/>
-          <p:cNvSpPr/>
-          <p:nvPr/>
-        </p:nvSpPr>
-        <p:spPr>
-          <a:xfrm>
-            <a:off x="6291072" y="1060704"/>
-            <a:ext cx="2551176" cy="54864"/>
-          </a:xfrm>
-          <a:prstGeom prst="rect">
-            <a:avLst/>
-          </a:prstGeom>
-          <a:solidFill>
-            <a:srgbClr val="006580"/>
-          </a:solidFill>
-          <a:ln/>
-        </p:spPr>
-      </p:sp>
-      <p:sp>
-        <p:nvSpPr>
-          <p:cNvPr id="24" name="Text 21"/>
-          <p:cNvSpPr/>
-          <p:nvPr/>
-        </p:nvSpPr>
-        <p:spPr>
-          <a:xfrm>
-            <a:off x="6217920" y="1188720"/>
-            <a:ext cx="2697480" cy="411480"/>
-          </a:xfrm>
-          <a:prstGeom prst="rect">
-            <a:avLst/>
-          </a:prstGeom>
-          <a:noFill/>
-          <a:ln/>
-        </p:spPr>
-        <p:txBody>
-          <a:bodyPr wrap="square" rtlCol="0" anchor="ctr"/>
-          <a:lstStyle/>
-          <a:p>
-            <a:pPr algn="ctr" indent="0" marL="0">
-              <a:buNone/>
-            </a:pPr>
-            <a:r>
-              <a:rPr lang="en-US" sz="1300" b="1" dirty="0">
-                <a:solidFill>
-                  <a:srgbClr val="19416C"/>
-                </a:solidFill>
-                <a:latin typeface="Inter" pitchFamily="34" charset="0"/>
-                <a:ea typeface="Inter" pitchFamily="34" charset="-122"/>
-                <a:cs typeface="Inter" pitchFamily="34" charset="-120"/>
-              </a:rPr>
-              <a:t>Cold Chain Compliance</a:t>
-            </a:r>
-            <a:endParaRPr lang="en-US" sz="1300" dirty="0"/>
-          </a:p>
-        </p:txBody>
-      </p:sp>
-      <p:sp>
-        <p:nvSpPr>
-          <p:cNvPr id="25" name="Text 22"/>
-          <p:cNvSpPr/>
-          <p:nvPr/>
-        </p:nvSpPr>
-        <p:spPr>
-          <a:xfrm>
-            <a:off x="6400800" y="1691640"/>
-            <a:ext cx="2331720" cy="274320"/>
-          </a:xfrm>
-          <a:prstGeom prst="rect">
-            <a:avLst/>
-          </a:prstGeom>
-          <a:noFill/>
-          <a:ln/>
-        </p:spPr>
-        <p:txBody>
-          <a:bodyPr wrap="square" rtlCol="0" anchor="ctr"/>
-          <a:lstStyle/>
-          <a:p>
-            <a:pPr indent="0" marL="0">
-              <a:buNone/>
-            </a:pPr>
-            <a:r>
-              <a:rPr lang="en-US" sz="1000" dirty="0">
-                <a:solidFill>
-                  <a:srgbClr val="6B7280"/>
-                </a:solidFill>
-                <a:latin typeface="Inter" pitchFamily="34" charset="0"/>
-                <a:ea typeface="Inter" pitchFamily="34" charset="-122"/>
-                <a:cs typeface="Inter" pitchFamily="34" charset="-120"/>
-              </a:rPr>
-              <a:t>Owner: Thomas Brennan</a:t>
-            </a:r>
-            <a:endParaRPr lang="en-US" sz="1000" dirty="0"/>
-          </a:p>
-        </p:txBody>
-      </p:sp>
-      <p:sp>
-        <p:nvSpPr>
-          <p:cNvPr id="26" name="Text 23"/>
-          <p:cNvSpPr/>
-          <p:nvPr/>
-        </p:nvSpPr>
-        <p:spPr>
-          <a:xfrm>
-            <a:off x="6400800" y="1965960"/>
-            <a:ext cx="2331720" cy="274320"/>
-          </a:xfrm>
-          <a:prstGeom prst="rect">
-            <a:avLst/>
-          </a:prstGeom>
-          <a:noFill/>
-          <a:ln/>
-        </p:spPr>
-        <p:txBody>
-          <a:bodyPr wrap="square" rtlCol="0" anchor="ctr"/>
-          <a:lstStyle/>
-          <a:p>
-            <a:pPr indent="0" marL="0">
-              <a:buNone/>
-            </a:pPr>
-            <a:r>
-              <a:rPr lang="en-US" sz="1000" dirty="0">
-                <a:solidFill>
-                  <a:srgbClr val="6B7280"/>
-                </a:solidFill>
-                <a:latin typeface="Inter" pitchFamily="34" charset="0"/>
-                <a:ea typeface="Inter" pitchFamily="34" charset="-122"/>
-                <a:cs typeface="Inter" pitchFamily="34" charset="-120"/>
-              </a:rPr>
-              <a:t>Refresh: 5 min</a:t>
-            </a:r>
-            <a:endParaRPr lang="en-US" sz="1000" dirty="0"/>
-          </a:p>
-        </p:txBody>
-      </p:sp>
-      <p:sp>
-        <p:nvSpPr>
-          <p:cNvPr id="27" name="Text 24"/>
-          <p:cNvSpPr/>
-          <p:nvPr/>
-        </p:nvSpPr>
-        <p:spPr>
-          <a:xfrm>
-            <a:off x="6400800" y="2240280"/>
-            <a:ext cx="2331720" cy="274320"/>
-          </a:xfrm>
-          <a:prstGeom prst="rect">
-            <a:avLst/>
-          </a:prstGeom>
-          <a:noFill/>
-          <a:ln/>
-        </p:spPr>
-        <p:txBody>
-          <a:bodyPr wrap="square" rtlCol="0" anchor="ctr"/>
-          <a:lstStyle/>
-          <a:p>
-            <a:pPr indent="0" marL="0">
-              <a:buNone/>
-            </a:pPr>
-            <a:r>
-              <a:rPr lang="en-US" sz="1100" b="1" dirty="0">
-                <a:solidFill>
-                  <a:srgbClr val="006580"/>
-                </a:solidFill>
-                <a:latin typeface="Inter" pitchFamily="34" charset="0"/>
-                <a:ea typeface="Inter" pitchFamily="34" charset="-122"/>
-                <a:cs typeface="Inter" pitchFamily="34" charset="-120"/>
-              </a:rPr>
-              <a:t>KPI: Spoilage risk score</a:t>
-            </a:r>
-            <a:endParaRPr lang="en-US" sz="1100" dirty="0"/>
-          </a:p>
-        </p:txBody>
-      </p:sp>
-      <p:sp>
-        <p:nvSpPr>
-          <p:cNvPr id="28" name="Text 25"/>
-          <p:cNvSpPr/>
-          <p:nvPr/>
-        </p:nvSpPr>
-        <p:spPr>
-          <a:xfrm>
-            <a:off x="6217920" y="2743200"/>
-            <a:ext cx="2697480" cy="274320"/>
-          </a:xfrm>
-          <a:prstGeom prst="rect">
-            <a:avLst/>
-          </a:prstGeom>
-          <a:noFill/>
-          <a:ln/>
-        </p:spPr>
-        <p:txBody>
-          <a:bodyPr wrap="square" rtlCol="0" anchor="ctr"/>
-          <a:lstStyle/>
-          <a:p>
-            <a:pPr algn="ctr" indent="0" marL="0">
-              <a:buNone/>
-            </a:pPr>
-            <a:r>
-              <a:rPr lang="en-US" sz="900" i="1" dirty="0">
-                <a:solidFill>
-                  <a:srgbClr val="A9B3B6"/>
-                </a:solidFill>
-                <a:latin typeface="Inter" pitchFamily="34" charset="0"/>
-                <a:ea typeface="Inter" pitchFamily="34" charset="-122"/>
-                <a:cs typeface="Inter" pitchFamily="34" charset="-120"/>
-              </a:rPr>
-              <a:t>Trust Score  •  API Sharing  •  Lineage</a:t>
-            </a:r>
-            <a:endParaRPr lang="en-US" sz="900" dirty="0"/>
-          </a:p>
-        </p:txBody>
-      </p:sp>
-      <p:sp>
-        <p:nvSpPr>
-          <p:cNvPr id="29" name="Shape 26"/>
-          <p:cNvSpPr/>
-          <p:nvPr/>
-        </p:nvSpPr>
-        <p:spPr>
-          <a:xfrm>
-            <a:off x="9098280" y="1005840"/>
-            <a:ext cx="2697480" cy="2331720"/>
-          </a:xfrm>
-          <a:prstGeom prst="roundRect">
-            <a:avLst>
-              <a:gd name="adj" fmla="val 4706"/>
-            </a:avLst>
-          </a:prstGeom>
-          <a:solidFill>
-            <a:srgbClr val="FFFFFF"/>
-          </a:solidFill>
-          <a:ln w="19050">
-            <a:solidFill>
-              <a:srgbClr val="009845"/>
-            </a:solidFill>
-            <a:prstDash val="solid"/>
-          </a:ln>
-          <a:effectLst>
-            <a:outerShdw sx="100000" sy="100000" kx="0" ky="0" algn="bl" rotWithShape="0" blurRad="50800" dist="19050" dir="16200000">
-              <a:srgbClr val="000000">
-                <a:alpha val="8000"/>
-              </a:srgbClr>
-            </a:outerShdw>
-          </a:effectLst>
-        </p:spPr>
-      </p:sp>
-      <p:sp>
-        <p:nvSpPr>
-          <p:cNvPr id="30" name="Shape 27"/>
-          <p:cNvSpPr/>
-          <p:nvPr/>
-        </p:nvSpPr>
-        <p:spPr>
-          <a:xfrm>
-            <a:off x="9171432" y="1060704"/>
-            <a:ext cx="2551176" cy="54864"/>
-          </a:xfrm>
-          <a:prstGeom prst="rect">
-            <a:avLst/>
-          </a:prstGeom>
-          <a:solidFill>
-            <a:srgbClr val="009845"/>
-          </a:solidFill>
-          <a:ln/>
-        </p:spPr>
-      </p:sp>
-      <p:sp>
-        <p:nvSpPr>
-          <p:cNvPr id="31" name="Text 28"/>
-          <p:cNvSpPr/>
-          <p:nvPr/>
-        </p:nvSpPr>
-        <p:spPr>
-          <a:xfrm>
-            <a:off x="9098280" y="1188720"/>
-            <a:ext cx="2697480" cy="411480"/>
-          </a:xfrm>
-          <a:prstGeom prst="rect">
-            <a:avLst/>
-          </a:prstGeom>
-          <a:noFill/>
-          <a:ln/>
-        </p:spPr>
-        <p:txBody>
-          <a:bodyPr wrap="square" rtlCol="0" anchor="ctr"/>
-          <a:lstStyle/>
-          <a:p>
-            <a:pPr algn="ctr" indent="0" marL="0">
-              <a:buNone/>
-            </a:pPr>
-            <a:r>
-              <a:rPr lang="en-US" sz="1300" b="1" dirty="0">
-                <a:solidFill>
-                  <a:srgbClr val="19416C"/>
-                </a:solidFill>
-                <a:latin typeface="Inter" pitchFamily="34" charset="0"/>
-                <a:ea typeface="Inter" pitchFamily="34" charset="-122"/>
-                <a:cs typeface="Inter" pitchFamily="34" charset="-120"/>
-              </a:rPr>
-              <a:t>Product Master 360</a:t>
-            </a:r>
-            <a:endParaRPr lang="en-US" sz="1300" dirty="0"/>
-          </a:p>
-        </p:txBody>
-      </p:sp>
-      <p:sp>
-        <p:nvSpPr>
-          <p:cNvPr id="32" name="Text 29"/>
-          <p:cNvSpPr/>
-          <p:nvPr/>
-        </p:nvSpPr>
-        <p:spPr>
-          <a:xfrm>
-            <a:off x="9281160" y="1691640"/>
-            <a:ext cx="2331720" cy="274320"/>
-          </a:xfrm>
-          <a:prstGeom prst="rect">
-            <a:avLst/>
-          </a:prstGeom>
-          <a:noFill/>
-          <a:ln/>
-        </p:spPr>
-        <p:txBody>
-          <a:bodyPr wrap="square" rtlCol="0" anchor="ctr"/>
-          <a:lstStyle/>
-          <a:p>
-            <a:pPr indent="0" marL="0">
-              <a:buNone/>
-            </a:pPr>
-            <a:r>
-              <a:rPr lang="en-US" sz="1000" dirty="0">
-                <a:solidFill>
-                  <a:srgbClr val="6B7280"/>
-                </a:solidFill>
-                <a:latin typeface="Inter" pitchFamily="34" charset="0"/>
-                <a:ea typeface="Inter" pitchFamily="34" charset="-122"/>
-                <a:cs typeface="Inter" pitchFamily="34" charset="-120"/>
-              </a:rPr>
-              <a:t>Owner: Thomas Berger</a:t>
-            </a:r>
-            <a:endParaRPr lang="en-US" sz="1000" dirty="0"/>
-          </a:p>
-        </p:txBody>
-      </p:sp>
-      <p:sp>
-        <p:nvSpPr>
-          <p:cNvPr id="33" name="Text 30"/>
-          <p:cNvSpPr/>
-          <p:nvPr/>
-        </p:nvSpPr>
-        <p:spPr>
-          <a:xfrm>
-            <a:off x="9281160" y="1965960"/>
-            <a:ext cx="2331720" cy="274320"/>
-          </a:xfrm>
-          <a:prstGeom prst="rect">
-            <a:avLst/>
-          </a:prstGeom>
-          <a:noFill/>
-          <a:ln/>
-        </p:spPr>
-        <p:txBody>
-          <a:bodyPr wrap="square" rtlCol="0" anchor="ctr"/>
-          <a:lstStyle/>
-          <a:p>
-            <a:pPr indent="0" marL="0">
-              <a:buNone/>
-            </a:pPr>
-            <a:r>
-              <a:rPr lang="en-US" sz="1000" dirty="0">
-                <a:solidFill>
-                  <a:srgbClr val="6B7280"/>
-                </a:solidFill>
-                <a:latin typeface="Inter" pitchFamily="34" charset="0"/>
-                <a:ea typeface="Inter" pitchFamily="34" charset="-122"/>
-                <a:cs typeface="Inter" pitchFamily="34" charset="-120"/>
-              </a:rPr>
-              <a:t>Refresh: 1 hour</a:t>
-            </a:r>
-            <a:endParaRPr lang="en-US" sz="1000" dirty="0"/>
-          </a:p>
-        </p:txBody>
-      </p:sp>
-      <p:sp>
-        <p:nvSpPr>
-          <p:cNvPr id="34" name="Text 31"/>
-          <p:cNvSpPr/>
-          <p:nvPr/>
-        </p:nvSpPr>
-        <p:spPr>
-          <a:xfrm>
-            <a:off x="9281160" y="2240280"/>
-            <a:ext cx="2331720" cy="274320"/>
-          </a:xfrm>
-          <a:prstGeom prst="rect">
-            <a:avLst/>
-          </a:prstGeom>
-          <a:noFill/>
-          <a:ln/>
-        </p:spPr>
-        <p:txBody>
-          <a:bodyPr wrap="square" rtlCol="0" anchor="ctr"/>
-          <a:lstStyle/>
-          <a:p>
-            <a:pPr indent="0" marL="0">
-              <a:buNone/>
-            </a:pPr>
-            <a:r>
-              <a:rPr lang="en-US" sz="1100" b="1" dirty="0">
-                <a:solidFill>
-                  <a:srgbClr val="009845"/>
-                </a:solidFill>
-                <a:latin typeface="Inter" pitchFamily="34" charset="0"/>
-                <a:ea typeface="Inter" pitchFamily="34" charset="-122"/>
-                <a:cs typeface="Inter" pitchFamily="34" charset="-120"/>
-              </a:rPr>
-              <a:t>KPI: 8,200 missing weights</a:t>
-            </a:r>
-            <a:endParaRPr lang="en-US" sz="1100" dirty="0"/>
-          </a:p>
-        </p:txBody>
-      </p:sp>
-      <p:sp>
-        <p:nvSpPr>
-          <p:cNvPr id="35" name="Text 32"/>
-          <p:cNvSpPr/>
-          <p:nvPr/>
-        </p:nvSpPr>
-        <p:spPr>
-          <a:xfrm>
-            <a:off x="9098280" y="2743200"/>
-            <a:ext cx="2697480" cy="274320"/>
-          </a:xfrm>
-          <a:prstGeom prst="rect">
-            <a:avLst/>
-          </a:prstGeom>
-          <a:noFill/>
-          <a:ln/>
-        </p:spPr>
-        <p:txBody>
-          <a:bodyPr wrap="square" rtlCol="0" anchor="ctr"/>
-          <a:lstStyle/>
-          <a:p>
-            <a:pPr algn="ctr" indent="0" marL="0">
-              <a:buNone/>
-            </a:pPr>
-            <a:r>
-              <a:rPr lang="en-US" sz="900" i="1" dirty="0">
-                <a:solidFill>
-                  <a:srgbClr val="A9B3B6"/>
-                </a:solidFill>
-                <a:latin typeface="Inter" pitchFamily="34" charset="0"/>
-                <a:ea typeface="Inter" pitchFamily="34" charset="-122"/>
-                <a:cs typeface="Inter" pitchFamily="34" charset="-120"/>
-              </a:rPr>
-              <a:t>Trust Score  •  API Sharing  •  Lineage</a:t>
-            </a:r>
-            <a:endParaRPr lang="en-US" sz="900" dirty="0"/>
-          </a:p>
-        </p:txBody>
-      </p:sp>
-      <p:sp>
-        <p:nvSpPr>
-          <p:cNvPr id="36" name="Shape 33"/>
-          <p:cNvSpPr/>
-          <p:nvPr/>
-        </p:nvSpPr>
-        <p:spPr>
-          <a:xfrm>
-            <a:off x="457200" y="3566160"/>
-            <a:ext cx="2697480" cy="2331720"/>
-          </a:xfrm>
-          <a:prstGeom prst="roundRect">
-            <a:avLst>
-              <a:gd name="adj" fmla="val 4706"/>
-            </a:avLst>
-          </a:prstGeom>
-          <a:solidFill>
-            <a:srgbClr val="FFFFFF"/>
-          </a:solidFill>
-          <a:ln w="19050">
-            <a:solidFill>
-              <a:srgbClr val="19416C"/>
-            </a:solidFill>
-            <a:prstDash val="solid"/>
-          </a:ln>
-          <a:effectLst>
-            <a:outerShdw sx="100000" sy="100000" kx="0" ky="0" algn="bl" rotWithShape="0" blurRad="50800" dist="19050" dir="16200000">
-              <a:srgbClr val="000000">
-                <a:alpha val="8000"/>
-              </a:srgbClr>
-            </a:outerShdw>
-          </a:effectLst>
-        </p:spPr>
-      </p:sp>
-      <p:sp>
-        <p:nvSpPr>
-          <p:cNvPr id="37" name="Shape 34"/>
-          <p:cNvSpPr/>
-          <p:nvPr/>
-        </p:nvSpPr>
-        <p:spPr>
-          <a:xfrm>
-            <a:off x="530352" y="3621024"/>
-            <a:ext cx="2551176" cy="54864"/>
-          </a:xfrm>
-          <a:prstGeom prst="rect">
-            <a:avLst/>
-          </a:prstGeom>
-          <a:solidFill>
-            <a:srgbClr val="19416C"/>
-          </a:solidFill>
-          <a:ln/>
-        </p:spPr>
-      </p:sp>
-      <p:sp>
-        <p:nvSpPr>
-          <p:cNvPr id="38" name="Text 35"/>
-          <p:cNvSpPr/>
-          <p:nvPr/>
-        </p:nvSpPr>
-        <p:spPr>
-          <a:xfrm>
-            <a:off x="457200" y="3749040"/>
-            <a:ext cx="2697480" cy="411480"/>
-          </a:xfrm>
-          <a:prstGeom prst="rect">
-            <a:avLst/>
-          </a:prstGeom>
-          <a:noFill/>
-          <a:ln/>
-        </p:spPr>
-        <p:txBody>
-          <a:bodyPr wrap="square" rtlCol="0" anchor="ctr"/>
-          <a:lstStyle/>
-          <a:p>
-            <a:pPr algn="ctr" indent="0" marL="0">
-              <a:buNone/>
-            </a:pPr>
-            <a:r>
-              <a:rPr lang="en-US" sz="1300" b="1" dirty="0">
-                <a:solidFill>
-                  <a:srgbClr val="19416C"/>
-                </a:solidFill>
-                <a:latin typeface="Inter" pitchFamily="34" charset="0"/>
-                <a:ea typeface="Inter" pitchFamily="34" charset="-122"/>
-                <a:cs typeface="Inter" pitchFamily="34" charset="-120"/>
-              </a:rPr>
-              <a:t>Customer Delivery Exp.</a:t>
-            </a:r>
-            <a:endParaRPr lang="en-US" sz="1300" dirty="0"/>
-          </a:p>
-        </p:txBody>
-      </p:sp>
-      <p:sp>
-        <p:nvSpPr>
-          <p:cNvPr id="39" name="Text 36"/>
-          <p:cNvSpPr/>
-          <p:nvPr/>
-        </p:nvSpPr>
-        <p:spPr>
-          <a:xfrm>
-            <a:off x="640080" y="4251960"/>
-            <a:ext cx="2331720" cy="274320"/>
-          </a:xfrm>
-          <a:prstGeom prst="rect">
-            <a:avLst/>
-          </a:prstGeom>
-          <a:noFill/>
-          <a:ln/>
-        </p:spPr>
-        <p:txBody>
-          <a:bodyPr wrap="square" rtlCol="0" anchor="ctr"/>
-          <a:lstStyle/>
-          <a:p>
-            <a:pPr indent="0" marL="0">
-              <a:buNone/>
-            </a:pPr>
-            <a:r>
-              <a:rPr lang="en-US" sz="1000" dirty="0">
-                <a:solidFill>
-                  <a:srgbClr val="6B7280"/>
-                </a:solidFill>
-                <a:latin typeface="Inter" pitchFamily="34" charset="0"/>
-                <a:ea typeface="Inter" pitchFamily="34" charset="-122"/>
-                <a:cs typeface="Inter" pitchFamily="34" charset="-120"/>
-              </a:rPr>
-              <a:t>Owner: Lisa Park</a:t>
-            </a:r>
-            <a:endParaRPr lang="en-US" sz="1000" dirty="0"/>
-          </a:p>
-        </p:txBody>
-      </p:sp>
-      <p:sp>
-        <p:nvSpPr>
-          <p:cNvPr id="40" name="Text 37"/>
-          <p:cNvSpPr/>
-          <p:nvPr/>
-        </p:nvSpPr>
-        <p:spPr>
-          <a:xfrm>
-            <a:off x="640080" y="4526280"/>
-            <a:ext cx="2331720" cy="274320"/>
-          </a:xfrm>
-          <a:prstGeom prst="rect">
-            <a:avLst/>
-          </a:prstGeom>
-          <a:noFill/>
-          <a:ln/>
-        </p:spPr>
-        <p:txBody>
-          <a:bodyPr wrap="square" rtlCol="0" anchor="ctr"/>
-          <a:lstStyle/>
-          <a:p>
-            <a:pPr indent="0" marL="0">
-              <a:buNone/>
-            </a:pPr>
-            <a:r>
-              <a:rPr lang="en-US" sz="1000" dirty="0">
-                <a:solidFill>
-                  <a:srgbClr val="6B7280"/>
-                </a:solidFill>
-                <a:latin typeface="Inter" pitchFamily="34" charset="0"/>
-                <a:ea typeface="Inter" pitchFamily="34" charset="-122"/>
-                <a:cs typeface="Inter" pitchFamily="34" charset="-120"/>
-              </a:rPr>
-              <a:t>Refresh: 1 hour</a:t>
-            </a:r>
-            <a:endParaRPr lang="en-US" sz="1000" dirty="0"/>
-          </a:p>
-        </p:txBody>
-      </p:sp>
-      <p:sp>
-        <p:nvSpPr>
-          <p:cNvPr id="41" name="Text 38"/>
-          <p:cNvSpPr/>
-          <p:nvPr/>
-        </p:nvSpPr>
-        <p:spPr>
-          <a:xfrm>
-            <a:off x="640080" y="4800600"/>
-            <a:ext cx="2331720" cy="274320"/>
-          </a:xfrm>
-          <a:prstGeom prst="rect">
-            <a:avLst/>
-          </a:prstGeom>
-          <a:noFill/>
-          <a:ln/>
-        </p:spPr>
-        <p:txBody>
-          <a:bodyPr wrap="square" rtlCol="0" anchor="ctr"/>
-          <a:lstStyle/>
-          <a:p>
-            <a:pPr indent="0" marL="0">
-              <a:buNone/>
-            </a:pPr>
-            <a:r>
-              <a:rPr lang="en-US" sz="1100" b="1" dirty="0">
-                <a:solidFill>
-                  <a:srgbClr val="19416C"/>
-                </a:solidFill>
-                <a:latin typeface="Inter" pitchFamily="34" charset="0"/>
-                <a:ea typeface="Inter" pitchFamily="34" charset="-122"/>
-                <a:cs typeface="Inter" pitchFamily="34" charset="-120"/>
-              </a:rPr>
-              <a:t>KPI: WISMO: 41%</a:t>
-            </a:r>
-            <a:endParaRPr lang="en-US" sz="1100" dirty="0"/>
-          </a:p>
-        </p:txBody>
-      </p:sp>
-      <p:sp>
-        <p:nvSpPr>
-          <p:cNvPr id="42" name="Text 39"/>
-          <p:cNvSpPr/>
-          <p:nvPr/>
-        </p:nvSpPr>
-        <p:spPr>
-          <a:xfrm>
-            <a:off x="457200" y="5303520"/>
-            <a:ext cx="2697480" cy="274320"/>
-          </a:xfrm>
-          <a:prstGeom prst="rect">
-            <a:avLst/>
-          </a:prstGeom>
-          <a:noFill/>
-          <a:ln/>
-        </p:spPr>
-        <p:txBody>
-          <a:bodyPr wrap="square" rtlCol="0" anchor="ctr"/>
-          <a:lstStyle/>
-          <a:p>
-            <a:pPr algn="ctr" indent="0" marL="0">
-              <a:buNone/>
-            </a:pPr>
-            <a:r>
-              <a:rPr lang="en-US" sz="900" i="1" dirty="0">
-                <a:solidFill>
-                  <a:srgbClr val="A9B3B6"/>
-                </a:solidFill>
-                <a:latin typeface="Inter" pitchFamily="34" charset="0"/>
-                <a:ea typeface="Inter" pitchFamily="34" charset="-122"/>
-                <a:cs typeface="Inter" pitchFamily="34" charset="-120"/>
-              </a:rPr>
-              <a:t>Trust Score  •  API Sharing  •  Lineage</a:t>
-            </a:r>
-            <a:endParaRPr lang="en-US" sz="900" dirty="0"/>
-          </a:p>
-        </p:txBody>
-      </p:sp>
-      <p:sp>
-        <p:nvSpPr>
-          <p:cNvPr id="43" name="Shape 40"/>
-          <p:cNvSpPr/>
-          <p:nvPr/>
-        </p:nvSpPr>
-        <p:spPr>
-          <a:xfrm>
-            <a:off x="3337560" y="3566160"/>
-            <a:ext cx="2697480" cy="2331720"/>
-          </a:xfrm>
-          <a:prstGeom prst="roundRect">
-            <a:avLst>
-              <a:gd name="adj" fmla="val 4706"/>
-            </a:avLst>
-          </a:prstGeom>
-          <a:solidFill>
-            <a:srgbClr val="FFFFFF"/>
-          </a:solidFill>
-          <a:ln w="19050">
-            <a:solidFill>
-              <a:srgbClr val="19416C"/>
-            </a:solidFill>
-            <a:prstDash val="solid"/>
-          </a:ln>
-          <a:effectLst>
-            <a:outerShdw sx="100000" sy="100000" kx="0" ky="0" algn="bl" rotWithShape="0" blurRad="50800" dist="19050" dir="16200000">
-              <a:srgbClr val="000000">
-                <a:alpha val="8000"/>
-              </a:srgbClr>
-            </a:outerShdw>
-          </a:effectLst>
-        </p:spPr>
-      </p:sp>
-      <p:sp>
-        <p:nvSpPr>
-          <p:cNvPr id="44" name="Shape 41"/>
-          <p:cNvSpPr/>
-          <p:nvPr/>
-        </p:nvSpPr>
-        <p:spPr>
-          <a:xfrm>
-            <a:off x="3410712" y="3621024"/>
-            <a:ext cx="2551176" cy="54864"/>
-          </a:xfrm>
-          <a:prstGeom prst="rect">
-            <a:avLst/>
-          </a:prstGeom>
-          <a:solidFill>
-            <a:srgbClr val="19416C"/>
-          </a:solidFill>
-          <a:ln/>
-        </p:spPr>
-      </p:sp>
-      <p:sp>
-        <p:nvSpPr>
-          <p:cNvPr id="45" name="Text 42"/>
-          <p:cNvSpPr/>
-          <p:nvPr/>
-        </p:nvSpPr>
-        <p:spPr>
-          <a:xfrm>
-            <a:off x="3337560" y="3749040"/>
-            <a:ext cx="2697480" cy="411480"/>
-          </a:xfrm>
-          <a:prstGeom prst="rect">
-            <a:avLst/>
-          </a:prstGeom>
-          <a:noFill/>
-          <a:ln/>
-        </p:spPr>
-        <p:txBody>
-          <a:bodyPr wrap="square" rtlCol="0" anchor="ctr"/>
-          <a:lstStyle/>
-          <a:p>
-            <a:pPr algn="ctr" indent="0" marL="0">
-              <a:buNone/>
-            </a:pPr>
-            <a:r>
-              <a:rPr lang="en-US" sz="1300" b="1" dirty="0">
-                <a:solidFill>
-                  <a:srgbClr val="19416C"/>
-                </a:solidFill>
-                <a:latin typeface="Inter" pitchFamily="34" charset="0"/>
-                <a:ea typeface="Inter" pitchFamily="34" charset="-122"/>
-                <a:cs typeface="Inter" pitchFamily="34" charset="-120"/>
-              </a:rPr>
-              <a:t>Compliance Readiness</a:t>
-            </a:r>
-            <a:endParaRPr lang="en-US" sz="1300" dirty="0"/>
-          </a:p>
-        </p:txBody>
-      </p:sp>
-      <p:sp>
-        <p:nvSpPr>
-          <p:cNvPr id="46" name="Text 43"/>
-          <p:cNvSpPr/>
-          <p:nvPr/>
-        </p:nvSpPr>
-        <p:spPr>
-          <a:xfrm>
-            <a:off x="3520440" y="4251960"/>
-            <a:ext cx="2331720" cy="274320"/>
-          </a:xfrm>
-          <a:prstGeom prst="rect">
-            <a:avLst/>
-          </a:prstGeom>
-          <a:noFill/>
-          <a:ln/>
-        </p:spPr>
-        <p:txBody>
-          <a:bodyPr wrap="square" rtlCol="0" anchor="ctr"/>
-          <a:lstStyle/>
-          <a:p>
-            <a:pPr indent="0" marL="0">
-              <a:buNone/>
-            </a:pPr>
-            <a:r>
-              <a:rPr lang="en-US" sz="1000" dirty="0">
-                <a:solidFill>
-                  <a:srgbClr val="6B7280"/>
-                </a:solidFill>
-                <a:latin typeface="Inter" pitchFamily="34" charset="0"/>
-                <a:ea typeface="Inter" pitchFamily="34" charset="-122"/>
-                <a:cs typeface="Inter" pitchFamily="34" charset="-120"/>
-              </a:rPr>
-              <a:t>Owner: Dr. Elena Vasquez</a:t>
-            </a:r>
-            <a:endParaRPr lang="en-US" sz="1000" dirty="0"/>
-          </a:p>
-        </p:txBody>
-      </p:sp>
-      <p:sp>
-        <p:nvSpPr>
-          <p:cNvPr id="47" name="Text 44"/>
-          <p:cNvSpPr/>
-          <p:nvPr/>
-        </p:nvSpPr>
-        <p:spPr>
-          <a:xfrm>
-            <a:off x="3520440" y="4526280"/>
-            <a:ext cx="2331720" cy="274320"/>
-          </a:xfrm>
-          <a:prstGeom prst="rect">
-            <a:avLst/>
-          </a:prstGeom>
-          <a:noFill/>
-          <a:ln/>
-        </p:spPr>
-        <p:txBody>
-          <a:bodyPr wrap="square" rtlCol="0" anchor="ctr"/>
-          <a:lstStyle/>
-          <a:p>
-            <a:pPr indent="0" marL="0">
-              <a:buNone/>
-            </a:pPr>
-            <a:r>
-              <a:rPr lang="en-US" sz="1000" dirty="0">
-                <a:solidFill>
-                  <a:srgbClr val="6B7280"/>
-                </a:solidFill>
-                <a:latin typeface="Inter" pitchFamily="34" charset="0"/>
-                <a:ea typeface="Inter" pitchFamily="34" charset="-122"/>
-                <a:cs typeface="Inter" pitchFamily="34" charset="-120"/>
-              </a:rPr>
-              <a:t>Refresh: Daily</a:t>
-            </a:r>
-            <a:endParaRPr lang="en-US" sz="1000" dirty="0"/>
-          </a:p>
-        </p:txBody>
-      </p:sp>
-      <p:sp>
-        <p:nvSpPr>
-          <p:cNvPr id="48" name="Text 45"/>
-          <p:cNvSpPr/>
-          <p:nvPr/>
-        </p:nvSpPr>
-        <p:spPr>
-          <a:xfrm>
-            <a:off x="3520440" y="4800600"/>
-            <a:ext cx="2331720" cy="274320"/>
-          </a:xfrm>
-          <a:prstGeom prst="rect">
-            <a:avLst/>
-          </a:prstGeom>
-          <a:noFill/>
-          <a:ln/>
-        </p:spPr>
-        <p:txBody>
-          <a:bodyPr wrap="square" rtlCol="0" anchor="ctr"/>
-          <a:lstStyle/>
-          <a:p>
-            <a:pPr indent="0" marL="0">
-              <a:buNone/>
-            </a:pPr>
-            <a:r>
-              <a:rPr lang="en-US" sz="1100" b="1" dirty="0">
-                <a:solidFill>
-                  <a:srgbClr val="19416C"/>
-                </a:solidFill>
-                <a:latin typeface="Inter" pitchFamily="34" charset="0"/>
-                <a:ea typeface="Inter" pitchFamily="34" charset="-122"/>
-                <a:cs typeface="Inter" pitchFamily="34" charset="-120"/>
-              </a:rPr>
-              <a:t>KPI: Lot capture: 85%</a:t>
-            </a:r>
-            <a:endParaRPr lang="en-US" sz="1100" dirty="0"/>
-          </a:p>
-        </p:txBody>
-      </p:sp>
-      <p:sp>
-        <p:nvSpPr>
-          <p:cNvPr id="49" name="Text 46"/>
-          <p:cNvSpPr/>
-          <p:nvPr/>
-        </p:nvSpPr>
-        <p:spPr>
-          <a:xfrm>
-            <a:off x="3337560" y="5303520"/>
-            <a:ext cx="2697480" cy="274320"/>
-          </a:xfrm>
-          <a:prstGeom prst="rect">
-            <a:avLst/>
-          </a:prstGeom>
-          <a:noFill/>
-          <a:ln/>
-        </p:spPr>
-        <p:txBody>
-          <a:bodyPr wrap="square" rtlCol="0" anchor="ctr"/>
-          <a:lstStyle/>
-          <a:p>
-            <a:pPr algn="ctr" indent="0" marL="0">
-              <a:buNone/>
-            </a:pPr>
-            <a:r>
-              <a:rPr lang="en-US" sz="900" i="1" dirty="0">
-                <a:solidFill>
-                  <a:srgbClr val="A9B3B6"/>
-                </a:solidFill>
-                <a:latin typeface="Inter" pitchFamily="34" charset="0"/>
-                <a:ea typeface="Inter" pitchFamily="34" charset="-122"/>
-                <a:cs typeface="Inter" pitchFamily="34" charset="-120"/>
-              </a:rPr>
-              <a:t>Trust Score  •  API Sharing  •  Lineage</a:t>
-            </a:r>
-            <a:endParaRPr lang="en-US" sz="900" dirty="0"/>
-          </a:p>
-        </p:txBody>
-      </p:sp>
-      <p:sp>
-        <p:nvSpPr>
-          <p:cNvPr id="50" name="Shape 47"/>
-          <p:cNvSpPr/>
-          <p:nvPr/>
-        </p:nvSpPr>
-        <p:spPr>
-          <a:xfrm>
-            <a:off x="6217920" y="3566160"/>
-            <a:ext cx="2697480" cy="2331720"/>
-          </a:xfrm>
-          <a:prstGeom prst="roundRect">
-            <a:avLst>
-              <a:gd name="adj" fmla="val 4706"/>
-            </a:avLst>
-          </a:prstGeom>
-          <a:solidFill>
-            <a:srgbClr val="FFFFFF"/>
-          </a:solidFill>
-          <a:ln w="19050">
-            <a:solidFill>
-              <a:srgbClr val="006580"/>
-            </a:solidFill>
-            <a:prstDash val="solid"/>
-          </a:ln>
-          <a:effectLst>
-            <a:outerShdw sx="100000" sy="100000" kx="0" ky="0" algn="bl" rotWithShape="0" blurRad="50800" dist="19050" dir="16200000">
-              <a:srgbClr val="000000">
-                <a:alpha val="8000"/>
-              </a:srgbClr>
-            </a:outerShdw>
-          </a:effectLst>
-        </p:spPr>
-      </p:sp>
-      <p:sp>
-        <p:nvSpPr>
-          <p:cNvPr id="51" name="Shape 48"/>
-          <p:cNvSpPr/>
-          <p:nvPr/>
-        </p:nvSpPr>
-        <p:spPr>
-          <a:xfrm>
-            <a:off x="6291072" y="3621024"/>
-            <a:ext cx="2551176" cy="54864"/>
-          </a:xfrm>
-          <a:prstGeom prst="rect">
-            <a:avLst/>
-          </a:prstGeom>
-          <a:solidFill>
-            <a:srgbClr val="006580"/>
-          </a:solidFill>
-          <a:ln/>
-        </p:spPr>
-      </p:sp>
-      <p:sp>
-        <p:nvSpPr>
-          <p:cNvPr id="52" name="Text 49"/>
-          <p:cNvSpPr/>
-          <p:nvPr/>
-        </p:nvSpPr>
-        <p:spPr>
-          <a:xfrm>
-            <a:off x="6217920" y="3749040"/>
-            <a:ext cx="2697480" cy="411480"/>
-          </a:xfrm>
-          <a:prstGeom prst="rect">
-            <a:avLst/>
-          </a:prstGeom>
-          <a:noFill/>
-          <a:ln/>
-        </p:spPr>
-        <p:txBody>
-          <a:bodyPr wrap="square" rtlCol="0" anchor="ctr"/>
-          <a:lstStyle/>
-          <a:p>
-            <a:pPr algn="ctr" indent="0" marL="0">
-              <a:buNone/>
-            </a:pPr>
-            <a:r>
-              <a:rPr lang="en-US" sz="1300" b="1" dirty="0">
-                <a:solidFill>
-                  <a:srgbClr val="19416C"/>
-                </a:solidFill>
-                <a:latin typeface="Inter" pitchFamily="34" charset="0"/>
-                <a:ea typeface="Inter" pitchFamily="34" charset="-122"/>
-                <a:cs typeface="Inter" pitchFamily="34" charset="-120"/>
-              </a:rPr>
-              <a:t>Operational Cost Impact</a:t>
-            </a:r>
-            <a:endParaRPr lang="en-US" sz="1300" dirty="0"/>
-          </a:p>
-        </p:txBody>
-      </p:sp>
-      <p:sp>
-        <p:nvSpPr>
-          <p:cNvPr id="53" name="Text 50"/>
-          <p:cNvSpPr/>
-          <p:nvPr/>
-        </p:nvSpPr>
-        <p:spPr>
-          <a:xfrm>
-            <a:off x="6400800" y="4251960"/>
-            <a:ext cx="2331720" cy="274320"/>
-          </a:xfrm>
-          <a:prstGeom prst="rect">
-            <a:avLst/>
-          </a:prstGeom>
-          <a:noFill/>
-          <a:ln/>
-        </p:spPr>
-        <p:txBody>
-          <a:bodyPr wrap="square" rtlCol="0" anchor="ctr"/>
-          <a:lstStyle/>
-          <a:p>
-            <a:pPr indent="0" marL="0">
-              <a:buNone/>
-            </a:pPr>
-            <a:r>
-              <a:rPr lang="en-US" sz="1000" dirty="0">
-                <a:solidFill>
-                  <a:srgbClr val="6B7280"/>
-                </a:solidFill>
-                <a:latin typeface="Inter" pitchFamily="34" charset="0"/>
-                <a:ea typeface="Inter" pitchFamily="34" charset="-122"/>
-                <a:cs typeface="Inter" pitchFamily="34" charset="-120"/>
-              </a:rPr>
-              <a:t>Owner: CFO Office</a:t>
-            </a:r>
-            <a:endParaRPr lang="en-US" sz="1000" dirty="0"/>
-          </a:p>
-        </p:txBody>
-      </p:sp>
-      <p:sp>
-        <p:nvSpPr>
-          <p:cNvPr id="54" name="Text 51"/>
-          <p:cNvSpPr/>
-          <p:nvPr/>
-        </p:nvSpPr>
-        <p:spPr>
-          <a:xfrm>
-            <a:off x="6400800" y="4526280"/>
-            <a:ext cx="2331720" cy="274320"/>
-          </a:xfrm>
-          <a:prstGeom prst="rect">
-            <a:avLst/>
-          </a:prstGeom>
-          <a:noFill/>
-          <a:ln/>
-        </p:spPr>
-        <p:txBody>
-          <a:bodyPr wrap="square" rtlCol="0" anchor="ctr"/>
-          <a:lstStyle/>
-          <a:p>
-            <a:pPr indent="0" marL="0">
-              <a:buNone/>
-            </a:pPr>
-            <a:r>
-              <a:rPr lang="en-US" sz="1000" dirty="0">
-                <a:solidFill>
-                  <a:srgbClr val="6B7280"/>
-                </a:solidFill>
-                <a:latin typeface="Inter" pitchFamily="34" charset="0"/>
-                <a:ea typeface="Inter" pitchFamily="34" charset="-122"/>
-                <a:cs typeface="Inter" pitchFamily="34" charset="-120"/>
-              </a:rPr>
-              <a:t>Refresh: Daily</a:t>
-            </a:r>
-            <a:endParaRPr lang="en-US" sz="1000" dirty="0"/>
-          </a:p>
-        </p:txBody>
-      </p:sp>
-      <p:sp>
-        <p:nvSpPr>
-          <p:cNvPr id="55" name="Text 52"/>
-          <p:cNvSpPr/>
-          <p:nvPr/>
-        </p:nvSpPr>
-        <p:spPr>
-          <a:xfrm>
-            <a:off x="6400800" y="4800600"/>
-            <a:ext cx="2331720" cy="274320"/>
-          </a:xfrm>
-          <a:prstGeom prst="rect">
-            <a:avLst/>
-          </a:prstGeom>
-          <a:noFill/>
-          <a:ln/>
-        </p:spPr>
-        <p:txBody>
-          <a:bodyPr wrap="square" rtlCol="0" anchor="ctr"/>
-          <a:lstStyle/>
-          <a:p>
-            <a:pPr indent="0" marL="0">
-              <a:buNone/>
-            </a:pPr>
-            <a:r>
-              <a:rPr lang="en-US" sz="1100" b="1" dirty="0">
-                <a:solidFill>
-                  <a:srgbClr val="006580"/>
-                </a:solidFill>
-                <a:latin typeface="Inter" pitchFamily="34" charset="0"/>
-                <a:ea typeface="Inter" pitchFamily="34" charset="-122"/>
-                <a:cs typeface="Inter" pitchFamily="34" charset="-120"/>
-              </a:rPr>
-              <a:t>KPI: $127M annual</a:t>
-            </a:r>
-            <a:endParaRPr lang="en-US" sz="1100" dirty="0"/>
-          </a:p>
-        </p:txBody>
-      </p:sp>
-      <p:sp>
-        <p:nvSpPr>
-          <p:cNvPr id="56" name="Text 53"/>
-          <p:cNvSpPr/>
-          <p:nvPr/>
-        </p:nvSpPr>
-        <p:spPr>
-          <a:xfrm>
-            <a:off x="6217920" y="5303520"/>
             <a:ext cx="2697480" cy="274320"/>
           </a:xfrm>
           <a:prstGeom prst="rect">
@@ -16504,7 +14929,7 @@
       </p:grpSpPr>
       <p:pic>
         <p:nvPicPr>
-          <p:cNvPr id="2" name="Image 0" descr="C:\Claude\End-To-End Demo\generators\assets\qlik_divider_bg.png">    </p:cNvPr>
+          <p:cNvPr id="2" name="Image 0" descr="C:\Claude\MCG Full Stack\generators\assets\qlik_divider_bg.png">    </p:cNvPr>
           <p:cNvPicPr>
             <a:picLocks noChangeAspect="1"/>
           </p:cNvPicPr>
@@ -16695,7 +15120,7 @@
       </p:sp>
       <p:pic>
         <p:nvPicPr>
-          <p:cNvPr id="4" name="Image 0" descr="C:\Claude\End-To-End Demo\generators\assets\qlik_logo.png">    </p:cNvPr>
+          <p:cNvPr id="4" name="Image 0" descr="C:\Claude\MCG Full Stack\generators\assets\qlik_logo.png">    </p:cNvPr>
           <p:cNvPicPr>
             <a:picLocks noChangeAspect="1"/>
           </p:cNvPicPr>
@@ -18304,7 +16729,7 @@
       </p:grpSpPr>
       <p:pic>
         <p:nvPicPr>
-          <p:cNvPr id="2" name="Image 0" descr="C:\Claude\End-To-End Demo\generators\assets\qlik_divider_bg.png">    </p:cNvPr>
+          <p:cNvPr id="2" name="Image 0" descr="C:\Claude\MCG Full Stack\generators\assets\qlik_divider_bg.png">    </p:cNvPr>
           <p:cNvPicPr>
             <a:picLocks noChangeAspect="1"/>
           </p:cNvPicPr>

--- a/MCG_Technology_Architecture.pptx
+++ b/MCG_Technology_Architecture.pptx
@@ -4912,7 +4912,7 @@
                 <a:ea typeface="Inter" pitchFamily="34" charset="-122"/>
                 <a:cs typeface="Inter" pitchFamily="34" charset="-120"/>
               </a:rPr>
-              <a:t>Remote Engine</a:t>
+              <a:t>Data Gateway</a:t>
             </a:r>
             <a:endParaRPr lang="en-US" sz="1000" dirty="0"/>
           </a:p>
@@ -4929,7 +4929,7 @@
                 <a:ea typeface="Inter" pitchFamily="34" charset="-122"/>
                 <a:cs typeface="Inter" pitchFamily="34" charset="-120"/>
               </a:rPr>
-              <a:t>Gen2</a:t>
+              <a:t>Streaming</a:t>
             </a:r>
             <a:endParaRPr lang="en-US" sz="1000" dirty="0"/>
           </a:p>
@@ -14391,7 +14391,7 @@
                 <a:ea typeface="Inter" pitchFamily="34" charset="-122"/>
                 <a:cs typeface="Inter" pitchFamily="34" charset="-120"/>
               </a:rPr>
-              <a:t>2 Gold-Layer Data Products</a:t>
+              <a:t>7 Gold-Layer Data Products</a:t>
             </a:r>
             <a:endParaRPr lang="en-US" sz="2200" dirty="0"/>
           </a:p>
@@ -14772,7 +14772,7 @@
                 <a:ea typeface="Inter" pitchFamily="34" charset="-122"/>
                 <a:cs typeface="Inter" pitchFamily="34" charset="-120"/>
               </a:rPr>
-              <a:t>Owner: Sophie Muller</a:t>
+              <a:t>Owner: Sophie Müller</a:t>
             </a:r>
             <a:endParaRPr lang="en-US" sz="1000" dirty="0"/>
           </a:p>
@@ -14865,6 +14865,1251 @@
         <p:spPr>
           <a:xfrm>
             <a:off x="3337560" y="2743200"/>
+            <a:ext cx="2697480" cy="274320"/>
+          </a:xfrm>
+          <a:prstGeom prst="rect">
+            <a:avLst/>
+          </a:prstGeom>
+          <a:noFill/>
+          <a:ln/>
+        </p:spPr>
+        <p:txBody>
+          <a:bodyPr wrap="square" rtlCol="0" anchor="ctr"/>
+          <a:lstStyle/>
+          <a:p>
+            <a:pPr algn="ctr" indent="0" marL="0">
+              <a:buNone/>
+            </a:pPr>
+            <a:r>
+              <a:rPr lang="en-US" sz="900" i="1" dirty="0">
+                <a:solidFill>
+                  <a:srgbClr val="A9B3B6"/>
+                </a:solidFill>
+                <a:latin typeface="Inter" pitchFamily="34" charset="0"/>
+                <a:ea typeface="Inter" pitchFamily="34" charset="-122"/>
+                <a:cs typeface="Inter" pitchFamily="34" charset="-120"/>
+              </a:rPr>
+              <a:t>Trust Score  •  API Sharing  •  Lineage</a:t>
+            </a:r>
+            <a:endParaRPr lang="en-US" sz="900" dirty="0"/>
+          </a:p>
+        </p:txBody>
+      </p:sp>
+      <p:sp>
+        <p:nvSpPr>
+          <p:cNvPr id="22" name="Shape 19"/>
+          <p:cNvSpPr/>
+          <p:nvPr/>
+        </p:nvSpPr>
+        <p:spPr>
+          <a:xfrm>
+            <a:off x="6217920" y="1005840"/>
+            <a:ext cx="2697480" cy="2331720"/>
+          </a:xfrm>
+          <a:prstGeom prst="roundRect">
+            <a:avLst>
+              <a:gd name="adj" fmla="val 4706"/>
+            </a:avLst>
+          </a:prstGeom>
+          <a:solidFill>
+            <a:srgbClr val="FFFFFF"/>
+          </a:solidFill>
+          <a:ln w="19050">
+            <a:solidFill>
+              <a:srgbClr val="19416C"/>
+            </a:solidFill>
+            <a:prstDash val="solid"/>
+          </a:ln>
+          <a:effectLst>
+            <a:outerShdw sx="100000" sy="100000" kx="0" ky="0" algn="bl" rotWithShape="0" blurRad="50800" dist="19050" dir="16200000">
+              <a:srgbClr val="000000">
+                <a:alpha val="8000"/>
+              </a:srgbClr>
+            </a:outerShdw>
+          </a:effectLst>
+        </p:spPr>
+      </p:sp>
+      <p:sp>
+        <p:nvSpPr>
+          <p:cNvPr id="23" name="Shape 20"/>
+          <p:cNvSpPr/>
+          <p:nvPr/>
+        </p:nvSpPr>
+        <p:spPr>
+          <a:xfrm>
+            <a:off x="6291072" y="1060704"/>
+            <a:ext cx="2551176" cy="54864"/>
+          </a:xfrm>
+          <a:prstGeom prst="rect">
+            <a:avLst/>
+          </a:prstGeom>
+          <a:solidFill>
+            <a:srgbClr val="19416C"/>
+          </a:solidFill>
+          <a:ln/>
+        </p:spPr>
+      </p:sp>
+      <p:sp>
+        <p:nvSpPr>
+          <p:cNvPr id="24" name="Text 21"/>
+          <p:cNvSpPr/>
+          <p:nvPr/>
+        </p:nvSpPr>
+        <p:spPr>
+          <a:xfrm>
+            <a:off x="6217920" y="1188720"/>
+            <a:ext cx="2697480" cy="411480"/>
+          </a:xfrm>
+          <a:prstGeom prst="rect">
+            <a:avLst/>
+          </a:prstGeom>
+          <a:noFill/>
+          <a:ln/>
+        </p:spPr>
+        <p:txBody>
+          <a:bodyPr wrap="square" rtlCol="0" anchor="ctr"/>
+          <a:lstStyle/>
+          <a:p>
+            <a:pPr algn="ctr" indent="0" marL="0">
+              <a:buNone/>
+            </a:pPr>
+            <a:r>
+              <a:rPr lang="en-US" sz="1300" b="1" dirty="0">
+                <a:solidFill>
+                  <a:srgbClr val="19416C"/>
+                </a:solidFill>
+                <a:latin typeface="Inter" pitchFamily="34" charset="0"/>
+                <a:ea typeface="Inter" pitchFamily="34" charset="-122"/>
+                <a:cs typeface="Inter" pitchFamily="34" charset="-120"/>
+              </a:rPr>
+              <a:t>Cold Chain Compliance</a:t>
+            </a:r>
+            <a:endParaRPr lang="en-US" sz="1300" dirty="0"/>
+          </a:p>
+        </p:txBody>
+      </p:sp>
+      <p:sp>
+        <p:nvSpPr>
+          <p:cNvPr id="25" name="Text 22"/>
+          <p:cNvSpPr/>
+          <p:nvPr/>
+        </p:nvSpPr>
+        <p:spPr>
+          <a:xfrm>
+            <a:off x="6400800" y="1691640"/>
+            <a:ext cx="2331720" cy="274320"/>
+          </a:xfrm>
+          <a:prstGeom prst="rect">
+            <a:avLst/>
+          </a:prstGeom>
+          <a:noFill/>
+          <a:ln/>
+        </p:spPr>
+        <p:txBody>
+          <a:bodyPr wrap="square" rtlCol="0" anchor="ctr"/>
+          <a:lstStyle/>
+          <a:p>
+            <a:pPr indent="0" marL="0">
+              <a:buNone/>
+            </a:pPr>
+            <a:r>
+              <a:rPr lang="en-US" sz="1000" dirty="0">
+                <a:solidFill>
+                  <a:srgbClr val="6B7280"/>
+                </a:solidFill>
+                <a:latin typeface="Inter" pitchFamily="34" charset="0"/>
+                <a:ea typeface="Inter" pitchFamily="34" charset="-122"/>
+                <a:cs typeface="Inter" pitchFamily="34" charset="-120"/>
+              </a:rPr>
+              <a:t>Owner: Lars Eriksson</a:t>
+            </a:r>
+            <a:endParaRPr lang="en-US" sz="1000" dirty="0"/>
+          </a:p>
+        </p:txBody>
+      </p:sp>
+      <p:sp>
+        <p:nvSpPr>
+          <p:cNvPr id="26" name="Text 23"/>
+          <p:cNvSpPr/>
+          <p:nvPr/>
+        </p:nvSpPr>
+        <p:spPr>
+          <a:xfrm>
+            <a:off x="6400800" y="1965960"/>
+            <a:ext cx="2331720" cy="274320"/>
+          </a:xfrm>
+          <a:prstGeom prst="rect">
+            <a:avLst/>
+          </a:prstGeom>
+          <a:noFill/>
+          <a:ln/>
+        </p:spPr>
+        <p:txBody>
+          <a:bodyPr wrap="square" rtlCol="0" anchor="ctr"/>
+          <a:lstStyle/>
+          <a:p>
+            <a:pPr indent="0" marL="0">
+              <a:buNone/>
+            </a:pPr>
+            <a:r>
+              <a:rPr lang="en-US" sz="1000" dirty="0">
+                <a:solidFill>
+                  <a:srgbClr val="6B7280"/>
+                </a:solidFill>
+                <a:latin typeface="Inter" pitchFamily="34" charset="0"/>
+                <a:ea typeface="Inter" pitchFamily="34" charset="-122"/>
+                <a:cs typeface="Inter" pitchFamily="34" charset="-120"/>
+              </a:rPr>
+              <a:t>Refresh: 5 min</a:t>
+            </a:r>
+            <a:endParaRPr lang="en-US" sz="1000" dirty="0"/>
+          </a:p>
+        </p:txBody>
+      </p:sp>
+      <p:sp>
+        <p:nvSpPr>
+          <p:cNvPr id="27" name="Text 24"/>
+          <p:cNvSpPr/>
+          <p:nvPr/>
+        </p:nvSpPr>
+        <p:spPr>
+          <a:xfrm>
+            <a:off x="6400800" y="2240280"/>
+            <a:ext cx="2331720" cy="274320"/>
+          </a:xfrm>
+          <a:prstGeom prst="rect">
+            <a:avLst/>
+          </a:prstGeom>
+          <a:noFill/>
+          <a:ln/>
+        </p:spPr>
+        <p:txBody>
+          <a:bodyPr wrap="square" rtlCol="0" anchor="ctr"/>
+          <a:lstStyle/>
+          <a:p>
+            <a:pPr indent="0" marL="0">
+              <a:buNone/>
+            </a:pPr>
+            <a:r>
+              <a:rPr lang="en-US" sz="1100" b="1" dirty="0">
+                <a:solidFill>
+                  <a:srgbClr val="19416C"/>
+                </a:solidFill>
+                <a:latin typeface="Inter" pitchFamily="34" charset="0"/>
+                <a:ea typeface="Inter" pitchFamily="34" charset="-122"/>
+                <a:cs typeface="Inter" pitchFamily="34" charset="-120"/>
+              </a:rPr>
+              <a:t>KPI: Exceedance: &lt; 2%</a:t>
+            </a:r>
+            <a:endParaRPr lang="en-US" sz="1100" dirty="0"/>
+          </a:p>
+        </p:txBody>
+      </p:sp>
+      <p:sp>
+        <p:nvSpPr>
+          <p:cNvPr id="28" name="Text 25"/>
+          <p:cNvSpPr/>
+          <p:nvPr/>
+        </p:nvSpPr>
+        <p:spPr>
+          <a:xfrm>
+            <a:off x="6217920" y="2743200"/>
+            <a:ext cx="2697480" cy="274320"/>
+          </a:xfrm>
+          <a:prstGeom prst="rect">
+            <a:avLst/>
+          </a:prstGeom>
+          <a:noFill/>
+          <a:ln/>
+        </p:spPr>
+        <p:txBody>
+          <a:bodyPr wrap="square" rtlCol="0" anchor="ctr"/>
+          <a:lstStyle/>
+          <a:p>
+            <a:pPr algn="ctr" indent="0" marL="0">
+              <a:buNone/>
+            </a:pPr>
+            <a:r>
+              <a:rPr lang="en-US" sz="900" i="1" dirty="0">
+                <a:solidFill>
+                  <a:srgbClr val="A9B3B6"/>
+                </a:solidFill>
+                <a:latin typeface="Inter" pitchFamily="34" charset="0"/>
+                <a:ea typeface="Inter" pitchFamily="34" charset="-122"/>
+                <a:cs typeface="Inter" pitchFamily="34" charset="-120"/>
+              </a:rPr>
+              <a:t>Trust Score  •  API Sharing  •  Lineage</a:t>
+            </a:r>
+            <a:endParaRPr lang="en-US" sz="900" dirty="0"/>
+          </a:p>
+        </p:txBody>
+      </p:sp>
+      <p:sp>
+        <p:nvSpPr>
+          <p:cNvPr id="29" name="Shape 26"/>
+          <p:cNvSpPr/>
+          <p:nvPr/>
+        </p:nvSpPr>
+        <p:spPr>
+          <a:xfrm>
+            <a:off x="9098280" y="1005840"/>
+            <a:ext cx="2697480" cy="2331720"/>
+          </a:xfrm>
+          <a:prstGeom prst="roundRect">
+            <a:avLst>
+              <a:gd name="adj" fmla="val 4706"/>
+            </a:avLst>
+          </a:prstGeom>
+          <a:solidFill>
+            <a:srgbClr val="FFFFFF"/>
+          </a:solidFill>
+          <a:ln w="19050">
+            <a:solidFill>
+              <a:srgbClr val="4CB393"/>
+            </a:solidFill>
+            <a:prstDash val="solid"/>
+          </a:ln>
+          <a:effectLst>
+            <a:outerShdw sx="100000" sy="100000" kx="0" ky="0" algn="bl" rotWithShape="0" blurRad="50800" dist="19050" dir="16200000">
+              <a:srgbClr val="000000">
+                <a:alpha val="8000"/>
+              </a:srgbClr>
+            </a:outerShdw>
+          </a:effectLst>
+        </p:spPr>
+      </p:sp>
+      <p:sp>
+        <p:nvSpPr>
+          <p:cNvPr id="30" name="Shape 27"/>
+          <p:cNvSpPr/>
+          <p:nvPr/>
+        </p:nvSpPr>
+        <p:spPr>
+          <a:xfrm>
+            <a:off x="9171432" y="1060704"/>
+            <a:ext cx="2551176" cy="54864"/>
+          </a:xfrm>
+          <a:prstGeom prst="rect">
+            <a:avLst/>
+          </a:prstGeom>
+          <a:solidFill>
+            <a:srgbClr val="4CB393"/>
+          </a:solidFill>
+          <a:ln/>
+        </p:spPr>
+      </p:sp>
+      <p:sp>
+        <p:nvSpPr>
+          <p:cNvPr id="31" name="Text 28"/>
+          <p:cNvSpPr/>
+          <p:nvPr/>
+        </p:nvSpPr>
+        <p:spPr>
+          <a:xfrm>
+            <a:off x="9098280" y="1188720"/>
+            <a:ext cx="2697480" cy="411480"/>
+          </a:xfrm>
+          <a:prstGeom prst="rect">
+            <a:avLst/>
+          </a:prstGeom>
+          <a:noFill/>
+          <a:ln/>
+        </p:spPr>
+        <p:txBody>
+          <a:bodyPr wrap="square" rtlCol="0" anchor="ctr"/>
+          <a:lstStyle/>
+          <a:p>
+            <a:pPr algn="ctr" indent="0" marL="0">
+              <a:buNone/>
+            </a:pPr>
+            <a:r>
+              <a:rPr lang="en-US" sz="1300" b="1" dirty="0">
+                <a:solidFill>
+                  <a:srgbClr val="19416C"/>
+                </a:solidFill>
+                <a:latin typeface="Inter" pitchFamily="34" charset="0"/>
+                <a:ea typeface="Inter" pitchFamily="34" charset="-122"/>
+                <a:cs typeface="Inter" pitchFamily="34" charset="-120"/>
+              </a:rPr>
+              <a:t>Product Master Health</a:t>
+            </a:r>
+            <a:endParaRPr lang="en-US" sz="1300" dirty="0"/>
+          </a:p>
+        </p:txBody>
+      </p:sp>
+      <p:sp>
+        <p:nvSpPr>
+          <p:cNvPr id="32" name="Text 29"/>
+          <p:cNvSpPr/>
+          <p:nvPr/>
+        </p:nvSpPr>
+        <p:spPr>
+          <a:xfrm>
+            <a:off x="9281160" y="1691640"/>
+            <a:ext cx="2331720" cy="274320"/>
+          </a:xfrm>
+          <a:prstGeom prst="rect">
+            <a:avLst/>
+          </a:prstGeom>
+          <a:noFill/>
+          <a:ln/>
+        </p:spPr>
+        <p:txBody>
+          <a:bodyPr wrap="square" rtlCol="0" anchor="ctr"/>
+          <a:lstStyle/>
+          <a:p>
+            <a:pPr indent="0" marL="0">
+              <a:buNone/>
+            </a:pPr>
+            <a:r>
+              <a:rPr lang="en-US" sz="1000" dirty="0">
+                <a:solidFill>
+                  <a:srgbClr val="6B7280"/>
+                </a:solidFill>
+                <a:latin typeface="Inter" pitchFamily="34" charset="0"/>
+                <a:ea typeface="Inter" pitchFamily="34" charset="-122"/>
+                <a:cs typeface="Inter" pitchFamily="34" charset="-120"/>
+              </a:rPr>
+              <a:t>Owner: Thomas Berger</a:t>
+            </a:r>
+            <a:endParaRPr lang="en-US" sz="1000" dirty="0"/>
+          </a:p>
+        </p:txBody>
+      </p:sp>
+      <p:sp>
+        <p:nvSpPr>
+          <p:cNvPr id="33" name="Text 30"/>
+          <p:cNvSpPr/>
+          <p:nvPr/>
+        </p:nvSpPr>
+        <p:spPr>
+          <a:xfrm>
+            <a:off x="9281160" y="1965960"/>
+            <a:ext cx="2331720" cy="274320"/>
+          </a:xfrm>
+          <a:prstGeom prst="rect">
+            <a:avLst/>
+          </a:prstGeom>
+          <a:noFill/>
+          <a:ln/>
+        </p:spPr>
+        <p:txBody>
+          <a:bodyPr wrap="square" rtlCol="0" anchor="ctr"/>
+          <a:lstStyle/>
+          <a:p>
+            <a:pPr indent="0" marL="0">
+              <a:buNone/>
+            </a:pPr>
+            <a:r>
+              <a:rPr lang="en-US" sz="1000" dirty="0">
+                <a:solidFill>
+                  <a:srgbClr val="6B7280"/>
+                </a:solidFill>
+                <a:latin typeface="Inter" pitchFamily="34" charset="0"/>
+                <a:ea typeface="Inter" pitchFamily="34" charset="-122"/>
+                <a:cs typeface="Inter" pitchFamily="34" charset="-120"/>
+              </a:rPr>
+              <a:t>Refresh: 1 hour</a:t>
+            </a:r>
+            <a:endParaRPr lang="en-US" sz="1000" dirty="0"/>
+          </a:p>
+        </p:txBody>
+      </p:sp>
+      <p:sp>
+        <p:nvSpPr>
+          <p:cNvPr id="34" name="Text 31"/>
+          <p:cNvSpPr/>
+          <p:nvPr/>
+        </p:nvSpPr>
+        <p:spPr>
+          <a:xfrm>
+            <a:off x="9281160" y="2240280"/>
+            <a:ext cx="2331720" cy="274320"/>
+          </a:xfrm>
+          <a:prstGeom prst="rect">
+            <a:avLst/>
+          </a:prstGeom>
+          <a:noFill/>
+          <a:ln/>
+        </p:spPr>
+        <p:txBody>
+          <a:bodyPr wrap="square" rtlCol="0" anchor="ctr"/>
+          <a:lstStyle/>
+          <a:p>
+            <a:pPr indent="0" marL="0">
+              <a:buNone/>
+            </a:pPr>
+            <a:r>
+              <a:rPr lang="en-US" sz="1100" b="1" dirty="0">
+                <a:solidFill>
+                  <a:srgbClr val="4CB393"/>
+                </a:solidFill>
+                <a:latin typeface="Inter" pitchFamily="34" charset="0"/>
+                <a:ea typeface="Inter" pitchFamily="34" charset="-122"/>
+                <a:cs typeface="Inter" pitchFamily="34" charset="-120"/>
+              </a:rPr>
+              <a:t>KPI: Completeness: &gt; 95%</a:t>
+            </a:r>
+            <a:endParaRPr lang="en-US" sz="1100" dirty="0"/>
+          </a:p>
+        </p:txBody>
+      </p:sp>
+      <p:sp>
+        <p:nvSpPr>
+          <p:cNvPr id="35" name="Text 32"/>
+          <p:cNvSpPr/>
+          <p:nvPr/>
+        </p:nvSpPr>
+        <p:spPr>
+          <a:xfrm>
+            <a:off x="9098280" y="2743200"/>
+            <a:ext cx="2697480" cy="274320"/>
+          </a:xfrm>
+          <a:prstGeom prst="rect">
+            <a:avLst/>
+          </a:prstGeom>
+          <a:noFill/>
+          <a:ln/>
+        </p:spPr>
+        <p:txBody>
+          <a:bodyPr wrap="square" rtlCol="0" anchor="ctr"/>
+          <a:lstStyle/>
+          <a:p>
+            <a:pPr algn="ctr" indent="0" marL="0">
+              <a:buNone/>
+            </a:pPr>
+            <a:r>
+              <a:rPr lang="en-US" sz="900" i="1" dirty="0">
+                <a:solidFill>
+                  <a:srgbClr val="A9B3B6"/>
+                </a:solidFill>
+                <a:latin typeface="Inter" pitchFamily="34" charset="0"/>
+                <a:ea typeface="Inter" pitchFamily="34" charset="-122"/>
+                <a:cs typeface="Inter" pitchFamily="34" charset="-120"/>
+              </a:rPr>
+              <a:t>Trust Score  •  API Sharing  •  Lineage</a:t>
+            </a:r>
+            <a:endParaRPr lang="en-US" sz="900" dirty="0"/>
+          </a:p>
+        </p:txBody>
+      </p:sp>
+      <p:sp>
+        <p:nvSpPr>
+          <p:cNvPr id="36" name="Shape 33"/>
+          <p:cNvSpPr/>
+          <p:nvPr/>
+        </p:nvSpPr>
+        <p:spPr>
+          <a:xfrm>
+            <a:off x="457200" y="3566160"/>
+            <a:ext cx="2697480" cy="2331720"/>
+          </a:xfrm>
+          <a:prstGeom prst="roundRect">
+            <a:avLst>
+              <a:gd name="adj" fmla="val 4706"/>
+            </a:avLst>
+          </a:prstGeom>
+          <a:solidFill>
+            <a:srgbClr val="FFFFFF"/>
+          </a:solidFill>
+          <a:ln w="19050">
+            <a:solidFill>
+              <a:srgbClr val="006580"/>
+            </a:solidFill>
+            <a:prstDash val="solid"/>
+          </a:ln>
+          <a:effectLst>
+            <a:outerShdw sx="100000" sy="100000" kx="0" ky="0" algn="bl" rotWithShape="0" blurRad="50800" dist="19050" dir="16200000">
+              <a:srgbClr val="000000">
+                <a:alpha val="8000"/>
+              </a:srgbClr>
+            </a:outerShdw>
+          </a:effectLst>
+        </p:spPr>
+      </p:sp>
+      <p:sp>
+        <p:nvSpPr>
+          <p:cNvPr id="37" name="Shape 34"/>
+          <p:cNvSpPr/>
+          <p:nvPr/>
+        </p:nvSpPr>
+        <p:spPr>
+          <a:xfrm>
+            <a:off x="530352" y="3621024"/>
+            <a:ext cx="2551176" cy="54864"/>
+          </a:xfrm>
+          <a:prstGeom prst="rect">
+            <a:avLst/>
+          </a:prstGeom>
+          <a:solidFill>
+            <a:srgbClr val="006580"/>
+          </a:solidFill>
+          <a:ln/>
+        </p:spPr>
+      </p:sp>
+      <p:sp>
+        <p:nvSpPr>
+          <p:cNvPr id="38" name="Text 35"/>
+          <p:cNvSpPr/>
+          <p:nvPr/>
+        </p:nvSpPr>
+        <p:spPr>
+          <a:xfrm>
+            <a:off x="457200" y="3749040"/>
+            <a:ext cx="2697480" cy="411480"/>
+          </a:xfrm>
+          <a:prstGeom prst="rect">
+            <a:avLst/>
+          </a:prstGeom>
+          <a:noFill/>
+          <a:ln/>
+        </p:spPr>
+        <p:txBody>
+          <a:bodyPr wrap="square" rtlCol="0" anchor="ctr"/>
+          <a:lstStyle/>
+          <a:p>
+            <a:pPr algn="ctr" indent="0" marL="0">
+              <a:buNone/>
+            </a:pPr>
+            <a:r>
+              <a:rPr lang="en-US" sz="1300" b="1" dirty="0">
+                <a:solidFill>
+                  <a:srgbClr val="19416C"/>
+                </a:solidFill>
+                <a:latin typeface="Inter" pitchFamily="34" charset="0"/>
+                <a:ea typeface="Inter" pitchFamily="34" charset="-122"/>
+                <a:cs typeface="Inter" pitchFamily="34" charset="-120"/>
+              </a:rPr>
+              <a:t>Compliance Traceability</a:t>
+            </a:r>
+            <a:endParaRPr lang="en-US" sz="1300" dirty="0"/>
+          </a:p>
+        </p:txBody>
+      </p:sp>
+      <p:sp>
+        <p:nvSpPr>
+          <p:cNvPr id="39" name="Text 36"/>
+          <p:cNvSpPr/>
+          <p:nvPr/>
+        </p:nvSpPr>
+        <p:spPr>
+          <a:xfrm>
+            <a:off x="640080" y="4251960"/>
+            <a:ext cx="2331720" cy="274320"/>
+          </a:xfrm>
+          <a:prstGeom prst="rect">
+            <a:avLst/>
+          </a:prstGeom>
+          <a:noFill/>
+          <a:ln/>
+        </p:spPr>
+        <p:txBody>
+          <a:bodyPr wrap="square" rtlCol="0" anchor="ctr"/>
+          <a:lstStyle/>
+          <a:p>
+            <a:pPr indent="0" marL="0">
+              <a:buNone/>
+            </a:pPr>
+            <a:r>
+              <a:rPr lang="en-US" sz="1000" dirty="0">
+                <a:solidFill>
+                  <a:srgbClr val="6B7280"/>
+                </a:solidFill>
+                <a:latin typeface="Inter" pitchFamily="34" charset="0"/>
+                <a:ea typeface="Inter" pitchFamily="34" charset="-122"/>
+                <a:cs typeface="Inter" pitchFamily="34" charset="-120"/>
+              </a:rPr>
+              <a:t>Owner: Dr. E. Vasquez</a:t>
+            </a:r>
+            <a:endParaRPr lang="en-US" sz="1000" dirty="0"/>
+          </a:p>
+        </p:txBody>
+      </p:sp>
+      <p:sp>
+        <p:nvSpPr>
+          <p:cNvPr id="40" name="Text 37"/>
+          <p:cNvSpPr/>
+          <p:nvPr/>
+        </p:nvSpPr>
+        <p:spPr>
+          <a:xfrm>
+            <a:off x="640080" y="4526280"/>
+            <a:ext cx="2331720" cy="274320"/>
+          </a:xfrm>
+          <a:prstGeom prst="rect">
+            <a:avLst/>
+          </a:prstGeom>
+          <a:noFill/>
+          <a:ln/>
+        </p:spPr>
+        <p:txBody>
+          <a:bodyPr wrap="square" rtlCol="0" anchor="ctr"/>
+          <a:lstStyle/>
+          <a:p>
+            <a:pPr indent="0" marL="0">
+              <a:buNone/>
+            </a:pPr>
+            <a:r>
+              <a:rPr lang="en-US" sz="1000" dirty="0">
+                <a:solidFill>
+                  <a:srgbClr val="6B7280"/>
+                </a:solidFill>
+                <a:latin typeface="Inter" pitchFamily="34" charset="0"/>
+                <a:ea typeface="Inter" pitchFamily="34" charset="-122"/>
+                <a:cs typeface="Inter" pitchFamily="34" charset="-120"/>
+              </a:rPr>
+              <a:t>Refresh: 30 min</a:t>
+            </a:r>
+            <a:endParaRPr lang="en-US" sz="1000" dirty="0"/>
+          </a:p>
+        </p:txBody>
+      </p:sp>
+      <p:sp>
+        <p:nvSpPr>
+          <p:cNvPr id="41" name="Text 38"/>
+          <p:cNvSpPr/>
+          <p:nvPr/>
+        </p:nvSpPr>
+        <p:spPr>
+          <a:xfrm>
+            <a:off x="640080" y="4800600"/>
+            <a:ext cx="2331720" cy="274320"/>
+          </a:xfrm>
+          <a:prstGeom prst="rect">
+            <a:avLst/>
+          </a:prstGeom>
+          <a:noFill/>
+          <a:ln/>
+        </p:spPr>
+        <p:txBody>
+          <a:bodyPr wrap="square" rtlCol="0" anchor="ctr"/>
+          <a:lstStyle/>
+          <a:p>
+            <a:pPr indent="0" marL="0">
+              <a:buNone/>
+            </a:pPr>
+            <a:r>
+              <a:rPr lang="en-US" sz="1100" b="1" dirty="0">
+                <a:solidFill>
+                  <a:srgbClr val="006580"/>
+                </a:solidFill>
+                <a:latin typeface="Inter" pitchFamily="34" charset="0"/>
+                <a:ea typeface="Inter" pitchFamily="34" charset="-122"/>
+                <a:cs typeface="Inter" pitchFamily="34" charset="-120"/>
+              </a:rPr>
+              <a:t>KPI: Lot capture: 100%</a:t>
+            </a:r>
+            <a:endParaRPr lang="en-US" sz="1100" dirty="0"/>
+          </a:p>
+        </p:txBody>
+      </p:sp>
+      <p:sp>
+        <p:nvSpPr>
+          <p:cNvPr id="42" name="Text 39"/>
+          <p:cNvSpPr/>
+          <p:nvPr/>
+        </p:nvSpPr>
+        <p:spPr>
+          <a:xfrm>
+            <a:off x="457200" y="5303520"/>
+            <a:ext cx="2697480" cy="274320"/>
+          </a:xfrm>
+          <a:prstGeom prst="rect">
+            <a:avLst/>
+          </a:prstGeom>
+          <a:noFill/>
+          <a:ln/>
+        </p:spPr>
+        <p:txBody>
+          <a:bodyPr wrap="square" rtlCol="0" anchor="ctr"/>
+          <a:lstStyle/>
+          <a:p>
+            <a:pPr algn="ctr" indent="0" marL="0">
+              <a:buNone/>
+            </a:pPr>
+            <a:r>
+              <a:rPr lang="en-US" sz="900" i="1" dirty="0">
+                <a:solidFill>
+                  <a:srgbClr val="A9B3B6"/>
+                </a:solidFill>
+                <a:latin typeface="Inter" pitchFamily="34" charset="0"/>
+                <a:ea typeface="Inter" pitchFamily="34" charset="-122"/>
+                <a:cs typeface="Inter" pitchFamily="34" charset="-120"/>
+              </a:rPr>
+              <a:t>Trust Score  •  API Sharing  •  Lineage</a:t>
+            </a:r>
+            <a:endParaRPr lang="en-US" sz="900" dirty="0"/>
+          </a:p>
+        </p:txBody>
+      </p:sp>
+      <p:sp>
+        <p:nvSpPr>
+          <p:cNvPr id="43" name="Shape 40"/>
+          <p:cNvSpPr/>
+          <p:nvPr/>
+        </p:nvSpPr>
+        <p:spPr>
+          <a:xfrm>
+            <a:off x="3337560" y="3566160"/>
+            <a:ext cx="2697480" cy="2331720"/>
+          </a:xfrm>
+          <a:prstGeom prst="roundRect">
+            <a:avLst>
+              <a:gd name="adj" fmla="val 4706"/>
+            </a:avLst>
+          </a:prstGeom>
+          <a:solidFill>
+            <a:srgbClr val="FFFFFF"/>
+          </a:solidFill>
+          <a:ln w="19050">
+            <a:solidFill>
+              <a:srgbClr val="009845"/>
+            </a:solidFill>
+            <a:prstDash val="solid"/>
+          </a:ln>
+          <a:effectLst>
+            <a:outerShdw sx="100000" sy="100000" kx="0" ky="0" algn="bl" rotWithShape="0" blurRad="50800" dist="19050" dir="16200000">
+              <a:srgbClr val="000000">
+                <a:alpha val="8000"/>
+              </a:srgbClr>
+            </a:outerShdw>
+          </a:effectLst>
+        </p:spPr>
+      </p:sp>
+      <p:sp>
+        <p:nvSpPr>
+          <p:cNvPr id="44" name="Shape 41"/>
+          <p:cNvSpPr/>
+          <p:nvPr/>
+        </p:nvSpPr>
+        <p:spPr>
+          <a:xfrm>
+            <a:off x="3410712" y="3621024"/>
+            <a:ext cx="2551176" cy="54864"/>
+          </a:xfrm>
+          <a:prstGeom prst="rect">
+            <a:avLst/>
+          </a:prstGeom>
+          <a:solidFill>
+            <a:srgbClr val="009845"/>
+          </a:solidFill>
+          <a:ln/>
+        </p:spPr>
+      </p:sp>
+      <p:sp>
+        <p:nvSpPr>
+          <p:cNvPr id="45" name="Text 42"/>
+          <p:cNvSpPr/>
+          <p:nvPr/>
+        </p:nvSpPr>
+        <p:spPr>
+          <a:xfrm>
+            <a:off x="3337560" y="3749040"/>
+            <a:ext cx="2697480" cy="411480"/>
+          </a:xfrm>
+          <a:prstGeom prst="rect">
+            <a:avLst/>
+          </a:prstGeom>
+          <a:noFill/>
+          <a:ln/>
+        </p:spPr>
+        <p:txBody>
+          <a:bodyPr wrap="square" rtlCol="0" anchor="ctr"/>
+          <a:lstStyle/>
+          <a:p>
+            <a:pPr algn="ctr" indent="0" marL="0">
+              <a:buNone/>
+            </a:pPr>
+            <a:r>
+              <a:rPr lang="en-US" sz="1300" b="1" dirty="0">
+                <a:solidFill>
+                  <a:srgbClr val="19416C"/>
+                </a:solidFill>
+                <a:latin typeface="Inter" pitchFamily="34" charset="0"/>
+                <a:ea typeface="Inter" pitchFamily="34" charset="-122"/>
+                <a:cs typeface="Inter" pitchFamily="34" charset="-120"/>
+              </a:rPr>
+              <a:t>Pipeline &amp; Timestamp Audit</a:t>
+            </a:r>
+            <a:endParaRPr lang="en-US" sz="1300" dirty="0"/>
+          </a:p>
+        </p:txBody>
+      </p:sp>
+      <p:sp>
+        <p:nvSpPr>
+          <p:cNvPr id="46" name="Text 43"/>
+          <p:cNvSpPr/>
+          <p:nvPr/>
+        </p:nvSpPr>
+        <p:spPr>
+          <a:xfrm>
+            <a:off x="3520440" y="4251960"/>
+            <a:ext cx="2331720" cy="274320"/>
+          </a:xfrm>
+          <a:prstGeom prst="rect">
+            <a:avLst/>
+          </a:prstGeom>
+          <a:noFill/>
+          <a:ln/>
+        </p:spPr>
+        <p:txBody>
+          <a:bodyPr wrap="square" rtlCol="0" anchor="ctr"/>
+          <a:lstStyle/>
+          <a:p>
+            <a:pPr indent="0" marL="0">
+              <a:buNone/>
+            </a:pPr>
+            <a:r>
+              <a:rPr lang="en-US" sz="1000" dirty="0">
+                <a:solidFill>
+                  <a:srgbClr val="6B7280"/>
+                </a:solidFill>
+                <a:latin typeface="Inter" pitchFamily="34" charset="0"/>
+                <a:ea typeface="Inter" pitchFamily="34" charset="-122"/>
+                <a:cs typeface="Inter" pitchFamily="34" charset="-120"/>
+              </a:rPr>
+              <a:t>Owner: P. Ramanathan</a:t>
+            </a:r>
+            <a:endParaRPr lang="en-US" sz="1000" dirty="0"/>
+          </a:p>
+        </p:txBody>
+      </p:sp>
+      <p:sp>
+        <p:nvSpPr>
+          <p:cNvPr id="47" name="Text 44"/>
+          <p:cNvSpPr/>
+          <p:nvPr/>
+        </p:nvSpPr>
+        <p:spPr>
+          <a:xfrm>
+            <a:off x="3520440" y="4526280"/>
+            <a:ext cx="2331720" cy="274320"/>
+          </a:xfrm>
+          <a:prstGeom prst="rect">
+            <a:avLst/>
+          </a:prstGeom>
+          <a:noFill/>
+          <a:ln/>
+        </p:spPr>
+        <p:txBody>
+          <a:bodyPr wrap="square" rtlCol="0" anchor="ctr"/>
+          <a:lstStyle/>
+          <a:p>
+            <a:pPr indent="0" marL="0">
+              <a:buNone/>
+            </a:pPr>
+            <a:r>
+              <a:rPr lang="en-US" sz="1000" dirty="0">
+                <a:solidFill>
+                  <a:srgbClr val="6B7280"/>
+                </a:solidFill>
+                <a:latin typeface="Inter" pitchFamily="34" charset="0"/>
+                <a:ea typeface="Inter" pitchFamily="34" charset="-122"/>
+                <a:cs typeface="Inter" pitchFamily="34" charset="-120"/>
+              </a:rPr>
+              <a:t>Refresh: 5 min</a:t>
+            </a:r>
+            <a:endParaRPr lang="en-US" sz="1000" dirty="0"/>
+          </a:p>
+        </p:txBody>
+      </p:sp>
+      <p:sp>
+        <p:nvSpPr>
+          <p:cNvPr id="48" name="Text 45"/>
+          <p:cNvSpPr/>
+          <p:nvPr/>
+        </p:nvSpPr>
+        <p:spPr>
+          <a:xfrm>
+            <a:off x="3520440" y="4800600"/>
+            <a:ext cx="2331720" cy="274320"/>
+          </a:xfrm>
+          <a:prstGeom prst="rect">
+            <a:avLst/>
+          </a:prstGeom>
+          <a:noFill/>
+          <a:ln/>
+        </p:spPr>
+        <p:txBody>
+          <a:bodyPr wrap="square" rtlCol="0" anchor="ctr"/>
+          <a:lstStyle/>
+          <a:p>
+            <a:pPr indent="0" marL="0">
+              <a:buNone/>
+            </a:pPr>
+            <a:r>
+              <a:rPr lang="en-US" sz="1100" b="1" dirty="0">
+                <a:solidFill>
+                  <a:srgbClr val="009845"/>
+                </a:solidFill>
+                <a:latin typeface="Inter" pitchFamily="34" charset="0"/>
+                <a:ea typeface="Inter" pitchFamily="34" charset="-122"/>
+                <a:cs typeface="Inter" pitchFamily="34" charset="-120"/>
+              </a:rPr>
+              <a:t>KPI: Trust Score: 0.95 target</a:t>
+            </a:r>
+            <a:endParaRPr lang="en-US" sz="1100" dirty="0"/>
+          </a:p>
+        </p:txBody>
+      </p:sp>
+      <p:sp>
+        <p:nvSpPr>
+          <p:cNvPr id="49" name="Text 46"/>
+          <p:cNvSpPr/>
+          <p:nvPr/>
+        </p:nvSpPr>
+        <p:spPr>
+          <a:xfrm>
+            <a:off x="3337560" y="5303520"/>
+            <a:ext cx="2697480" cy="274320"/>
+          </a:xfrm>
+          <a:prstGeom prst="rect">
+            <a:avLst/>
+          </a:prstGeom>
+          <a:noFill/>
+          <a:ln/>
+        </p:spPr>
+        <p:txBody>
+          <a:bodyPr wrap="square" rtlCol="0" anchor="ctr"/>
+          <a:lstStyle/>
+          <a:p>
+            <a:pPr algn="ctr" indent="0" marL="0">
+              <a:buNone/>
+            </a:pPr>
+            <a:r>
+              <a:rPr lang="en-US" sz="900" i="1" dirty="0">
+                <a:solidFill>
+                  <a:srgbClr val="A9B3B6"/>
+                </a:solidFill>
+                <a:latin typeface="Inter" pitchFamily="34" charset="0"/>
+                <a:ea typeface="Inter" pitchFamily="34" charset="-122"/>
+                <a:cs typeface="Inter" pitchFamily="34" charset="-120"/>
+              </a:rPr>
+              <a:t>Trust Score  •  API Sharing  •  Lineage</a:t>
+            </a:r>
+            <a:endParaRPr lang="en-US" sz="900" dirty="0"/>
+          </a:p>
+        </p:txBody>
+      </p:sp>
+      <p:sp>
+        <p:nvSpPr>
+          <p:cNvPr id="50" name="Shape 47"/>
+          <p:cNvSpPr/>
+          <p:nvPr/>
+        </p:nvSpPr>
+        <p:spPr>
+          <a:xfrm>
+            <a:off x="6217920" y="3566160"/>
+            <a:ext cx="2697480" cy="2331720"/>
+          </a:xfrm>
+          <a:prstGeom prst="roundRect">
+            <a:avLst>
+              <a:gd name="adj" fmla="val 4706"/>
+            </a:avLst>
+          </a:prstGeom>
+          <a:solidFill>
+            <a:srgbClr val="FFFFFF"/>
+          </a:solidFill>
+          <a:ln w="19050">
+            <a:solidFill>
+              <a:srgbClr val="19416C"/>
+            </a:solidFill>
+            <a:prstDash val="solid"/>
+          </a:ln>
+          <a:effectLst>
+            <a:outerShdw sx="100000" sy="100000" kx="0" ky="0" algn="bl" rotWithShape="0" blurRad="50800" dist="19050" dir="16200000">
+              <a:srgbClr val="000000">
+                <a:alpha val="8000"/>
+              </a:srgbClr>
+            </a:outerShdw>
+          </a:effectLst>
+        </p:spPr>
+      </p:sp>
+      <p:sp>
+        <p:nvSpPr>
+          <p:cNvPr id="51" name="Shape 48"/>
+          <p:cNvSpPr/>
+          <p:nvPr/>
+        </p:nvSpPr>
+        <p:spPr>
+          <a:xfrm>
+            <a:off x="6291072" y="3621024"/>
+            <a:ext cx="2551176" cy="54864"/>
+          </a:xfrm>
+          <a:prstGeom prst="rect">
+            <a:avLst/>
+          </a:prstGeom>
+          <a:solidFill>
+            <a:srgbClr val="19416C"/>
+          </a:solidFill>
+          <a:ln/>
+        </p:spPr>
+      </p:sp>
+      <p:sp>
+        <p:nvSpPr>
+          <p:cNvPr id="52" name="Text 49"/>
+          <p:cNvSpPr/>
+          <p:nvPr/>
+        </p:nvSpPr>
+        <p:spPr>
+          <a:xfrm>
+            <a:off x="6217920" y="3749040"/>
+            <a:ext cx="2697480" cy="411480"/>
+          </a:xfrm>
+          <a:prstGeom prst="rect">
+            <a:avLst/>
+          </a:prstGeom>
+          <a:noFill/>
+          <a:ln/>
+        </p:spPr>
+        <p:txBody>
+          <a:bodyPr wrap="square" rtlCol="0" anchor="ctr"/>
+          <a:lstStyle/>
+          <a:p>
+            <a:pPr algn="ctr" indent="0" marL="0">
+              <a:buNone/>
+            </a:pPr>
+            <a:r>
+              <a:rPr lang="en-US" sz="1300" b="1" dirty="0">
+                <a:solidFill>
+                  <a:srgbClr val="19416C"/>
+                </a:solidFill>
+                <a:latin typeface="Inter" pitchFamily="34" charset="0"/>
+                <a:ea typeface="Inter" pitchFamily="34" charset="-122"/>
+                <a:cs typeface="Inter" pitchFamily="34" charset="-120"/>
+              </a:rPr>
+              <a:t>Customer Quality Index</a:t>
+            </a:r>
+            <a:endParaRPr lang="en-US" sz="1300" dirty="0"/>
+          </a:p>
+        </p:txBody>
+      </p:sp>
+      <p:sp>
+        <p:nvSpPr>
+          <p:cNvPr id="53" name="Text 50"/>
+          <p:cNvSpPr/>
+          <p:nvPr/>
+        </p:nvSpPr>
+        <p:spPr>
+          <a:xfrm>
+            <a:off x="6400800" y="4251960"/>
+            <a:ext cx="2331720" cy="274320"/>
+          </a:xfrm>
+          <a:prstGeom prst="rect">
+            <a:avLst/>
+          </a:prstGeom>
+          <a:noFill/>
+          <a:ln/>
+        </p:spPr>
+        <p:txBody>
+          <a:bodyPr wrap="square" rtlCol="0" anchor="ctr"/>
+          <a:lstStyle/>
+          <a:p>
+            <a:pPr indent="0" marL="0">
+              <a:buNone/>
+            </a:pPr>
+            <a:r>
+              <a:rPr lang="en-US" sz="1000" dirty="0">
+                <a:solidFill>
+                  <a:srgbClr val="6B7280"/>
+                </a:solidFill>
+                <a:latin typeface="Inter" pitchFamily="34" charset="0"/>
+                <a:ea typeface="Inter" pitchFamily="34" charset="-122"/>
+                <a:cs typeface="Inter" pitchFamily="34" charset="-120"/>
+              </a:rPr>
+              <a:t>Owner: Sophie Müller</a:t>
+            </a:r>
+            <a:endParaRPr lang="en-US" sz="1000" dirty="0"/>
+          </a:p>
+        </p:txBody>
+      </p:sp>
+      <p:sp>
+        <p:nvSpPr>
+          <p:cNvPr id="54" name="Text 51"/>
+          <p:cNvSpPr/>
+          <p:nvPr/>
+        </p:nvSpPr>
+        <p:spPr>
+          <a:xfrm>
+            <a:off x="6400800" y="4526280"/>
+            <a:ext cx="2331720" cy="274320"/>
+          </a:xfrm>
+          <a:prstGeom prst="rect">
+            <a:avLst/>
+          </a:prstGeom>
+          <a:noFill/>
+          <a:ln/>
+        </p:spPr>
+        <p:txBody>
+          <a:bodyPr wrap="square" rtlCol="0" anchor="ctr"/>
+          <a:lstStyle/>
+          <a:p>
+            <a:pPr indent="0" marL="0">
+              <a:buNone/>
+            </a:pPr>
+            <a:r>
+              <a:rPr lang="en-US" sz="1000" dirty="0">
+                <a:solidFill>
+                  <a:srgbClr val="6B7280"/>
+                </a:solidFill>
+                <a:latin typeface="Inter" pitchFamily="34" charset="0"/>
+                <a:ea typeface="Inter" pitchFamily="34" charset="-122"/>
+                <a:cs typeface="Inter" pitchFamily="34" charset="-120"/>
+              </a:rPr>
+              <a:t>Refresh: 1 hour</a:t>
+            </a:r>
+            <a:endParaRPr lang="en-US" sz="1000" dirty="0"/>
+          </a:p>
+        </p:txBody>
+      </p:sp>
+      <p:sp>
+        <p:nvSpPr>
+          <p:cNvPr id="55" name="Text 52"/>
+          <p:cNvSpPr/>
+          <p:nvPr/>
+        </p:nvSpPr>
+        <p:spPr>
+          <a:xfrm>
+            <a:off x="6400800" y="4800600"/>
+            <a:ext cx="2331720" cy="274320"/>
+          </a:xfrm>
+          <a:prstGeom prst="rect">
+            <a:avLst/>
+          </a:prstGeom>
+          <a:noFill/>
+          <a:ln/>
+        </p:spPr>
+        <p:txBody>
+          <a:bodyPr wrap="square" rtlCol="0" anchor="ctr"/>
+          <a:lstStyle/>
+          <a:p>
+            <a:pPr indent="0" marL="0">
+              <a:buNone/>
+            </a:pPr>
+            <a:r>
+              <a:rPr lang="en-US" sz="1100" b="1" dirty="0">
+                <a:solidFill>
+                  <a:srgbClr val="19416C"/>
+                </a:solidFill>
+                <a:latin typeface="Inter" pitchFamily="34" charset="0"/>
+                <a:ea typeface="Inter" pitchFamily="34" charset="-122"/>
+                <a:cs typeface="Inter" pitchFamily="34" charset="-120"/>
+              </a:rPr>
+              <a:t>KPI: Address quality: &gt; 0.85</a:t>
+            </a:r>
+            <a:endParaRPr lang="en-US" sz="1100" dirty="0"/>
+          </a:p>
+        </p:txBody>
+      </p:sp>
+      <p:sp>
+        <p:nvSpPr>
+          <p:cNvPr id="56" name="Text 53"/>
+          <p:cNvSpPr/>
+          <p:nvPr/>
+        </p:nvSpPr>
+        <p:spPr>
+          <a:xfrm>
+            <a:off x="6217920" y="5303520"/>
             <a:ext cx="2697480" cy="274320"/>
           </a:xfrm>
           <a:prstGeom prst="rect">

--- a/MCG_Technology_Architecture.pptx
+++ b/MCG_Technology_Architecture.pptx
@@ -14170,7 +14170,7 @@
               <a:buNone/>
             </a:pPr>
             <a:r>
-              <a:rPr lang="en-US" sz="1100" b="1" dirty="0">
+              <a:rPr lang="en-US" sz="1000" b="1" dirty="0">
                 <a:solidFill>
                   <a:srgbClr val="009845"/>
                 </a:solidFill>
@@ -14178,9 +14178,9 @@
                 <a:ea typeface="Inter" pitchFamily="34" charset="-122"/>
                 <a:cs typeface="Inter" pitchFamily="34" charset="-120"/>
               </a:rPr>
-              <a:t>+ Talend Address Validation Job — tAddressRowStandardize → tAddressRowValidate → tGeocode (callable service)</a:t>
-            </a:r>
-            <a:endParaRPr lang="en-US" sz="1100" dirty="0"/>
+              <a:t>+ Talend Address Validation Job (callable service)   •   All 8 routes defined as declarative YAML — version-controlled, API-imported, daily-scheduled (QTCP preview)</a:t>
+            </a:r>
+            <a:endParaRPr lang="en-US" sz="1000" dirty="0"/>
           </a:p>
         </p:txBody>
       </p:sp>

--- a/MCG_Technology_Architecture.pptx
+++ b/MCG_Technology_Architecture.pptx
@@ -2078,7 +2078,7 @@
                 <a:ea typeface="Inter" pitchFamily="34" charset="-122"/>
                 <a:cs typeface="Inter" pitchFamily="34" charset="-120"/>
               </a:rPr>
-              <a:t>3 Sources  •  Open Lakehouse  •  8 Transformation Routes  •  7 Data Products</a:t>
+              <a:t>3 Sources  •  Open Lakehouse  •  8 Transformation Routes  •  2 Data Products</a:t>
             </a:r>
             <a:endParaRPr lang="en-US" sz="1200" dirty="0"/>
           </a:p>
@@ -5696,7 +5696,7 @@
                 <a:ea typeface="Inter" pitchFamily="34" charset="-122"/>
                 <a:cs typeface="Inter" pitchFamily="34" charset="-120"/>
               </a:rPr>
-              <a:t>8 Bronze tables  •  8 Silver transformations + 1 Talend job  •  7 Gold data products</a:t>
+              <a:t>8 Bronze tables  •  8 Silver transformations + 1 Talend job  •  2 Gold data products</a:t>
             </a:r>
             <a:endParaRPr lang="en-US" sz="1100" dirty="0"/>
           </a:p>
@@ -6257,7 +6257,7 @@
                 <a:ea typeface="Inter" pitchFamily="34" charset="-122"/>
                 <a:cs typeface="Inter" pitchFamily="34" charset="-120"/>
               </a:rPr>
-              <a:t>3 Sources  •  23 Tables  •  9 Flows  •  7 Products  •  10 Sheets  •  2 Models  •  25 Docs  •  5 Automations  •  1 MCP Server</a:t>
+              <a:t>3 Sources  •  18 Tables  •  9 Flows  •  2 Products  •  10 Sheets  •  2 Models  •  25 Docs  •  5 Automations  •  1 MCP Server</a:t>
             </a:r>
             <a:endParaRPr lang="en-US" sz="1100" dirty="0"/>
           </a:p>
@@ -7552,7 +7552,7 @@
                 <a:ea typeface="Inter" pitchFamily="34" charset="-122"/>
                 <a:cs typeface="Inter" pitchFamily="34" charset="-120"/>
               </a:rPr>
-              <a:t>Gold (7 products)</a:t>
+              <a:t>Gold (2 products)</a:t>
             </a:r>
             <a:endParaRPr lang="en-US" sz="1200" dirty="0"/>
           </a:p>
@@ -14391,7 +14391,7 @@
                 <a:ea typeface="Inter" pitchFamily="34" charset="-122"/>
                 <a:cs typeface="Inter" pitchFamily="34" charset="-120"/>
               </a:rPr>
-              <a:t>7 Gold-Layer Data Products</a:t>
+              <a:t>Gold-Layer Data Products</a:t>
             </a:r>
             <a:endParaRPr lang="en-US" sz="2200" dirty="0"/>
           </a:p>
@@ -14399,14 +14399,53 @@
       </p:sp>
       <p:sp>
         <p:nvSpPr>
-          <p:cNvPr id="8" name="Shape 5"/>
-          <p:cNvSpPr/>
-          <p:nvPr/>
-        </p:nvSpPr>
-        <p:spPr>
-          <a:xfrm>
-            <a:off x="457200" y="1005840"/>
-            <a:ext cx="2697480" cy="2331720"/>
+          <p:cNvPr id="8" name="Text 5"/>
+          <p:cNvSpPr/>
+          <p:nvPr/>
+        </p:nvSpPr>
+        <p:spPr>
+          <a:xfrm>
+            <a:off x="457200" y="868680"/>
+            <a:ext cx="11274552" cy="365760"/>
+          </a:xfrm>
+          <a:prstGeom prst="rect">
+            <a:avLst/>
+          </a:prstGeom>
+          <a:noFill/>
+          <a:ln/>
+        </p:spPr>
+        <p:txBody>
+          <a:bodyPr wrap="square" rtlCol="0" anchor="ctr"/>
+          <a:lstStyle/>
+          <a:p>
+            <a:pPr algn="ctr" indent="0" marL="0">
+              <a:buNone/>
+            </a:pPr>
+            <a:r>
+              <a:rPr lang="en-US" sz="1200" dirty="0">
+                <a:solidFill>
+                  <a:srgbClr val="6B7280"/>
+                </a:solidFill>
+                <a:latin typeface="Inter" pitchFamily="34" charset="0"/>
+                <a:ea typeface="Inter" pitchFamily="34" charset="-122"/>
+                <a:cs typeface="Inter" pitchFamily="34" charset="-120"/>
+              </a:rPr>
+              <a:t>One governed mart per analytics domain app — created by the pipeline's gold datamart task, attached via the Data Products API</a:t>
+            </a:r>
+            <a:endParaRPr lang="en-US" sz="1200" dirty="0"/>
+          </a:p>
+        </p:txBody>
+      </p:sp>
+      <p:sp>
+        <p:nvSpPr>
+          <p:cNvPr id="9" name="Shape 6"/>
+          <p:cNvSpPr/>
+          <p:nvPr/>
+        </p:nvSpPr>
+        <p:spPr>
+          <a:xfrm>
+            <a:off x="822960" y="1554480"/>
+            <a:ext cx="5029200" cy="2331720"/>
           </a:xfrm>
           <a:prstGeom prst="roundRect">
             <a:avLst>
@@ -14433,14 +14472,14 @@
       </p:sp>
       <p:sp>
         <p:nvSpPr>
-          <p:cNvPr id="9" name="Shape 6"/>
-          <p:cNvSpPr/>
-          <p:nvPr/>
-        </p:nvSpPr>
-        <p:spPr>
-          <a:xfrm>
-            <a:off x="530352" y="1060704"/>
-            <a:ext cx="2551176" cy="54864"/>
+          <p:cNvPr id="10" name="Shape 7"/>
+          <p:cNvSpPr/>
+          <p:nvPr/>
+        </p:nvSpPr>
+        <p:spPr>
+          <a:xfrm>
+            <a:off x="896112" y="1609344"/>
+            <a:ext cx="4882896" cy="54864"/>
           </a:xfrm>
           <a:prstGeom prst="rect">
             <a:avLst/>
@@ -14453,14 +14492,14 @@
       </p:sp>
       <p:sp>
         <p:nvSpPr>
-          <p:cNvPr id="10" name="Text 7"/>
-          <p:cNvSpPr/>
-          <p:nvPr/>
-        </p:nvSpPr>
-        <p:spPr>
-          <a:xfrm>
-            <a:off x="457200" y="1188720"/>
-            <a:ext cx="2697480" cy="411480"/>
+          <p:cNvPr id="11" name="Text 8"/>
+          <p:cNvSpPr/>
+          <p:nvPr/>
+        </p:nvSpPr>
+        <p:spPr>
+          <a:xfrm>
+            <a:off x="822960" y="1737360"/>
+            <a:ext cx="5029200" cy="411480"/>
           </a:xfrm>
           <a:prstGeom prst="rect">
             <a:avLst/>
@@ -14492,14 +14531,14 @@
       </p:sp>
       <p:sp>
         <p:nvSpPr>
-          <p:cNvPr id="11" name="Text 8"/>
-          <p:cNvSpPr/>
-          <p:nvPr/>
-        </p:nvSpPr>
-        <p:spPr>
-          <a:xfrm>
-            <a:off x="640080" y="1691640"/>
-            <a:ext cx="2331720" cy="274320"/>
+          <p:cNvPr id="12" name="Text 9"/>
+          <p:cNvSpPr/>
+          <p:nvPr/>
+        </p:nvSpPr>
+        <p:spPr>
+          <a:xfrm>
+            <a:off x="1005840" y="2240280"/>
+            <a:ext cx="4663440" cy="274320"/>
           </a:xfrm>
           <a:prstGeom prst="rect">
             <a:avLst/>
@@ -14531,14 +14570,14 @@
       </p:sp>
       <p:sp>
         <p:nvSpPr>
-          <p:cNvPr id="12" name="Text 9"/>
-          <p:cNvSpPr/>
-          <p:nvPr/>
-        </p:nvSpPr>
-        <p:spPr>
-          <a:xfrm>
-            <a:off x="640080" y="1965960"/>
-            <a:ext cx="2331720" cy="274320"/>
+          <p:cNvPr id="13" name="Text 10"/>
+          <p:cNvSpPr/>
+          <p:nvPr/>
+        </p:nvSpPr>
+        <p:spPr>
+          <a:xfrm>
+            <a:off x="1005840" y="2514600"/>
+            <a:ext cx="4663440" cy="274320"/>
           </a:xfrm>
           <a:prstGeom prst="rect">
             <a:avLst/>
@@ -14562,7 +14601,7 @@
                 <a:ea typeface="Inter" pitchFamily="34" charset="-122"/>
                 <a:cs typeface="Inter" pitchFamily="34" charset="-120"/>
               </a:rPr>
-              <a:t>Refresh: 15 min</a:t>
+              <a:t>Refresh: Daily 06:00 UTC + event</a:t>
             </a:r>
             <a:endParaRPr lang="en-US" sz="1000" dirty="0"/>
           </a:p>
@@ -14570,14 +14609,14 @@
       </p:sp>
       <p:sp>
         <p:nvSpPr>
-          <p:cNvPr id="13" name="Text 10"/>
-          <p:cNvSpPr/>
-          <p:nvPr/>
-        </p:nvSpPr>
-        <p:spPr>
-          <a:xfrm>
-            <a:off x="640080" y="2240280"/>
-            <a:ext cx="2331720" cy="274320"/>
+          <p:cNvPr id="14" name="Text 11"/>
+          <p:cNvSpPr/>
+          <p:nvPr/>
+        </p:nvSpPr>
+        <p:spPr>
+          <a:xfrm>
+            <a:off x="1005840" y="2788920"/>
+            <a:ext cx="4663440" cy="274320"/>
           </a:xfrm>
           <a:prstGeom prst="rect">
             <a:avLst/>
@@ -14609,14 +14648,14 @@
       </p:sp>
       <p:sp>
         <p:nvSpPr>
-          <p:cNvPr id="14" name="Text 11"/>
-          <p:cNvSpPr/>
-          <p:nvPr/>
-        </p:nvSpPr>
-        <p:spPr>
-          <a:xfrm>
-            <a:off x="457200" y="2743200"/>
-            <a:ext cx="2697480" cy="274320"/>
+          <p:cNvPr id="15" name="Text 12"/>
+          <p:cNvSpPr/>
+          <p:nvPr/>
+        </p:nvSpPr>
+        <p:spPr>
+          <a:xfrm>
+            <a:off x="822960" y="3291840"/>
+            <a:ext cx="5029200" cy="274320"/>
           </a:xfrm>
           <a:prstGeom prst="rect">
             <a:avLst/>
@@ -14648,14 +14687,14 @@
       </p:sp>
       <p:sp>
         <p:nvSpPr>
-          <p:cNvPr id="15" name="Shape 12"/>
-          <p:cNvSpPr/>
-          <p:nvPr/>
-        </p:nvSpPr>
-        <p:spPr>
-          <a:xfrm>
-            <a:off x="3337560" y="1005840"/>
-            <a:ext cx="2697480" cy="2331720"/>
+          <p:cNvPr id="16" name="Shape 13"/>
+          <p:cNvSpPr/>
+          <p:nvPr/>
+        </p:nvSpPr>
+        <p:spPr>
+          <a:xfrm>
+            <a:off x="6400800" y="1554480"/>
+            <a:ext cx="5029200" cy="2331720"/>
           </a:xfrm>
           <a:prstGeom prst="roundRect">
             <a:avLst>
@@ -14682,14 +14721,14 @@
       </p:sp>
       <p:sp>
         <p:nvSpPr>
-          <p:cNvPr id="16" name="Shape 13"/>
-          <p:cNvSpPr/>
-          <p:nvPr/>
-        </p:nvSpPr>
-        <p:spPr>
-          <a:xfrm>
-            <a:off x="3410712" y="1060704"/>
-            <a:ext cx="2551176" cy="54864"/>
+          <p:cNvPr id="17" name="Shape 14"/>
+          <p:cNvSpPr/>
+          <p:nvPr/>
+        </p:nvSpPr>
+        <p:spPr>
+          <a:xfrm>
+            <a:off x="6473952" y="1609344"/>
+            <a:ext cx="4882896" cy="54864"/>
           </a:xfrm>
           <a:prstGeom prst="rect">
             <a:avLst/>
@@ -14702,14 +14741,14 @@
       </p:sp>
       <p:sp>
         <p:nvSpPr>
-          <p:cNvPr id="17" name="Text 14"/>
-          <p:cNvSpPr/>
-          <p:nvPr/>
-        </p:nvSpPr>
-        <p:spPr>
-          <a:xfrm>
-            <a:off x="3337560" y="1188720"/>
-            <a:ext cx="2697480" cy="411480"/>
+          <p:cNvPr id="18" name="Text 15"/>
+          <p:cNvSpPr/>
+          <p:nvPr/>
+        </p:nvSpPr>
+        <p:spPr>
+          <a:xfrm>
+            <a:off x="6400800" y="1737360"/>
+            <a:ext cx="5029200" cy="411480"/>
           </a:xfrm>
           <a:prstGeom prst="rect">
             <a:avLst/>
@@ -14741,14 +14780,14 @@
       </p:sp>
       <p:sp>
         <p:nvSpPr>
-          <p:cNvPr id="18" name="Text 15"/>
-          <p:cNvSpPr/>
-          <p:nvPr/>
-        </p:nvSpPr>
-        <p:spPr>
-          <a:xfrm>
-            <a:off x="3520440" y="1691640"/>
-            <a:ext cx="2331720" cy="274320"/>
+          <p:cNvPr id="19" name="Text 16"/>
+          <p:cNvSpPr/>
+          <p:nvPr/>
+        </p:nvSpPr>
+        <p:spPr>
+          <a:xfrm>
+            <a:off x="6583680" y="2240280"/>
+            <a:ext cx="4663440" cy="274320"/>
           </a:xfrm>
           <a:prstGeom prst="rect">
             <a:avLst/>
@@ -14780,14 +14819,14 @@
       </p:sp>
       <p:sp>
         <p:nvSpPr>
-          <p:cNvPr id="19" name="Text 16"/>
-          <p:cNvSpPr/>
-          <p:nvPr/>
-        </p:nvSpPr>
-        <p:spPr>
-          <a:xfrm>
-            <a:off x="3520440" y="1965960"/>
-            <a:ext cx="2331720" cy="274320"/>
+          <p:cNvPr id="20" name="Text 17"/>
+          <p:cNvSpPr/>
+          <p:nvPr/>
+        </p:nvSpPr>
+        <p:spPr>
+          <a:xfrm>
+            <a:off x="6583680" y="2514600"/>
+            <a:ext cx="4663440" cy="274320"/>
           </a:xfrm>
           <a:prstGeom prst="rect">
             <a:avLst/>
@@ -14811,7 +14850,7 @@
                 <a:ea typeface="Inter" pitchFamily="34" charset="-122"/>
                 <a:cs typeface="Inter" pitchFamily="34" charset="-120"/>
               </a:rPr>
-              <a:t>Refresh: 30 min</a:t>
+              <a:t>Refresh: Daily 06:00 UTC + event</a:t>
             </a:r>
             <a:endParaRPr lang="en-US" sz="1000" dirty="0"/>
           </a:p>
@@ -14819,14 +14858,14 @@
       </p:sp>
       <p:sp>
         <p:nvSpPr>
-          <p:cNvPr id="20" name="Text 17"/>
-          <p:cNvSpPr/>
-          <p:nvPr/>
-        </p:nvSpPr>
-        <p:spPr>
-          <a:xfrm>
-            <a:off x="3520440" y="2240280"/>
-            <a:ext cx="2331720" cy="274320"/>
+          <p:cNvPr id="21" name="Text 18"/>
+          <p:cNvSpPr/>
+          <p:nvPr/>
+        </p:nvSpPr>
+        <p:spPr>
+          <a:xfrm>
+            <a:off x="6583680" y="2788920"/>
+            <a:ext cx="4663440" cy="274320"/>
           </a:xfrm>
           <a:prstGeom prst="rect">
             <a:avLst/>
@@ -14858,1259 +14897,14 @@
       </p:sp>
       <p:sp>
         <p:nvSpPr>
-          <p:cNvPr id="21" name="Text 18"/>
-          <p:cNvSpPr/>
-          <p:nvPr/>
-        </p:nvSpPr>
-        <p:spPr>
-          <a:xfrm>
-            <a:off x="3337560" y="2743200"/>
-            <a:ext cx="2697480" cy="274320"/>
-          </a:xfrm>
-          <a:prstGeom prst="rect">
-            <a:avLst/>
-          </a:prstGeom>
-          <a:noFill/>
-          <a:ln/>
-        </p:spPr>
-        <p:txBody>
-          <a:bodyPr wrap="square" rtlCol="0" anchor="ctr"/>
-          <a:lstStyle/>
-          <a:p>
-            <a:pPr algn="ctr" indent="0" marL="0">
-              <a:buNone/>
-            </a:pPr>
-            <a:r>
-              <a:rPr lang="en-US" sz="900" i="1" dirty="0">
-                <a:solidFill>
-                  <a:srgbClr val="A9B3B6"/>
-                </a:solidFill>
-                <a:latin typeface="Inter" pitchFamily="34" charset="0"/>
-                <a:ea typeface="Inter" pitchFamily="34" charset="-122"/>
-                <a:cs typeface="Inter" pitchFamily="34" charset="-120"/>
-              </a:rPr>
-              <a:t>Trust Score  •  API Sharing  •  Lineage</a:t>
-            </a:r>
-            <a:endParaRPr lang="en-US" sz="900" dirty="0"/>
-          </a:p>
-        </p:txBody>
-      </p:sp>
-      <p:sp>
-        <p:nvSpPr>
-          <p:cNvPr id="22" name="Shape 19"/>
-          <p:cNvSpPr/>
-          <p:nvPr/>
-        </p:nvSpPr>
-        <p:spPr>
-          <a:xfrm>
-            <a:off x="6217920" y="1005840"/>
-            <a:ext cx="2697480" cy="2331720"/>
-          </a:xfrm>
-          <a:prstGeom prst="roundRect">
-            <a:avLst>
-              <a:gd name="adj" fmla="val 4706"/>
-            </a:avLst>
-          </a:prstGeom>
-          <a:solidFill>
-            <a:srgbClr val="FFFFFF"/>
-          </a:solidFill>
-          <a:ln w="19050">
-            <a:solidFill>
-              <a:srgbClr val="19416C"/>
-            </a:solidFill>
-            <a:prstDash val="solid"/>
-          </a:ln>
-          <a:effectLst>
-            <a:outerShdw sx="100000" sy="100000" kx="0" ky="0" algn="bl" rotWithShape="0" blurRad="50800" dist="19050" dir="16200000">
-              <a:srgbClr val="000000">
-                <a:alpha val="8000"/>
-              </a:srgbClr>
-            </a:outerShdw>
-          </a:effectLst>
-        </p:spPr>
-      </p:sp>
-      <p:sp>
-        <p:nvSpPr>
-          <p:cNvPr id="23" name="Shape 20"/>
-          <p:cNvSpPr/>
-          <p:nvPr/>
-        </p:nvSpPr>
-        <p:spPr>
-          <a:xfrm>
-            <a:off x="6291072" y="1060704"/>
-            <a:ext cx="2551176" cy="54864"/>
-          </a:xfrm>
-          <a:prstGeom prst="rect">
-            <a:avLst/>
-          </a:prstGeom>
-          <a:solidFill>
-            <a:srgbClr val="19416C"/>
-          </a:solidFill>
-          <a:ln/>
-        </p:spPr>
-      </p:sp>
-      <p:sp>
-        <p:nvSpPr>
-          <p:cNvPr id="24" name="Text 21"/>
-          <p:cNvSpPr/>
-          <p:nvPr/>
-        </p:nvSpPr>
-        <p:spPr>
-          <a:xfrm>
-            <a:off x="6217920" y="1188720"/>
-            <a:ext cx="2697480" cy="411480"/>
-          </a:xfrm>
-          <a:prstGeom prst="rect">
-            <a:avLst/>
-          </a:prstGeom>
-          <a:noFill/>
-          <a:ln/>
-        </p:spPr>
-        <p:txBody>
-          <a:bodyPr wrap="square" rtlCol="0" anchor="ctr"/>
-          <a:lstStyle/>
-          <a:p>
-            <a:pPr algn="ctr" indent="0" marL="0">
-              <a:buNone/>
-            </a:pPr>
-            <a:r>
-              <a:rPr lang="en-US" sz="1300" b="1" dirty="0">
-                <a:solidFill>
-                  <a:srgbClr val="19416C"/>
-                </a:solidFill>
-                <a:latin typeface="Inter" pitchFamily="34" charset="0"/>
-                <a:ea typeface="Inter" pitchFamily="34" charset="-122"/>
-                <a:cs typeface="Inter" pitchFamily="34" charset="-120"/>
-              </a:rPr>
-              <a:t>Cold Chain Compliance</a:t>
-            </a:r>
-            <a:endParaRPr lang="en-US" sz="1300" dirty="0"/>
-          </a:p>
-        </p:txBody>
-      </p:sp>
-      <p:sp>
-        <p:nvSpPr>
-          <p:cNvPr id="25" name="Text 22"/>
-          <p:cNvSpPr/>
-          <p:nvPr/>
-        </p:nvSpPr>
-        <p:spPr>
-          <a:xfrm>
-            <a:off x="6400800" y="1691640"/>
-            <a:ext cx="2331720" cy="274320"/>
-          </a:xfrm>
-          <a:prstGeom prst="rect">
-            <a:avLst/>
-          </a:prstGeom>
-          <a:noFill/>
-          <a:ln/>
-        </p:spPr>
-        <p:txBody>
-          <a:bodyPr wrap="square" rtlCol="0" anchor="ctr"/>
-          <a:lstStyle/>
-          <a:p>
-            <a:pPr indent="0" marL="0">
-              <a:buNone/>
-            </a:pPr>
-            <a:r>
-              <a:rPr lang="en-US" sz="1000" dirty="0">
-                <a:solidFill>
-                  <a:srgbClr val="6B7280"/>
-                </a:solidFill>
-                <a:latin typeface="Inter" pitchFamily="34" charset="0"/>
-                <a:ea typeface="Inter" pitchFamily="34" charset="-122"/>
-                <a:cs typeface="Inter" pitchFamily="34" charset="-120"/>
-              </a:rPr>
-              <a:t>Owner: Lars Eriksson</a:t>
-            </a:r>
-            <a:endParaRPr lang="en-US" sz="1000" dirty="0"/>
-          </a:p>
-        </p:txBody>
-      </p:sp>
-      <p:sp>
-        <p:nvSpPr>
-          <p:cNvPr id="26" name="Text 23"/>
-          <p:cNvSpPr/>
-          <p:nvPr/>
-        </p:nvSpPr>
-        <p:spPr>
-          <a:xfrm>
-            <a:off x="6400800" y="1965960"/>
-            <a:ext cx="2331720" cy="274320"/>
-          </a:xfrm>
-          <a:prstGeom prst="rect">
-            <a:avLst/>
-          </a:prstGeom>
-          <a:noFill/>
-          <a:ln/>
-        </p:spPr>
-        <p:txBody>
-          <a:bodyPr wrap="square" rtlCol="0" anchor="ctr"/>
-          <a:lstStyle/>
-          <a:p>
-            <a:pPr indent="0" marL="0">
-              <a:buNone/>
-            </a:pPr>
-            <a:r>
-              <a:rPr lang="en-US" sz="1000" dirty="0">
-                <a:solidFill>
-                  <a:srgbClr val="6B7280"/>
-                </a:solidFill>
-                <a:latin typeface="Inter" pitchFamily="34" charset="0"/>
-                <a:ea typeface="Inter" pitchFamily="34" charset="-122"/>
-                <a:cs typeface="Inter" pitchFamily="34" charset="-120"/>
-              </a:rPr>
-              <a:t>Refresh: 5 min</a:t>
-            </a:r>
-            <a:endParaRPr lang="en-US" sz="1000" dirty="0"/>
-          </a:p>
-        </p:txBody>
-      </p:sp>
-      <p:sp>
-        <p:nvSpPr>
-          <p:cNvPr id="27" name="Text 24"/>
-          <p:cNvSpPr/>
-          <p:nvPr/>
-        </p:nvSpPr>
-        <p:spPr>
-          <a:xfrm>
-            <a:off x="6400800" y="2240280"/>
-            <a:ext cx="2331720" cy="274320"/>
-          </a:xfrm>
-          <a:prstGeom prst="rect">
-            <a:avLst/>
-          </a:prstGeom>
-          <a:noFill/>
-          <a:ln/>
-        </p:spPr>
-        <p:txBody>
-          <a:bodyPr wrap="square" rtlCol="0" anchor="ctr"/>
-          <a:lstStyle/>
-          <a:p>
-            <a:pPr indent="0" marL="0">
-              <a:buNone/>
-            </a:pPr>
-            <a:r>
-              <a:rPr lang="en-US" sz="1100" b="1" dirty="0">
-                <a:solidFill>
-                  <a:srgbClr val="19416C"/>
-                </a:solidFill>
-                <a:latin typeface="Inter" pitchFamily="34" charset="0"/>
-                <a:ea typeface="Inter" pitchFamily="34" charset="-122"/>
-                <a:cs typeface="Inter" pitchFamily="34" charset="-120"/>
-              </a:rPr>
-              <a:t>KPI: Exceedance: &lt; 2%</a:t>
-            </a:r>
-            <a:endParaRPr lang="en-US" sz="1100" dirty="0"/>
-          </a:p>
-        </p:txBody>
-      </p:sp>
-      <p:sp>
-        <p:nvSpPr>
-          <p:cNvPr id="28" name="Text 25"/>
-          <p:cNvSpPr/>
-          <p:nvPr/>
-        </p:nvSpPr>
-        <p:spPr>
-          <a:xfrm>
-            <a:off x="6217920" y="2743200"/>
-            <a:ext cx="2697480" cy="274320"/>
-          </a:xfrm>
-          <a:prstGeom prst="rect">
-            <a:avLst/>
-          </a:prstGeom>
-          <a:noFill/>
-          <a:ln/>
-        </p:spPr>
-        <p:txBody>
-          <a:bodyPr wrap="square" rtlCol="0" anchor="ctr"/>
-          <a:lstStyle/>
-          <a:p>
-            <a:pPr algn="ctr" indent="0" marL="0">
-              <a:buNone/>
-            </a:pPr>
-            <a:r>
-              <a:rPr lang="en-US" sz="900" i="1" dirty="0">
-                <a:solidFill>
-                  <a:srgbClr val="A9B3B6"/>
-                </a:solidFill>
-                <a:latin typeface="Inter" pitchFamily="34" charset="0"/>
-                <a:ea typeface="Inter" pitchFamily="34" charset="-122"/>
-                <a:cs typeface="Inter" pitchFamily="34" charset="-120"/>
-              </a:rPr>
-              <a:t>Trust Score  •  API Sharing  •  Lineage</a:t>
-            </a:r>
-            <a:endParaRPr lang="en-US" sz="900" dirty="0"/>
-          </a:p>
-        </p:txBody>
-      </p:sp>
-      <p:sp>
-        <p:nvSpPr>
-          <p:cNvPr id="29" name="Shape 26"/>
-          <p:cNvSpPr/>
-          <p:nvPr/>
-        </p:nvSpPr>
-        <p:spPr>
-          <a:xfrm>
-            <a:off x="9098280" y="1005840"/>
-            <a:ext cx="2697480" cy="2331720"/>
-          </a:xfrm>
-          <a:prstGeom prst="roundRect">
-            <a:avLst>
-              <a:gd name="adj" fmla="val 4706"/>
-            </a:avLst>
-          </a:prstGeom>
-          <a:solidFill>
-            <a:srgbClr val="FFFFFF"/>
-          </a:solidFill>
-          <a:ln w="19050">
-            <a:solidFill>
-              <a:srgbClr val="4CB393"/>
-            </a:solidFill>
-            <a:prstDash val="solid"/>
-          </a:ln>
-          <a:effectLst>
-            <a:outerShdw sx="100000" sy="100000" kx="0" ky="0" algn="bl" rotWithShape="0" blurRad="50800" dist="19050" dir="16200000">
-              <a:srgbClr val="000000">
-                <a:alpha val="8000"/>
-              </a:srgbClr>
-            </a:outerShdw>
-          </a:effectLst>
-        </p:spPr>
-      </p:sp>
-      <p:sp>
-        <p:nvSpPr>
-          <p:cNvPr id="30" name="Shape 27"/>
-          <p:cNvSpPr/>
-          <p:nvPr/>
-        </p:nvSpPr>
-        <p:spPr>
-          <a:xfrm>
-            <a:off x="9171432" y="1060704"/>
-            <a:ext cx="2551176" cy="54864"/>
-          </a:xfrm>
-          <a:prstGeom prst="rect">
-            <a:avLst/>
-          </a:prstGeom>
-          <a:solidFill>
-            <a:srgbClr val="4CB393"/>
-          </a:solidFill>
-          <a:ln/>
-        </p:spPr>
-      </p:sp>
-      <p:sp>
-        <p:nvSpPr>
-          <p:cNvPr id="31" name="Text 28"/>
-          <p:cNvSpPr/>
-          <p:nvPr/>
-        </p:nvSpPr>
-        <p:spPr>
-          <a:xfrm>
-            <a:off x="9098280" y="1188720"/>
-            <a:ext cx="2697480" cy="411480"/>
-          </a:xfrm>
-          <a:prstGeom prst="rect">
-            <a:avLst/>
-          </a:prstGeom>
-          <a:noFill/>
-          <a:ln/>
-        </p:spPr>
-        <p:txBody>
-          <a:bodyPr wrap="square" rtlCol="0" anchor="ctr"/>
-          <a:lstStyle/>
-          <a:p>
-            <a:pPr algn="ctr" indent="0" marL="0">
-              <a:buNone/>
-            </a:pPr>
-            <a:r>
-              <a:rPr lang="en-US" sz="1300" b="1" dirty="0">
-                <a:solidFill>
-                  <a:srgbClr val="19416C"/>
-                </a:solidFill>
-                <a:latin typeface="Inter" pitchFamily="34" charset="0"/>
-                <a:ea typeface="Inter" pitchFamily="34" charset="-122"/>
-                <a:cs typeface="Inter" pitchFamily="34" charset="-120"/>
-              </a:rPr>
-              <a:t>Product Master Health</a:t>
-            </a:r>
-            <a:endParaRPr lang="en-US" sz="1300" dirty="0"/>
-          </a:p>
-        </p:txBody>
-      </p:sp>
-      <p:sp>
-        <p:nvSpPr>
-          <p:cNvPr id="32" name="Text 29"/>
-          <p:cNvSpPr/>
-          <p:nvPr/>
-        </p:nvSpPr>
-        <p:spPr>
-          <a:xfrm>
-            <a:off x="9281160" y="1691640"/>
-            <a:ext cx="2331720" cy="274320"/>
-          </a:xfrm>
-          <a:prstGeom prst="rect">
-            <a:avLst/>
-          </a:prstGeom>
-          <a:noFill/>
-          <a:ln/>
-        </p:spPr>
-        <p:txBody>
-          <a:bodyPr wrap="square" rtlCol="0" anchor="ctr"/>
-          <a:lstStyle/>
-          <a:p>
-            <a:pPr indent="0" marL="0">
-              <a:buNone/>
-            </a:pPr>
-            <a:r>
-              <a:rPr lang="en-US" sz="1000" dirty="0">
-                <a:solidFill>
-                  <a:srgbClr val="6B7280"/>
-                </a:solidFill>
-                <a:latin typeface="Inter" pitchFamily="34" charset="0"/>
-                <a:ea typeface="Inter" pitchFamily="34" charset="-122"/>
-                <a:cs typeface="Inter" pitchFamily="34" charset="-120"/>
-              </a:rPr>
-              <a:t>Owner: Thomas Berger</a:t>
-            </a:r>
-            <a:endParaRPr lang="en-US" sz="1000" dirty="0"/>
-          </a:p>
-        </p:txBody>
-      </p:sp>
-      <p:sp>
-        <p:nvSpPr>
-          <p:cNvPr id="33" name="Text 30"/>
-          <p:cNvSpPr/>
-          <p:nvPr/>
-        </p:nvSpPr>
-        <p:spPr>
-          <a:xfrm>
-            <a:off x="9281160" y="1965960"/>
-            <a:ext cx="2331720" cy="274320"/>
-          </a:xfrm>
-          <a:prstGeom prst="rect">
-            <a:avLst/>
-          </a:prstGeom>
-          <a:noFill/>
-          <a:ln/>
-        </p:spPr>
-        <p:txBody>
-          <a:bodyPr wrap="square" rtlCol="0" anchor="ctr"/>
-          <a:lstStyle/>
-          <a:p>
-            <a:pPr indent="0" marL="0">
-              <a:buNone/>
-            </a:pPr>
-            <a:r>
-              <a:rPr lang="en-US" sz="1000" dirty="0">
-                <a:solidFill>
-                  <a:srgbClr val="6B7280"/>
-                </a:solidFill>
-                <a:latin typeface="Inter" pitchFamily="34" charset="0"/>
-                <a:ea typeface="Inter" pitchFamily="34" charset="-122"/>
-                <a:cs typeface="Inter" pitchFamily="34" charset="-120"/>
-              </a:rPr>
-              <a:t>Refresh: 1 hour</a:t>
-            </a:r>
-            <a:endParaRPr lang="en-US" sz="1000" dirty="0"/>
-          </a:p>
-        </p:txBody>
-      </p:sp>
-      <p:sp>
-        <p:nvSpPr>
-          <p:cNvPr id="34" name="Text 31"/>
-          <p:cNvSpPr/>
-          <p:nvPr/>
-        </p:nvSpPr>
-        <p:spPr>
-          <a:xfrm>
-            <a:off x="9281160" y="2240280"/>
-            <a:ext cx="2331720" cy="274320"/>
-          </a:xfrm>
-          <a:prstGeom prst="rect">
-            <a:avLst/>
-          </a:prstGeom>
-          <a:noFill/>
-          <a:ln/>
-        </p:spPr>
-        <p:txBody>
-          <a:bodyPr wrap="square" rtlCol="0" anchor="ctr"/>
-          <a:lstStyle/>
-          <a:p>
-            <a:pPr indent="0" marL="0">
-              <a:buNone/>
-            </a:pPr>
-            <a:r>
-              <a:rPr lang="en-US" sz="1100" b="1" dirty="0">
-                <a:solidFill>
-                  <a:srgbClr val="4CB393"/>
-                </a:solidFill>
-                <a:latin typeface="Inter" pitchFamily="34" charset="0"/>
-                <a:ea typeface="Inter" pitchFamily="34" charset="-122"/>
-                <a:cs typeface="Inter" pitchFamily="34" charset="-120"/>
-              </a:rPr>
-              <a:t>KPI: Completeness: &gt; 95%</a:t>
-            </a:r>
-            <a:endParaRPr lang="en-US" sz="1100" dirty="0"/>
-          </a:p>
-        </p:txBody>
-      </p:sp>
-      <p:sp>
-        <p:nvSpPr>
-          <p:cNvPr id="35" name="Text 32"/>
-          <p:cNvSpPr/>
-          <p:nvPr/>
-        </p:nvSpPr>
-        <p:spPr>
-          <a:xfrm>
-            <a:off x="9098280" y="2743200"/>
-            <a:ext cx="2697480" cy="274320"/>
-          </a:xfrm>
-          <a:prstGeom prst="rect">
-            <a:avLst/>
-          </a:prstGeom>
-          <a:noFill/>
-          <a:ln/>
-        </p:spPr>
-        <p:txBody>
-          <a:bodyPr wrap="square" rtlCol="0" anchor="ctr"/>
-          <a:lstStyle/>
-          <a:p>
-            <a:pPr algn="ctr" indent="0" marL="0">
-              <a:buNone/>
-            </a:pPr>
-            <a:r>
-              <a:rPr lang="en-US" sz="900" i="1" dirty="0">
-                <a:solidFill>
-                  <a:srgbClr val="A9B3B6"/>
-                </a:solidFill>
-                <a:latin typeface="Inter" pitchFamily="34" charset="0"/>
-                <a:ea typeface="Inter" pitchFamily="34" charset="-122"/>
-                <a:cs typeface="Inter" pitchFamily="34" charset="-120"/>
-              </a:rPr>
-              <a:t>Trust Score  •  API Sharing  •  Lineage</a:t>
-            </a:r>
-            <a:endParaRPr lang="en-US" sz="900" dirty="0"/>
-          </a:p>
-        </p:txBody>
-      </p:sp>
-      <p:sp>
-        <p:nvSpPr>
-          <p:cNvPr id="36" name="Shape 33"/>
-          <p:cNvSpPr/>
-          <p:nvPr/>
-        </p:nvSpPr>
-        <p:spPr>
-          <a:xfrm>
-            <a:off x="457200" y="3566160"/>
-            <a:ext cx="2697480" cy="2331720"/>
-          </a:xfrm>
-          <a:prstGeom prst="roundRect">
-            <a:avLst>
-              <a:gd name="adj" fmla="val 4706"/>
-            </a:avLst>
-          </a:prstGeom>
-          <a:solidFill>
-            <a:srgbClr val="FFFFFF"/>
-          </a:solidFill>
-          <a:ln w="19050">
-            <a:solidFill>
-              <a:srgbClr val="006580"/>
-            </a:solidFill>
-            <a:prstDash val="solid"/>
-          </a:ln>
-          <a:effectLst>
-            <a:outerShdw sx="100000" sy="100000" kx="0" ky="0" algn="bl" rotWithShape="0" blurRad="50800" dist="19050" dir="16200000">
-              <a:srgbClr val="000000">
-                <a:alpha val="8000"/>
-              </a:srgbClr>
-            </a:outerShdw>
-          </a:effectLst>
-        </p:spPr>
-      </p:sp>
-      <p:sp>
-        <p:nvSpPr>
-          <p:cNvPr id="37" name="Shape 34"/>
-          <p:cNvSpPr/>
-          <p:nvPr/>
-        </p:nvSpPr>
-        <p:spPr>
-          <a:xfrm>
-            <a:off x="530352" y="3621024"/>
-            <a:ext cx="2551176" cy="54864"/>
-          </a:xfrm>
-          <a:prstGeom prst="rect">
-            <a:avLst/>
-          </a:prstGeom>
-          <a:solidFill>
-            <a:srgbClr val="006580"/>
-          </a:solidFill>
-          <a:ln/>
-        </p:spPr>
-      </p:sp>
-      <p:sp>
-        <p:nvSpPr>
-          <p:cNvPr id="38" name="Text 35"/>
-          <p:cNvSpPr/>
-          <p:nvPr/>
-        </p:nvSpPr>
-        <p:spPr>
-          <a:xfrm>
-            <a:off x="457200" y="3749040"/>
-            <a:ext cx="2697480" cy="411480"/>
-          </a:xfrm>
-          <a:prstGeom prst="rect">
-            <a:avLst/>
-          </a:prstGeom>
-          <a:noFill/>
-          <a:ln/>
-        </p:spPr>
-        <p:txBody>
-          <a:bodyPr wrap="square" rtlCol="0" anchor="ctr"/>
-          <a:lstStyle/>
-          <a:p>
-            <a:pPr algn="ctr" indent="0" marL="0">
-              <a:buNone/>
-            </a:pPr>
-            <a:r>
-              <a:rPr lang="en-US" sz="1300" b="1" dirty="0">
-                <a:solidFill>
-                  <a:srgbClr val="19416C"/>
-                </a:solidFill>
-                <a:latin typeface="Inter" pitchFamily="34" charset="0"/>
-                <a:ea typeface="Inter" pitchFamily="34" charset="-122"/>
-                <a:cs typeface="Inter" pitchFamily="34" charset="-120"/>
-              </a:rPr>
-              <a:t>Compliance Traceability</a:t>
-            </a:r>
-            <a:endParaRPr lang="en-US" sz="1300" dirty="0"/>
-          </a:p>
-        </p:txBody>
-      </p:sp>
-      <p:sp>
-        <p:nvSpPr>
-          <p:cNvPr id="39" name="Text 36"/>
-          <p:cNvSpPr/>
-          <p:nvPr/>
-        </p:nvSpPr>
-        <p:spPr>
-          <a:xfrm>
-            <a:off x="640080" y="4251960"/>
-            <a:ext cx="2331720" cy="274320"/>
-          </a:xfrm>
-          <a:prstGeom prst="rect">
-            <a:avLst/>
-          </a:prstGeom>
-          <a:noFill/>
-          <a:ln/>
-        </p:spPr>
-        <p:txBody>
-          <a:bodyPr wrap="square" rtlCol="0" anchor="ctr"/>
-          <a:lstStyle/>
-          <a:p>
-            <a:pPr indent="0" marL="0">
-              <a:buNone/>
-            </a:pPr>
-            <a:r>
-              <a:rPr lang="en-US" sz="1000" dirty="0">
-                <a:solidFill>
-                  <a:srgbClr val="6B7280"/>
-                </a:solidFill>
-                <a:latin typeface="Inter" pitchFamily="34" charset="0"/>
-                <a:ea typeface="Inter" pitchFamily="34" charset="-122"/>
-                <a:cs typeface="Inter" pitchFamily="34" charset="-120"/>
-              </a:rPr>
-              <a:t>Owner: Dr. E. Vasquez</a:t>
-            </a:r>
-            <a:endParaRPr lang="en-US" sz="1000" dirty="0"/>
-          </a:p>
-        </p:txBody>
-      </p:sp>
-      <p:sp>
-        <p:nvSpPr>
-          <p:cNvPr id="40" name="Text 37"/>
-          <p:cNvSpPr/>
-          <p:nvPr/>
-        </p:nvSpPr>
-        <p:spPr>
-          <a:xfrm>
-            <a:off x="640080" y="4526280"/>
-            <a:ext cx="2331720" cy="274320"/>
-          </a:xfrm>
-          <a:prstGeom prst="rect">
-            <a:avLst/>
-          </a:prstGeom>
-          <a:noFill/>
-          <a:ln/>
-        </p:spPr>
-        <p:txBody>
-          <a:bodyPr wrap="square" rtlCol="0" anchor="ctr"/>
-          <a:lstStyle/>
-          <a:p>
-            <a:pPr indent="0" marL="0">
-              <a:buNone/>
-            </a:pPr>
-            <a:r>
-              <a:rPr lang="en-US" sz="1000" dirty="0">
-                <a:solidFill>
-                  <a:srgbClr val="6B7280"/>
-                </a:solidFill>
-                <a:latin typeface="Inter" pitchFamily="34" charset="0"/>
-                <a:ea typeface="Inter" pitchFamily="34" charset="-122"/>
-                <a:cs typeface="Inter" pitchFamily="34" charset="-120"/>
-              </a:rPr>
-              <a:t>Refresh: 30 min</a:t>
-            </a:r>
-            <a:endParaRPr lang="en-US" sz="1000" dirty="0"/>
-          </a:p>
-        </p:txBody>
-      </p:sp>
-      <p:sp>
-        <p:nvSpPr>
-          <p:cNvPr id="41" name="Text 38"/>
-          <p:cNvSpPr/>
-          <p:nvPr/>
-        </p:nvSpPr>
-        <p:spPr>
-          <a:xfrm>
-            <a:off x="640080" y="4800600"/>
-            <a:ext cx="2331720" cy="274320"/>
-          </a:xfrm>
-          <a:prstGeom prst="rect">
-            <a:avLst/>
-          </a:prstGeom>
-          <a:noFill/>
-          <a:ln/>
-        </p:spPr>
-        <p:txBody>
-          <a:bodyPr wrap="square" rtlCol="0" anchor="ctr"/>
-          <a:lstStyle/>
-          <a:p>
-            <a:pPr indent="0" marL="0">
-              <a:buNone/>
-            </a:pPr>
-            <a:r>
-              <a:rPr lang="en-US" sz="1100" b="1" dirty="0">
-                <a:solidFill>
-                  <a:srgbClr val="006580"/>
-                </a:solidFill>
-                <a:latin typeface="Inter" pitchFamily="34" charset="0"/>
-                <a:ea typeface="Inter" pitchFamily="34" charset="-122"/>
-                <a:cs typeface="Inter" pitchFamily="34" charset="-120"/>
-              </a:rPr>
-              <a:t>KPI: Lot capture: 100%</a:t>
-            </a:r>
-            <a:endParaRPr lang="en-US" sz="1100" dirty="0"/>
-          </a:p>
-        </p:txBody>
-      </p:sp>
-      <p:sp>
-        <p:nvSpPr>
-          <p:cNvPr id="42" name="Text 39"/>
-          <p:cNvSpPr/>
-          <p:nvPr/>
-        </p:nvSpPr>
-        <p:spPr>
-          <a:xfrm>
-            <a:off x="457200" y="5303520"/>
-            <a:ext cx="2697480" cy="274320"/>
-          </a:xfrm>
-          <a:prstGeom prst="rect">
-            <a:avLst/>
-          </a:prstGeom>
-          <a:noFill/>
-          <a:ln/>
-        </p:spPr>
-        <p:txBody>
-          <a:bodyPr wrap="square" rtlCol="0" anchor="ctr"/>
-          <a:lstStyle/>
-          <a:p>
-            <a:pPr algn="ctr" indent="0" marL="0">
-              <a:buNone/>
-            </a:pPr>
-            <a:r>
-              <a:rPr lang="en-US" sz="900" i="1" dirty="0">
-                <a:solidFill>
-                  <a:srgbClr val="A9B3B6"/>
-                </a:solidFill>
-                <a:latin typeface="Inter" pitchFamily="34" charset="0"/>
-                <a:ea typeface="Inter" pitchFamily="34" charset="-122"/>
-                <a:cs typeface="Inter" pitchFamily="34" charset="-120"/>
-              </a:rPr>
-              <a:t>Trust Score  •  API Sharing  •  Lineage</a:t>
-            </a:r>
-            <a:endParaRPr lang="en-US" sz="900" dirty="0"/>
-          </a:p>
-        </p:txBody>
-      </p:sp>
-      <p:sp>
-        <p:nvSpPr>
-          <p:cNvPr id="43" name="Shape 40"/>
-          <p:cNvSpPr/>
-          <p:nvPr/>
-        </p:nvSpPr>
-        <p:spPr>
-          <a:xfrm>
-            <a:off x="3337560" y="3566160"/>
-            <a:ext cx="2697480" cy="2331720"/>
-          </a:xfrm>
-          <a:prstGeom prst="roundRect">
-            <a:avLst>
-              <a:gd name="adj" fmla="val 4706"/>
-            </a:avLst>
-          </a:prstGeom>
-          <a:solidFill>
-            <a:srgbClr val="FFFFFF"/>
-          </a:solidFill>
-          <a:ln w="19050">
-            <a:solidFill>
-              <a:srgbClr val="009845"/>
-            </a:solidFill>
-            <a:prstDash val="solid"/>
-          </a:ln>
-          <a:effectLst>
-            <a:outerShdw sx="100000" sy="100000" kx="0" ky="0" algn="bl" rotWithShape="0" blurRad="50800" dist="19050" dir="16200000">
-              <a:srgbClr val="000000">
-                <a:alpha val="8000"/>
-              </a:srgbClr>
-            </a:outerShdw>
-          </a:effectLst>
-        </p:spPr>
-      </p:sp>
-      <p:sp>
-        <p:nvSpPr>
-          <p:cNvPr id="44" name="Shape 41"/>
-          <p:cNvSpPr/>
-          <p:nvPr/>
-        </p:nvSpPr>
-        <p:spPr>
-          <a:xfrm>
-            <a:off x="3410712" y="3621024"/>
-            <a:ext cx="2551176" cy="54864"/>
-          </a:xfrm>
-          <a:prstGeom prst="rect">
-            <a:avLst/>
-          </a:prstGeom>
-          <a:solidFill>
-            <a:srgbClr val="009845"/>
-          </a:solidFill>
-          <a:ln/>
-        </p:spPr>
-      </p:sp>
-      <p:sp>
-        <p:nvSpPr>
-          <p:cNvPr id="45" name="Text 42"/>
-          <p:cNvSpPr/>
-          <p:nvPr/>
-        </p:nvSpPr>
-        <p:spPr>
-          <a:xfrm>
-            <a:off x="3337560" y="3749040"/>
-            <a:ext cx="2697480" cy="411480"/>
-          </a:xfrm>
-          <a:prstGeom prst="rect">
-            <a:avLst/>
-          </a:prstGeom>
-          <a:noFill/>
-          <a:ln/>
-        </p:spPr>
-        <p:txBody>
-          <a:bodyPr wrap="square" rtlCol="0" anchor="ctr"/>
-          <a:lstStyle/>
-          <a:p>
-            <a:pPr algn="ctr" indent="0" marL="0">
-              <a:buNone/>
-            </a:pPr>
-            <a:r>
-              <a:rPr lang="en-US" sz="1300" b="1" dirty="0">
-                <a:solidFill>
-                  <a:srgbClr val="19416C"/>
-                </a:solidFill>
-                <a:latin typeface="Inter" pitchFamily="34" charset="0"/>
-                <a:ea typeface="Inter" pitchFamily="34" charset="-122"/>
-                <a:cs typeface="Inter" pitchFamily="34" charset="-120"/>
-              </a:rPr>
-              <a:t>Pipeline &amp; Timestamp Audit</a:t>
-            </a:r>
-            <a:endParaRPr lang="en-US" sz="1300" dirty="0"/>
-          </a:p>
-        </p:txBody>
-      </p:sp>
-      <p:sp>
-        <p:nvSpPr>
-          <p:cNvPr id="46" name="Text 43"/>
-          <p:cNvSpPr/>
-          <p:nvPr/>
-        </p:nvSpPr>
-        <p:spPr>
-          <a:xfrm>
-            <a:off x="3520440" y="4251960"/>
-            <a:ext cx="2331720" cy="274320"/>
-          </a:xfrm>
-          <a:prstGeom prst="rect">
-            <a:avLst/>
-          </a:prstGeom>
-          <a:noFill/>
-          <a:ln/>
-        </p:spPr>
-        <p:txBody>
-          <a:bodyPr wrap="square" rtlCol="0" anchor="ctr"/>
-          <a:lstStyle/>
-          <a:p>
-            <a:pPr indent="0" marL="0">
-              <a:buNone/>
-            </a:pPr>
-            <a:r>
-              <a:rPr lang="en-US" sz="1000" dirty="0">
-                <a:solidFill>
-                  <a:srgbClr val="6B7280"/>
-                </a:solidFill>
-                <a:latin typeface="Inter" pitchFamily="34" charset="0"/>
-                <a:ea typeface="Inter" pitchFamily="34" charset="-122"/>
-                <a:cs typeface="Inter" pitchFamily="34" charset="-120"/>
-              </a:rPr>
-              <a:t>Owner: P. Ramanathan</a:t>
-            </a:r>
-            <a:endParaRPr lang="en-US" sz="1000" dirty="0"/>
-          </a:p>
-        </p:txBody>
-      </p:sp>
-      <p:sp>
-        <p:nvSpPr>
-          <p:cNvPr id="47" name="Text 44"/>
-          <p:cNvSpPr/>
-          <p:nvPr/>
-        </p:nvSpPr>
-        <p:spPr>
-          <a:xfrm>
-            <a:off x="3520440" y="4526280"/>
-            <a:ext cx="2331720" cy="274320"/>
-          </a:xfrm>
-          <a:prstGeom prst="rect">
-            <a:avLst/>
-          </a:prstGeom>
-          <a:noFill/>
-          <a:ln/>
-        </p:spPr>
-        <p:txBody>
-          <a:bodyPr wrap="square" rtlCol="0" anchor="ctr"/>
-          <a:lstStyle/>
-          <a:p>
-            <a:pPr indent="0" marL="0">
-              <a:buNone/>
-            </a:pPr>
-            <a:r>
-              <a:rPr lang="en-US" sz="1000" dirty="0">
-                <a:solidFill>
-                  <a:srgbClr val="6B7280"/>
-                </a:solidFill>
-                <a:latin typeface="Inter" pitchFamily="34" charset="0"/>
-                <a:ea typeface="Inter" pitchFamily="34" charset="-122"/>
-                <a:cs typeface="Inter" pitchFamily="34" charset="-120"/>
-              </a:rPr>
-              <a:t>Refresh: 5 min</a:t>
-            </a:r>
-            <a:endParaRPr lang="en-US" sz="1000" dirty="0"/>
-          </a:p>
-        </p:txBody>
-      </p:sp>
-      <p:sp>
-        <p:nvSpPr>
-          <p:cNvPr id="48" name="Text 45"/>
-          <p:cNvSpPr/>
-          <p:nvPr/>
-        </p:nvSpPr>
-        <p:spPr>
-          <a:xfrm>
-            <a:off x="3520440" y="4800600"/>
-            <a:ext cx="2331720" cy="274320"/>
-          </a:xfrm>
-          <a:prstGeom prst="rect">
-            <a:avLst/>
-          </a:prstGeom>
-          <a:noFill/>
-          <a:ln/>
-        </p:spPr>
-        <p:txBody>
-          <a:bodyPr wrap="square" rtlCol="0" anchor="ctr"/>
-          <a:lstStyle/>
-          <a:p>
-            <a:pPr indent="0" marL="0">
-              <a:buNone/>
-            </a:pPr>
-            <a:r>
-              <a:rPr lang="en-US" sz="1100" b="1" dirty="0">
-                <a:solidFill>
-                  <a:srgbClr val="009845"/>
-                </a:solidFill>
-                <a:latin typeface="Inter" pitchFamily="34" charset="0"/>
-                <a:ea typeface="Inter" pitchFamily="34" charset="-122"/>
-                <a:cs typeface="Inter" pitchFamily="34" charset="-120"/>
-              </a:rPr>
-              <a:t>KPI: Trust Score: 0.95 target</a:t>
-            </a:r>
-            <a:endParaRPr lang="en-US" sz="1100" dirty="0"/>
-          </a:p>
-        </p:txBody>
-      </p:sp>
-      <p:sp>
-        <p:nvSpPr>
-          <p:cNvPr id="49" name="Text 46"/>
-          <p:cNvSpPr/>
-          <p:nvPr/>
-        </p:nvSpPr>
-        <p:spPr>
-          <a:xfrm>
-            <a:off x="3337560" y="5303520"/>
-            <a:ext cx="2697480" cy="274320"/>
-          </a:xfrm>
-          <a:prstGeom prst="rect">
-            <a:avLst/>
-          </a:prstGeom>
-          <a:noFill/>
-          <a:ln/>
-        </p:spPr>
-        <p:txBody>
-          <a:bodyPr wrap="square" rtlCol="0" anchor="ctr"/>
-          <a:lstStyle/>
-          <a:p>
-            <a:pPr algn="ctr" indent="0" marL="0">
-              <a:buNone/>
-            </a:pPr>
-            <a:r>
-              <a:rPr lang="en-US" sz="900" i="1" dirty="0">
-                <a:solidFill>
-                  <a:srgbClr val="A9B3B6"/>
-                </a:solidFill>
-                <a:latin typeface="Inter" pitchFamily="34" charset="0"/>
-                <a:ea typeface="Inter" pitchFamily="34" charset="-122"/>
-                <a:cs typeface="Inter" pitchFamily="34" charset="-120"/>
-              </a:rPr>
-              <a:t>Trust Score  •  API Sharing  •  Lineage</a:t>
-            </a:r>
-            <a:endParaRPr lang="en-US" sz="900" dirty="0"/>
-          </a:p>
-        </p:txBody>
-      </p:sp>
-      <p:sp>
-        <p:nvSpPr>
-          <p:cNvPr id="50" name="Shape 47"/>
-          <p:cNvSpPr/>
-          <p:nvPr/>
-        </p:nvSpPr>
-        <p:spPr>
-          <a:xfrm>
-            <a:off x="6217920" y="3566160"/>
-            <a:ext cx="2697480" cy="2331720"/>
-          </a:xfrm>
-          <a:prstGeom prst="roundRect">
-            <a:avLst>
-              <a:gd name="adj" fmla="val 4706"/>
-            </a:avLst>
-          </a:prstGeom>
-          <a:solidFill>
-            <a:srgbClr val="FFFFFF"/>
-          </a:solidFill>
-          <a:ln w="19050">
-            <a:solidFill>
-              <a:srgbClr val="19416C"/>
-            </a:solidFill>
-            <a:prstDash val="solid"/>
-          </a:ln>
-          <a:effectLst>
-            <a:outerShdw sx="100000" sy="100000" kx="0" ky="0" algn="bl" rotWithShape="0" blurRad="50800" dist="19050" dir="16200000">
-              <a:srgbClr val="000000">
-                <a:alpha val="8000"/>
-              </a:srgbClr>
-            </a:outerShdw>
-          </a:effectLst>
-        </p:spPr>
-      </p:sp>
-      <p:sp>
-        <p:nvSpPr>
-          <p:cNvPr id="51" name="Shape 48"/>
-          <p:cNvSpPr/>
-          <p:nvPr/>
-        </p:nvSpPr>
-        <p:spPr>
-          <a:xfrm>
-            <a:off x="6291072" y="3621024"/>
-            <a:ext cx="2551176" cy="54864"/>
-          </a:xfrm>
-          <a:prstGeom prst="rect">
-            <a:avLst/>
-          </a:prstGeom>
-          <a:solidFill>
-            <a:srgbClr val="19416C"/>
-          </a:solidFill>
-          <a:ln/>
-        </p:spPr>
-      </p:sp>
-      <p:sp>
-        <p:nvSpPr>
-          <p:cNvPr id="52" name="Text 49"/>
-          <p:cNvSpPr/>
-          <p:nvPr/>
-        </p:nvSpPr>
-        <p:spPr>
-          <a:xfrm>
-            <a:off x="6217920" y="3749040"/>
-            <a:ext cx="2697480" cy="411480"/>
-          </a:xfrm>
-          <a:prstGeom prst="rect">
-            <a:avLst/>
-          </a:prstGeom>
-          <a:noFill/>
-          <a:ln/>
-        </p:spPr>
-        <p:txBody>
-          <a:bodyPr wrap="square" rtlCol="0" anchor="ctr"/>
-          <a:lstStyle/>
-          <a:p>
-            <a:pPr algn="ctr" indent="0" marL="0">
-              <a:buNone/>
-            </a:pPr>
-            <a:r>
-              <a:rPr lang="en-US" sz="1300" b="1" dirty="0">
-                <a:solidFill>
-                  <a:srgbClr val="19416C"/>
-                </a:solidFill>
-                <a:latin typeface="Inter" pitchFamily="34" charset="0"/>
-                <a:ea typeface="Inter" pitchFamily="34" charset="-122"/>
-                <a:cs typeface="Inter" pitchFamily="34" charset="-120"/>
-              </a:rPr>
-              <a:t>Customer Quality Index</a:t>
-            </a:r>
-            <a:endParaRPr lang="en-US" sz="1300" dirty="0"/>
-          </a:p>
-        </p:txBody>
-      </p:sp>
-      <p:sp>
-        <p:nvSpPr>
-          <p:cNvPr id="53" name="Text 50"/>
-          <p:cNvSpPr/>
-          <p:nvPr/>
-        </p:nvSpPr>
-        <p:spPr>
-          <a:xfrm>
-            <a:off x="6400800" y="4251960"/>
-            <a:ext cx="2331720" cy="274320"/>
-          </a:xfrm>
-          <a:prstGeom prst="rect">
-            <a:avLst/>
-          </a:prstGeom>
-          <a:noFill/>
-          <a:ln/>
-        </p:spPr>
-        <p:txBody>
-          <a:bodyPr wrap="square" rtlCol="0" anchor="ctr"/>
-          <a:lstStyle/>
-          <a:p>
-            <a:pPr indent="0" marL="0">
-              <a:buNone/>
-            </a:pPr>
-            <a:r>
-              <a:rPr lang="en-US" sz="1000" dirty="0">
-                <a:solidFill>
-                  <a:srgbClr val="6B7280"/>
-                </a:solidFill>
-                <a:latin typeface="Inter" pitchFamily="34" charset="0"/>
-                <a:ea typeface="Inter" pitchFamily="34" charset="-122"/>
-                <a:cs typeface="Inter" pitchFamily="34" charset="-120"/>
-              </a:rPr>
-              <a:t>Owner: Sophie Müller</a:t>
-            </a:r>
-            <a:endParaRPr lang="en-US" sz="1000" dirty="0"/>
-          </a:p>
-        </p:txBody>
-      </p:sp>
-      <p:sp>
-        <p:nvSpPr>
-          <p:cNvPr id="54" name="Text 51"/>
-          <p:cNvSpPr/>
-          <p:nvPr/>
-        </p:nvSpPr>
-        <p:spPr>
-          <a:xfrm>
-            <a:off x="6400800" y="4526280"/>
-            <a:ext cx="2331720" cy="274320"/>
-          </a:xfrm>
-          <a:prstGeom prst="rect">
-            <a:avLst/>
-          </a:prstGeom>
-          <a:noFill/>
-          <a:ln/>
-        </p:spPr>
-        <p:txBody>
-          <a:bodyPr wrap="square" rtlCol="0" anchor="ctr"/>
-          <a:lstStyle/>
-          <a:p>
-            <a:pPr indent="0" marL="0">
-              <a:buNone/>
-            </a:pPr>
-            <a:r>
-              <a:rPr lang="en-US" sz="1000" dirty="0">
-                <a:solidFill>
-                  <a:srgbClr val="6B7280"/>
-                </a:solidFill>
-                <a:latin typeface="Inter" pitchFamily="34" charset="0"/>
-                <a:ea typeface="Inter" pitchFamily="34" charset="-122"/>
-                <a:cs typeface="Inter" pitchFamily="34" charset="-120"/>
-              </a:rPr>
-              <a:t>Refresh: 1 hour</a:t>
-            </a:r>
-            <a:endParaRPr lang="en-US" sz="1000" dirty="0"/>
-          </a:p>
-        </p:txBody>
-      </p:sp>
-      <p:sp>
-        <p:nvSpPr>
-          <p:cNvPr id="55" name="Text 52"/>
-          <p:cNvSpPr/>
-          <p:nvPr/>
-        </p:nvSpPr>
-        <p:spPr>
-          <a:xfrm>
-            <a:off x="6400800" y="4800600"/>
-            <a:ext cx="2331720" cy="274320"/>
-          </a:xfrm>
-          <a:prstGeom prst="rect">
-            <a:avLst/>
-          </a:prstGeom>
-          <a:noFill/>
-          <a:ln/>
-        </p:spPr>
-        <p:txBody>
-          <a:bodyPr wrap="square" rtlCol="0" anchor="ctr"/>
-          <a:lstStyle/>
-          <a:p>
-            <a:pPr indent="0" marL="0">
-              <a:buNone/>
-            </a:pPr>
-            <a:r>
-              <a:rPr lang="en-US" sz="1100" b="1" dirty="0">
-                <a:solidFill>
-                  <a:srgbClr val="19416C"/>
-                </a:solidFill>
-                <a:latin typeface="Inter" pitchFamily="34" charset="0"/>
-                <a:ea typeface="Inter" pitchFamily="34" charset="-122"/>
-                <a:cs typeface="Inter" pitchFamily="34" charset="-120"/>
-              </a:rPr>
-              <a:t>KPI: Address quality: &gt; 0.85</a:t>
-            </a:r>
-            <a:endParaRPr lang="en-US" sz="1100" dirty="0"/>
-          </a:p>
-        </p:txBody>
-      </p:sp>
-      <p:sp>
-        <p:nvSpPr>
-          <p:cNvPr id="56" name="Text 53"/>
-          <p:cNvSpPr/>
-          <p:nvPr/>
-        </p:nvSpPr>
-        <p:spPr>
-          <a:xfrm>
-            <a:off x="6217920" y="5303520"/>
-            <a:ext cx="2697480" cy="274320"/>
+          <p:cNvPr id="22" name="Text 19"/>
+          <p:cNvSpPr/>
+          <p:nvPr/>
+        </p:nvSpPr>
+        <p:spPr>
+          <a:xfrm>
+            <a:off x="6400800" y="3291840"/>
+            <a:ext cx="5029200" cy="274320"/>
           </a:xfrm>
           <a:prstGeom prst="rect">
             <a:avLst/>

--- a/MCG_Technology_Architecture.pptx
+++ b/MCG_Technology_Architecture.pptx
@@ -14601,7 +14601,7 @@
                 <a:ea typeface="Inter" pitchFamily="34" charset="-122"/>
                 <a:cs typeface="Inter" pitchFamily="34" charset="-120"/>
               </a:rPr>
-              <a:t>Refresh: Daily 06:00 UTC + event</a:t>
+              <a:t>Refresh: Daily 06:00 UTC</a:t>
             </a:r>
             <a:endParaRPr lang="en-US" sz="1000" dirty="0"/>
           </a:p>
@@ -14850,7 +14850,7 @@
                 <a:ea typeface="Inter" pitchFamily="34" charset="-122"/>
                 <a:cs typeface="Inter" pitchFamily="34" charset="-120"/>
               </a:rPr>
-              <a:t>Refresh: Daily 06:00 UTC + event</a:t>
+              <a:t>Refresh: Daily 06:00 UTC</a:t>
             </a:r>
             <a:endParaRPr lang="en-US" sz="1000" dirty="0"/>
           </a:p>

--- a/MCG_Technology_Architecture.pptx
+++ b/MCG_Technology_Architecture.pptx
@@ -2078,7 +2078,7 @@
                 <a:ea typeface="Inter" pitchFamily="34" charset="-122"/>
                 <a:cs typeface="Inter" pitchFamily="34" charset="-120"/>
               </a:rPr>
-              <a:t>3 Sources  •  Open Lakehouse  •  8 Transformation Routes  •  2 Data Products</a:t>
+              <a:t>3 Sources  •  2 Declarative Pipelines  •  Open Lakehouse  •  2 Data Products</a:t>
             </a:r>
             <a:endParaRPr lang="en-US" sz="1200" dirty="0"/>
           </a:p>
@@ -5696,7 +5696,7 @@
                 <a:ea typeface="Inter" pitchFamily="34" charset="-122"/>
                 <a:cs typeface="Inter" pitchFamily="34" charset="-120"/>
               </a:rPr>
-              <a:t>8 Bronze tables  •  8 Silver transformations + 1 Talend job  •  2 Gold data products</a:t>
+              <a:t>2 declarative pipeline projects (batch + streaming)  •  8 Bronze tables  •  8 Silver transforms  •  2 Gold products</a:t>
             </a:r>
             <a:endParaRPr lang="en-US" sz="1100" dirty="0"/>
           </a:p>
@@ -6257,7 +6257,7 @@
                 <a:ea typeface="Inter" pitchFamily="34" charset="-122"/>
                 <a:cs typeface="Inter" pitchFamily="34" charset="-120"/>
               </a:rPr>
-              <a:t>3 Sources  •  18 Tables  •  9 Flows  •  2 Products  •  10 Sheets  •  2 Models  •  25 Docs  •  5 Automations  •  1 MCP Server</a:t>
+              <a:t>3 Sources  •  2 Pipelines  •  18 Tables  •  2 Products  •  10 Sheets  •  2 Models  •  25 Docs  •  5 Automations  •  1 MCP Server</a:t>
             </a:r>
             <a:endParaRPr lang="en-US" sz="1100" dirty="0"/>
           </a:p>
@@ -7791,6 +7791,74 @@
         </p:nvSpPr>
         <p:spPr>
           <a:xfrm>
+            <a:off x="1965960" y="2039112"/>
+            <a:ext cx="7040880" cy="301752"/>
+          </a:xfrm>
+          <a:prstGeom prst="roundRect">
+            <a:avLst>
+              <a:gd name="adj" fmla="val 24242"/>
+            </a:avLst>
+          </a:prstGeom>
+          <a:solidFill>
+            <a:srgbClr val="009845"/>
+          </a:solidFill>
+          <a:ln/>
+          <a:effectLst>
+            <a:outerShdw sx="100000" sy="100000" kx="0" ky="0" algn="bl" rotWithShape="0" blurRad="38100" dist="12700" dir="16200000">
+              <a:srgbClr val="000000">
+                <a:alpha val="12000"/>
+              </a:srgbClr>
+            </a:outerShdw>
+          </a:effectLst>
+        </p:spPr>
+      </p:sp>
+      <p:sp>
+        <p:nvSpPr>
+          <p:cNvPr id="45" name="Text 42"/>
+          <p:cNvSpPr/>
+          <p:nvPr/>
+        </p:nvSpPr>
+        <p:spPr>
+          <a:xfrm>
+            <a:off x="1965960" y="2039112"/>
+            <a:ext cx="7040880" cy="301752"/>
+          </a:xfrm>
+          <a:prstGeom prst="rect">
+            <a:avLst/>
+          </a:prstGeom>
+          <a:noFill/>
+          <a:ln/>
+        </p:spPr>
+        <p:txBody>
+          <a:bodyPr wrap="square" rtlCol="0" anchor="ctr"/>
+          <a:lstStyle/>
+          <a:p>
+            <a:pPr algn="ctr" indent="0" marL="0">
+              <a:buNone/>
+            </a:pPr>
+            <a:r>
+              <a:rPr lang="en-US" sz="1000" b="1" dirty="0">
+                <a:solidFill>
+                  <a:srgbClr val="FFFFFF"/>
+                </a:solidFill>
+                <a:latin typeface="Inter" pitchFamily="34" charset="0"/>
+                <a:ea typeface="Inter" pitchFamily="34" charset="-122"/>
+                <a:cs typeface="Inter" pitchFamily="34" charset="-120"/>
+              </a:rPr>
+              <a:t>Qlik Cloud Pipelines  •  MCG Batch + MCG Streaming  •  declarative YAML, API-imported</a:t>
+            </a:r>
+            <a:endParaRPr lang="en-US" sz="1000" dirty="0"/>
+          </a:p>
+        </p:txBody>
+      </p:sp>
+      <p:sp>
+        <p:nvSpPr>
+          <p:cNvPr id="46" name="Shape 43"/>
+          <p:cNvSpPr/>
+          <p:nvPr/>
+        </p:nvSpPr>
+        <p:spPr>
+          <a:xfrm>
             <a:off x="3794760" y="3337560"/>
             <a:ext cx="0" cy="457200"/>
           </a:xfrm>
@@ -7809,7 +7877,7 @@
       </p:sp>
       <p:sp>
         <p:nvSpPr>
-          <p:cNvPr id="45" name="Shape 42"/>
+          <p:cNvPr id="47" name="Shape 44"/>
           <p:cNvSpPr/>
           <p:nvPr/>
         </p:nvSpPr>
@@ -7833,7 +7901,7 @@
       </p:sp>
       <p:sp>
         <p:nvSpPr>
-          <p:cNvPr id="46" name="Shape 43"/>
+          <p:cNvPr id="48" name="Shape 45"/>
           <p:cNvSpPr/>
           <p:nvPr/>
         </p:nvSpPr>
@@ -7867,7 +7935,7 @@
       </p:sp>
       <p:sp>
         <p:nvSpPr>
-          <p:cNvPr id="47" name="Text 44"/>
+          <p:cNvPr id="49" name="Text 46"/>
           <p:cNvSpPr/>
           <p:nvPr/>
         </p:nvSpPr>
@@ -7906,7 +7974,7 @@
       </p:sp>
       <p:sp>
         <p:nvSpPr>
-          <p:cNvPr id="48" name="Text 45"/>
+          <p:cNvPr id="50" name="Text 47"/>
           <p:cNvSpPr/>
           <p:nvPr/>
         </p:nvSpPr>
@@ -7948,7 +8016,7 @@
       </p:sp>
       <p:sp>
         <p:nvSpPr>
-          <p:cNvPr id="49" name="Shape 46"/>
+          <p:cNvPr id="51" name="Shape 48"/>
           <p:cNvSpPr/>
           <p:nvPr/>
         </p:nvSpPr>
@@ -7982,7 +8050,7 @@
       </p:sp>
       <p:sp>
         <p:nvSpPr>
-          <p:cNvPr id="50" name="Text 47"/>
+          <p:cNvPr id="52" name="Text 49"/>
           <p:cNvSpPr/>
           <p:nvPr/>
         </p:nvSpPr>
@@ -8021,7 +8089,7 @@
       </p:sp>
       <p:sp>
         <p:nvSpPr>
-          <p:cNvPr id="51" name="Text 48"/>
+          <p:cNvPr id="53" name="Text 50"/>
           <p:cNvSpPr/>
           <p:nvPr/>
         </p:nvSpPr>
@@ -8063,7 +8131,7 @@
       </p:sp>
       <p:sp>
         <p:nvSpPr>
-          <p:cNvPr id="52" name="Shape 49"/>
+          <p:cNvPr id="54" name="Shape 51"/>
           <p:cNvSpPr/>
           <p:nvPr/>
         </p:nvSpPr>
@@ -8097,7 +8165,7 @@
       </p:sp>
       <p:sp>
         <p:nvSpPr>
-          <p:cNvPr id="53" name="Text 50"/>
+          <p:cNvPr id="55" name="Text 52"/>
           <p:cNvSpPr/>
           <p:nvPr/>
         </p:nvSpPr>
@@ -8136,7 +8204,7 @@
       </p:sp>
       <p:sp>
         <p:nvSpPr>
-          <p:cNvPr id="54" name="Text 51"/>
+          <p:cNvPr id="56" name="Text 53"/>
           <p:cNvSpPr/>
           <p:nvPr/>
         </p:nvSpPr>
@@ -8198,7 +8266,7 @@
       </p:sp>
       <p:sp>
         <p:nvSpPr>
-          <p:cNvPr id="55" name="Shape 52"/>
+          <p:cNvPr id="57" name="Shape 54"/>
           <p:cNvSpPr/>
           <p:nvPr/>
         </p:nvSpPr>
@@ -8222,7 +8290,7 @@
       </p:sp>
       <p:sp>
         <p:nvSpPr>
-          <p:cNvPr id="56" name="Shape 53"/>
+          <p:cNvPr id="58" name="Shape 55"/>
           <p:cNvSpPr/>
           <p:nvPr/>
         </p:nvSpPr>
@@ -8246,7 +8314,7 @@
       </p:sp>
       <p:sp>
         <p:nvSpPr>
-          <p:cNvPr id="57" name="Shape 54"/>
+          <p:cNvPr id="59" name="Shape 56"/>
           <p:cNvSpPr/>
           <p:nvPr/>
         </p:nvSpPr>
@@ -8270,7 +8338,7 @@
       </p:sp>
       <p:sp>
         <p:nvSpPr>
-          <p:cNvPr id="58" name="Shape 55"/>
+          <p:cNvPr id="60" name="Shape 57"/>
           <p:cNvSpPr/>
           <p:nvPr/>
         </p:nvSpPr>
@@ -8304,7 +8372,7 @@
       </p:sp>
       <p:sp>
         <p:nvSpPr>
-          <p:cNvPr id="59" name="Text 56"/>
+          <p:cNvPr id="61" name="Text 58"/>
           <p:cNvSpPr/>
           <p:nvPr/>
         </p:nvSpPr>
@@ -8343,7 +8411,7 @@
       </p:sp>
       <p:sp>
         <p:nvSpPr>
-          <p:cNvPr id="60" name="Text 57"/>
+          <p:cNvPr id="62" name="Text 59"/>
           <p:cNvSpPr/>
           <p:nvPr/>
         </p:nvSpPr>
@@ -8405,7 +8473,7 @@
       </p:sp>
       <p:sp>
         <p:nvSpPr>
-          <p:cNvPr id="61" name="Shape 58"/>
+          <p:cNvPr id="63" name="Shape 60"/>
           <p:cNvSpPr/>
           <p:nvPr/>
         </p:nvSpPr>
@@ -8439,7 +8507,7 @@
       </p:sp>
       <p:sp>
         <p:nvSpPr>
-          <p:cNvPr id="62" name="Text 59"/>
+          <p:cNvPr id="64" name="Text 61"/>
           <p:cNvSpPr/>
           <p:nvPr/>
         </p:nvSpPr>
@@ -8478,7 +8546,7 @@
       </p:sp>
       <p:sp>
         <p:nvSpPr>
-          <p:cNvPr id="63" name="Text 60"/>
+          <p:cNvPr id="65" name="Text 62"/>
           <p:cNvSpPr/>
           <p:nvPr/>
         </p:nvSpPr>
@@ -8540,7 +8608,7 @@
       </p:sp>
       <p:sp>
         <p:nvSpPr>
-          <p:cNvPr id="64" name="Shape 61"/>
+          <p:cNvPr id="66" name="Shape 63"/>
           <p:cNvSpPr/>
           <p:nvPr/>
         </p:nvSpPr>
@@ -8574,7 +8642,7 @@
       </p:sp>
       <p:sp>
         <p:nvSpPr>
-          <p:cNvPr id="65" name="Text 62"/>
+          <p:cNvPr id="67" name="Text 64"/>
           <p:cNvSpPr/>
           <p:nvPr/>
         </p:nvSpPr>
@@ -8613,7 +8681,7 @@
       </p:sp>
       <p:sp>
         <p:nvSpPr>
-          <p:cNvPr id="66" name="Text 63"/>
+          <p:cNvPr id="68" name="Text 65"/>
           <p:cNvSpPr/>
           <p:nvPr/>
         </p:nvSpPr>
@@ -8675,7 +8743,7 @@
       </p:sp>
       <p:sp>
         <p:nvSpPr>
-          <p:cNvPr id="67" name="Shape 64"/>
+          <p:cNvPr id="69" name="Shape 66"/>
           <p:cNvSpPr/>
           <p:nvPr/>
         </p:nvSpPr>
@@ -8709,7 +8777,7 @@
       </p:sp>
       <p:sp>
         <p:nvSpPr>
-          <p:cNvPr id="68" name="Text 65"/>
+          <p:cNvPr id="70" name="Text 67"/>
           <p:cNvSpPr/>
           <p:nvPr/>
         </p:nvSpPr>
@@ -8748,7 +8816,7 @@
       </p:sp>
       <p:sp>
         <p:nvSpPr>
-          <p:cNvPr id="69" name="Text 66"/>
+          <p:cNvPr id="71" name="Text 68"/>
           <p:cNvSpPr/>
           <p:nvPr/>
         </p:nvSpPr>
@@ -8810,7 +8878,7 @@
       </p:sp>
       <p:sp>
         <p:nvSpPr>
-          <p:cNvPr id="70" name="Shape 67"/>
+          <p:cNvPr id="72" name="Shape 69"/>
           <p:cNvSpPr/>
           <p:nvPr/>
         </p:nvSpPr>
@@ -8837,7 +8905,7 @@
       </p:sp>
       <p:sp>
         <p:nvSpPr>
-          <p:cNvPr id="71" name="Text 68"/>
+          <p:cNvPr id="73" name="Text 70"/>
           <p:cNvSpPr/>
           <p:nvPr/>
         </p:nvSpPr>

--- a/MCG_Technology_Architecture.pptx
+++ b/MCG_Technology_Architecture.pptx
@@ -5996,7 +5996,7 @@
                 <a:ea typeface="Inter" pitchFamily="34" charset="-122"/>
                 <a:cs typeface="Inter" pitchFamily="34" charset="-120"/>
               </a:rPr>
-              <a:t>2 Predict models (Spoilage + SLA)  •  Qlik Answers (25 docs)  •  Discovery Agent  •  MCP Server</a:t>
+              <a:t>2 Predict models (Exceedance + Late Delivery)  •  Qlik Answers (25 docs)  •  Discovery Agent  •  MCP Server</a:t>
             </a:r>
             <a:endParaRPr lang="en-US" sz="1100" dirty="0"/>
           </a:p>
@@ -8123,7 +8123,7 @@
                 <a:ea typeface="Inter" pitchFamily="34" charset="-122"/>
                 <a:cs typeface="Inter" pitchFamily="34" charset="-120"/>
               </a:rPr>
-              <a:t>Spoilage Risk • SLA Model</a:t>
+              <a:t>Exceedance • Late Delivery</a:t>
             </a:r>
             <a:endParaRPr lang="en-US" sz="1000" dirty="0"/>
           </a:p>
@@ -15874,7 +15874,7 @@
                 <a:ea typeface="Inter" pitchFamily="34" charset="-122"/>
                 <a:cs typeface="Inter" pitchFamily="34" charset="-120"/>
               </a:rPr>
-              <a:t>Spoilage Risk Predictor</a:t>
+              <a:t>Cold Chain Exceedance</a:t>
             </a:r>
             <a:endParaRPr lang="en-US" sz="1200" dirty="0"/>
           </a:p>
@@ -15916,7 +15916,7 @@
                 <a:ea typeface="Inter" pitchFamily="34" charset="-122"/>
                 <a:cs typeface="Inter" pitchFamily="34" charset="-120"/>
               </a:rPr>
-              <a:t>Target: spoilage_risk_score</a:t>
+              <a:t>Target: alert_flag</a:t>
             </a:r>
             <a:endParaRPr lang="en-US" sz="1000" dirty="0"/>
           </a:p>
@@ -15936,7 +15936,7 @@
                 <a:ea typeface="Inter" pitchFamily="34" charset="-122"/>
                 <a:cs typeface="Inter" pitchFamily="34" charset="-120"/>
               </a:rPr>
-              <a:t>Top feature: route_id</a:t>
+              <a:t>Top: temperature_c, route_id</a:t>
             </a:r>
             <a:endParaRPr lang="en-US" sz="1000" dirty="0"/>
           </a:p>
@@ -16009,7 +16009,7 @@
                 <a:ea typeface="Inter" pitchFamily="34" charset="-122"/>
                 <a:cs typeface="Inter" pitchFamily="34" charset="-120"/>
               </a:rPr>
-              <a:t>Delivery SLA Predictor</a:t>
+              <a:t>Late Delivery Predictor</a:t>
             </a:r>
             <a:endParaRPr lang="en-US" sz="1200" dirty="0"/>
           </a:p>
@@ -16051,7 +16051,7 @@
                 <a:ea typeface="Inter" pitchFamily="34" charset="-122"/>
                 <a:cs typeface="Inter" pitchFamily="34" charset="-120"/>
               </a:rPr>
-              <a:t>Target: sla_met (Y/N)</a:t>
+              <a:t>Target: delivered_late</a:t>
             </a:r>
             <a:endParaRPr lang="en-US" sz="1000" dirty="0"/>
           </a:p>
@@ -16071,7 +16071,7 @@
                 <a:ea typeface="Inter" pitchFamily="34" charset="-122"/>
                 <a:cs typeface="Inter" pitchFamily="34" charset="-120"/>
               </a:rPr>
-              <a:t>Top: address_quality</a:t>
+              <a:t>Top: tracking_missing</a:t>
             </a:r>
             <a:endParaRPr lang="en-US" sz="1000" dirty="0"/>
           </a:p>

--- a/MCG_Technology_Architecture.pptx
+++ b/MCG_Technology_Architecture.pptx
@@ -2692,7 +2692,7 @@
                 <a:ea typeface="Inter" pitchFamily="34" charset="-122"/>
                 <a:cs typeface="Inter" pitchFamily="34" charset="-120"/>
               </a:rPr>
-              <a:t>$41M / year</a:t>
+              <a:t>$48M / year</a:t>
             </a:r>
             <a:endParaRPr lang="en-US" sz="1100" dirty="0"/>
           </a:p>
@@ -2888,7 +2888,7 @@
                 <a:ea typeface="Inter" pitchFamily="34" charset="-122"/>
                 <a:cs typeface="Inter" pitchFamily="34" charset="-120"/>
               </a:rPr>
-              <a:t>$31M / year</a:t>
+              <a:t>$3.1M / year</a:t>
             </a:r>
             <a:endParaRPr lang="en-US" sz="1100" dirty="0"/>
           </a:p>
@@ -3084,7 +3084,7 @@
                 <a:ea typeface="Inter" pitchFamily="34" charset="-122"/>
                 <a:cs typeface="Inter" pitchFamily="34" charset="-120"/>
               </a:rPr>
-              <a:t>$14M / year</a:t>
+              <a:t>$8.2M / year</a:t>
             </a:r>
             <a:endParaRPr lang="en-US" sz="1100" dirty="0"/>
           </a:p>
@@ -3280,7 +3280,7 @@
                 <a:ea typeface="Inter" pitchFamily="34" charset="-122"/>
                 <a:cs typeface="Inter" pitchFamily="34" charset="-120"/>
               </a:rPr>
-              <a:t>$4M / year</a:t>
+              <a:t>$12M / year</a:t>
             </a:r>
             <a:endParaRPr lang="en-US" sz="1100" dirty="0"/>
           </a:p>
@@ -3476,7 +3476,7 @@
                 <a:ea typeface="Inter" pitchFamily="34" charset="-122"/>
                 <a:cs typeface="Inter" pitchFamily="34" charset="-120"/>
               </a:rPr>
-              <a:t>$6M / year</a:t>
+              <a:t>$6.5M / year</a:t>
             </a:r>
             <a:endParaRPr lang="en-US" sz="1100" dirty="0"/>
           </a:p>
@@ -3672,7 +3672,7 @@
                 <a:ea typeface="Inter" pitchFamily="34" charset="-122"/>
                 <a:cs typeface="Inter" pitchFamily="34" charset="-120"/>
               </a:rPr>
-              <a:t>$22M / year</a:t>
+              <a:t>$14.8M / year</a:t>
             </a:r>
             <a:endParaRPr lang="en-US" sz="1100" dirty="0"/>
           </a:p>
@@ -3868,7 +3868,7 @@
                 <a:ea typeface="Inter" pitchFamily="34" charset="-122"/>
                 <a:cs typeface="Inter" pitchFamily="34" charset="-120"/>
               </a:rPr>
-              <a:t>$9M / year</a:t>
+              <a:t>$4.2M / year</a:t>
             </a:r>
             <a:endParaRPr lang="en-US" sz="1100" dirty="0"/>
           </a:p>

--- a/MCG_Technology_Architecture.pptx
+++ b/MCG_Technology_Architecture.pptx
@@ -2101,7 +2101,7 @@
         <p:spPr>
           <a:xfrm>
             <a:off x="548640" y="3657600"/>
-            <a:ext cx="5486400" cy="457200"/>
+            <a:ext cx="6400800" cy="457200"/>
           </a:xfrm>
           <a:prstGeom prst="rect">
             <a:avLst/>
@@ -2125,7 +2125,7 @@
                 <a:ea typeface="Inter" pitchFamily="34" charset="-122"/>
                 <a:cs typeface="Inter" pitchFamily="34" charset="-120"/>
               </a:rPr>
-              <a:t>Qlik Cloud Full Stack Demo</a:t>
+              <a:t>Project Qlarity  ·  Qlik Cloud Full Stack Demo</a:t>
             </a:r>
             <a:endParaRPr lang="en-US" sz="1600" dirty="0"/>
           </a:p>
@@ -2700,7 +2700,7 @@
                 <a:ea typeface="Inter" pitchFamily="34" charset="-122"/>
                 <a:cs typeface="Inter" pitchFamily="34" charset="-120"/>
               </a:rPr>
-              <a:t>MCG Technology Architecture  •  Qlik Cloud</a:t>
+              <a:t>Project Qlarity  •  MCG Technology Architecture  •  Qlik Cloud</a:t>
             </a:r>
             <a:endParaRPr lang="en-US" sz="800" dirty="0"/>
           </a:p>
@@ -4265,7 +4265,7 @@
                 <a:ea typeface="Inter" pitchFamily="34" charset="-122"/>
                 <a:cs typeface="Inter" pitchFamily="34" charset="-120"/>
               </a:rPr>
-              <a:t>MCG Technology Architecture  •  Qlik Cloud</a:t>
+              <a:t>Project Qlarity  •  MCG Technology Architecture  •  Qlik Cloud</a:t>
             </a:r>
             <a:endParaRPr lang="en-US" sz="800" dirty="0"/>
           </a:p>
@@ -5641,7 +5641,7 @@
                 <a:ea typeface="Inter" pitchFamily="34" charset="-122"/>
                 <a:cs typeface="Inter" pitchFamily="34" charset="-120"/>
               </a:rPr>
-              <a:t>MCG Technology Architecture  •  Qlik Cloud</a:t>
+              <a:t>Project Qlarity  •  MCG Technology Architecture  •  Qlik Cloud</a:t>
             </a:r>
             <a:endParaRPr lang="en-US" sz="800" dirty="0"/>
           </a:p>
@@ -6615,7 +6615,7 @@
                 <a:ea typeface="Inter" pitchFamily="34" charset="-122"/>
                 <a:cs typeface="Inter" pitchFamily="34" charset="-120"/>
               </a:rPr>
-              <a:t>MCG Technology Architecture  •  Qlik Cloud</a:t>
+              <a:t>Project Qlarity  •  MCG Technology Architecture  •  Qlik Cloud</a:t>
             </a:r>
             <a:endParaRPr lang="en-US" sz="800" dirty="0"/>
           </a:p>
@@ -9337,7 +9337,7 @@
                 <a:ea typeface="Inter" pitchFamily="34" charset="-122"/>
                 <a:cs typeface="Inter" pitchFamily="34" charset="-120"/>
               </a:rPr>
-              <a:t>MCG Technology Architecture  •  Qlik Cloud</a:t>
+              <a:t>Project Qlarity  •  MCG Technology Architecture  •  Qlik Cloud</a:t>
             </a:r>
             <a:endParaRPr lang="en-US" sz="800" dirty="0"/>
           </a:p>
@@ -11148,7 +11148,7 @@
                 <a:ea typeface="Inter" pitchFamily="34" charset="-122"/>
                 <a:cs typeface="Inter" pitchFamily="34" charset="-120"/>
               </a:rPr>
-              <a:t>MCG Technology Architecture  •  Qlik Cloud</a:t>
+              <a:t>Project Qlarity  •  MCG Technology Architecture  •  Qlik Cloud</a:t>
             </a:r>
             <a:endParaRPr lang="en-US" sz="800" dirty="0"/>
           </a:p>
@@ -12234,7 +12234,7 @@
                 <a:ea typeface="Inter" pitchFamily="34" charset="-122"/>
                 <a:cs typeface="Inter" pitchFamily="34" charset="-120"/>
               </a:rPr>
-              <a:t>MCG Technology Architecture  •  Qlik Cloud</a:t>
+              <a:t>Project Qlarity  •  MCG Technology Architecture  •  Qlik Cloud</a:t>
             </a:r>
             <a:endParaRPr lang="en-US" sz="800" dirty="0"/>
           </a:p>
@@ -14176,7 +14176,7 @@
                 <a:ea typeface="Inter" pitchFamily="34" charset="-122"/>
                 <a:cs typeface="Inter" pitchFamily="34" charset="-120"/>
               </a:rPr>
-              <a:t>MCG Technology Architecture  •  Qlik Cloud</a:t>
+              <a:t>Project Qlarity  •  MCG Technology Architecture  •  Qlik Cloud</a:t>
             </a:r>
             <a:endParaRPr lang="en-US" sz="800" dirty="0"/>
           </a:p>
@@ -15690,7 +15690,7 @@
                 <a:ea typeface="Inter" pitchFamily="34" charset="-122"/>
                 <a:cs typeface="Inter" pitchFamily="34" charset="-120"/>
               </a:rPr>
-              <a:t>MCG Technology Architecture  •  Qlik Cloud</a:t>
+              <a:t>Project Qlarity  •  MCG Technology Architecture  •  Qlik Cloud</a:t>
             </a:r>
             <a:endParaRPr lang="en-US" sz="800" dirty="0"/>
           </a:p>
@@ -16591,7 +16591,7 @@
                 <a:ea typeface="Inter" pitchFamily="34" charset="-122"/>
                 <a:cs typeface="Inter" pitchFamily="34" charset="-120"/>
               </a:rPr>
-              <a:t>MCG Technology Architecture  •  Qlik Cloud</a:t>
+              <a:t>Project Qlarity  •  MCG Technology Architecture  •  Qlik Cloud</a:t>
             </a:r>
             <a:endParaRPr lang="en-US" sz="800" dirty="0"/>
           </a:p>

--- a/MCG_Technology_Architecture.pptx
+++ b/MCG_Technology_Architecture.pptx
@@ -7031,14 +7031,70 @@
       </p:sp>
       <p:sp>
         <p:nvSpPr>
-          <p:cNvPr id="17" name="Text 14"/>
-          <p:cNvSpPr/>
-          <p:nvPr/>
-        </p:nvSpPr>
-        <p:spPr>
-          <a:xfrm>
-            <a:off x="2039112" y="1060704"/>
-            <a:ext cx="2688336" cy="457200"/>
+          <p:cNvPr id="17" name="Shape 14"/>
+          <p:cNvSpPr/>
+          <p:nvPr/>
+        </p:nvSpPr>
+        <p:spPr>
+          <a:xfrm>
+            <a:off x="2084832" y="1179576"/>
+            <a:ext cx="566928" cy="566928"/>
+          </a:xfrm>
+          <a:prstGeom prst="ellipse">
+            <a:avLst/>
+          </a:prstGeom>
+          <a:solidFill>
+            <a:srgbClr val="FFFFFF"/>
+          </a:solidFill>
+          <a:ln w="12700">
+            <a:solidFill>
+              <a:srgbClr val="FFFFFF"/>
+            </a:solidFill>
+            <a:prstDash val="solid"/>
+          </a:ln>
+          <a:effectLst>
+            <a:outerShdw sx="100000" sy="100000" kx="0" ky="0" algn="bl" rotWithShape="0" blurRad="38100" dist="12700" dir="16200000">
+              <a:srgbClr val="000000">
+                <a:alpha val="15000"/>
+              </a:srgbClr>
+            </a:outerShdw>
+          </a:effectLst>
+        </p:spPr>
+      </p:sp>
+      <p:pic>
+        <p:nvPicPr>
+          <p:cNvPr id="18" name="Image 1" descr="C:\Claude\MCG Full Stack\generators\assets\icons\database.png">    </p:cNvPr>
+          <p:cNvPicPr>
+            <a:picLocks noChangeAspect="1"/>
+          </p:cNvPicPr>
+          <p:nvPr/>
+        </p:nvPicPr>
+        <p:blipFill>
+          <a:blip r:embed="rId2"/>
+          <a:stretch>
+            <a:fillRect/>
+          </a:stretch>
+        </p:blipFill>
+        <p:spPr>
+          <a:xfrm>
+            <a:off x="2192548" y="1287292"/>
+            <a:ext cx="351495" cy="351495"/>
+          </a:xfrm>
+          <a:prstGeom prst="rect">
+            <a:avLst/>
+          </a:prstGeom>
+        </p:spPr>
+      </p:pic>
+      <p:sp>
+        <p:nvSpPr>
+          <p:cNvPr id="19" name="Text 15"/>
+          <p:cNvSpPr/>
+          <p:nvPr/>
+        </p:nvSpPr>
+        <p:spPr>
+          <a:xfrm>
+            <a:off x="2779776" y="1078992"/>
+            <a:ext cx="1929384" cy="438912"/>
           </a:xfrm>
           <a:prstGeom prst="rect">
             <a:avLst/>
@@ -7050,7 +7106,7 @@
           <a:bodyPr wrap="square" rtlCol="0" anchor="b"/>
           <a:lstStyle/>
           <a:p>
-            <a:pPr algn="ctr" indent="0" marL="0">
+            <a:pPr algn="l" indent="0" marL="0">
               <a:buNone/>
             </a:pPr>
             <a:r>
@@ -7070,14 +7126,14 @@
       </p:sp>
       <p:sp>
         <p:nvSpPr>
-          <p:cNvPr id="18" name="Text 15"/>
-          <p:cNvSpPr/>
-          <p:nvPr/>
-        </p:nvSpPr>
-        <p:spPr>
-          <a:xfrm>
-            <a:off x="2039112" y="1481328"/>
-            <a:ext cx="2688336" cy="384048"/>
+          <p:cNvPr id="20" name="Text 16"/>
+          <p:cNvSpPr/>
+          <p:nvPr/>
+        </p:nvSpPr>
+        <p:spPr>
+          <a:xfrm>
+            <a:off x="2779776" y="1463040"/>
+            <a:ext cx="1929384" cy="402336"/>
           </a:xfrm>
           <a:prstGeom prst="rect">
             <a:avLst/>
@@ -7089,16 +7145,16 @@
           <a:bodyPr wrap="square" rtlCol="0" anchor="t"/>
           <a:lstStyle/>
           <a:p>
-            <a:pPr algn="ctr" indent="0" marL="0">
+            <a:pPr algn="l" indent="0" marL="0">
               <a:lnSpc>
-                <a:spcPct val="105000"/>
+                <a:spcPct val="102000"/>
               </a:lnSpc>
               <a:buNone/>
             </a:pPr>
             <a:r>
-              <a:rPr lang="en-US" sz="1000" dirty="0">
-                <a:solidFill>
-                  <a:srgbClr val="D0D4D7"/>
+              <a:rPr lang="en-US" sz="950" dirty="0">
+                <a:solidFill>
+                  <a:srgbClr val="D8DCE0"/>
                 </a:solidFill>
                 <a:latin typeface="Inter" pitchFamily="34" charset="0"/>
                 <a:ea typeface="Inter" pitchFamily="34" charset="-122"/>
@@ -7106,13 +7162,13 @@
               </a:rPr>
               <a:t>CDC • 3 tables • Real-time</a:t>
             </a:r>
-            <a:endParaRPr lang="en-US" sz="1000" dirty="0"/>
-          </a:p>
-        </p:txBody>
-      </p:sp>
-      <p:sp>
-        <p:nvSpPr>
-          <p:cNvPr id="19" name="Shape 16"/>
+            <a:endParaRPr lang="en-US" sz="950" dirty="0"/>
+          </a:p>
+        </p:txBody>
+      </p:sp>
+      <p:sp>
+        <p:nvSpPr>
+          <p:cNvPr id="21" name="Shape 17"/>
           <p:cNvSpPr/>
           <p:nvPr/>
         </p:nvSpPr>
@@ -7146,14 +7202,70 @@
       </p:sp>
       <p:sp>
         <p:nvSpPr>
-          <p:cNvPr id="20" name="Text 17"/>
-          <p:cNvSpPr/>
-          <p:nvPr/>
-        </p:nvSpPr>
-        <p:spPr>
-          <a:xfrm>
-            <a:off x="5056632" y="1060704"/>
-            <a:ext cx="2688336" cy="457200"/>
+          <p:cNvPr id="22" name="Shape 18"/>
+          <p:cNvSpPr/>
+          <p:nvPr/>
+        </p:nvSpPr>
+        <p:spPr>
+          <a:xfrm>
+            <a:off x="5102352" y="1179576"/>
+            <a:ext cx="566928" cy="566928"/>
+          </a:xfrm>
+          <a:prstGeom prst="ellipse">
+            <a:avLst/>
+          </a:prstGeom>
+          <a:solidFill>
+            <a:srgbClr val="FFFFFF"/>
+          </a:solidFill>
+          <a:ln w="12700">
+            <a:solidFill>
+              <a:srgbClr val="FFFFFF"/>
+            </a:solidFill>
+            <a:prstDash val="solid"/>
+          </a:ln>
+          <a:effectLst>
+            <a:outerShdw sx="100000" sy="100000" kx="0" ky="0" algn="bl" rotWithShape="0" blurRad="38100" dist="12700" dir="16200000">
+              <a:srgbClr val="000000">
+                <a:alpha val="15000"/>
+              </a:srgbClr>
+            </a:outerShdw>
+          </a:effectLst>
+        </p:spPr>
+      </p:sp>
+      <p:pic>
+        <p:nvPicPr>
+          <p:cNvPr id="23" name="Image 2" descr="C:\Claude\MCG Full Stack\generators\assets\icons\stream.png">    </p:cNvPr>
+          <p:cNvPicPr>
+            <a:picLocks noChangeAspect="1"/>
+          </p:cNvPicPr>
+          <p:nvPr/>
+        </p:nvPicPr>
+        <p:blipFill>
+          <a:blip r:embed="rId3"/>
+          <a:stretch>
+            <a:fillRect/>
+          </a:stretch>
+        </p:blipFill>
+        <p:spPr>
+          <a:xfrm>
+            <a:off x="5210068" y="1287292"/>
+            <a:ext cx="351495" cy="351495"/>
+          </a:xfrm>
+          <a:prstGeom prst="rect">
+            <a:avLst/>
+          </a:prstGeom>
+        </p:spPr>
+      </p:pic>
+      <p:sp>
+        <p:nvSpPr>
+          <p:cNvPr id="24" name="Text 19"/>
+          <p:cNvSpPr/>
+          <p:nvPr/>
+        </p:nvSpPr>
+        <p:spPr>
+          <a:xfrm>
+            <a:off x="5797296" y="1078992"/>
+            <a:ext cx="1929384" cy="438912"/>
           </a:xfrm>
           <a:prstGeom prst="rect">
             <a:avLst/>
@@ -7165,7 +7277,7 @@
           <a:bodyPr wrap="square" rtlCol="0" anchor="b"/>
           <a:lstStyle/>
           <a:p>
-            <a:pPr algn="ctr" indent="0" marL="0">
+            <a:pPr algn="l" indent="0" marL="0">
               <a:buNone/>
             </a:pPr>
             <a:r>
@@ -7185,14 +7297,14 @@
       </p:sp>
       <p:sp>
         <p:nvSpPr>
-          <p:cNvPr id="21" name="Text 18"/>
-          <p:cNvSpPr/>
-          <p:nvPr/>
-        </p:nvSpPr>
-        <p:spPr>
-          <a:xfrm>
-            <a:off x="5056632" y="1481328"/>
-            <a:ext cx="2688336" cy="384048"/>
+          <p:cNvPr id="25" name="Text 20"/>
+          <p:cNvSpPr/>
+          <p:nvPr/>
+        </p:nvSpPr>
+        <p:spPr>
+          <a:xfrm>
+            <a:off x="5797296" y="1463040"/>
+            <a:ext cx="1929384" cy="402336"/>
           </a:xfrm>
           <a:prstGeom prst="rect">
             <a:avLst/>
@@ -7204,16 +7316,16 @@
           <a:bodyPr wrap="square" rtlCol="0" anchor="t"/>
           <a:lstStyle/>
           <a:p>
-            <a:pPr algn="ctr" indent="0" marL="0">
+            <a:pPr algn="l" indent="0" marL="0">
               <a:lnSpc>
-                <a:spcPct val="105000"/>
+                <a:spcPct val="102000"/>
               </a:lnSpc>
               <a:buNone/>
             </a:pPr>
             <a:r>
-              <a:rPr lang="en-US" sz="1000" dirty="0">
-                <a:solidFill>
-                  <a:srgbClr val="D0D4D7"/>
+              <a:rPr lang="en-US" sz="950" dirty="0">
+                <a:solidFill>
+                  <a:srgbClr val="D8DCE0"/>
                 </a:solidFill>
                 <a:latin typeface="Inter" pitchFamily="34" charset="0"/>
                 <a:ea typeface="Inter" pitchFamily="34" charset="-122"/>
@@ -7221,13 +7333,13 @@
               </a:rPr>
               <a:t>Streaming • 2 IoT topics</a:t>
             </a:r>
-            <a:endParaRPr lang="en-US" sz="1000" dirty="0"/>
-          </a:p>
-        </p:txBody>
-      </p:sp>
-      <p:sp>
-        <p:nvSpPr>
-          <p:cNvPr id="22" name="Shape 19"/>
+            <a:endParaRPr lang="en-US" sz="950" dirty="0"/>
+          </a:p>
+        </p:txBody>
+      </p:sp>
+      <p:sp>
+        <p:nvSpPr>
+          <p:cNvPr id="26" name="Shape 21"/>
           <p:cNvSpPr/>
           <p:nvPr/>
         </p:nvSpPr>
@@ -7261,14 +7373,70 @@
       </p:sp>
       <p:sp>
         <p:nvSpPr>
-          <p:cNvPr id="23" name="Text 20"/>
-          <p:cNvSpPr/>
-          <p:nvPr/>
-        </p:nvSpPr>
-        <p:spPr>
-          <a:xfrm>
-            <a:off x="8074152" y="1060704"/>
-            <a:ext cx="2688336" cy="457200"/>
+          <p:cNvPr id="27" name="Shape 22"/>
+          <p:cNvSpPr/>
+          <p:nvPr/>
+        </p:nvSpPr>
+        <p:spPr>
+          <a:xfrm>
+            <a:off x="8119872" y="1179576"/>
+            <a:ext cx="566928" cy="566928"/>
+          </a:xfrm>
+          <a:prstGeom prst="ellipse">
+            <a:avLst/>
+          </a:prstGeom>
+          <a:solidFill>
+            <a:srgbClr val="FFFFFF"/>
+          </a:solidFill>
+          <a:ln w="12700">
+            <a:solidFill>
+              <a:srgbClr val="FFFFFF"/>
+            </a:solidFill>
+            <a:prstDash val="solid"/>
+          </a:ln>
+          <a:effectLst>
+            <a:outerShdw sx="100000" sy="100000" kx="0" ky="0" algn="bl" rotWithShape="0" blurRad="38100" dist="12700" dir="16200000">
+              <a:srgbClr val="000000">
+                <a:alpha val="15000"/>
+              </a:srgbClr>
+            </a:outerShdw>
+          </a:effectLst>
+        </p:spPr>
+      </p:sp>
+      <p:pic>
+        <p:nvPicPr>
+          <p:cNvPr id="28" name="Image 3" descr="C:\Claude\MCG Full Stack\generators\assets\icons\cloud.png">    </p:cNvPr>
+          <p:cNvPicPr>
+            <a:picLocks noChangeAspect="1"/>
+          </p:cNvPicPr>
+          <p:nvPr/>
+        </p:nvPicPr>
+        <p:blipFill>
+          <a:blip r:embed="rId4"/>
+          <a:stretch>
+            <a:fillRect/>
+          </a:stretch>
+        </p:blipFill>
+        <p:spPr>
+          <a:xfrm>
+            <a:off x="8227588" y="1287292"/>
+            <a:ext cx="351495" cy="351495"/>
+          </a:xfrm>
+          <a:prstGeom prst="rect">
+            <a:avLst/>
+          </a:prstGeom>
+        </p:spPr>
+      </p:pic>
+      <p:sp>
+        <p:nvSpPr>
+          <p:cNvPr id="29" name="Text 23"/>
+          <p:cNvSpPr/>
+          <p:nvPr/>
+        </p:nvSpPr>
+        <p:spPr>
+          <a:xfrm>
+            <a:off x="8814816" y="1078992"/>
+            <a:ext cx="1929384" cy="438912"/>
           </a:xfrm>
           <a:prstGeom prst="rect">
             <a:avLst/>
@@ -7280,7 +7448,7 @@
           <a:bodyPr wrap="square" rtlCol="0" anchor="b"/>
           <a:lstStyle/>
           <a:p>
-            <a:pPr algn="ctr" indent="0" marL="0">
+            <a:pPr algn="l" indent="0" marL="0">
               <a:buNone/>
             </a:pPr>
             <a:r>
@@ -7300,14 +7468,14 @@
       </p:sp>
       <p:sp>
         <p:nvSpPr>
-          <p:cNvPr id="24" name="Text 21"/>
-          <p:cNvSpPr/>
-          <p:nvPr/>
-        </p:nvSpPr>
-        <p:spPr>
-          <a:xfrm>
-            <a:off x="8074152" y="1481328"/>
-            <a:ext cx="2688336" cy="384048"/>
+          <p:cNvPr id="30" name="Text 24"/>
+          <p:cNvSpPr/>
+          <p:nvPr/>
+        </p:nvSpPr>
+        <p:spPr>
+          <a:xfrm>
+            <a:off x="8814816" y="1463040"/>
+            <a:ext cx="1929384" cy="402336"/>
           </a:xfrm>
           <a:prstGeom prst="rect">
             <a:avLst/>
@@ -7319,16 +7487,16 @@
           <a:bodyPr wrap="square" rtlCol="0" anchor="t"/>
           <a:lstStyle/>
           <a:p>
-            <a:pPr algn="ctr" indent="0" marL="0">
+            <a:pPr algn="l" indent="0" marL="0">
               <a:lnSpc>
-                <a:spcPct val="105000"/>
+                <a:spcPct val="102000"/>
               </a:lnSpc>
               <a:buNone/>
             </a:pPr>
             <a:r>
-              <a:rPr lang="en-US" sz="1000" dirty="0">
-                <a:solidFill>
-                  <a:srgbClr val="D0D4D7"/>
+              <a:rPr lang="en-US" sz="950" dirty="0">
+                <a:solidFill>
+                  <a:srgbClr val="D8DCE0"/>
                 </a:solidFill>
                 <a:latin typeface="Inter" pitchFamily="34" charset="0"/>
                 <a:ea typeface="Inter" pitchFamily="34" charset="-122"/>
@@ -7336,13 +7504,13 @@
               </a:rPr>
               <a:t>Connector • 3 objects • 15 min</a:t>
             </a:r>
-            <a:endParaRPr lang="en-US" sz="1000" dirty="0"/>
-          </a:p>
-        </p:txBody>
-      </p:sp>
-      <p:sp>
-        <p:nvSpPr>
-          <p:cNvPr id="25" name="Shape 22"/>
+            <a:endParaRPr lang="en-US" sz="950" dirty="0"/>
+          </a:p>
+        </p:txBody>
+      </p:sp>
+      <p:sp>
+        <p:nvSpPr>
+          <p:cNvPr id="31" name="Shape 25"/>
           <p:cNvSpPr/>
           <p:nvPr/>
         </p:nvSpPr>
@@ -7366,7 +7534,7 @@
       </p:sp>
       <p:sp>
         <p:nvSpPr>
-          <p:cNvPr id="26" name="Shape 23"/>
+          <p:cNvPr id="32" name="Shape 26"/>
           <p:cNvSpPr/>
           <p:nvPr/>
         </p:nvSpPr>
@@ -7390,7 +7558,7 @@
       </p:sp>
       <p:sp>
         <p:nvSpPr>
-          <p:cNvPr id="27" name="Shape 24"/>
+          <p:cNvPr id="33" name="Shape 27"/>
           <p:cNvSpPr/>
           <p:nvPr/>
         </p:nvSpPr>
@@ -7414,7 +7582,7 @@
       </p:sp>
       <p:sp>
         <p:nvSpPr>
-          <p:cNvPr id="28" name="Shape 25"/>
+          <p:cNvPr id="34" name="Shape 28"/>
           <p:cNvSpPr/>
           <p:nvPr/>
         </p:nvSpPr>
@@ -7441,7 +7609,63 @@
       </p:sp>
       <p:sp>
         <p:nvSpPr>
-          <p:cNvPr id="29" name="Text 26"/>
+          <p:cNvPr id="35" name="Shape 29"/>
+          <p:cNvSpPr/>
+          <p:nvPr/>
+        </p:nvSpPr>
+        <p:spPr>
+          <a:xfrm>
+            <a:off x="2075688" y="2441448"/>
+            <a:ext cx="256032" cy="256032"/>
+          </a:xfrm>
+          <a:prstGeom prst="ellipse">
+            <a:avLst/>
+          </a:prstGeom>
+          <a:solidFill>
+            <a:srgbClr val="FFFFFF"/>
+          </a:solidFill>
+          <a:ln w="12700">
+            <a:solidFill>
+              <a:srgbClr val="009845"/>
+            </a:solidFill>
+            <a:prstDash val="solid"/>
+          </a:ln>
+          <a:effectLst>
+            <a:outerShdw sx="100000" sy="100000" kx="0" ky="0" algn="bl" rotWithShape="0" blurRad="38100" dist="12700" dir="16200000">
+              <a:srgbClr val="000000">
+                <a:alpha val="15000"/>
+              </a:srgbClr>
+            </a:outerShdw>
+          </a:effectLst>
+        </p:spPr>
+      </p:sp>
+      <p:pic>
+        <p:nvPicPr>
+          <p:cNvPr id="36" name="Image 4" descr="C:\Claude\MCG Full Stack\generators\assets\icons\lakehouse.png">    </p:cNvPr>
+          <p:cNvPicPr>
+            <a:picLocks noChangeAspect="1"/>
+          </p:cNvPicPr>
+          <p:nvPr/>
+        </p:nvPicPr>
+        <p:blipFill>
+          <a:blip r:embed="rId5"/>
+          <a:stretch>
+            <a:fillRect/>
+          </a:stretch>
+        </p:blipFill>
+        <p:spPr>
+          <a:xfrm>
+            <a:off x="2124334" y="2490094"/>
+            <a:ext cx="158740" cy="158740"/>
+          </a:xfrm>
+          <a:prstGeom prst="rect">
+            <a:avLst/>
+          </a:prstGeom>
+        </p:spPr>
+      </p:pic>
+      <p:sp>
+        <p:nvSpPr>
+          <p:cNvPr id="37" name="Text 30"/>
           <p:cNvSpPr/>
           <p:nvPr/>
         </p:nvSpPr>
@@ -7480,7 +7704,7 @@
       </p:sp>
       <p:sp>
         <p:nvSpPr>
-          <p:cNvPr id="30" name="Shape 27"/>
+          <p:cNvPr id="38" name="Shape 31"/>
           <p:cNvSpPr/>
           <p:nvPr/>
         </p:nvSpPr>
@@ -7514,7 +7738,7 @@
       </p:sp>
       <p:sp>
         <p:nvSpPr>
-          <p:cNvPr id="31" name="Text 28"/>
+          <p:cNvPr id="39" name="Text 32"/>
           <p:cNvSpPr/>
           <p:nvPr/>
         </p:nvSpPr>
@@ -7553,7 +7777,7 @@
       </p:sp>
       <p:sp>
         <p:nvSpPr>
-          <p:cNvPr id="32" name="Text 29"/>
+          <p:cNvPr id="40" name="Text 33"/>
           <p:cNvSpPr/>
           <p:nvPr/>
         </p:nvSpPr>
@@ -7595,7 +7819,7 @@
       </p:sp>
       <p:sp>
         <p:nvSpPr>
-          <p:cNvPr id="33" name="Shape 30"/>
+          <p:cNvPr id="41" name="Shape 34"/>
           <p:cNvSpPr/>
           <p:nvPr/>
         </p:nvSpPr>
@@ -7629,7 +7853,7 @@
       </p:sp>
       <p:sp>
         <p:nvSpPr>
-          <p:cNvPr id="34" name="Text 31"/>
+          <p:cNvPr id="42" name="Text 35"/>
           <p:cNvSpPr/>
           <p:nvPr/>
         </p:nvSpPr>
@@ -7668,7 +7892,7 @@
       </p:sp>
       <p:sp>
         <p:nvSpPr>
-          <p:cNvPr id="35" name="Text 32"/>
+          <p:cNvPr id="43" name="Text 36"/>
           <p:cNvSpPr/>
           <p:nvPr/>
         </p:nvSpPr>
@@ -7710,7 +7934,7 @@
       </p:sp>
       <p:sp>
         <p:nvSpPr>
-          <p:cNvPr id="36" name="Shape 33"/>
+          <p:cNvPr id="44" name="Shape 37"/>
           <p:cNvSpPr/>
           <p:nvPr/>
         </p:nvSpPr>
@@ -7744,7 +7968,7 @@
       </p:sp>
       <p:sp>
         <p:nvSpPr>
-          <p:cNvPr id="37" name="Text 34"/>
+          <p:cNvPr id="45" name="Text 38"/>
           <p:cNvSpPr/>
           <p:nvPr/>
         </p:nvSpPr>
@@ -7783,7 +8007,7 @@
       </p:sp>
       <p:sp>
         <p:nvSpPr>
-          <p:cNvPr id="38" name="Text 35"/>
+          <p:cNvPr id="46" name="Text 39"/>
           <p:cNvSpPr/>
           <p:nvPr/>
         </p:nvSpPr>
@@ -7825,7 +8049,7 @@
       </p:sp>
       <p:sp>
         <p:nvSpPr>
-          <p:cNvPr id="39" name="Shape 36"/>
+          <p:cNvPr id="47" name="Shape 40"/>
           <p:cNvSpPr/>
           <p:nvPr/>
         </p:nvSpPr>
@@ -7849,7 +8073,7 @@
       </p:sp>
       <p:sp>
         <p:nvSpPr>
-          <p:cNvPr id="40" name="Shape 37"/>
+          <p:cNvPr id="48" name="Shape 41"/>
           <p:cNvSpPr/>
           <p:nvPr/>
         </p:nvSpPr>
@@ -7873,14 +8097,14 @@
       </p:sp>
       <p:sp>
         <p:nvSpPr>
-          <p:cNvPr id="41" name="Shape 38"/>
-          <p:cNvSpPr/>
-          <p:nvPr/>
-        </p:nvSpPr>
-        <p:spPr>
-          <a:xfrm>
-            <a:off x="9189720" y="2423160"/>
-            <a:ext cx="1691640" cy="914400"/>
+          <p:cNvPr id="49" name="Shape 42"/>
+          <p:cNvSpPr/>
+          <p:nvPr/>
+        </p:nvSpPr>
+        <p:spPr>
+          <a:xfrm>
+            <a:off x="9144000" y="2423160"/>
+            <a:ext cx="1874520" cy="914400"/>
           </a:xfrm>
           <a:prstGeom prst="roundRect">
             <a:avLst>
@@ -7907,14 +8131,70 @@
       </p:sp>
       <p:sp>
         <p:nvSpPr>
-          <p:cNvPr id="42" name="Text 39"/>
-          <p:cNvSpPr/>
-          <p:nvPr/>
-        </p:nvSpPr>
-        <p:spPr>
-          <a:xfrm>
-            <a:off x="9262872" y="2478024"/>
-            <a:ext cx="1545336" cy="457200"/>
+          <p:cNvPr id="50" name="Shape 43"/>
+          <p:cNvSpPr/>
+          <p:nvPr/>
+        </p:nvSpPr>
+        <p:spPr>
+          <a:xfrm>
+            <a:off x="9262872" y="2596896"/>
+            <a:ext cx="566928" cy="566928"/>
+          </a:xfrm>
+          <a:prstGeom prst="ellipse">
+            <a:avLst/>
+          </a:prstGeom>
+          <a:solidFill>
+            <a:srgbClr val="FFFFFF"/>
+          </a:solidFill>
+          <a:ln w="12700">
+            <a:solidFill>
+              <a:srgbClr val="FFFFFF"/>
+            </a:solidFill>
+            <a:prstDash val="solid"/>
+          </a:ln>
+          <a:effectLst>
+            <a:outerShdw sx="100000" sy="100000" kx="0" ky="0" algn="bl" rotWithShape="0" blurRad="38100" dist="12700" dir="16200000">
+              <a:srgbClr val="000000">
+                <a:alpha val="15000"/>
+              </a:srgbClr>
+            </a:outerShdw>
+          </a:effectLst>
+        </p:spPr>
+      </p:sp>
+      <p:pic>
+        <p:nvPicPr>
+          <p:cNvPr id="51" name="Image 5" descr="C:\Claude\MCG Full Stack\generators\assets\icons\transform.png">    </p:cNvPr>
+          <p:cNvPicPr>
+            <a:picLocks noChangeAspect="1"/>
+          </p:cNvPicPr>
+          <p:nvPr/>
+        </p:nvPicPr>
+        <p:blipFill>
+          <a:blip r:embed="rId6"/>
+          <a:stretch>
+            <a:fillRect/>
+          </a:stretch>
+        </p:blipFill>
+        <p:spPr>
+          <a:xfrm>
+            <a:off x="9370588" y="2704612"/>
+            <a:ext cx="351495" cy="351495"/>
+          </a:xfrm>
+          <a:prstGeom prst="rect">
+            <a:avLst/>
+          </a:prstGeom>
+        </p:spPr>
+      </p:pic>
+      <p:sp>
+        <p:nvSpPr>
+          <p:cNvPr id="52" name="Text 44"/>
+          <p:cNvSpPr/>
+          <p:nvPr/>
+        </p:nvSpPr>
+        <p:spPr>
+          <a:xfrm>
+            <a:off x="9957816" y="2496312"/>
+            <a:ext cx="969264" cy="438912"/>
           </a:xfrm>
           <a:prstGeom prst="rect">
             <a:avLst/>
@@ -7926,7 +8206,7 @@
           <a:bodyPr wrap="square" rtlCol="0" anchor="b"/>
           <a:lstStyle/>
           <a:p>
-            <a:pPr algn="ctr" indent="0" marL="0">
+            <a:pPr algn="l" indent="0" marL="0">
               <a:buNone/>
             </a:pPr>
             <a:r>
@@ -7946,14 +8226,14 @@
       </p:sp>
       <p:sp>
         <p:nvSpPr>
-          <p:cNvPr id="43" name="Text 40"/>
-          <p:cNvSpPr/>
-          <p:nvPr/>
-        </p:nvSpPr>
-        <p:spPr>
-          <a:xfrm>
-            <a:off x="9262872" y="2898648"/>
-            <a:ext cx="1545336" cy="384048"/>
+          <p:cNvPr id="53" name="Text 45"/>
+          <p:cNvSpPr/>
+          <p:nvPr/>
+        </p:nvSpPr>
+        <p:spPr>
+          <a:xfrm>
+            <a:off x="9957816" y="2880360"/>
+            <a:ext cx="969264" cy="402336"/>
           </a:xfrm>
           <a:prstGeom prst="rect">
             <a:avLst/>
@@ -7965,16 +8245,16 @@
           <a:bodyPr wrap="square" rtlCol="0" anchor="t"/>
           <a:lstStyle/>
           <a:p>
-            <a:pPr algn="ctr" indent="0" marL="0">
+            <a:pPr algn="l" indent="0" marL="0">
               <a:lnSpc>
-                <a:spcPct val="105000"/>
+                <a:spcPct val="102000"/>
               </a:lnSpc>
               <a:buNone/>
             </a:pPr>
             <a:r>
-              <a:rPr lang="en-US" sz="1000" dirty="0">
-                <a:solidFill>
-                  <a:srgbClr val="D0D4D7"/>
+              <a:rPr lang="en-US" sz="950" dirty="0">
+                <a:solidFill>
+                  <a:srgbClr val="D8DCE0"/>
                 </a:solidFill>
                 <a:latin typeface="Inter" pitchFamily="34" charset="0"/>
                 <a:ea typeface="Inter" pitchFamily="34" charset="-122"/>
@@ -7982,33 +8262,13 @@
               </a:rPr>
               <a:t>Address Validation</a:t>
             </a:r>
-            <a:endParaRPr lang="en-US" sz="1000" dirty="0"/>
-          </a:p>
-          <a:p>
-            <a:pPr algn="ctr" indent="0" marL="0">
-              <a:lnSpc>
-                <a:spcPct val="105000"/>
-              </a:lnSpc>
-              <a:buNone/>
-            </a:pPr>
-            <a:r>
-              <a:rPr lang="en-US" sz="1000" dirty="0">
-                <a:solidFill>
-                  <a:srgbClr val="D0D4D7"/>
-                </a:solidFill>
-                <a:latin typeface="Inter" pitchFamily="34" charset="0"/>
-                <a:ea typeface="Inter" pitchFamily="34" charset="-122"/>
-                <a:cs typeface="Inter" pitchFamily="34" charset="-120"/>
-              </a:rPr>
-              <a:t>+ Stewardship</a:t>
-            </a:r>
-            <a:endParaRPr lang="en-US" sz="1000" dirty="0"/>
-          </a:p>
-        </p:txBody>
-      </p:sp>
-      <p:sp>
-        <p:nvSpPr>
-          <p:cNvPr id="44" name="Shape 41"/>
+            <a:endParaRPr lang="en-US" sz="950" dirty="0"/>
+          </a:p>
+        </p:txBody>
+      </p:sp>
+      <p:sp>
+        <p:nvSpPr>
+          <p:cNvPr id="54" name="Shape 46"/>
           <p:cNvSpPr/>
           <p:nvPr/>
         </p:nvSpPr>
@@ -8037,7 +8297,7 @@
       </p:sp>
       <p:sp>
         <p:nvSpPr>
-          <p:cNvPr id="45" name="Text 42"/>
+          <p:cNvPr id="55" name="Text 47"/>
           <p:cNvSpPr/>
           <p:nvPr/>
         </p:nvSpPr>
@@ -8076,7 +8336,63 @@
       </p:sp>
       <p:sp>
         <p:nvSpPr>
-          <p:cNvPr id="46" name="Shape 43"/>
+          <p:cNvPr id="56" name="Shape 48"/>
+          <p:cNvSpPr/>
+          <p:nvPr/>
+        </p:nvSpPr>
+        <p:spPr>
+          <a:xfrm>
+            <a:off x="2029968" y="2057400"/>
+            <a:ext cx="256032" cy="256032"/>
+          </a:xfrm>
+          <a:prstGeom prst="ellipse">
+            <a:avLst/>
+          </a:prstGeom>
+          <a:solidFill>
+            <a:srgbClr val="FFFFFF"/>
+          </a:solidFill>
+          <a:ln w="12700">
+            <a:solidFill>
+              <a:srgbClr val="FFFFFF"/>
+            </a:solidFill>
+            <a:prstDash val="solid"/>
+          </a:ln>
+          <a:effectLst>
+            <a:outerShdw sx="100000" sy="100000" kx="0" ky="0" algn="bl" rotWithShape="0" blurRad="38100" dist="12700" dir="16200000">
+              <a:srgbClr val="000000">
+                <a:alpha val="15000"/>
+              </a:srgbClr>
+            </a:outerShdw>
+          </a:effectLst>
+        </p:spPr>
+      </p:sp>
+      <p:pic>
+        <p:nvPicPr>
+          <p:cNvPr id="57" name="Image 6" descr="C:\Claude\MCG Full Stack\generators\assets\icons\pipeline.png">    </p:cNvPr>
+          <p:cNvPicPr>
+            <a:picLocks noChangeAspect="1"/>
+          </p:cNvPicPr>
+          <p:nvPr/>
+        </p:nvPicPr>
+        <p:blipFill>
+          <a:blip r:embed="rId7"/>
+          <a:stretch>
+            <a:fillRect/>
+          </a:stretch>
+        </p:blipFill>
+        <p:spPr>
+          <a:xfrm>
+            <a:off x="2078614" y="2106046"/>
+            <a:ext cx="158740" cy="158740"/>
+          </a:xfrm>
+          <a:prstGeom prst="rect">
+            <a:avLst/>
+          </a:prstGeom>
+        </p:spPr>
+      </p:pic>
+      <p:sp>
+        <p:nvSpPr>
+          <p:cNvPr id="58" name="Shape 49"/>
           <p:cNvSpPr/>
           <p:nvPr/>
         </p:nvSpPr>
@@ -8100,7 +8416,7 @@
       </p:sp>
       <p:sp>
         <p:nvSpPr>
-          <p:cNvPr id="47" name="Shape 44"/>
+          <p:cNvPr id="59" name="Shape 50"/>
           <p:cNvSpPr/>
           <p:nvPr/>
         </p:nvSpPr>
@@ -8124,7 +8440,7 @@
       </p:sp>
       <p:sp>
         <p:nvSpPr>
-          <p:cNvPr id="48" name="Shape 45"/>
+          <p:cNvPr id="60" name="Shape 51"/>
           <p:cNvSpPr/>
           <p:nvPr/>
         </p:nvSpPr>
@@ -8158,14 +8474,70 @@
       </p:sp>
       <p:sp>
         <p:nvSpPr>
-          <p:cNvPr id="49" name="Text 46"/>
-          <p:cNvSpPr/>
-          <p:nvPr/>
-        </p:nvSpPr>
-        <p:spPr>
-          <a:xfrm>
-            <a:off x="2039112" y="3849624"/>
-            <a:ext cx="2596896" cy="457200"/>
+          <p:cNvPr id="61" name="Shape 52"/>
+          <p:cNvSpPr/>
+          <p:nvPr/>
+        </p:nvSpPr>
+        <p:spPr>
+          <a:xfrm>
+            <a:off x="2084832" y="3968496"/>
+            <a:ext cx="566928" cy="566928"/>
+          </a:xfrm>
+          <a:prstGeom prst="ellipse">
+            <a:avLst/>
+          </a:prstGeom>
+          <a:solidFill>
+            <a:srgbClr val="FFFFFF"/>
+          </a:solidFill>
+          <a:ln w="12700">
+            <a:solidFill>
+              <a:srgbClr val="FFFFFF"/>
+            </a:solidFill>
+            <a:prstDash val="solid"/>
+          </a:ln>
+          <a:effectLst>
+            <a:outerShdw sx="100000" sy="100000" kx="0" ky="0" algn="bl" rotWithShape="0" blurRad="38100" dist="12700" dir="16200000">
+              <a:srgbClr val="000000">
+                <a:alpha val="15000"/>
+              </a:srgbClr>
+            </a:outerShdw>
+          </a:effectLst>
+        </p:spPr>
+      </p:sp>
+      <p:pic>
+        <p:nvPicPr>
+          <p:cNvPr id="62" name="Image 7" descr="C:\Claude\MCG Full Stack\generators\assets\icons\analytics.png">    </p:cNvPr>
+          <p:cNvPicPr>
+            <a:picLocks noChangeAspect="1"/>
+          </p:cNvPicPr>
+          <p:nvPr/>
+        </p:nvPicPr>
+        <p:blipFill>
+          <a:blip r:embed="rId8"/>
+          <a:stretch>
+            <a:fillRect/>
+          </a:stretch>
+        </p:blipFill>
+        <p:spPr>
+          <a:xfrm>
+            <a:off x="2192548" y="4076212"/>
+            <a:ext cx="351495" cy="351495"/>
+          </a:xfrm>
+          <a:prstGeom prst="rect">
+            <a:avLst/>
+          </a:prstGeom>
+        </p:spPr>
+      </p:pic>
+      <p:sp>
+        <p:nvSpPr>
+          <p:cNvPr id="63" name="Text 53"/>
+          <p:cNvSpPr/>
+          <p:nvPr/>
+        </p:nvSpPr>
+        <p:spPr>
+          <a:xfrm>
+            <a:off x="2779776" y="3867912"/>
+            <a:ext cx="1837944" cy="438912"/>
           </a:xfrm>
           <a:prstGeom prst="rect">
             <a:avLst/>
@@ -8177,7 +8549,7 @@
           <a:bodyPr wrap="square" rtlCol="0" anchor="b"/>
           <a:lstStyle/>
           <a:p>
-            <a:pPr algn="ctr" indent="0" marL="0">
+            <a:pPr algn="l" indent="0" marL="0">
               <a:buNone/>
             </a:pPr>
             <a:r>
@@ -8197,14 +8569,14 @@
       </p:sp>
       <p:sp>
         <p:nvSpPr>
-          <p:cNvPr id="50" name="Text 47"/>
-          <p:cNvSpPr/>
-          <p:nvPr/>
-        </p:nvSpPr>
-        <p:spPr>
-          <a:xfrm>
-            <a:off x="2039112" y="4270248"/>
-            <a:ext cx="2596896" cy="384048"/>
+          <p:cNvPr id="64" name="Text 54"/>
+          <p:cNvSpPr/>
+          <p:nvPr/>
+        </p:nvSpPr>
+        <p:spPr>
+          <a:xfrm>
+            <a:off x="2779776" y="4251960"/>
+            <a:ext cx="1837944" cy="402336"/>
           </a:xfrm>
           <a:prstGeom prst="rect">
             <a:avLst/>
@@ -8216,16 +8588,16 @@
           <a:bodyPr wrap="square" rtlCol="0" anchor="t"/>
           <a:lstStyle/>
           <a:p>
-            <a:pPr algn="ctr" indent="0" marL="0">
+            <a:pPr algn="l" indent="0" marL="0">
               <a:lnSpc>
-                <a:spcPct val="105000"/>
+                <a:spcPct val="102000"/>
               </a:lnSpc>
               <a:buNone/>
             </a:pPr>
             <a:r>
-              <a:rPr lang="en-US" sz="1000" dirty="0">
-                <a:solidFill>
-                  <a:srgbClr val="D0D4D7"/>
+              <a:rPr lang="en-US" sz="950" dirty="0">
+                <a:solidFill>
+                  <a:srgbClr val="D8DCE0"/>
                 </a:solidFill>
                 <a:latin typeface="Inter" pitchFamily="34" charset="0"/>
                 <a:ea typeface="Inter" pitchFamily="34" charset="-122"/>
@@ -8233,13 +8605,13 @@
               </a:rPr>
               <a:t>2 apps • 10 sheets</a:t>
             </a:r>
-            <a:endParaRPr lang="en-US" sz="1000" dirty="0"/>
-          </a:p>
-        </p:txBody>
-      </p:sp>
-      <p:sp>
-        <p:nvSpPr>
-          <p:cNvPr id="51" name="Shape 48"/>
+            <a:endParaRPr lang="en-US" sz="950" dirty="0"/>
+          </a:p>
+        </p:txBody>
+      </p:sp>
+      <p:sp>
+        <p:nvSpPr>
+          <p:cNvPr id="65" name="Shape 55"/>
           <p:cNvSpPr/>
           <p:nvPr/>
         </p:nvSpPr>
@@ -8273,14 +8645,70 @@
       </p:sp>
       <p:sp>
         <p:nvSpPr>
-          <p:cNvPr id="52" name="Text 49"/>
-          <p:cNvSpPr/>
-          <p:nvPr/>
-        </p:nvSpPr>
-        <p:spPr>
-          <a:xfrm>
-            <a:off x="4965192" y="3849624"/>
-            <a:ext cx="2596896" cy="457200"/>
+          <p:cNvPr id="66" name="Shape 56"/>
+          <p:cNvSpPr/>
+          <p:nvPr/>
+        </p:nvSpPr>
+        <p:spPr>
+          <a:xfrm>
+            <a:off x="5010912" y="3968496"/>
+            <a:ext cx="566928" cy="566928"/>
+          </a:xfrm>
+          <a:prstGeom prst="ellipse">
+            <a:avLst/>
+          </a:prstGeom>
+          <a:solidFill>
+            <a:srgbClr val="FFFFFF"/>
+          </a:solidFill>
+          <a:ln w="12700">
+            <a:solidFill>
+              <a:srgbClr val="FFFFFF"/>
+            </a:solidFill>
+            <a:prstDash val="solid"/>
+          </a:ln>
+          <a:effectLst>
+            <a:outerShdw sx="100000" sy="100000" kx="0" ky="0" algn="bl" rotWithShape="0" blurRad="38100" dist="12700" dir="16200000">
+              <a:srgbClr val="000000">
+                <a:alpha val="15000"/>
+              </a:srgbClr>
+            </a:outerShdw>
+          </a:effectLst>
+        </p:spPr>
+      </p:sp>
+      <p:pic>
+        <p:nvPicPr>
+          <p:cNvPr id="67" name="Image 8" descr="C:\Claude\MCG Full Stack\generators\assets\icons\predict.png">    </p:cNvPr>
+          <p:cNvPicPr>
+            <a:picLocks noChangeAspect="1"/>
+          </p:cNvPicPr>
+          <p:nvPr/>
+        </p:nvPicPr>
+        <p:blipFill>
+          <a:blip r:embed="rId9"/>
+          <a:stretch>
+            <a:fillRect/>
+          </a:stretch>
+        </p:blipFill>
+        <p:spPr>
+          <a:xfrm>
+            <a:off x="5118628" y="4076212"/>
+            <a:ext cx="351495" cy="351495"/>
+          </a:xfrm>
+          <a:prstGeom prst="rect">
+            <a:avLst/>
+          </a:prstGeom>
+        </p:spPr>
+      </p:pic>
+      <p:sp>
+        <p:nvSpPr>
+          <p:cNvPr id="68" name="Text 57"/>
+          <p:cNvSpPr/>
+          <p:nvPr/>
+        </p:nvSpPr>
+        <p:spPr>
+          <a:xfrm>
+            <a:off x="5705856" y="3867912"/>
+            <a:ext cx="1837944" cy="438912"/>
           </a:xfrm>
           <a:prstGeom prst="rect">
             <a:avLst/>
@@ -8292,7 +8720,7 @@
           <a:bodyPr wrap="square" rtlCol="0" anchor="b"/>
           <a:lstStyle/>
           <a:p>
-            <a:pPr algn="ctr" indent="0" marL="0">
+            <a:pPr algn="l" indent="0" marL="0">
               <a:buNone/>
             </a:pPr>
             <a:r>
@@ -8312,14 +8740,14 @@
       </p:sp>
       <p:sp>
         <p:nvSpPr>
-          <p:cNvPr id="53" name="Text 50"/>
-          <p:cNvSpPr/>
-          <p:nvPr/>
-        </p:nvSpPr>
-        <p:spPr>
-          <a:xfrm>
-            <a:off x="4965192" y="4270248"/>
-            <a:ext cx="2596896" cy="384048"/>
+          <p:cNvPr id="69" name="Text 58"/>
+          <p:cNvSpPr/>
+          <p:nvPr/>
+        </p:nvSpPr>
+        <p:spPr>
+          <a:xfrm>
+            <a:off x="5705856" y="4251960"/>
+            <a:ext cx="1837944" cy="402336"/>
           </a:xfrm>
           <a:prstGeom prst="rect">
             <a:avLst/>
@@ -8331,16 +8759,16 @@
           <a:bodyPr wrap="square" rtlCol="0" anchor="t"/>
           <a:lstStyle/>
           <a:p>
-            <a:pPr algn="ctr" indent="0" marL="0">
+            <a:pPr algn="l" indent="0" marL="0">
               <a:lnSpc>
-                <a:spcPct val="105000"/>
+                <a:spcPct val="102000"/>
               </a:lnSpc>
               <a:buNone/>
             </a:pPr>
             <a:r>
-              <a:rPr lang="en-US" sz="1000" dirty="0">
-                <a:solidFill>
-                  <a:srgbClr val="D0D4D7"/>
+              <a:rPr lang="en-US" sz="950" dirty="0">
+                <a:solidFill>
+                  <a:srgbClr val="D8DCE0"/>
                 </a:solidFill>
                 <a:latin typeface="Inter" pitchFamily="34" charset="0"/>
                 <a:ea typeface="Inter" pitchFamily="34" charset="-122"/>
@@ -8348,13 +8776,13 @@
               </a:rPr>
               <a:t>Exceedance • Late Delivery</a:t>
             </a:r>
-            <a:endParaRPr lang="en-US" sz="1000" dirty="0"/>
-          </a:p>
-        </p:txBody>
-      </p:sp>
-      <p:sp>
-        <p:nvSpPr>
-          <p:cNvPr id="54" name="Shape 51"/>
+            <a:endParaRPr lang="en-US" sz="950" dirty="0"/>
+          </a:p>
+        </p:txBody>
+      </p:sp>
+      <p:sp>
+        <p:nvSpPr>
+          <p:cNvPr id="70" name="Shape 59"/>
           <p:cNvSpPr/>
           <p:nvPr/>
         </p:nvSpPr>
@@ -8388,14 +8816,70 @@
       </p:sp>
       <p:sp>
         <p:nvSpPr>
-          <p:cNvPr id="55" name="Text 52"/>
-          <p:cNvSpPr/>
-          <p:nvPr/>
-        </p:nvSpPr>
-        <p:spPr>
-          <a:xfrm>
-            <a:off x="7891272" y="3849624"/>
-            <a:ext cx="2916936" cy="457200"/>
+          <p:cNvPr id="71" name="Shape 60"/>
+          <p:cNvSpPr/>
+          <p:nvPr/>
+        </p:nvSpPr>
+        <p:spPr>
+          <a:xfrm>
+            <a:off x="7936992" y="3968496"/>
+            <a:ext cx="566928" cy="566928"/>
+          </a:xfrm>
+          <a:prstGeom prst="ellipse">
+            <a:avLst/>
+          </a:prstGeom>
+          <a:solidFill>
+            <a:srgbClr val="FFFFFF"/>
+          </a:solidFill>
+          <a:ln w="12700">
+            <a:solidFill>
+              <a:srgbClr val="FFFFFF"/>
+            </a:solidFill>
+            <a:prstDash val="solid"/>
+          </a:ln>
+          <a:effectLst>
+            <a:outerShdw sx="100000" sy="100000" kx="0" ky="0" algn="bl" rotWithShape="0" blurRad="38100" dist="12700" dir="16200000">
+              <a:srgbClr val="000000">
+                <a:alpha val="15000"/>
+              </a:srgbClr>
+            </a:outerShdw>
+          </a:effectLst>
+        </p:spPr>
+      </p:sp>
+      <p:pic>
+        <p:nvPicPr>
+          <p:cNvPr id="72" name="Image 9" descr="C:\Claude\MCG Full Stack\generators\assets\icons\governance.png">    </p:cNvPr>
+          <p:cNvPicPr>
+            <a:picLocks noChangeAspect="1"/>
+          </p:cNvPicPr>
+          <p:nvPr/>
+        </p:nvPicPr>
+        <p:blipFill>
+          <a:blip r:embed="rId10"/>
+          <a:stretch>
+            <a:fillRect/>
+          </a:stretch>
+        </p:blipFill>
+        <p:spPr>
+          <a:xfrm>
+            <a:off x="8044708" y="4076212"/>
+            <a:ext cx="351495" cy="351495"/>
+          </a:xfrm>
+          <a:prstGeom prst="rect">
+            <a:avLst/>
+          </a:prstGeom>
+        </p:spPr>
+      </p:pic>
+      <p:sp>
+        <p:nvSpPr>
+          <p:cNvPr id="73" name="Text 61"/>
+          <p:cNvSpPr/>
+          <p:nvPr/>
+        </p:nvSpPr>
+        <p:spPr>
+          <a:xfrm>
+            <a:off x="8631936" y="3867912"/>
+            <a:ext cx="2157984" cy="438912"/>
           </a:xfrm>
           <a:prstGeom prst="rect">
             <a:avLst/>
@@ -8407,7 +8891,7 @@
           <a:bodyPr wrap="square" rtlCol="0" anchor="b"/>
           <a:lstStyle/>
           <a:p>
-            <a:pPr algn="ctr" indent="0" marL="0">
+            <a:pPr algn="l" indent="0" marL="0">
               <a:buNone/>
             </a:pPr>
             <a:r>
@@ -8427,14 +8911,14 @@
       </p:sp>
       <p:sp>
         <p:nvSpPr>
-          <p:cNvPr id="56" name="Text 53"/>
-          <p:cNvSpPr/>
-          <p:nvPr/>
-        </p:nvSpPr>
-        <p:spPr>
-          <a:xfrm>
-            <a:off x="7891272" y="4270248"/>
-            <a:ext cx="2916936" cy="384048"/>
+          <p:cNvPr id="74" name="Text 62"/>
+          <p:cNvSpPr/>
+          <p:nvPr/>
+        </p:nvSpPr>
+        <p:spPr>
+          <a:xfrm>
+            <a:off x="8631936" y="4251960"/>
+            <a:ext cx="2157984" cy="402336"/>
           </a:xfrm>
           <a:prstGeom prst="rect">
             <a:avLst/>
@@ -8446,16 +8930,16 @@
           <a:bodyPr wrap="square" rtlCol="0" anchor="t"/>
           <a:lstStyle/>
           <a:p>
-            <a:pPr algn="ctr" indent="0" marL="0">
+            <a:pPr algn="l" indent="0" marL="0">
               <a:lnSpc>
-                <a:spcPct val="105000"/>
+                <a:spcPct val="102000"/>
               </a:lnSpc>
               <a:buNone/>
             </a:pPr>
             <a:r>
-              <a:rPr lang="en-US" sz="1000" dirty="0">
-                <a:solidFill>
-                  <a:srgbClr val="D0D4D7"/>
+              <a:rPr lang="en-US" sz="950" dirty="0">
+                <a:solidFill>
+                  <a:srgbClr val="D8DCE0"/>
                 </a:solidFill>
                 <a:latin typeface="Inter" pitchFamily="34" charset="0"/>
                 <a:ea typeface="Inter" pitchFamily="34" charset="-122"/>
@@ -8463,19 +8947,19 @@
               </a:rPr>
               <a:t>Trust Score • Stewardship</a:t>
             </a:r>
-            <a:endParaRPr lang="en-US" sz="1000" dirty="0"/>
-          </a:p>
-          <a:p>
-            <a:pPr algn="ctr" indent="0" marL="0">
+            <a:endParaRPr lang="en-US" sz="950" dirty="0"/>
+          </a:p>
+          <a:p>
+            <a:pPr algn="l" indent="0" marL="0">
               <a:lnSpc>
-                <a:spcPct val="105000"/>
+                <a:spcPct val="102000"/>
               </a:lnSpc>
               <a:buNone/>
             </a:pPr>
             <a:r>
-              <a:rPr lang="en-US" sz="1000" dirty="0">
-                <a:solidFill>
-                  <a:srgbClr val="D0D4D7"/>
+              <a:rPr lang="en-US" sz="950" dirty="0">
+                <a:solidFill>
+                  <a:srgbClr val="D8DCE0"/>
                 </a:solidFill>
                 <a:latin typeface="Inter" pitchFamily="34" charset="0"/>
                 <a:ea typeface="Inter" pitchFamily="34" charset="-122"/>
@@ -8483,13 +8967,13 @@
               </a:rPr>
               <a:t>Glossary • Lineage</a:t>
             </a:r>
-            <a:endParaRPr lang="en-US" sz="1000" dirty="0"/>
-          </a:p>
-        </p:txBody>
-      </p:sp>
-      <p:sp>
-        <p:nvSpPr>
-          <p:cNvPr id="57" name="Shape 54"/>
+            <a:endParaRPr lang="en-US" sz="950" dirty="0"/>
+          </a:p>
+        </p:txBody>
+      </p:sp>
+      <p:sp>
+        <p:nvSpPr>
+          <p:cNvPr id="75" name="Shape 63"/>
           <p:cNvSpPr/>
           <p:nvPr/>
         </p:nvSpPr>
@@ -8513,7 +8997,7 @@
       </p:sp>
       <p:sp>
         <p:nvSpPr>
-          <p:cNvPr id="58" name="Shape 55"/>
+          <p:cNvPr id="76" name="Shape 64"/>
           <p:cNvSpPr/>
           <p:nvPr/>
         </p:nvSpPr>
@@ -8537,7 +9021,7 @@
       </p:sp>
       <p:sp>
         <p:nvSpPr>
-          <p:cNvPr id="59" name="Shape 56"/>
+          <p:cNvPr id="77" name="Shape 65"/>
           <p:cNvSpPr/>
           <p:nvPr/>
         </p:nvSpPr>
@@ -8561,7 +9045,7 @@
       </p:sp>
       <p:sp>
         <p:nvSpPr>
-          <p:cNvPr id="60" name="Shape 57"/>
+          <p:cNvPr id="78" name="Shape 66"/>
           <p:cNvSpPr/>
           <p:nvPr/>
         </p:nvSpPr>
@@ -8595,14 +9079,70 @@
       </p:sp>
       <p:sp>
         <p:nvSpPr>
-          <p:cNvPr id="61" name="Text 58"/>
-          <p:cNvSpPr/>
-          <p:nvPr/>
-        </p:nvSpPr>
-        <p:spPr>
-          <a:xfrm>
-            <a:off x="2039112" y="5129784"/>
-            <a:ext cx="1956816" cy="457200"/>
+          <p:cNvPr id="79" name="Shape 67"/>
+          <p:cNvSpPr/>
+          <p:nvPr/>
+        </p:nvSpPr>
+        <p:spPr>
+          <a:xfrm>
+            <a:off x="2084832" y="5248656"/>
+            <a:ext cx="566928" cy="566928"/>
+          </a:xfrm>
+          <a:prstGeom prst="ellipse">
+            <a:avLst/>
+          </a:prstGeom>
+          <a:solidFill>
+            <a:srgbClr val="FFFFFF"/>
+          </a:solidFill>
+          <a:ln w="12700">
+            <a:solidFill>
+              <a:srgbClr val="FFFFFF"/>
+            </a:solidFill>
+            <a:prstDash val="solid"/>
+          </a:ln>
+          <a:effectLst>
+            <a:outerShdw sx="100000" sy="100000" kx="0" ky="0" algn="bl" rotWithShape="0" blurRad="38100" dist="12700" dir="16200000">
+              <a:srgbClr val="000000">
+                <a:alpha val="15000"/>
+              </a:srgbClr>
+            </a:outerShdw>
+          </a:effectLst>
+        </p:spPr>
+      </p:sp>
+      <p:pic>
+        <p:nvPicPr>
+          <p:cNvPr id="80" name="Image 10" descr="C:\Claude\MCG Full Stack\generators\assets\icons\answers.png">    </p:cNvPr>
+          <p:cNvPicPr>
+            <a:picLocks noChangeAspect="1"/>
+          </p:cNvPicPr>
+          <p:nvPr/>
+        </p:nvPicPr>
+        <p:blipFill>
+          <a:blip r:embed="rId11"/>
+          <a:stretch>
+            <a:fillRect/>
+          </a:stretch>
+        </p:blipFill>
+        <p:spPr>
+          <a:xfrm>
+            <a:off x="2192548" y="5356372"/>
+            <a:ext cx="351495" cy="351495"/>
+          </a:xfrm>
+          <a:prstGeom prst="rect">
+            <a:avLst/>
+          </a:prstGeom>
+        </p:spPr>
+      </p:pic>
+      <p:sp>
+        <p:nvSpPr>
+          <p:cNvPr id="81" name="Text 68"/>
+          <p:cNvSpPr/>
+          <p:nvPr/>
+        </p:nvSpPr>
+        <p:spPr>
+          <a:xfrm>
+            <a:off x="2779776" y="5148072"/>
+            <a:ext cx="1197864" cy="438912"/>
           </a:xfrm>
           <a:prstGeom prst="rect">
             <a:avLst/>
@@ -8614,7 +9154,7 @@
           <a:bodyPr wrap="square" rtlCol="0" anchor="b"/>
           <a:lstStyle/>
           <a:p>
-            <a:pPr algn="ctr" indent="0" marL="0">
+            <a:pPr algn="l" indent="0" marL="0">
               <a:buNone/>
             </a:pPr>
             <a:r>
@@ -8634,14 +9174,14 @@
       </p:sp>
       <p:sp>
         <p:nvSpPr>
-          <p:cNvPr id="62" name="Text 59"/>
-          <p:cNvSpPr/>
-          <p:nvPr/>
-        </p:nvSpPr>
-        <p:spPr>
-          <a:xfrm>
-            <a:off x="2039112" y="5550408"/>
-            <a:ext cx="1956816" cy="384048"/>
+          <p:cNvPr id="82" name="Text 69"/>
+          <p:cNvSpPr/>
+          <p:nvPr/>
+        </p:nvSpPr>
+        <p:spPr>
+          <a:xfrm>
+            <a:off x="2779776" y="5532120"/>
+            <a:ext cx="1197864" cy="402336"/>
           </a:xfrm>
           <a:prstGeom prst="rect">
             <a:avLst/>
@@ -8653,16 +9193,16 @@
           <a:bodyPr wrap="square" rtlCol="0" anchor="t"/>
           <a:lstStyle/>
           <a:p>
-            <a:pPr algn="ctr" indent="0" marL="0">
+            <a:pPr algn="l" indent="0" marL="0">
               <a:lnSpc>
-                <a:spcPct val="105000"/>
+                <a:spcPct val="102000"/>
               </a:lnSpc>
               <a:buNone/>
             </a:pPr>
             <a:r>
-              <a:rPr lang="en-US" sz="1000" dirty="0">
-                <a:solidFill>
-                  <a:srgbClr val="D0D4D7"/>
+              <a:rPr lang="en-US" sz="950" dirty="0">
+                <a:solidFill>
+                  <a:srgbClr val="D8DCE0"/>
                 </a:solidFill>
                 <a:latin typeface="Inter" pitchFamily="34" charset="0"/>
                 <a:ea typeface="Inter" pitchFamily="34" charset="-122"/>
@@ -8670,19 +9210,19 @@
               </a:rPr>
               <a:t>25 DOCX docs</a:t>
             </a:r>
-            <a:endParaRPr lang="en-US" sz="1000" dirty="0"/>
-          </a:p>
-          <a:p>
-            <a:pPr algn="ctr" indent="0" marL="0">
+            <a:endParaRPr lang="en-US" sz="950" dirty="0"/>
+          </a:p>
+          <a:p>
+            <a:pPr algn="l" indent="0" marL="0">
               <a:lnSpc>
-                <a:spcPct val="105000"/>
+                <a:spcPct val="102000"/>
               </a:lnSpc>
               <a:buNone/>
             </a:pPr>
             <a:r>
-              <a:rPr lang="en-US" sz="1000" dirty="0">
-                <a:solidFill>
-                  <a:srgbClr val="D0D4D7"/>
+              <a:rPr lang="en-US" sz="950" dirty="0">
+                <a:solidFill>
+                  <a:srgbClr val="D8DCE0"/>
                 </a:solidFill>
                 <a:latin typeface="Inter" pitchFamily="34" charset="0"/>
                 <a:ea typeface="Inter" pitchFamily="34" charset="-122"/>
@@ -8690,13 +9230,13 @@
               </a:rPr>
               <a:t>Knowledge base</a:t>
             </a:r>
-            <a:endParaRPr lang="en-US" sz="1000" dirty="0"/>
-          </a:p>
-        </p:txBody>
-      </p:sp>
-      <p:sp>
-        <p:nvSpPr>
-          <p:cNvPr id="63" name="Shape 60"/>
+            <a:endParaRPr lang="en-US" sz="950" dirty="0"/>
+          </a:p>
+        </p:txBody>
+      </p:sp>
+      <p:sp>
+        <p:nvSpPr>
+          <p:cNvPr id="83" name="Shape 70"/>
           <p:cNvSpPr/>
           <p:nvPr/>
         </p:nvSpPr>
@@ -8730,14 +9270,70 @@
       </p:sp>
       <p:sp>
         <p:nvSpPr>
-          <p:cNvPr id="64" name="Text 61"/>
-          <p:cNvSpPr/>
-          <p:nvPr/>
-        </p:nvSpPr>
-        <p:spPr>
-          <a:xfrm>
-            <a:off x="4325112" y="5129784"/>
-            <a:ext cx="1956816" cy="457200"/>
+          <p:cNvPr id="84" name="Shape 71"/>
+          <p:cNvSpPr/>
+          <p:nvPr/>
+        </p:nvSpPr>
+        <p:spPr>
+          <a:xfrm>
+            <a:off x="4370832" y="5248656"/>
+            <a:ext cx="566928" cy="566928"/>
+          </a:xfrm>
+          <a:prstGeom prst="ellipse">
+            <a:avLst/>
+          </a:prstGeom>
+          <a:solidFill>
+            <a:srgbClr val="FFFFFF"/>
+          </a:solidFill>
+          <a:ln w="12700">
+            <a:solidFill>
+              <a:srgbClr val="FFFFFF"/>
+            </a:solidFill>
+            <a:prstDash val="solid"/>
+          </a:ln>
+          <a:effectLst>
+            <a:outerShdw sx="100000" sy="100000" kx="0" ky="0" algn="bl" rotWithShape="0" blurRad="38100" dist="12700" dir="16200000">
+              <a:srgbClr val="000000">
+                <a:alpha val="15000"/>
+              </a:srgbClr>
+            </a:outerShdw>
+          </a:effectLst>
+        </p:spPr>
+      </p:sp>
+      <p:pic>
+        <p:nvPicPr>
+          <p:cNvPr id="85" name="Image 11" descr="C:\Claude\MCG Full Stack\generators\assets\icons\agent.png">    </p:cNvPr>
+          <p:cNvPicPr>
+            <a:picLocks noChangeAspect="1"/>
+          </p:cNvPicPr>
+          <p:nvPr/>
+        </p:nvPicPr>
+        <p:blipFill>
+          <a:blip r:embed="rId12"/>
+          <a:stretch>
+            <a:fillRect/>
+          </a:stretch>
+        </p:blipFill>
+        <p:spPr>
+          <a:xfrm>
+            <a:off x="4478548" y="5356372"/>
+            <a:ext cx="351495" cy="351495"/>
+          </a:xfrm>
+          <a:prstGeom prst="rect">
+            <a:avLst/>
+          </a:prstGeom>
+        </p:spPr>
+      </p:pic>
+      <p:sp>
+        <p:nvSpPr>
+          <p:cNvPr id="86" name="Text 72"/>
+          <p:cNvSpPr/>
+          <p:nvPr/>
+        </p:nvSpPr>
+        <p:spPr>
+          <a:xfrm>
+            <a:off x="5065776" y="5148072"/>
+            <a:ext cx="1197864" cy="438912"/>
           </a:xfrm>
           <a:prstGeom prst="rect">
             <a:avLst/>
@@ -8749,7 +9345,7 @@
           <a:bodyPr wrap="square" rtlCol="0" anchor="b"/>
           <a:lstStyle/>
           <a:p>
-            <a:pPr algn="ctr" indent="0" marL="0">
+            <a:pPr algn="l" indent="0" marL="0">
               <a:buNone/>
             </a:pPr>
             <a:r>
@@ -8769,14 +9365,14 @@
       </p:sp>
       <p:sp>
         <p:nvSpPr>
-          <p:cNvPr id="65" name="Text 62"/>
-          <p:cNvSpPr/>
-          <p:nvPr/>
-        </p:nvSpPr>
-        <p:spPr>
-          <a:xfrm>
-            <a:off x="4325112" y="5550408"/>
-            <a:ext cx="1956816" cy="384048"/>
+          <p:cNvPr id="87" name="Text 73"/>
+          <p:cNvSpPr/>
+          <p:nvPr/>
+        </p:nvSpPr>
+        <p:spPr>
+          <a:xfrm>
+            <a:off x="5065776" y="5532120"/>
+            <a:ext cx="1197864" cy="402336"/>
           </a:xfrm>
           <a:prstGeom prst="rect">
             <a:avLst/>
@@ -8788,16 +9384,16 @@
           <a:bodyPr wrap="square" rtlCol="0" anchor="t"/>
           <a:lstStyle/>
           <a:p>
-            <a:pPr algn="ctr" indent="0" marL="0">
+            <a:pPr algn="l" indent="0" marL="0">
               <a:lnSpc>
-                <a:spcPct val="105000"/>
+                <a:spcPct val="102000"/>
               </a:lnSpc>
               <a:buNone/>
             </a:pPr>
             <a:r>
-              <a:rPr lang="en-US" sz="1000" dirty="0">
-                <a:solidFill>
-                  <a:srgbClr val="D0D4D7"/>
+              <a:rPr lang="en-US" sz="950" dirty="0">
+                <a:solidFill>
+                  <a:srgbClr val="D8DCE0"/>
                 </a:solidFill>
                 <a:latin typeface="Inter" pitchFamily="34" charset="0"/>
                 <a:ea typeface="Inter" pitchFamily="34" charset="-122"/>
@@ -8805,19 +9401,19 @@
               </a:rPr>
               <a:t>Anomaly detection</a:t>
             </a:r>
-            <a:endParaRPr lang="en-US" sz="1000" dirty="0"/>
-          </a:p>
-          <a:p>
-            <a:pPr algn="ctr" indent="0" marL="0">
+            <a:endParaRPr lang="en-US" sz="950" dirty="0"/>
+          </a:p>
+          <a:p>
+            <a:pPr algn="l" indent="0" marL="0">
               <a:lnSpc>
-                <a:spcPct val="105000"/>
+                <a:spcPct val="102000"/>
               </a:lnSpc>
               <a:buNone/>
             </a:pPr>
             <a:r>
-              <a:rPr lang="en-US" sz="1000" dirty="0">
-                <a:solidFill>
-                  <a:srgbClr val="D0D4D7"/>
+              <a:rPr lang="en-US" sz="950" dirty="0">
+                <a:solidFill>
+                  <a:srgbClr val="D8DCE0"/>
                 </a:solidFill>
                 <a:latin typeface="Inter" pitchFamily="34" charset="0"/>
                 <a:ea typeface="Inter" pitchFamily="34" charset="-122"/>
@@ -8825,13 +9421,13 @@
               </a:rPr>
               <a:t>Proactive alerts</a:t>
             </a:r>
-            <a:endParaRPr lang="en-US" sz="1000" dirty="0"/>
-          </a:p>
-        </p:txBody>
-      </p:sp>
-      <p:sp>
-        <p:nvSpPr>
-          <p:cNvPr id="66" name="Shape 63"/>
+            <a:endParaRPr lang="en-US" sz="950" dirty="0"/>
+          </a:p>
+        </p:txBody>
+      </p:sp>
+      <p:sp>
+        <p:nvSpPr>
+          <p:cNvPr id="88" name="Shape 74"/>
           <p:cNvSpPr/>
           <p:nvPr/>
         </p:nvSpPr>
@@ -8865,14 +9461,70 @@
       </p:sp>
       <p:sp>
         <p:nvSpPr>
-          <p:cNvPr id="67" name="Text 64"/>
-          <p:cNvSpPr/>
-          <p:nvPr/>
-        </p:nvSpPr>
-        <p:spPr>
-          <a:xfrm>
-            <a:off x="6611112" y="5129784"/>
-            <a:ext cx="1956816" cy="457200"/>
+          <p:cNvPr id="89" name="Shape 75"/>
+          <p:cNvSpPr/>
+          <p:nvPr/>
+        </p:nvSpPr>
+        <p:spPr>
+          <a:xfrm>
+            <a:off x="6656832" y="5248656"/>
+            <a:ext cx="566928" cy="566928"/>
+          </a:xfrm>
+          <a:prstGeom prst="ellipse">
+            <a:avLst/>
+          </a:prstGeom>
+          <a:solidFill>
+            <a:srgbClr val="FFFFFF"/>
+          </a:solidFill>
+          <a:ln w="12700">
+            <a:solidFill>
+              <a:srgbClr val="FFFFFF"/>
+            </a:solidFill>
+            <a:prstDash val="solid"/>
+          </a:ln>
+          <a:effectLst>
+            <a:outerShdw sx="100000" sy="100000" kx="0" ky="0" algn="bl" rotWithShape="0" blurRad="38100" dist="12700" dir="16200000">
+              <a:srgbClr val="000000">
+                <a:alpha val="15000"/>
+              </a:srgbClr>
+            </a:outerShdw>
+          </a:effectLst>
+        </p:spPr>
+      </p:sp>
+      <p:pic>
+        <p:nvPicPr>
+          <p:cNvPr id="90" name="Image 12" descr="C:\Claude\MCG Full Stack\generators\assets\icons\mcp.png">    </p:cNvPr>
+          <p:cNvPicPr>
+            <a:picLocks noChangeAspect="1"/>
+          </p:cNvPicPr>
+          <p:nvPr/>
+        </p:nvPicPr>
+        <p:blipFill>
+          <a:blip r:embed="rId13"/>
+          <a:stretch>
+            <a:fillRect/>
+          </a:stretch>
+        </p:blipFill>
+        <p:spPr>
+          <a:xfrm>
+            <a:off x="6764548" y="5356372"/>
+            <a:ext cx="351495" cy="351495"/>
+          </a:xfrm>
+          <a:prstGeom prst="rect">
+            <a:avLst/>
+          </a:prstGeom>
+        </p:spPr>
+      </p:pic>
+      <p:sp>
+        <p:nvSpPr>
+          <p:cNvPr id="91" name="Text 76"/>
+          <p:cNvSpPr/>
+          <p:nvPr/>
+        </p:nvSpPr>
+        <p:spPr>
+          <a:xfrm>
+            <a:off x="7351776" y="5148072"/>
+            <a:ext cx="1197864" cy="438912"/>
           </a:xfrm>
           <a:prstGeom prst="rect">
             <a:avLst/>
@@ -8884,7 +9536,7 @@
           <a:bodyPr wrap="square" rtlCol="0" anchor="b"/>
           <a:lstStyle/>
           <a:p>
-            <a:pPr algn="ctr" indent="0" marL="0">
+            <a:pPr algn="l" indent="0" marL="0">
               <a:buNone/>
             </a:pPr>
             <a:r>
@@ -8904,14 +9556,14 @@
       </p:sp>
       <p:sp>
         <p:nvSpPr>
-          <p:cNvPr id="68" name="Text 65"/>
-          <p:cNvSpPr/>
-          <p:nvPr/>
-        </p:nvSpPr>
-        <p:spPr>
-          <a:xfrm>
-            <a:off x="6611112" y="5550408"/>
-            <a:ext cx="1956816" cy="384048"/>
+          <p:cNvPr id="92" name="Text 77"/>
+          <p:cNvSpPr/>
+          <p:nvPr/>
+        </p:nvSpPr>
+        <p:spPr>
+          <a:xfrm>
+            <a:off x="7351776" y="5532120"/>
+            <a:ext cx="1197864" cy="402336"/>
           </a:xfrm>
           <a:prstGeom prst="rect">
             <a:avLst/>
@@ -8923,16 +9575,16 @@
           <a:bodyPr wrap="square" rtlCol="0" anchor="t"/>
           <a:lstStyle/>
           <a:p>
-            <a:pPr algn="ctr" indent="0" marL="0">
+            <a:pPr algn="l" indent="0" marL="0">
               <a:lnSpc>
-                <a:spcPct val="105000"/>
+                <a:spcPct val="102000"/>
               </a:lnSpc>
               <a:buNone/>
             </a:pPr>
             <a:r>
-              <a:rPr lang="en-US" sz="1000" dirty="0">
-                <a:solidFill>
-                  <a:srgbClr val="D0D4D7"/>
+              <a:rPr lang="en-US" sz="950" dirty="0">
+                <a:solidFill>
+                  <a:srgbClr val="D8DCE0"/>
                 </a:solidFill>
                 <a:latin typeface="Inter" pitchFamily="34" charset="0"/>
                 <a:ea typeface="Inter" pitchFamily="34" charset="-122"/>
@@ -8940,19 +9592,19 @@
               </a:rPr>
               <a:t>Claude integration</a:t>
             </a:r>
-            <a:endParaRPr lang="en-US" sz="1000" dirty="0"/>
-          </a:p>
-          <a:p>
-            <a:pPr algn="ctr" indent="0" marL="0">
+            <a:endParaRPr lang="en-US" sz="950" dirty="0"/>
+          </a:p>
+          <a:p>
+            <a:pPr algn="l" indent="0" marL="0">
               <a:lnSpc>
-                <a:spcPct val="105000"/>
+                <a:spcPct val="102000"/>
               </a:lnSpc>
               <a:buNone/>
             </a:pPr>
             <a:r>
-              <a:rPr lang="en-US" sz="1000" dirty="0">
-                <a:solidFill>
-                  <a:srgbClr val="D0D4D7"/>
+              <a:rPr lang="en-US" sz="950" dirty="0">
+                <a:solidFill>
+                  <a:srgbClr val="D8DCE0"/>
                 </a:solidFill>
                 <a:latin typeface="Inter" pitchFamily="34" charset="0"/>
                 <a:ea typeface="Inter" pitchFamily="34" charset="-122"/>
@@ -8960,13 +9612,13 @@
               </a:rPr>
               <a:t>Agentic queries</a:t>
             </a:r>
-            <a:endParaRPr lang="en-US" sz="1000" dirty="0"/>
-          </a:p>
-        </p:txBody>
-      </p:sp>
-      <p:sp>
-        <p:nvSpPr>
-          <p:cNvPr id="69" name="Shape 66"/>
+            <a:endParaRPr lang="en-US" sz="950" dirty="0"/>
+          </a:p>
+        </p:txBody>
+      </p:sp>
+      <p:sp>
+        <p:nvSpPr>
+          <p:cNvPr id="93" name="Shape 78"/>
           <p:cNvSpPr/>
           <p:nvPr/>
         </p:nvSpPr>
@@ -9000,14 +9652,70 @@
       </p:sp>
       <p:sp>
         <p:nvSpPr>
-          <p:cNvPr id="70" name="Text 67"/>
-          <p:cNvSpPr/>
-          <p:nvPr/>
-        </p:nvSpPr>
-        <p:spPr>
-          <a:xfrm>
-            <a:off x="8897112" y="5129784"/>
-            <a:ext cx="1911096" cy="457200"/>
+          <p:cNvPr id="94" name="Shape 79"/>
+          <p:cNvSpPr/>
+          <p:nvPr/>
+        </p:nvSpPr>
+        <p:spPr>
+          <a:xfrm>
+            <a:off x="8942832" y="5248656"/>
+            <a:ext cx="566928" cy="566928"/>
+          </a:xfrm>
+          <a:prstGeom prst="ellipse">
+            <a:avLst/>
+          </a:prstGeom>
+          <a:solidFill>
+            <a:srgbClr val="FFFFFF"/>
+          </a:solidFill>
+          <a:ln w="12700">
+            <a:solidFill>
+              <a:srgbClr val="FFFFFF"/>
+            </a:solidFill>
+            <a:prstDash val="solid"/>
+          </a:ln>
+          <a:effectLst>
+            <a:outerShdw sx="100000" sy="100000" kx="0" ky="0" algn="bl" rotWithShape="0" blurRad="38100" dist="12700" dir="16200000">
+              <a:srgbClr val="000000">
+                <a:alpha val="15000"/>
+              </a:srgbClr>
+            </a:outerShdw>
+          </a:effectLst>
+        </p:spPr>
+      </p:sp>
+      <p:pic>
+        <p:nvPicPr>
+          <p:cNvPr id="95" name="Image 13" descr="C:\Claude\MCG Full Stack\generators\assets\icons\automation.png">    </p:cNvPr>
+          <p:cNvPicPr>
+            <a:picLocks noChangeAspect="1"/>
+          </p:cNvPicPr>
+          <p:nvPr/>
+        </p:nvPicPr>
+        <p:blipFill>
+          <a:blip r:embed="rId14"/>
+          <a:stretch>
+            <a:fillRect/>
+          </a:stretch>
+        </p:blipFill>
+        <p:spPr>
+          <a:xfrm>
+            <a:off x="9050548" y="5356372"/>
+            <a:ext cx="351495" cy="351495"/>
+          </a:xfrm>
+          <a:prstGeom prst="rect">
+            <a:avLst/>
+          </a:prstGeom>
+        </p:spPr>
+      </p:pic>
+      <p:sp>
+        <p:nvSpPr>
+          <p:cNvPr id="96" name="Text 80"/>
+          <p:cNvSpPr/>
+          <p:nvPr/>
+        </p:nvSpPr>
+        <p:spPr>
+          <a:xfrm>
+            <a:off x="9637776" y="5148072"/>
+            <a:ext cx="1152144" cy="438912"/>
           </a:xfrm>
           <a:prstGeom prst="rect">
             <a:avLst/>
@@ -9019,7 +9727,7 @@
           <a:bodyPr wrap="square" rtlCol="0" anchor="b"/>
           <a:lstStyle/>
           <a:p>
-            <a:pPr algn="ctr" indent="0" marL="0">
+            <a:pPr algn="l" indent="0" marL="0">
               <a:buNone/>
             </a:pPr>
             <a:r>
@@ -9039,14 +9747,14 @@
       </p:sp>
       <p:sp>
         <p:nvSpPr>
-          <p:cNvPr id="71" name="Text 68"/>
-          <p:cNvSpPr/>
-          <p:nvPr/>
-        </p:nvSpPr>
-        <p:spPr>
-          <a:xfrm>
-            <a:off x="8897112" y="5550408"/>
-            <a:ext cx="1911096" cy="384048"/>
+          <p:cNvPr id="97" name="Text 81"/>
+          <p:cNvSpPr/>
+          <p:nvPr/>
+        </p:nvSpPr>
+        <p:spPr>
+          <a:xfrm>
+            <a:off x="9637776" y="5532120"/>
+            <a:ext cx="1152144" cy="402336"/>
           </a:xfrm>
           <a:prstGeom prst="rect">
             <a:avLst/>
@@ -9058,16 +9766,16 @@
           <a:bodyPr wrap="square" rtlCol="0" anchor="t"/>
           <a:lstStyle/>
           <a:p>
-            <a:pPr algn="ctr" indent="0" marL="0">
+            <a:pPr algn="l" indent="0" marL="0">
               <a:lnSpc>
-                <a:spcPct val="105000"/>
+                <a:spcPct val="102000"/>
               </a:lnSpc>
               <a:buNone/>
             </a:pPr>
             <a:r>
-              <a:rPr lang="en-US" sz="1000" dirty="0">
-                <a:solidFill>
-                  <a:srgbClr val="D0D4D7"/>
+              <a:rPr lang="en-US" sz="950" dirty="0">
+                <a:solidFill>
+                  <a:srgbClr val="D8DCE0"/>
                 </a:solidFill>
                 <a:latin typeface="Inter" pitchFamily="34" charset="0"/>
                 <a:ea typeface="Inter" pitchFamily="34" charset="-122"/>
@@ -9075,19 +9783,19 @@
               </a:rPr>
               <a:t>Teams alerts</a:t>
             </a:r>
-            <a:endParaRPr lang="en-US" sz="1000" dirty="0"/>
-          </a:p>
-          <a:p>
-            <a:pPr algn="ctr" indent="0" marL="0">
+            <a:endParaRPr lang="en-US" sz="950" dirty="0"/>
+          </a:p>
+          <a:p>
+            <a:pPr algn="l" indent="0" marL="0">
               <a:lnSpc>
-                <a:spcPct val="105000"/>
+                <a:spcPct val="102000"/>
               </a:lnSpc>
               <a:buNone/>
             </a:pPr>
             <a:r>
-              <a:rPr lang="en-US" sz="1000" dirty="0">
-                <a:solidFill>
-                  <a:srgbClr val="D0D4D7"/>
+              <a:rPr lang="en-US" sz="950" dirty="0">
+                <a:solidFill>
+                  <a:srgbClr val="D8DCE0"/>
                 </a:solidFill>
                 <a:latin typeface="Inter" pitchFamily="34" charset="0"/>
                 <a:ea typeface="Inter" pitchFamily="34" charset="-122"/>
@@ -9095,13 +9803,13 @@
               </a:rPr>
               <a:t>Talend jobs</a:t>
             </a:r>
-            <a:endParaRPr lang="en-US" sz="1000" dirty="0"/>
-          </a:p>
-        </p:txBody>
-      </p:sp>
-      <p:sp>
-        <p:nvSpPr>
-          <p:cNvPr id="72" name="Shape 69"/>
+            <a:endParaRPr lang="en-US" sz="950" dirty="0"/>
+          </a:p>
+        </p:txBody>
+      </p:sp>
+      <p:sp>
+        <p:nvSpPr>
+          <p:cNvPr id="98" name="Shape 82"/>
           <p:cNvSpPr/>
           <p:nvPr/>
         </p:nvSpPr>
@@ -9128,7 +9836,7 @@
       </p:sp>
       <p:sp>
         <p:nvSpPr>
-          <p:cNvPr id="73" name="Text 70"/>
+          <p:cNvPr id="99" name="Text 83"/>
           <p:cNvSpPr/>
           <p:nvPr/>
         </p:nvSpPr>
@@ -11307,14 +12015,70 @@
       </p:sp>
       <p:sp>
         <p:nvSpPr>
-          <p:cNvPr id="10" name="Text 7"/>
-          <p:cNvSpPr/>
-          <p:nvPr/>
-        </p:nvSpPr>
-        <p:spPr>
-          <a:xfrm>
-            <a:off x="621792" y="1837944"/>
-            <a:ext cx="2962656" cy="502920"/>
+          <p:cNvPr id="10" name="Shape 7"/>
+          <p:cNvSpPr/>
+          <p:nvPr/>
+        </p:nvSpPr>
+        <p:spPr>
+          <a:xfrm>
+            <a:off x="667512" y="2002536"/>
+            <a:ext cx="566928" cy="566928"/>
+          </a:xfrm>
+          <a:prstGeom prst="ellipse">
+            <a:avLst/>
+          </a:prstGeom>
+          <a:solidFill>
+            <a:srgbClr val="FFFFFF"/>
+          </a:solidFill>
+          <a:ln w="12700">
+            <a:solidFill>
+              <a:srgbClr val="FFFFFF"/>
+            </a:solidFill>
+            <a:prstDash val="solid"/>
+          </a:ln>
+          <a:effectLst>
+            <a:outerShdw sx="100000" sy="100000" kx="0" ky="0" algn="bl" rotWithShape="0" blurRad="38100" dist="12700" dir="16200000">
+              <a:srgbClr val="000000">
+                <a:alpha val="15000"/>
+              </a:srgbClr>
+            </a:outerShdw>
+          </a:effectLst>
+        </p:spPr>
+      </p:sp>
+      <p:pic>
+        <p:nvPicPr>
+          <p:cNvPr id="11" name="Image 1" descr="C:\Claude\MCG Full Stack\generators\assets\icons\database.png">    </p:cNvPr>
+          <p:cNvPicPr>
+            <a:picLocks noChangeAspect="1"/>
+          </p:cNvPicPr>
+          <p:nvPr/>
+        </p:nvPicPr>
+        <p:blipFill>
+          <a:blip r:embed="rId2"/>
+          <a:stretch>
+            <a:fillRect/>
+          </a:stretch>
+        </p:blipFill>
+        <p:spPr>
+          <a:xfrm>
+            <a:off x="775228" y="2110252"/>
+            <a:ext cx="351495" cy="351495"/>
+          </a:xfrm>
+          <a:prstGeom prst="rect">
+            <a:avLst/>
+          </a:prstGeom>
+        </p:spPr>
+      </p:pic>
+      <p:sp>
+        <p:nvSpPr>
+          <p:cNvPr id="12" name="Text 8"/>
+          <p:cNvSpPr/>
+          <p:nvPr/>
+        </p:nvSpPr>
+        <p:spPr>
+          <a:xfrm>
+            <a:off x="1362456" y="1856232"/>
+            <a:ext cx="2203704" cy="484632"/>
           </a:xfrm>
           <a:prstGeom prst="rect">
             <a:avLst/>
@@ -11326,7 +12090,7 @@
           <a:bodyPr wrap="square" rtlCol="0" anchor="b"/>
           <a:lstStyle/>
           <a:p>
-            <a:pPr algn="ctr" indent="0" marL="0">
+            <a:pPr algn="l" indent="0" marL="0">
               <a:buNone/>
             </a:pPr>
             <a:r>
@@ -11346,14 +12110,14 @@
       </p:sp>
       <p:sp>
         <p:nvSpPr>
-          <p:cNvPr id="11" name="Text 8"/>
-          <p:cNvSpPr/>
-          <p:nvPr/>
-        </p:nvSpPr>
-        <p:spPr>
-          <a:xfrm>
-            <a:off x="621792" y="2304288"/>
-            <a:ext cx="2962656" cy="422453"/>
+          <p:cNvPr id="13" name="Text 9"/>
+          <p:cNvSpPr/>
+          <p:nvPr/>
+        </p:nvSpPr>
+        <p:spPr>
+          <a:xfrm>
+            <a:off x="1362456" y="2286000"/>
+            <a:ext cx="2203704" cy="448056"/>
           </a:xfrm>
           <a:prstGeom prst="rect">
             <a:avLst/>
@@ -11365,16 +12129,16 @@
           <a:bodyPr wrap="square" rtlCol="0" anchor="t"/>
           <a:lstStyle/>
           <a:p>
-            <a:pPr algn="ctr" indent="0" marL="0">
+            <a:pPr algn="l" indent="0" marL="0">
               <a:lnSpc>
-                <a:spcPct val="105000"/>
+                <a:spcPct val="102000"/>
               </a:lnSpc>
               <a:buNone/>
             </a:pPr>
             <a:r>
-              <a:rPr lang="en-US" sz="1000" dirty="0">
-                <a:solidFill>
-                  <a:srgbClr val="D0D4D7"/>
+              <a:rPr lang="en-US" sz="950" dirty="0">
+                <a:solidFill>
+                  <a:srgbClr val="D8DCE0"/>
                 </a:solidFill>
                 <a:latin typeface="Inter" pitchFamily="34" charset="0"/>
                 <a:ea typeface="Inter" pitchFamily="34" charset="-122"/>
@@ -11382,19 +12146,19 @@
               </a:rPr>
               <a:t>PostgreSQL • MySQL • SQL Server</a:t>
             </a:r>
-            <a:endParaRPr lang="en-US" sz="1000" dirty="0"/>
-          </a:p>
-          <a:p>
-            <a:pPr algn="ctr" indent="0" marL="0">
+            <a:endParaRPr lang="en-US" sz="950" dirty="0"/>
+          </a:p>
+          <a:p>
+            <a:pPr algn="l" indent="0" marL="0">
               <a:lnSpc>
-                <a:spcPct val="105000"/>
+                <a:spcPct val="102000"/>
               </a:lnSpc>
               <a:buNone/>
             </a:pPr>
             <a:r>
-              <a:rPr lang="en-US" sz="1000" dirty="0">
-                <a:solidFill>
-                  <a:srgbClr val="D0D4D7"/>
+              <a:rPr lang="en-US" sz="950" dirty="0">
+                <a:solidFill>
+                  <a:srgbClr val="D8DCE0"/>
                 </a:solidFill>
                 <a:latin typeface="Inter" pitchFamily="34" charset="0"/>
                 <a:ea typeface="Inter" pitchFamily="34" charset="-122"/>
@@ -11402,13 +12166,13 @@
               </a:rPr>
               <a:t>(mcg-qlik-dmg container)</a:t>
             </a:r>
-            <a:endParaRPr lang="en-US" sz="1000" dirty="0"/>
-          </a:p>
-        </p:txBody>
-      </p:sp>
-      <p:sp>
-        <p:nvSpPr>
-          <p:cNvPr id="12" name="Shape 9"/>
+            <a:endParaRPr lang="en-US" sz="950" dirty="0"/>
+          </a:p>
+        </p:txBody>
+      </p:sp>
+      <p:sp>
+        <p:nvSpPr>
+          <p:cNvPr id="14" name="Shape 10"/>
           <p:cNvSpPr/>
           <p:nvPr/>
         </p:nvSpPr>
@@ -11442,14 +12206,70 @@
       </p:sp>
       <p:sp>
         <p:nvSpPr>
-          <p:cNvPr id="13" name="Text 10"/>
-          <p:cNvSpPr/>
-          <p:nvPr/>
-        </p:nvSpPr>
-        <p:spPr>
-          <a:xfrm>
-            <a:off x="4645152" y="1837944"/>
-            <a:ext cx="2962656" cy="502920"/>
+          <p:cNvPr id="15" name="Shape 11"/>
+          <p:cNvSpPr/>
+          <p:nvPr/>
+        </p:nvSpPr>
+        <p:spPr>
+          <a:xfrm>
+            <a:off x="4690872" y="2002536"/>
+            <a:ext cx="566928" cy="566928"/>
+          </a:xfrm>
+          <a:prstGeom prst="ellipse">
+            <a:avLst/>
+          </a:prstGeom>
+          <a:solidFill>
+            <a:srgbClr val="FFFFFF"/>
+          </a:solidFill>
+          <a:ln w="12700">
+            <a:solidFill>
+              <a:srgbClr val="FFFFFF"/>
+            </a:solidFill>
+            <a:prstDash val="solid"/>
+          </a:ln>
+          <a:effectLst>
+            <a:outerShdw sx="100000" sy="100000" kx="0" ky="0" algn="bl" rotWithShape="0" blurRad="38100" dist="12700" dir="16200000">
+              <a:srgbClr val="000000">
+                <a:alpha val="15000"/>
+              </a:srgbClr>
+            </a:outerShdw>
+          </a:effectLst>
+        </p:spPr>
+      </p:sp>
+      <p:pic>
+        <p:nvPicPr>
+          <p:cNvPr id="16" name="Image 2" descr="C:\Claude\MCG Full Stack\generators\assets\icons\gateway.png">    </p:cNvPr>
+          <p:cNvPicPr>
+            <a:picLocks noChangeAspect="1"/>
+          </p:cNvPicPr>
+          <p:nvPr/>
+        </p:nvPicPr>
+        <p:blipFill>
+          <a:blip r:embed="rId3"/>
+          <a:stretch>
+            <a:fillRect/>
+          </a:stretch>
+        </p:blipFill>
+        <p:spPr>
+          <a:xfrm>
+            <a:off x="4798588" y="2110252"/>
+            <a:ext cx="351495" cy="351495"/>
+          </a:xfrm>
+          <a:prstGeom prst="rect">
+            <a:avLst/>
+          </a:prstGeom>
+        </p:spPr>
+      </p:pic>
+      <p:sp>
+        <p:nvSpPr>
+          <p:cNvPr id="17" name="Text 12"/>
+          <p:cNvSpPr/>
+          <p:nvPr/>
+        </p:nvSpPr>
+        <p:spPr>
+          <a:xfrm>
+            <a:off x="5385816" y="1856232"/>
+            <a:ext cx="2203704" cy="484632"/>
           </a:xfrm>
           <a:prstGeom prst="rect">
             <a:avLst/>
@@ -11461,7 +12281,7 @@
           <a:bodyPr wrap="square" rtlCol="0" anchor="b"/>
           <a:lstStyle/>
           <a:p>
-            <a:pPr algn="ctr" indent="0" marL="0">
+            <a:pPr algn="l" indent="0" marL="0">
               <a:buNone/>
             </a:pPr>
             <a:r>
@@ -11481,14 +12301,14 @@
       </p:sp>
       <p:sp>
         <p:nvSpPr>
-          <p:cNvPr id="14" name="Text 11"/>
-          <p:cNvSpPr/>
-          <p:nvPr/>
-        </p:nvSpPr>
-        <p:spPr>
-          <a:xfrm>
-            <a:off x="4645152" y="2304288"/>
-            <a:ext cx="2962656" cy="422453"/>
+          <p:cNvPr id="18" name="Text 13"/>
+          <p:cNvSpPr/>
+          <p:nvPr/>
+        </p:nvSpPr>
+        <p:spPr>
+          <a:xfrm>
+            <a:off x="5385816" y="2286000"/>
+            <a:ext cx="2203704" cy="448056"/>
           </a:xfrm>
           <a:prstGeom prst="rect">
             <a:avLst/>
@@ -11500,16 +12320,16 @@
           <a:bodyPr wrap="square" rtlCol="0" anchor="t"/>
           <a:lstStyle/>
           <a:p>
-            <a:pPr algn="ctr" indent="0" marL="0">
+            <a:pPr algn="l" indent="0" marL="0">
               <a:lnSpc>
-                <a:spcPct val="105000"/>
+                <a:spcPct val="102000"/>
               </a:lnSpc>
               <a:buNone/>
             </a:pPr>
             <a:r>
-              <a:rPr lang="en-US" sz="1000" dirty="0">
-                <a:solidFill>
-                  <a:srgbClr val="D0D4D7"/>
+              <a:rPr lang="en-US" sz="950" dirty="0">
+                <a:solidFill>
+                  <a:srgbClr val="D8DCE0"/>
                 </a:solidFill>
                 <a:latin typeface="Inter" pitchFamily="34" charset="0"/>
                 <a:ea typeface="Inter" pitchFamily="34" charset="-122"/>
@@ -11517,19 +12337,19 @@
               </a:rPr>
               <a:t>Registered to tenant</a:t>
             </a:r>
-            <a:endParaRPr lang="en-US" sz="1000" dirty="0"/>
-          </a:p>
-          <a:p>
-            <a:pPr algn="ctr" indent="0" marL="0">
+            <a:endParaRPr lang="en-US" sz="950" dirty="0"/>
+          </a:p>
+          <a:p>
+            <a:pPr algn="l" indent="0" marL="0">
               <a:lnSpc>
-                <a:spcPct val="105000"/>
+                <a:spcPct val="102000"/>
               </a:lnSpc>
               <a:buNone/>
             </a:pPr>
             <a:r>
-              <a:rPr lang="en-US" sz="1000" dirty="0">
-                <a:solidFill>
-                  <a:srgbClr val="D0D4D7"/>
+              <a:rPr lang="en-US" sz="950" dirty="0">
+                <a:solidFill>
+                  <a:srgbClr val="D8DCE0"/>
                 </a:solidFill>
                 <a:latin typeface="Inter" pitchFamily="34" charset="0"/>
                 <a:ea typeface="Inter" pitchFamily="34" charset="-122"/>
@@ -11537,13 +12357,13 @@
               </a:rPr>
               <a:t>Outbound HTTPS 443</a:t>
             </a:r>
-            <a:endParaRPr lang="en-US" sz="1000" dirty="0"/>
-          </a:p>
-        </p:txBody>
-      </p:sp>
-      <p:sp>
-        <p:nvSpPr>
-          <p:cNvPr id="15" name="Shape 12"/>
+            <a:endParaRPr lang="en-US" sz="950" dirty="0"/>
+          </a:p>
+        </p:txBody>
+      </p:sp>
+      <p:sp>
+        <p:nvSpPr>
+          <p:cNvPr id="19" name="Shape 14"/>
           <p:cNvSpPr/>
           <p:nvPr/>
         </p:nvSpPr>
@@ -11577,14 +12397,70 @@
       </p:sp>
       <p:sp>
         <p:nvSpPr>
-          <p:cNvPr id="16" name="Text 13"/>
-          <p:cNvSpPr/>
-          <p:nvPr/>
-        </p:nvSpPr>
-        <p:spPr>
-          <a:xfrm>
-            <a:off x="8668512" y="1837944"/>
-            <a:ext cx="2871216" cy="502920"/>
+          <p:cNvPr id="20" name="Shape 15"/>
+          <p:cNvSpPr/>
+          <p:nvPr/>
+        </p:nvSpPr>
+        <p:spPr>
+          <a:xfrm>
+            <a:off x="8714232" y="2002536"/>
+            <a:ext cx="566928" cy="566928"/>
+          </a:xfrm>
+          <a:prstGeom prst="ellipse">
+            <a:avLst/>
+          </a:prstGeom>
+          <a:solidFill>
+            <a:srgbClr val="FFFFFF"/>
+          </a:solidFill>
+          <a:ln w="12700">
+            <a:solidFill>
+              <a:srgbClr val="FFFFFF"/>
+            </a:solidFill>
+            <a:prstDash val="solid"/>
+          </a:ln>
+          <a:effectLst>
+            <a:outerShdw sx="100000" sy="100000" kx="0" ky="0" algn="bl" rotWithShape="0" blurRad="38100" dist="12700" dir="16200000">
+              <a:srgbClr val="000000">
+                <a:alpha val="15000"/>
+              </a:srgbClr>
+            </a:outerShdw>
+          </a:effectLst>
+        </p:spPr>
+      </p:sp>
+      <p:pic>
+        <p:nvPicPr>
+          <p:cNvPr id="21" name="Image 3" descr="C:\Claude\MCG Full Stack\generators\assets\icons\cloud.png">    </p:cNvPr>
+          <p:cNvPicPr>
+            <a:picLocks noChangeAspect="1"/>
+          </p:cNvPicPr>
+          <p:nvPr/>
+        </p:nvPicPr>
+        <p:blipFill>
+          <a:blip r:embed="rId4"/>
+          <a:stretch>
+            <a:fillRect/>
+          </a:stretch>
+        </p:blipFill>
+        <p:spPr>
+          <a:xfrm>
+            <a:off x="8821948" y="2110252"/>
+            <a:ext cx="351495" cy="351495"/>
+          </a:xfrm>
+          <a:prstGeom prst="rect">
+            <a:avLst/>
+          </a:prstGeom>
+        </p:spPr>
+      </p:pic>
+      <p:sp>
+        <p:nvSpPr>
+          <p:cNvPr id="22" name="Text 16"/>
+          <p:cNvSpPr/>
+          <p:nvPr/>
+        </p:nvSpPr>
+        <p:spPr>
+          <a:xfrm>
+            <a:off x="9409176" y="1856232"/>
+            <a:ext cx="2112264" cy="484632"/>
           </a:xfrm>
           <a:prstGeom prst="rect">
             <a:avLst/>
@@ -11596,7 +12472,7 @@
           <a:bodyPr wrap="square" rtlCol="0" anchor="b"/>
           <a:lstStyle/>
           <a:p>
-            <a:pPr algn="ctr" indent="0" marL="0">
+            <a:pPr algn="l" indent="0" marL="0">
               <a:buNone/>
             </a:pPr>
             <a:r>
@@ -11616,14 +12492,14 @@
       </p:sp>
       <p:sp>
         <p:nvSpPr>
-          <p:cNvPr id="17" name="Text 14"/>
-          <p:cNvSpPr/>
-          <p:nvPr/>
-        </p:nvSpPr>
-        <p:spPr>
-          <a:xfrm>
-            <a:off x="8668512" y="2304288"/>
-            <a:ext cx="2871216" cy="422453"/>
+          <p:cNvPr id="23" name="Text 17"/>
+          <p:cNvSpPr/>
+          <p:nvPr/>
+        </p:nvSpPr>
+        <p:spPr>
+          <a:xfrm>
+            <a:off x="9409176" y="2286000"/>
+            <a:ext cx="2112264" cy="448056"/>
           </a:xfrm>
           <a:prstGeom prst="rect">
             <a:avLst/>
@@ -11635,16 +12511,16 @@
           <a:bodyPr wrap="square" rtlCol="0" anchor="t"/>
           <a:lstStyle/>
           <a:p>
-            <a:pPr algn="ctr" indent="0" marL="0">
+            <a:pPr algn="l" indent="0" marL="0">
               <a:lnSpc>
-                <a:spcPct val="105000"/>
+                <a:spcPct val="102000"/>
               </a:lnSpc>
               <a:buNone/>
             </a:pPr>
             <a:r>
-              <a:rPr lang="en-US" sz="1000" dirty="0">
-                <a:solidFill>
-                  <a:srgbClr val="D0D4D7"/>
+              <a:rPr lang="en-US" sz="950" dirty="0">
+                <a:solidFill>
+                  <a:srgbClr val="D8DCE0"/>
                 </a:solidFill>
                 <a:latin typeface="Inter" pitchFamily="34" charset="0"/>
                 <a:ea typeface="Inter" pitchFamily="34" charset="-122"/>
@@ -11652,19 +12528,19 @@
               </a:rPr>
               <a:t>Data Integration project</a:t>
             </a:r>
-            <a:endParaRPr lang="en-US" sz="1000" dirty="0"/>
-          </a:p>
-          <a:p>
-            <a:pPr algn="ctr" indent="0" marL="0">
+            <a:endParaRPr lang="en-US" sz="950" dirty="0"/>
+          </a:p>
+          <a:p>
+            <a:pPr algn="l" indent="0" marL="0">
               <a:lnSpc>
-                <a:spcPct val="105000"/>
+                <a:spcPct val="102000"/>
               </a:lnSpc>
               <a:buNone/>
             </a:pPr>
             <a:r>
-              <a:rPr lang="en-US" sz="1000" dirty="0">
-                <a:solidFill>
-                  <a:srgbClr val="D0D4D7"/>
+              <a:rPr lang="en-US" sz="950" dirty="0">
+                <a:solidFill>
+                  <a:srgbClr val="D8DCE0"/>
                 </a:solidFill>
                 <a:latin typeface="Inter" pitchFamily="34" charset="0"/>
                 <a:ea typeface="Inter" pitchFamily="34" charset="-122"/>
@@ -11672,13 +12548,13 @@
               </a:rPr>
               <a:t>CDC → Open Lakehouse</a:t>
             </a:r>
-            <a:endParaRPr lang="en-US" sz="1000" dirty="0"/>
-          </a:p>
-        </p:txBody>
-      </p:sp>
-      <p:sp>
-        <p:nvSpPr>
-          <p:cNvPr id="18" name="Shape 15"/>
+            <a:endParaRPr lang="en-US" sz="950" dirty="0"/>
+          </a:p>
+        </p:txBody>
+      </p:sp>
+      <p:sp>
+        <p:nvSpPr>
+          <p:cNvPr id="24" name="Shape 18"/>
           <p:cNvSpPr/>
           <p:nvPr/>
         </p:nvSpPr>
@@ -11702,7 +12578,7 @@
       </p:sp>
       <p:sp>
         <p:nvSpPr>
-          <p:cNvPr id="19" name="Shape 16"/>
+          <p:cNvPr id="25" name="Shape 19"/>
           <p:cNvSpPr/>
           <p:nvPr/>
         </p:nvSpPr>
@@ -11726,7 +12602,7 @@
       </p:sp>
       <p:sp>
         <p:nvSpPr>
-          <p:cNvPr id="20" name="Text 17"/>
+          <p:cNvPr id="26" name="Text 20"/>
           <p:cNvSpPr/>
           <p:nvPr/>
         </p:nvSpPr>
@@ -11765,7 +12641,7 @@
       </p:sp>
       <p:sp>
         <p:nvSpPr>
-          <p:cNvPr id="21" name="Text 18"/>
+          <p:cNvPr id="27" name="Text 21"/>
           <p:cNvSpPr/>
           <p:nvPr/>
         </p:nvSpPr>
@@ -11804,7 +12680,7 @@
       </p:sp>
       <p:sp>
         <p:nvSpPr>
-          <p:cNvPr id="22" name="Text 19"/>
+          <p:cNvPr id="28" name="Text 22"/>
           <p:cNvSpPr/>
           <p:nvPr/>
         </p:nvSpPr>
@@ -11843,7 +12719,7 @@
       </p:sp>
       <p:sp>
         <p:nvSpPr>
-          <p:cNvPr id="23" name="Text 20"/>
+          <p:cNvPr id="29" name="Text 23"/>
           <p:cNvSpPr/>
           <p:nvPr/>
         </p:nvSpPr>
@@ -11882,7 +12758,7 @@
       </p:sp>
       <p:sp>
         <p:nvSpPr>
-          <p:cNvPr id="24" name="Text 21"/>
+          <p:cNvPr id="30" name="Text 24"/>
           <p:cNvSpPr/>
           <p:nvPr/>
         </p:nvSpPr>
@@ -11921,7 +12797,7 @@
       </p:sp>
       <p:sp>
         <p:nvSpPr>
-          <p:cNvPr id="25" name="Text 22"/>
+          <p:cNvPr id="31" name="Text 25"/>
           <p:cNvSpPr/>
           <p:nvPr/>
         </p:nvSpPr>
@@ -11960,7 +12836,7 @@
       </p:sp>
       <p:sp>
         <p:nvSpPr>
-          <p:cNvPr id="26" name="Text 23"/>
+          <p:cNvPr id="32" name="Text 26"/>
           <p:cNvSpPr/>
           <p:nvPr/>
         </p:nvSpPr>
@@ -11999,7 +12875,7 @@
       </p:sp>
       <p:sp>
         <p:nvSpPr>
-          <p:cNvPr id="27" name="Text 24"/>
+          <p:cNvPr id="33" name="Text 27"/>
           <p:cNvSpPr/>
           <p:nvPr/>
         </p:nvSpPr>
@@ -12038,7 +12914,7 @@
       </p:sp>
       <p:sp>
         <p:nvSpPr>
-          <p:cNvPr id="28" name="Shape 25"/>
+          <p:cNvPr id="34" name="Shape 28"/>
           <p:cNvSpPr/>
           <p:nvPr/>
         </p:nvSpPr>
@@ -12065,7 +12941,7 @@
       </p:sp>
       <p:sp>
         <p:nvSpPr>
-          <p:cNvPr id="29" name="Text 26"/>
+          <p:cNvPr id="35" name="Text 29"/>
           <p:cNvSpPr/>
           <p:nvPr/>
         </p:nvSpPr>
@@ -16704,7 +17580,63 @@
       </p:sp>
       <p:sp>
         <p:nvSpPr>
-          <p:cNvPr id="9" name="Text 6"/>
+          <p:cNvPr id="9" name="Shape 6"/>
+          <p:cNvSpPr/>
+          <p:nvPr/>
+        </p:nvSpPr>
+        <p:spPr>
+          <a:xfrm>
+            <a:off x="621792" y="1033272"/>
+            <a:ext cx="329184" cy="329184"/>
+          </a:xfrm>
+          <a:prstGeom prst="ellipse">
+            <a:avLst/>
+          </a:prstGeom>
+          <a:solidFill>
+            <a:srgbClr val="FFFFFF"/>
+          </a:solidFill>
+          <a:ln w="12700">
+            <a:solidFill>
+              <a:srgbClr val="19416C"/>
+            </a:solidFill>
+            <a:prstDash val="solid"/>
+          </a:ln>
+          <a:effectLst>
+            <a:outerShdw sx="100000" sy="100000" kx="0" ky="0" algn="bl" rotWithShape="0" blurRad="38100" dist="12700" dir="16200000">
+              <a:srgbClr val="000000">
+                <a:alpha val="15000"/>
+              </a:srgbClr>
+            </a:outerShdw>
+          </a:effectLst>
+        </p:spPr>
+      </p:sp>
+      <p:pic>
+        <p:nvPicPr>
+          <p:cNvPr id="10" name="Image 1" descr="C:\Claude\MCG Full Stack\generators\assets\icons\analytics.png">    </p:cNvPr>
+          <p:cNvPicPr>
+            <a:picLocks noChangeAspect="1"/>
+          </p:cNvPicPr>
+          <p:nvPr/>
+        </p:nvPicPr>
+        <p:blipFill>
+          <a:blip r:embed="rId2"/>
+          <a:stretch>
+            <a:fillRect/>
+          </a:stretch>
+        </p:blipFill>
+        <p:spPr>
+          <a:xfrm>
+            <a:off x="684337" y="1095817"/>
+            <a:ext cx="204094" cy="204094"/>
+          </a:xfrm>
+          <a:prstGeom prst="rect">
+            <a:avLst/>
+          </a:prstGeom>
+        </p:spPr>
+      </p:pic>
+      <p:sp>
+        <p:nvSpPr>
+          <p:cNvPr id="11" name="Text 7"/>
           <p:cNvSpPr/>
           <p:nvPr/>
         </p:nvSpPr>
@@ -16743,7 +17675,7 @@
       </p:sp>
       <p:sp>
         <p:nvSpPr>
-          <p:cNvPr id="10" name="Shape 7"/>
+          <p:cNvPr id="12" name="Shape 8"/>
           <p:cNvSpPr/>
           <p:nvPr/>
         </p:nvSpPr>
@@ -16777,7 +17709,7 @@
       </p:sp>
       <p:sp>
         <p:nvSpPr>
-          <p:cNvPr id="11" name="Text 8"/>
+          <p:cNvPr id="13" name="Text 9"/>
           <p:cNvSpPr/>
           <p:nvPr/>
         </p:nvSpPr>
@@ -16816,7 +17748,7 @@
       </p:sp>
       <p:sp>
         <p:nvSpPr>
-          <p:cNvPr id="12" name="Text 9"/>
+          <p:cNvPr id="14" name="Text 10"/>
           <p:cNvSpPr/>
           <p:nvPr/>
         </p:nvSpPr>
@@ -16878,7 +17810,7 @@
       </p:sp>
       <p:sp>
         <p:nvSpPr>
-          <p:cNvPr id="13" name="Shape 10"/>
+          <p:cNvPr id="15" name="Shape 11"/>
           <p:cNvSpPr/>
           <p:nvPr/>
         </p:nvSpPr>
@@ -16912,7 +17844,7 @@
       </p:sp>
       <p:sp>
         <p:nvSpPr>
-          <p:cNvPr id="14" name="Text 11"/>
+          <p:cNvPr id="16" name="Text 12"/>
           <p:cNvSpPr/>
           <p:nvPr/>
         </p:nvSpPr>
@@ -16951,7 +17883,7 @@
       </p:sp>
       <p:sp>
         <p:nvSpPr>
-          <p:cNvPr id="15" name="Text 12"/>
+          <p:cNvPr id="17" name="Text 13"/>
           <p:cNvSpPr/>
           <p:nvPr/>
         </p:nvSpPr>
@@ -17013,7 +17945,7 @@
       </p:sp>
       <p:sp>
         <p:nvSpPr>
-          <p:cNvPr id="16" name="Text 13"/>
+          <p:cNvPr id="18" name="Text 14"/>
           <p:cNvSpPr/>
           <p:nvPr/>
         </p:nvSpPr>
@@ -17052,7 +17984,7 @@
       </p:sp>
       <p:sp>
         <p:nvSpPr>
-          <p:cNvPr id="17" name="Shape 14"/>
+          <p:cNvPr id="19" name="Shape 15"/>
           <p:cNvSpPr/>
           <p:nvPr/>
         </p:nvSpPr>
@@ -17079,7 +18011,63 @@
       </p:sp>
       <p:sp>
         <p:nvSpPr>
-          <p:cNvPr id="18" name="Text 15"/>
+          <p:cNvPr id="20" name="Shape 16"/>
+          <p:cNvSpPr/>
+          <p:nvPr/>
+        </p:nvSpPr>
+        <p:spPr>
+          <a:xfrm>
+            <a:off x="6428232" y="1033272"/>
+            <a:ext cx="329184" cy="329184"/>
+          </a:xfrm>
+          <a:prstGeom prst="ellipse">
+            <a:avLst/>
+          </a:prstGeom>
+          <a:solidFill>
+            <a:srgbClr val="FFFFFF"/>
+          </a:solidFill>
+          <a:ln w="12700">
+            <a:solidFill>
+              <a:srgbClr val="006580"/>
+            </a:solidFill>
+            <a:prstDash val="solid"/>
+          </a:ln>
+          <a:effectLst>
+            <a:outerShdw sx="100000" sy="100000" kx="0" ky="0" algn="bl" rotWithShape="0" blurRad="38100" dist="12700" dir="16200000">
+              <a:srgbClr val="000000">
+                <a:alpha val="15000"/>
+              </a:srgbClr>
+            </a:outerShdw>
+          </a:effectLst>
+        </p:spPr>
+      </p:sp>
+      <p:pic>
+        <p:nvPicPr>
+          <p:cNvPr id="21" name="Image 2" descr="C:\Claude\MCG Full Stack\generators\assets\icons\predict.png">    </p:cNvPr>
+          <p:cNvPicPr>
+            <a:picLocks noChangeAspect="1"/>
+          </p:cNvPicPr>
+          <p:nvPr/>
+        </p:nvPicPr>
+        <p:blipFill>
+          <a:blip r:embed="rId3"/>
+          <a:stretch>
+            <a:fillRect/>
+          </a:stretch>
+        </p:blipFill>
+        <p:spPr>
+          <a:xfrm>
+            <a:off x="6490777" y="1095817"/>
+            <a:ext cx="204094" cy="204094"/>
+          </a:xfrm>
+          <a:prstGeom prst="rect">
+            <a:avLst/>
+          </a:prstGeom>
+        </p:spPr>
+      </p:pic>
+      <p:sp>
+        <p:nvSpPr>
+          <p:cNvPr id="22" name="Text 17"/>
           <p:cNvSpPr/>
           <p:nvPr/>
         </p:nvSpPr>
@@ -17118,7 +18106,7 @@
       </p:sp>
       <p:sp>
         <p:nvSpPr>
-          <p:cNvPr id="19" name="Shape 16"/>
+          <p:cNvPr id="23" name="Shape 18"/>
           <p:cNvSpPr/>
           <p:nvPr/>
         </p:nvSpPr>
@@ -17152,7 +18140,7 @@
       </p:sp>
       <p:sp>
         <p:nvSpPr>
-          <p:cNvPr id="20" name="Text 17"/>
+          <p:cNvPr id="24" name="Text 19"/>
           <p:cNvSpPr/>
           <p:nvPr/>
         </p:nvSpPr>
@@ -17191,7 +18179,7 @@
       </p:sp>
       <p:sp>
         <p:nvSpPr>
-          <p:cNvPr id="21" name="Text 18"/>
+          <p:cNvPr id="25" name="Text 20"/>
           <p:cNvSpPr/>
           <p:nvPr/>
         </p:nvSpPr>
@@ -17253,7 +18241,7 @@
       </p:sp>
       <p:sp>
         <p:nvSpPr>
-          <p:cNvPr id="22" name="Shape 19"/>
+          <p:cNvPr id="26" name="Shape 21"/>
           <p:cNvSpPr/>
           <p:nvPr/>
         </p:nvSpPr>
@@ -17287,7 +18275,7 @@
       </p:sp>
       <p:sp>
         <p:nvSpPr>
-          <p:cNvPr id="23" name="Text 20"/>
+          <p:cNvPr id="27" name="Text 22"/>
           <p:cNvSpPr/>
           <p:nvPr/>
         </p:nvSpPr>
@@ -17326,7 +18314,7 @@
       </p:sp>
       <p:sp>
         <p:nvSpPr>
-          <p:cNvPr id="24" name="Text 21"/>
+          <p:cNvPr id="28" name="Text 23"/>
           <p:cNvSpPr/>
           <p:nvPr/>
         </p:nvSpPr>
@@ -17388,7 +18376,7 @@
       </p:sp>
       <p:sp>
         <p:nvSpPr>
-          <p:cNvPr id="25" name="Text 22"/>
+          <p:cNvPr id="29" name="Text 24"/>
           <p:cNvSpPr/>
           <p:nvPr/>
         </p:nvSpPr>
@@ -17427,7 +18415,7 @@
       </p:sp>
       <p:sp>
         <p:nvSpPr>
-          <p:cNvPr id="26" name="Shape 23"/>
+          <p:cNvPr id="30" name="Shape 25"/>
           <p:cNvSpPr/>
           <p:nvPr/>
         </p:nvSpPr>
@@ -17454,7 +18442,63 @@
       </p:sp>
       <p:sp>
         <p:nvSpPr>
-          <p:cNvPr id="27" name="Text 24"/>
+          <p:cNvPr id="31" name="Shape 26"/>
+          <p:cNvSpPr/>
+          <p:nvPr/>
+        </p:nvSpPr>
+        <p:spPr>
+          <a:xfrm>
+            <a:off x="621792" y="3712464"/>
+            <a:ext cx="329184" cy="329184"/>
+          </a:xfrm>
+          <a:prstGeom prst="ellipse">
+            <a:avLst/>
+          </a:prstGeom>
+          <a:solidFill>
+            <a:srgbClr val="FFFFFF"/>
+          </a:solidFill>
+          <a:ln w="12700">
+            <a:solidFill>
+              <a:srgbClr val="4CB393"/>
+            </a:solidFill>
+            <a:prstDash val="solid"/>
+          </a:ln>
+          <a:effectLst>
+            <a:outerShdw sx="100000" sy="100000" kx="0" ky="0" algn="bl" rotWithShape="0" blurRad="38100" dist="12700" dir="16200000">
+              <a:srgbClr val="000000">
+                <a:alpha val="15000"/>
+              </a:srgbClr>
+            </a:outerShdw>
+          </a:effectLst>
+        </p:spPr>
+      </p:sp>
+      <p:pic>
+        <p:nvPicPr>
+          <p:cNvPr id="32" name="Image 3" descr="C:\Claude\MCG Full Stack\generators\assets\icons\agent.png">    </p:cNvPr>
+          <p:cNvPicPr>
+            <a:picLocks noChangeAspect="1"/>
+          </p:cNvPicPr>
+          <p:nvPr/>
+        </p:nvPicPr>
+        <p:blipFill>
+          <a:blip r:embed="rId4"/>
+          <a:stretch>
+            <a:fillRect/>
+          </a:stretch>
+        </p:blipFill>
+        <p:spPr>
+          <a:xfrm>
+            <a:off x="684337" y="3775009"/>
+            <a:ext cx="204094" cy="204094"/>
+          </a:xfrm>
+          <a:prstGeom prst="rect">
+            <a:avLst/>
+          </a:prstGeom>
+        </p:spPr>
+      </p:pic>
+      <p:sp>
+        <p:nvSpPr>
+          <p:cNvPr id="33" name="Text 27"/>
           <p:cNvSpPr/>
           <p:nvPr/>
         </p:nvSpPr>
@@ -17493,7 +18537,7 @@
       </p:sp>
       <p:sp>
         <p:nvSpPr>
-          <p:cNvPr id="28" name="Shape 25"/>
+          <p:cNvPr id="34" name="Shape 28"/>
           <p:cNvSpPr/>
           <p:nvPr/>
         </p:nvSpPr>
@@ -17527,30 +18571,86 @@
       </p:sp>
       <p:sp>
         <p:nvSpPr>
-          <p:cNvPr id="29" name="Text 26"/>
-          <p:cNvSpPr/>
-          <p:nvPr/>
-        </p:nvSpPr>
-        <p:spPr>
-          <a:xfrm>
-            <a:off x="758952" y="4261104"/>
-            <a:ext cx="2231136" cy="868680"/>
-          </a:xfrm>
-          <a:prstGeom prst="rect">
-            <a:avLst/>
-          </a:prstGeom>
-          <a:noFill/>
-          <a:ln/>
-        </p:spPr>
-        <p:txBody>
-          <a:bodyPr wrap="square" rtlCol="0" anchor="b"/>
+          <p:cNvPr id="35" name="Shape 29"/>
+          <p:cNvSpPr/>
+          <p:nvPr/>
+        </p:nvSpPr>
+        <p:spPr>
+          <a:xfrm>
+            <a:off x="1600200" y="4352544"/>
+            <a:ext cx="548640" cy="548640"/>
+          </a:xfrm>
+          <a:prstGeom prst="ellipse">
+            <a:avLst/>
+          </a:prstGeom>
+          <a:solidFill>
+            <a:srgbClr val="FFFFFF"/>
+          </a:solidFill>
+          <a:ln w="12700">
+            <a:solidFill>
+              <a:srgbClr val="FFFFFF"/>
+            </a:solidFill>
+            <a:prstDash val="solid"/>
+          </a:ln>
+          <a:effectLst>
+            <a:outerShdw sx="100000" sy="100000" kx="0" ky="0" algn="bl" rotWithShape="0" blurRad="38100" dist="12700" dir="16200000">
+              <a:srgbClr val="000000">
+                <a:alpha val="15000"/>
+              </a:srgbClr>
+            </a:outerShdw>
+          </a:effectLst>
+        </p:spPr>
+      </p:sp>
+      <p:pic>
+        <p:nvPicPr>
+          <p:cNvPr id="36" name="Image 4" descr="C:\Claude\MCG Full Stack\generators\assets\icons\answers.png">    </p:cNvPr>
+          <p:cNvPicPr>
+            <a:picLocks noChangeAspect="1"/>
+          </p:cNvPicPr>
+          <p:nvPr/>
+        </p:nvPicPr>
+        <p:blipFill>
+          <a:blip r:embed="rId5"/>
+          <a:stretch>
+            <a:fillRect/>
+          </a:stretch>
+        </p:blipFill>
+        <p:spPr>
+          <a:xfrm>
+            <a:off x="1704442" y="4456786"/>
+            <a:ext cx="340157" cy="340157"/>
+          </a:xfrm>
+          <a:prstGeom prst="rect">
+            <a:avLst/>
+          </a:prstGeom>
+        </p:spPr>
+      </p:pic>
+      <p:sp>
+        <p:nvSpPr>
+          <p:cNvPr id="37" name="Text 30"/>
+          <p:cNvSpPr/>
+          <p:nvPr/>
+        </p:nvSpPr>
+        <p:spPr>
+          <a:xfrm>
+            <a:off x="777240" y="4937760"/>
+            <a:ext cx="2194560" cy="310896"/>
+          </a:xfrm>
+          <a:prstGeom prst="rect">
+            <a:avLst/>
+          </a:prstGeom>
+          <a:noFill/>
+          <a:ln/>
+        </p:spPr>
+        <p:txBody>
+          <a:bodyPr wrap="square" rtlCol="0" anchor="t"/>
           <a:lstStyle/>
           <a:p>
             <a:pPr algn="ctr" indent="0" marL="0">
               <a:buNone/>
             </a:pPr>
             <a:r>
-              <a:rPr lang="en-US" sz="1200" b="1" dirty="0">
+              <a:rPr lang="en-US" sz="1300" b="1" dirty="0">
                 <a:solidFill>
                   <a:srgbClr val="FFFFFF"/>
                 </a:solidFill>
@@ -17560,20 +18660,20 @@
               </a:rPr>
               <a:t>Qlik Answers</a:t>
             </a:r>
-            <a:endParaRPr lang="en-US" sz="1200" dirty="0"/>
-          </a:p>
-        </p:txBody>
-      </p:sp>
-      <p:sp>
-        <p:nvSpPr>
-          <p:cNvPr id="30" name="Text 27"/>
-          <p:cNvSpPr/>
-          <p:nvPr/>
-        </p:nvSpPr>
-        <p:spPr>
-          <a:xfrm>
-            <a:off x="758952" y="5093208"/>
-            <a:ext cx="2231136" cy="729691"/>
+            <a:endParaRPr lang="en-US" sz="1300" dirty="0"/>
+          </a:p>
+        </p:txBody>
+      </p:sp>
+      <p:sp>
+        <p:nvSpPr>
+          <p:cNvPr id="38" name="Text 31"/>
+          <p:cNvSpPr/>
+          <p:nvPr/>
+        </p:nvSpPr>
+        <p:spPr>
+          <a:xfrm>
+            <a:off x="795528" y="5266944"/>
+            <a:ext cx="2157984" cy="621792"/>
           </a:xfrm>
           <a:prstGeom prst="rect">
             <a:avLst/>
@@ -17587,14 +18687,14 @@
           <a:p>
             <a:pPr algn="ctr" indent="0" marL="0">
               <a:lnSpc>
-                <a:spcPct val="105000"/>
+                <a:spcPct val="100000"/>
               </a:lnSpc>
               <a:buNone/>
             </a:pPr>
             <a:r>
-              <a:rPr lang="en-US" sz="1000" dirty="0">
-                <a:solidFill>
-                  <a:srgbClr val="D0D4D7"/>
+              <a:rPr lang="en-US" sz="950" dirty="0">
+                <a:solidFill>
+                  <a:srgbClr val="D8DCE0"/>
                 </a:solidFill>
                 <a:latin typeface="Inter" pitchFamily="34" charset="0"/>
                 <a:ea typeface="Inter" pitchFamily="34" charset="-122"/>
@@ -17602,19 +18702,19 @@
               </a:rPr>
               <a:t>25 DOCX docs</a:t>
             </a:r>
-            <a:endParaRPr lang="en-US" sz="1000" dirty="0"/>
+            <a:endParaRPr lang="en-US" sz="950" dirty="0"/>
           </a:p>
           <a:p>
             <a:pPr algn="ctr" indent="0" marL="0">
               <a:lnSpc>
-                <a:spcPct val="105000"/>
+                <a:spcPct val="100000"/>
               </a:lnSpc>
               <a:buNone/>
             </a:pPr>
             <a:r>
-              <a:rPr lang="en-US" sz="1000" dirty="0">
-                <a:solidFill>
-                  <a:srgbClr val="D0D4D7"/>
+              <a:rPr lang="en-US" sz="950" dirty="0">
+                <a:solidFill>
+                  <a:srgbClr val="D8DCE0"/>
                 </a:solidFill>
                 <a:latin typeface="Inter" pitchFamily="34" charset="0"/>
                 <a:ea typeface="Inter" pitchFamily="34" charset="-122"/>
@@ -17622,19 +18722,19 @@
               </a:rPr>
               <a:t>6 demo scenarios</a:t>
             </a:r>
-            <a:endParaRPr lang="en-US" sz="1000" dirty="0"/>
+            <a:endParaRPr lang="en-US" sz="950" dirty="0"/>
           </a:p>
           <a:p>
             <a:pPr algn="ctr" indent="0" marL="0">
               <a:lnSpc>
-                <a:spcPct val="105000"/>
+                <a:spcPct val="100000"/>
               </a:lnSpc>
               <a:buNone/>
             </a:pPr>
             <a:r>
-              <a:rPr lang="en-US" sz="1000" dirty="0">
-                <a:solidFill>
-                  <a:srgbClr val="D0D4D7"/>
+              <a:rPr lang="en-US" sz="950" dirty="0">
+                <a:solidFill>
+                  <a:srgbClr val="D8DCE0"/>
                 </a:solidFill>
                 <a:latin typeface="Inter" pitchFamily="34" charset="0"/>
                 <a:ea typeface="Inter" pitchFamily="34" charset="-122"/>
@@ -17642,13 +18742,13 @@
               </a:rPr>
               <a:t>Knowledge Mart</a:t>
             </a:r>
-            <a:endParaRPr lang="en-US" sz="1000" dirty="0"/>
-          </a:p>
-        </p:txBody>
-      </p:sp>
-      <p:sp>
-        <p:nvSpPr>
-          <p:cNvPr id="31" name="Shape 28"/>
+            <a:endParaRPr lang="en-US" sz="950" dirty="0"/>
+          </a:p>
+        </p:txBody>
+      </p:sp>
+      <p:sp>
+        <p:nvSpPr>
+          <p:cNvPr id="39" name="Shape 32"/>
           <p:cNvSpPr/>
           <p:nvPr/>
         </p:nvSpPr>
@@ -17682,30 +18782,86 @@
       </p:sp>
       <p:sp>
         <p:nvSpPr>
-          <p:cNvPr id="32" name="Text 29"/>
-          <p:cNvSpPr/>
-          <p:nvPr/>
-        </p:nvSpPr>
-        <p:spPr>
-          <a:xfrm>
-            <a:off x="3364992" y="4261104"/>
-            <a:ext cx="2231136" cy="868680"/>
-          </a:xfrm>
-          <a:prstGeom prst="rect">
-            <a:avLst/>
-          </a:prstGeom>
-          <a:noFill/>
-          <a:ln/>
-        </p:spPr>
-        <p:txBody>
-          <a:bodyPr wrap="square" rtlCol="0" anchor="b"/>
+          <p:cNvPr id="40" name="Shape 33"/>
+          <p:cNvSpPr/>
+          <p:nvPr/>
+        </p:nvSpPr>
+        <p:spPr>
+          <a:xfrm>
+            <a:off x="4206240" y="4352544"/>
+            <a:ext cx="548640" cy="548640"/>
+          </a:xfrm>
+          <a:prstGeom prst="ellipse">
+            <a:avLst/>
+          </a:prstGeom>
+          <a:solidFill>
+            <a:srgbClr val="FFFFFF"/>
+          </a:solidFill>
+          <a:ln w="12700">
+            <a:solidFill>
+              <a:srgbClr val="FFFFFF"/>
+            </a:solidFill>
+            <a:prstDash val="solid"/>
+          </a:ln>
+          <a:effectLst>
+            <a:outerShdw sx="100000" sy="100000" kx="0" ky="0" algn="bl" rotWithShape="0" blurRad="38100" dist="12700" dir="16200000">
+              <a:srgbClr val="000000">
+                <a:alpha val="15000"/>
+              </a:srgbClr>
+            </a:outerShdw>
+          </a:effectLst>
+        </p:spPr>
+      </p:sp>
+      <p:pic>
+        <p:nvPicPr>
+          <p:cNvPr id="41" name="Image 5" descr="C:\Claude\MCG Full Stack\generators\assets\icons\agent.png">    </p:cNvPr>
+          <p:cNvPicPr>
+            <a:picLocks noChangeAspect="1"/>
+          </p:cNvPicPr>
+          <p:nvPr/>
+        </p:nvPicPr>
+        <p:blipFill>
+          <a:blip r:embed="rId6"/>
+          <a:stretch>
+            <a:fillRect/>
+          </a:stretch>
+        </p:blipFill>
+        <p:spPr>
+          <a:xfrm>
+            <a:off x="4310482" y="4456786"/>
+            <a:ext cx="340157" cy="340157"/>
+          </a:xfrm>
+          <a:prstGeom prst="rect">
+            <a:avLst/>
+          </a:prstGeom>
+        </p:spPr>
+      </p:pic>
+      <p:sp>
+        <p:nvSpPr>
+          <p:cNvPr id="42" name="Text 34"/>
+          <p:cNvSpPr/>
+          <p:nvPr/>
+        </p:nvSpPr>
+        <p:spPr>
+          <a:xfrm>
+            <a:off x="3383280" y="4937760"/>
+            <a:ext cx="2194560" cy="310896"/>
+          </a:xfrm>
+          <a:prstGeom prst="rect">
+            <a:avLst/>
+          </a:prstGeom>
+          <a:noFill/>
+          <a:ln/>
+        </p:spPr>
+        <p:txBody>
+          <a:bodyPr wrap="square" rtlCol="0" anchor="t"/>
           <a:lstStyle/>
           <a:p>
             <a:pPr algn="ctr" indent="0" marL="0">
               <a:buNone/>
             </a:pPr>
             <a:r>
-              <a:rPr lang="en-US" sz="1200" b="1" dirty="0">
+              <a:rPr lang="en-US" sz="1300" b="1" dirty="0">
                 <a:solidFill>
                   <a:srgbClr val="FFFFFF"/>
                 </a:solidFill>
@@ -17715,20 +18871,20 @@
               </a:rPr>
               <a:t>Discovery Agent</a:t>
             </a:r>
-            <a:endParaRPr lang="en-US" sz="1200" dirty="0"/>
-          </a:p>
-        </p:txBody>
-      </p:sp>
-      <p:sp>
-        <p:nvSpPr>
-          <p:cNvPr id="33" name="Text 30"/>
-          <p:cNvSpPr/>
-          <p:nvPr/>
-        </p:nvSpPr>
-        <p:spPr>
-          <a:xfrm>
-            <a:off x="3364992" y="5093208"/>
-            <a:ext cx="2231136" cy="729691"/>
+            <a:endParaRPr lang="en-US" sz="1300" dirty="0"/>
+          </a:p>
+        </p:txBody>
+      </p:sp>
+      <p:sp>
+        <p:nvSpPr>
+          <p:cNvPr id="43" name="Text 35"/>
+          <p:cNvSpPr/>
+          <p:nvPr/>
+        </p:nvSpPr>
+        <p:spPr>
+          <a:xfrm>
+            <a:off x="3401568" y="5266944"/>
+            <a:ext cx="2157984" cy="621792"/>
           </a:xfrm>
           <a:prstGeom prst="rect">
             <a:avLst/>
@@ -17742,14 +18898,14 @@
           <a:p>
             <a:pPr algn="ctr" indent="0" marL="0">
               <a:lnSpc>
-                <a:spcPct val="105000"/>
+                <a:spcPct val="100000"/>
               </a:lnSpc>
               <a:buNone/>
             </a:pPr>
             <a:r>
-              <a:rPr lang="en-US" sz="1000" dirty="0">
-                <a:solidFill>
-                  <a:srgbClr val="D0D4D7"/>
+              <a:rPr lang="en-US" sz="950" dirty="0">
+                <a:solidFill>
+                  <a:srgbClr val="D8DCE0"/>
                 </a:solidFill>
                 <a:latin typeface="Inter" pitchFamily="34" charset="0"/>
                 <a:ea typeface="Inter" pitchFamily="34" charset="-122"/>
@@ -17757,19 +18913,19 @@
               </a:rPr>
               <a:t>Anomaly detection</a:t>
             </a:r>
-            <a:endParaRPr lang="en-US" sz="1000" dirty="0"/>
+            <a:endParaRPr lang="en-US" sz="950" dirty="0"/>
           </a:p>
           <a:p>
             <a:pPr algn="ctr" indent="0" marL="0">
               <a:lnSpc>
-                <a:spcPct val="105000"/>
+                <a:spcPct val="100000"/>
               </a:lnSpc>
               <a:buNone/>
             </a:pPr>
             <a:r>
-              <a:rPr lang="en-US" sz="1000" dirty="0">
-                <a:solidFill>
-                  <a:srgbClr val="D0D4D7"/>
+              <a:rPr lang="en-US" sz="950" dirty="0">
+                <a:solidFill>
+                  <a:srgbClr val="D8DCE0"/>
                 </a:solidFill>
                 <a:latin typeface="Inter" pitchFamily="34" charset="0"/>
                 <a:ea typeface="Inter" pitchFamily="34" charset="-122"/>
@@ -17777,19 +18933,19 @@
               </a:rPr>
               <a:t>TransFrio spoilage</a:t>
             </a:r>
-            <a:endParaRPr lang="en-US" sz="1000" dirty="0"/>
+            <a:endParaRPr lang="en-US" sz="950" dirty="0"/>
           </a:p>
           <a:p>
             <a:pPr algn="ctr" indent="0" marL="0">
               <a:lnSpc>
-                <a:spcPct val="105000"/>
+                <a:spcPct val="100000"/>
               </a:lnSpc>
               <a:buNone/>
             </a:pPr>
             <a:r>
-              <a:rPr lang="en-US" sz="1000" dirty="0">
-                <a:solidFill>
-                  <a:srgbClr val="D0D4D7"/>
+              <a:rPr lang="en-US" sz="950" dirty="0">
+                <a:solidFill>
+                  <a:srgbClr val="D8DCE0"/>
                 </a:solidFill>
                 <a:latin typeface="Inter" pitchFamily="34" charset="0"/>
                 <a:ea typeface="Inter" pitchFamily="34" charset="-122"/>
@@ -17797,13 +18953,13 @@
               </a:rPr>
               <a:t>Proactive alerts</a:t>
             </a:r>
-            <a:endParaRPr lang="en-US" sz="1000" dirty="0"/>
-          </a:p>
-        </p:txBody>
-      </p:sp>
-      <p:sp>
-        <p:nvSpPr>
-          <p:cNvPr id="34" name="Shape 31"/>
+            <a:endParaRPr lang="en-US" sz="950" dirty="0"/>
+          </a:p>
+        </p:txBody>
+      </p:sp>
+      <p:sp>
+        <p:nvSpPr>
+          <p:cNvPr id="44" name="Shape 36"/>
           <p:cNvSpPr/>
           <p:nvPr/>
         </p:nvSpPr>
@@ -17837,30 +18993,86 @@
       </p:sp>
       <p:sp>
         <p:nvSpPr>
-          <p:cNvPr id="35" name="Text 32"/>
-          <p:cNvSpPr/>
-          <p:nvPr/>
-        </p:nvSpPr>
-        <p:spPr>
-          <a:xfrm>
-            <a:off x="5971032" y="4261104"/>
-            <a:ext cx="2231136" cy="868680"/>
-          </a:xfrm>
-          <a:prstGeom prst="rect">
-            <a:avLst/>
-          </a:prstGeom>
-          <a:noFill/>
-          <a:ln/>
-        </p:spPr>
-        <p:txBody>
-          <a:bodyPr wrap="square" rtlCol="0" anchor="b"/>
+          <p:cNvPr id="45" name="Shape 37"/>
+          <p:cNvSpPr/>
+          <p:nvPr/>
+        </p:nvSpPr>
+        <p:spPr>
+          <a:xfrm>
+            <a:off x="6812280" y="4352544"/>
+            <a:ext cx="548640" cy="548640"/>
+          </a:xfrm>
+          <a:prstGeom prst="ellipse">
+            <a:avLst/>
+          </a:prstGeom>
+          <a:solidFill>
+            <a:srgbClr val="FFFFFF"/>
+          </a:solidFill>
+          <a:ln w="12700">
+            <a:solidFill>
+              <a:srgbClr val="FFFFFF"/>
+            </a:solidFill>
+            <a:prstDash val="solid"/>
+          </a:ln>
+          <a:effectLst>
+            <a:outerShdw sx="100000" sy="100000" kx="0" ky="0" algn="bl" rotWithShape="0" blurRad="38100" dist="12700" dir="16200000">
+              <a:srgbClr val="000000">
+                <a:alpha val="15000"/>
+              </a:srgbClr>
+            </a:outerShdw>
+          </a:effectLst>
+        </p:spPr>
+      </p:sp>
+      <p:pic>
+        <p:nvPicPr>
+          <p:cNvPr id="46" name="Image 6" descr="C:\Claude\MCG Full Stack\generators\assets\icons\mcp.png">    </p:cNvPr>
+          <p:cNvPicPr>
+            <a:picLocks noChangeAspect="1"/>
+          </p:cNvPicPr>
+          <p:nvPr/>
+        </p:nvPicPr>
+        <p:blipFill>
+          <a:blip r:embed="rId7"/>
+          <a:stretch>
+            <a:fillRect/>
+          </a:stretch>
+        </p:blipFill>
+        <p:spPr>
+          <a:xfrm>
+            <a:off x="6916522" y="4456786"/>
+            <a:ext cx="340157" cy="340157"/>
+          </a:xfrm>
+          <a:prstGeom prst="rect">
+            <a:avLst/>
+          </a:prstGeom>
+        </p:spPr>
+      </p:pic>
+      <p:sp>
+        <p:nvSpPr>
+          <p:cNvPr id="47" name="Text 38"/>
+          <p:cNvSpPr/>
+          <p:nvPr/>
+        </p:nvSpPr>
+        <p:spPr>
+          <a:xfrm>
+            <a:off x="5989320" y="4937760"/>
+            <a:ext cx="2194560" cy="310896"/>
+          </a:xfrm>
+          <a:prstGeom prst="rect">
+            <a:avLst/>
+          </a:prstGeom>
+          <a:noFill/>
+          <a:ln/>
+        </p:spPr>
+        <p:txBody>
+          <a:bodyPr wrap="square" rtlCol="0" anchor="t"/>
           <a:lstStyle/>
           <a:p>
             <a:pPr algn="ctr" indent="0" marL="0">
               <a:buNone/>
             </a:pPr>
             <a:r>
-              <a:rPr lang="en-US" sz="1200" b="1" dirty="0">
+              <a:rPr lang="en-US" sz="1300" b="1" dirty="0">
                 <a:solidFill>
                   <a:srgbClr val="FFFFFF"/>
                 </a:solidFill>
@@ -17870,20 +19082,20 @@
               </a:rPr>
               <a:t>MCP Server</a:t>
             </a:r>
-            <a:endParaRPr lang="en-US" sz="1200" dirty="0"/>
-          </a:p>
-        </p:txBody>
-      </p:sp>
-      <p:sp>
-        <p:nvSpPr>
-          <p:cNvPr id="36" name="Text 33"/>
-          <p:cNvSpPr/>
-          <p:nvPr/>
-        </p:nvSpPr>
-        <p:spPr>
-          <a:xfrm>
-            <a:off x="5971032" y="5093208"/>
-            <a:ext cx="2231136" cy="729691"/>
+            <a:endParaRPr lang="en-US" sz="1300" dirty="0"/>
+          </a:p>
+        </p:txBody>
+      </p:sp>
+      <p:sp>
+        <p:nvSpPr>
+          <p:cNvPr id="48" name="Text 39"/>
+          <p:cNvSpPr/>
+          <p:nvPr/>
+        </p:nvSpPr>
+        <p:spPr>
+          <a:xfrm>
+            <a:off x="6007608" y="5266944"/>
+            <a:ext cx="2157984" cy="621792"/>
           </a:xfrm>
           <a:prstGeom prst="rect">
             <a:avLst/>
@@ -17897,14 +19109,14 @@
           <a:p>
             <a:pPr algn="ctr" indent="0" marL="0">
               <a:lnSpc>
-                <a:spcPct val="105000"/>
+                <a:spcPct val="100000"/>
               </a:lnSpc>
               <a:buNone/>
             </a:pPr>
             <a:r>
-              <a:rPr lang="en-US" sz="1000" dirty="0">
-                <a:solidFill>
-                  <a:srgbClr val="D0D4D7"/>
+              <a:rPr lang="en-US" sz="950" dirty="0">
+                <a:solidFill>
+                  <a:srgbClr val="D8DCE0"/>
                 </a:solidFill>
                 <a:latin typeface="Inter" pitchFamily="34" charset="0"/>
                 <a:ea typeface="Inter" pitchFamily="34" charset="-122"/>
@@ -17912,19 +19124,19 @@
               </a:rPr>
               <a:t>Claude integration</a:t>
             </a:r>
-            <a:endParaRPr lang="en-US" sz="1000" dirty="0"/>
+            <a:endParaRPr lang="en-US" sz="950" dirty="0"/>
           </a:p>
           <a:p>
             <a:pPr algn="ctr" indent="0" marL="0">
               <a:lnSpc>
-                <a:spcPct val="105000"/>
+                <a:spcPct val="100000"/>
               </a:lnSpc>
               <a:buNone/>
             </a:pPr>
             <a:r>
-              <a:rPr lang="en-US" sz="1000" dirty="0">
-                <a:solidFill>
-                  <a:srgbClr val="D0D4D7"/>
+              <a:rPr lang="en-US" sz="950" dirty="0">
+                <a:solidFill>
+                  <a:srgbClr val="D8DCE0"/>
                 </a:solidFill>
                 <a:latin typeface="Inter" pitchFamily="34" charset="0"/>
                 <a:ea typeface="Inter" pitchFamily="34" charset="-122"/>
@@ -17932,19 +19144,19 @@
               </a:rPr>
               <a:t>5 demo prompts</a:t>
             </a:r>
-            <a:endParaRPr lang="en-US" sz="1000" dirty="0"/>
+            <a:endParaRPr lang="en-US" sz="950" dirty="0"/>
           </a:p>
           <a:p>
             <a:pPr algn="ctr" indent="0" marL="0">
               <a:lnSpc>
-                <a:spcPct val="105000"/>
+                <a:spcPct val="100000"/>
               </a:lnSpc>
               <a:buNone/>
             </a:pPr>
             <a:r>
-              <a:rPr lang="en-US" sz="1000" dirty="0">
-                <a:solidFill>
-                  <a:srgbClr val="D0D4D7"/>
+              <a:rPr lang="en-US" sz="950" dirty="0">
+                <a:solidFill>
+                  <a:srgbClr val="D8DCE0"/>
                 </a:solidFill>
                 <a:latin typeface="Inter" pitchFamily="34" charset="0"/>
                 <a:ea typeface="Inter" pitchFamily="34" charset="-122"/>
@@ -17952,13 +19164,13 @@
               </a:rPr>
               <a:t>Data + docs</a:t>
             </a:r>
-            <a:endParaRPr lang="en-US" sz="1000" dirty="0"/>
-          </a:p>
-        </p:txBody>
-      </p:sp>
-      <p:sp>
-        <p:nvSpPr>
-          <p:cNvPr id="37" name="Shape 34"/>
+            <a:endParaRPr lang="en-US" sz="950" dirty="0"/>
+          </a:p>
+        </p:txBody>
+      </p:sp>
+      <p:sp>
+        <p:nvSpPr>
+          <p:cNvPr id="49" name="Shape 40"/>
           <p:cNvSpPr/>
           <p:nvPr/>
         </p:nvSpPr>
@@ -17992,30 +19204,86 @@
       </p:sp>
       <p:sp>
         <p:nvSpPr>
-          <p:cNvPr id="38" name="Text 35"/>
-          <p:cNvSpPr/>
-          <p:nvPr/>
-        </p:nvSpPr>
-        <p:spPr>
-          <a:xfrm>
-            <a:off x="8577072" y="4261104"/>
-            <a:ext cx="2231136" cy="868680"/>
-          </a:xfrm>
-          <a:prstGeom prst="rect">
-            <a:avLst/>
-          </a:prstGeom>
-          <a:noFill/>
-          <a:ln/>
-        </p:spPr>
-        <p:txBody>
-          <a:bodyPr wrap="square" rtlCol="0" anchor="b"/>
+          <p:cNvPr id="50" name="Shape 41"/>
+          <p:cNvSpPr/>
+          <p:nvPr/>
+        </p:nvSpPr>
+        <p:spPr>
+          <a:xfrm>
+            <a:off x="9418320" y="4352544"/>
+            <a:ext cx="548640" cy="548640"/>
+          </a:xfrm>
+          <a:prstGeom prst="ellipse">
+            <a:avLst/>
+          </a:prstGeom>
+          <a:solidFill>
+            <a:srgbClr val="FFFFFF"/>
+          </a:solidFill>
+          <a:ln w="12700">
+            <a:solidFill>
+              <a:srgbClr val="FFFFFF"/>
+            </a:solidFill>
+            <a:prstDash val="solid"/>
+          </a:ln>
+          <a:effectLst>
+            <a:outerShdw sx="100000" sy="100000" kx="0" ky="0" algn="bl" rotWithShape="0" blurRad="38100" dist="12700" dir="16200000">
+              <a:srgbClr val="000000">
+                <a:alpha val="15000"/>
+              </a:srgbClr>
+            </a:outerShdw>
+          </a:effectLst>
+        </p:spPr>
+      </p:sp>
+      <p:pic>
+        <p:nvPicPr>
+          <p:cNvPr id="51" name="Image 7" descr="C:\Claude\MCG Full Stack\generators\assets\icons\automation.png">    </p:cNvPr>
+          <p:cNvPicPr>
+            <a:picLocks noChangeAspect="1"/>
+          </p:cNvPicPr>
+          <p:nvPr/>
+        </p:nvPicPr>
+        <p:blipFill>
+          <a:blip r:embed="rId8"/>
+          <a:stretch>
+            <a:fillRect/>
+          </a:stretch>
+        </p:blipFill>
+        <p:spPr>
+          <a:xfrm>
+            <a:off x="9522562" y="4456786"/>
+            <a:ext cx="340157" cy="340157"/>
+          </a:xfrm>
+          <a:prstGeom prst="rect">
+            <a:avLst/>
+          </a:prstGeom>
+        </p:spPr>
+      </p:pic>
+      <p:sp>
+        <p:nvSpPr>
+          <p:cNvPr id="52" name="Text 42"/>
+          <p:cNvSpPr/>
+          <p:nvPr/>
+        </p:nvSpPr>
+        <p:spPr>
+          <a:xfrm>
+            <a:off x="8595360" y="4937760"/>
+            <a:ext cx="2194560" cy="310896"/>
+          </a:xfrm>
+          <a:prstGeom prst="rect">
+            <a:avLst/>
+          </a:prstGeom>
+          <a:noFill/>
+          <a:ln/>
+        </p:spPr>
+        <p:txBody>
+          <a:bodyPr wrap="square" rtlCol="0" anchor="t"/>
           <a:lstStyle/>
           <a:p>
             <a:pPr algn="ctr" indent="0" marL="0">
               <a:buNone/>
             </a:pPr>
             <a:r>
-              <a:rPr lang="en-US" sz="1200" b="1" dirty="0">
+              <a:rPr lang="en-US" sz="1300" b="1" dirty="0">
                 <a:solidFill>
                   <a:srgbClr val="FFFFFF"/>
                 </a:solidFill>
@@ -18025,20 +19293,20 @@
               </a:rPr>
               <a:t>Automations</a:t>
             </a:r>
-            <a:endParaRPr lang="en-US" sz="1200" dirty="0"/>
-          </a:p>
-        </p:txBody>
-      </p:sp>
-      <p:sp>
-        <p:nvSpPr>
-          <p:cNvPr id="39" name="Text 36"/>
-          <p:cNvSpPr/>
-          <p:nvPr/>
-        </p:nvSpPr>
-        <p:spPr>
-          <a:xfrm>
-            <a:off x="8577072" y="5093208"/>
-            <a:ext cx="2231136" cy="729691"/>
+            <a:endParaRPr lang="en-US" sz="1300" dirty="0"/>
+          </a:p>
+        </p:txBody>
+      </p:sp>
+      <p:sp>
+        <p:nvSpPr>
+          <p:cNvPr id="53" name="Text 43"/>
+          <p:cNvSpPr/>
+          <p:nvPr/>
+        </p:nvSpPr>
+        <p:spPr>
+          <a:xfrm>
+            <a:off x="8613648" y="5266944"/>
+            <a:ext cx="2157984" cy="621792"/>
           </a:xfrm>
           <a:prstGeom prst="rect">
             <a:avLst/>
@@ -18052,14 +19320,14 @@
           <a:p>
             <a:pPr algn="ctr" indent="0" marL="0">
               <a:lnSpc>
-                <a:spcPct val="105000"/>
+                <a:spcPct val="100000"/>
               </a:lnSpc>
               <a:buNone/>
             </a:pPr>
             <a:r>
-              <a:rPr lang="en-US" sz="1000" dirty="0">
-                <a:solidFill>
-                  <a:srgbClr val="D0D4D7"/>
+              <a:rPr lang="en-US" sz="950" dirty="0">
+                <a:solidFill>
+                  <a:srgbClr val="D8DCE0"/>
                 </a:solidFill>
                 <a:latin typeface="Inter" pitchFamily="34" charset="0"/>
                 <a:ea typeface="Inter" pitchFamily="34" charset="-122"/>
@@ -18067,19 +19335,19 @@
               </a:rPr>
               <a:t>5 automations</a:t>
             </a:r>
-            <a:endParaRPr lang="en-US" sz="1000" dirty="0"/>
+            <a:endParaRPr lang="en-US" sz="950" dirty="0"/>
           </a:p>
           <a:p>
             <a:pPr algn="ctr" indent="0" marL="0">
               <a:lnSpc>
-                <a:spcPct val="105000"/>
+                <a:spcPct val="100000"/>
               </a:lnSpc>
               <a:buNone/>
             </a:pPr>
             <a:r>
-              <a:rPr lang="en-US" sz="1000" dirty="0">
-                <a:solidFill>
-                  <a:srgbClr val="D0D4D7"/>
+              <a:rPr lang="en-US" sz="950" dirty="0">
+                <a:solidFill>
+                  <a:srgbClr val="D8DCE0"/>
                 </a:solidFill>
                 <a:latin typeface="Inter" pitchFamily="34" charset="0"/>
                 <a:ea typeface="Inter" pitchFamily="34" charset="-122"/>
@@ -18087,19 +19355,19 @@
               </a:rPr>
               <a:t>Teams integration</a:t>
             </a:r>
-            <a:endParaRPr lang="en-US" sz="1000" dirty="0"/>
+            <a:endParaRPr lang="en-US" sz="950" dirty="0"/>
           </a:p>
           <a:p>
             <a:pPr algn="ctr" indent="0" marL="0">
               <a:lnSpc>
-                <a:spcPct val="105000"/>
+                <a:spcPct val="100000"/>
               </a:lnSpc>
               <a:buNone/>
             </a:pPr>
             <a:r>
-              <a:rPr lang="en-US" sz="1000" dirty="0">
-                <a:solidFill>
-                  <a:srgbClr val="D0D4D7"/>
+              <a:rPr lang="en-US" sz="950" dirty="0">
+                <a:solidFill>
+                  <a:srgbClr val="D8DCE0"/>
                 </a:solidFill>
                 <a:latin typeface="Inter" pitchFamily="34" charset="0"/>
                 <a:ea typeface="Inter" pitchFamily="34" charset="-122"/>
@@ -18107,7 +19375,7 @@
               </a:rPr>
               <a:t>Talend job trigger</a:t>
             </a:r>
-            <a:endParaRPr lang="en-US" sz="1000" dirty="0"/>
+            <a:endParaRPr lang="en-US" sz="950" dirty="0"/>
           </a:p>
         </p:txBody>
       </p:sp>

--- a/MCG_Technology_Architecture.pptx
+++ b/MCG_Technology_Architecture.pptx
@@ -18,9 +18,10 @@
     <p:sldId id="266" r:id="rId12"/>
     <p:sldId id="267" r:id="rId13"/>
     <p:sldId id="268" r:id="rId14"/>
+    <p:sldId id="269" r:id="rId15"/>
   </p:sldIdLst>
   <p:notesMasterIdLst>
-    <p:notesMasterId r:id="rId15"/>
+    <p:notesMasterId r:id="rId16"/>
   </p:notesMasterIdLst>
   <p:sldSz cx="12192000" cy="6858000"/>
   <p:notesSz cx="6858000" cy="12192000"/>
@@ -890,6 +891,94 @@
             <a:fld id="{F7021451-1387-4CA6-816F-3879F97B5CBC}" type="slidenum">
               <a:rPr lang="en-US"/>
               <a:t>13</a:t>
+            </a:fld>
+            <a:endParaRPr lang="en-US"/>
+          </a:p>
+        </p:txBody>
+      </p:sp>
+    </p:spTree>
+    <p:extLst>
+      <p:ext uri="{BB962C8B-B14F-4D97-AF65-F5344CB8AC3E}">
+        <p14:creationId xmlns:p14="http://schemas.microsoft.com/office/powerpoint/2010/main" val="1024086991"/>
+      </p:ext>
+    </p:extLst>
+  </p:cSld>
+  <p:clrMapOvr>
+    <a:masterClrMapping/>
+  </p:clrMapOvr>
+</p:notes>
+</file>
+
+<file path=ppt/notesSlides/notesSlide14.xml><?xml version="1.0" encoding="utf-8"?>
+<p:notes xmlns:a="http://schemas.openxmlformats.org/drawingml/2006/main" xmlns:r="http://schemas.openxmlformats.org/officeDocument/2006/relationships" xmlns:p="http://schemas.openxmlformats.org/presentationml/2006/main">
+  <p:cSld>
+    <p:spTree>
+      <p:nvGrpSpPr>
+        <p:cNvPr id="1" name=""/>
+        <p:cNvGrpSpPr/>
+        <p:nvPr/>
+      </p:nvGrpSpPr>
+      <p:grpSpPr>
+        <a:xfrm>
+          <a:off x="0" y="0"/>
+          <a:ext cx="0" cy="0"/>
+          <a:chOff x="0" y="0"/>
+          <a:chExt cx="0" cy="0"/>
+        </a:xfrm>
+      </p:grpSpPr>
+      <p:sp>
+        <p:nvSpPr>
+          <p:cNvPr id="2" name="Slide Image Placeholder 1"/>
+          <p:cNvSpPr>
+            <a:spLocks noGrp="1" noRot="1" noChangeAspect="1"/>
+          </p:cNvSpPr>
+          <p:nvPr>
+            <p:ph type="sldImg"/>
+          </p:nvPr>
+        </p:nvSpPr>
+        <p:spPr/>
+      </p:sp>
+      <p:sp>
+        <p:nvSpPr>
+          <p:cNvPr id="3" name="Notes Placeholder 2"/>
+          <p:cNvSpPr>
+            <a:spLocks noGrp="1"/>
+          </p:cNvSpPr>
+          <p:nvPr>
+            <p:ph type="body" idx="1"/>
+          </p:nvPr>
+        </p:nvSpPr>
+        <p:spPr/>
+        <p:txBody>
+          <a:bodyPr/>
+          <a:lstStyle/>
+          <a:p>
+            <a:r>
+              <a:rPr lang="en-US" dirty="0"/>
+              <a:t/>
+            </a:r>
+            <a:endParaRPr lang="en-US" dirty="0"/>
+          </a:p>
+        </p:txBody>
+      </p:sp>
+      <p:sp>
+        <p:nvSpPr>
+          <p:cNvPr id="4" name="Slide Number Placeholder 3"/>
+          <p:cNvSpPr>
+            <a:spLocks noGrp="1"/>
+          </p:cNvSpPr>
+          <p:nvPr>
+            <p:ph type="sldNum" sz="quarter" idx="10"/>
+          </p:nvPr>
+        </p:nvSpPr>
+        <p:spPr/>
+        <p:txBody>
+          <a:bodyPr/>
+          <a:lstStyle/>
+          <a:p>
+            <a:fld id="{F7021451-1387-4CA6-816F-3879F97B5CBC}" type="slidenum">
+              <a:rPr lang="en-US"/>
+              <a:t>14</a:t>
             </a:fld>
             <a:endParaRPr lang="en-US"/>
           </a:p>
@@ -2469,9 +2558,49 @@
           <a:chExt cx="0" cy="0"/>
         </a:xfrm>
       </p:grpSpPr>
+      <p:sp>
+        <p:nvSpPr>
+          <p:cNvPr id="2" name="Shape 0"/>
+          <p:cNvSpPr/>
+          <p:nvPr/>
+        </p:nvSpPr>
+        <p:spPr>
+          <a:xfrm>
+            <a:off x="0" y="0"/>
+            <a:ext cx="12188952" cy="54864"/>
+          </a:xfrm>
+          <a:prstGeom prst="rect">
+            <a:avLst/>
+          </a:prstGeom>
+          <a:solidFill>
+            <a:srgbClr val="009845"/>
+          </a:solidFill>
+          <a:ln/>
+        </p:spPr>
+      </p:sp>
+      <p:sp>
+        <p:nvSpPr>
+          <p:cNvPr id="3" name="Shape 1"/>
+          <p:cNvSpPr/>
+          <p:nvPr/>
+        </p:nvSpPr>
+        <p:spPr>
+          <a:xfrm>
+            <a:off x="457200" y="6446520"/>
+            <a:ext cx="11274552" cy="7315"/>
+          </a:xfrm>
+          <a:prstGeom prst="rect">
+            <a:avLst/>
+          </a:prstGeom>
+          <a:solidFill>
+            <a:srgbClr val="A9B3B6"/>
+          </a:solidFill>
+          <a:ln/>
+        </p:spPr>
+      </p:sp>
       <p:pic>
         <p:nvPicPr>
-          <p:cNvPr id="2" name="Image 0" descr="C:\Claude\MCG Full Stack\generators\assets\qlik_divider_bg.png">    </p:cNvPr>
+          <p:cNvPr id="4" name="Image 0" descr="C:\Claude\MCG Full Stack\generators\assets\qlik_logo.png">    </p:cNvPr>
           <p:cNvPicPr>
             <a:picLocks noChangeAspect="1"/>
           </p:cNvPicPr>
@@ -2485,8 +2614,8 @@
         </p:blipFill>
         <p:spPr>
           <a:xfrm>
-            <a:off x="0" y="0"/>
-            <a:ext cx="12188952" cy="6858000"/>
+            <a:off x="457200" y="6510528"/>
+            <a:ext cx="594360" cy="256032"/>
           </a:xfrm>
           <a:prstGeom prst="rect">
             <a:avLst/>
@@ -2495,14 +2624,14 @@
       </p:pic>
       <p:sp>
         <p:nvSpPr>
-          <p:cNvPr id="3" name="Text 0"/>
-          <p:cNvSpPr/>
-          <p:nvPr/>
-        </p:nvSpPr>
-        <p:spPr>
-          <a:xfrm>
-            <a:off x="731520" y="2194560"/>
-            <a:ext cx="7315200" cy="1188720"/>
+          <p:cNvPr id="5" name="Text 2"/>
+          <p:cNvSpPr/>
+          <p:nvPr/>
+        </p:nvSpPr>
+        <p:spPr>
+          <a:xfrm>
+            <a:off x="1188720" y="6510528"/>
+            <a:ext cx="7315200" cy="256032"/>
           </a:xfrm>
           <a:prstGeom prst="rect">
             <a:avLst/>
@@ -2518,7 +2647,85 @@
               <a:buNone/>
             </a:pPr>
             <a:r>
-              <a:rPr lang="en-US" sz="3600" b="1" dirty="0">
+              <a:rPr lang="en-US" sz="800" dirty="0">
+                <a:solidFill>
+                  <a:srgbClr val="A9B3B6"/>
+                </a:solidFill>
+                <a:latin typeface="Inter" pitchFamily="34" charset="0"/>
+                <a:ea typeface="Inter" pitchFamily="34" charset="-122"/>
+                <a:cs typeface="Inter" pitchFamily="34" charset="-120"/>
+              </a:rPr>
+              <a:t>Project Qlarity  •  MCG Technology Architecture  •  Qlik Cloud</a:t>
+            </a:r>
+            <a:endParaRPr lang="en-US" sz="800" dirty="0"/>
+          </a:p>
+        </p:txBody>
+      </p:sp>
+      <p:sp>
+        <p:nvSpPr>
+          <p:cNvPr id="6" name="Text 3"/>
+          <p:cNvSpPr/>
+          <p:nvPr/>
+        </p:nvSpPr>
+        <p:spPr>
+          <a:xfrm>
+            <a:off x="10972800" y="6510528"/>
+            <a:ext cx="914400" cy="256032"/>
+          </a:xfrm>
+          <a:prstGeom prst="rect">
+            <a:avLst/>
+          </a:prstGeom>
+          <a:noFill/>
+          <a:ln/>
+        </p:spPr>
+        <p:txBody>
+          <a:bodyPr wrap="square" rtlCol="0" anchor="ctr"/>
+          <a:lstStyle/>
+          <a:p>
+            <a:pPr algn="r" indent="0" marL="0">
+              <a:buNone/>
+            </a:pPr>
+            <a:r>
+              <a:rPr lang="en-US" sz="800" dirty="0">
+                <a:solidFill>
+                  <a:srgbClr val="A9B3B6"/>
+                </a:solidFill>
+                <a:latin typeface="Inter" pitchFamily="34" charset="0"/>
+                <a:ea typeface="Inter" pitchFamily="34" charset="-122"/>
+                <a:cs typeface="Inter" pitchFamily="34" charset="-120"/>
+              </a:rPr>
+              <a:t>10</a:t>
+            </a:r>
+            <a:endParaRPr lang="en-US" sz="800" dirty="0"/>
+          </a:p>
+        </p:txBody>
+      </p:sp>
+      <p:sp>
+        <p:nvSpPr>
+          <p:cNvPr id="7" name="Text 4"/>
+          <p:cNvSpPr/>
+          <p:nvPr/>
+        </p:nvSpPr>
+        <p:spPr>
+          <a:xfrm>
+            <a:off x="548640" y="228600"/>
+            <a:ext cx="10972800" cy="548640"/>
+          </a:xfrm>
+          <a:prstGeom prst="rect">
+            <a:avLst/>
+          </a:prstGeom>
+          <a:noFill/>
+          <a:ln/>
+        </p:spPr>
+        <p:txBody>
+          <a:bodyPr wrap="square" rtlCol="0" anchor="ctr"/>
+          <a:lstStyle/>
+          <a:p>
+            <a:pPr indent="0" marL="0">
+              <a:buNone/>
+            </a:pPr>
+            <a:r>
+              <a:rPr lang="en-US" sz="2200" b="1" dirty="0">
                 <a:solidFill>
                   <a:srgbClr val="19416C"/>
                 </a:solidFill>
@@ -2526,22 +2733,49 @@
                 <a:ea typeface="Inter" pitchFamily="34" charset="-122"/>
                 <a:cs typeface="Inter" pitchFamily="34" charset="-120"/>
               </a:rPr>
-              <a:t>The 7 Nightmares</a:t>
-            </a:r>
-            <a:endParaRPr lang="en-US" sz="3600" dirty="0"/>
-          </a:p>
-        </p:txBody>
-      </p:sp>
-      <p:sp>
-        <p:nvSpPr>
-          <p:cNvPr id="4" name="Text 1"/>
-          <p:cNvSpPr/>
-          <p:nvPr/>
-        </p:nvSpPr>
-        <p:spPr>
-          <a:xfrm>
-            <a:off x="731520" y="3383280"/>
-            <a:ext cx="7315200" cy="548640"/>
+              <a:t>Agentic Data Engineering Layer</a:t>
+            </a:r>
+            <a:endParaRPr lang="en-US" sz="2200" dirty="0"/>
+          </a:p>
+        </p:txBody>
+      </p:sp>
+      <p:sp>
+        <p:nvSpPr>
+          <p:cNvPr id="8" name="Shape 5"/>
+          <p:cNvSpPr/>
+          <p:nvPr/>
+        </p:nvSpPr>
+        <p:spPr>
+          <a:xfrm>
+            <a:off x="10378440" y="310896"/>
+            <a:ext cx="1325880" cy="274320"/>
+          </a:xfrm>
+          <a:prstGeom prst="roundRect">
+            <a:avLst>
+              <a:gd name="adj" fmla="val 50000"/>
+            </a:avLst>
+          </a:prstGeom>
+          <a:solidFill>
+            <a:srgbClr val="10CFC9"/>
+          </a:solidFill>
+          <a:ln w="6350">
+            <a:solidFill>
+              <a:srgbClr val="10CFC9"/>
+            </a:solidFill>
+            <a:prstDash val="solid"/>
+          </a:ln>
+        </p:spPr>
+      </p:sp>
+      <p:sp>
+        <p:nvSpPr>
+          <p:cNvPr id="9" name="Text 6"/>
+          <p:cNvSpPr/>
+          <p:nvPr/>
+        </p:nvSpPr>
+        <p:spPr>
+          <a:xfrm>
+            <a:off x="10378440" y="310896"/>
+            <a:ext cx="1325880" cy="274320"/>
           </a:xfrm>
           <a:prstGeom prst="rect">
             <a:avLst/>
@@ -2553,11 +2787,92 @@
           <a:bodyPr wrap="square" rtlCol="0" anchor="ctr"/>
           <a:lstStyle/>
           <a:p>
+            <a:pPr algn="ctr" indent="0" marL="0">
+              <a:buNone/>
+            </a:pPr>
+            <a:r>
+              <a:rPr lang="en-US" sz="900" b="1" dirty="0">
+                <a:solidFill>
+                  <a:srgbClr val="19416C"/>
+                </a:solidFill>
+                <a:latin typeface="Inter" pitchFamily="34" charset="0"/>
+                <a:ea typeface="Inter" pitchFamily="34" charset="-122"/>
+                <a:cs typeface="Inter" pitchFamily="34" charset="-120"/>
+              </a:rPr>
+              <a:t>Preview</a:t>
+            </a:r>
+            <a:endParaRPr lang="en-US" sz="900" dirty="0"/>
+          </a:p>
+        </p:txBody>
+      </p:sp>
+      <p:sp>
+        <p:nvSpPr>
+          <p:cNvPr id="10" name="Text 7"/>
+          <p:cNvSpPr/>
+          <p:nvPr/>
+        </p:nvSpPr>
+        <p:spPr>
+          <a:xfrm>
+            <a:off x="548640" y="822960"/>
+            <a:ext cx="9692640" cy="365760"/>
+          </a:xfrm>
+          <a:prstGeom prst="rect">
+            <a:avLst/>
+          </a:prstGeom>
+          <a:noFill/>
+          <a:ln/>
+        </p:spPr>
+        <p:txBody>
+          <a:bodyPr wrap="square" rtlCol="0" anchor="ctr"/>
+          <a:lstStyle/>
+          <a:p>
             <a:pPr indent="0" marL="0">
-              <a:buNone/>
-            </a:pPr>
-            <a:r>
-              <a:rPr lang="en-US" sz="1600" dirty="0">
+              <a:lnSpc>
+                <a:spcPct val="102000"/>
+              </a:lnSpc>
+              <a:buNone/>
+            </a:pPr>
+            <a:r>
+              <a:rPr lang="en-US" sz="1150" i="1" dirty="0">
+                <a:solidFill>
+                  <a:srgbClr val="6B7280"/>
+                </a:solidFill>
+                <a:latin typeface="Inter" pitchFamily="34" charset="0"/>
+                <a:ea typeface="Inter" pitchFamily="34" charset="-122"/>
+                <a:cs typeface="Inter" pitchFamily="34" charset="-120"/>
+              </a:rPr>
+              <a:t>Build-side AI. One declarative pipeline YAML, authored visually, in an IDE, or by an AI agent. A path from raw data to trusted, AI-ready data products that keeps human expertise in the loop at each stage.</a:t>
+            </a:r>
+            <a:endParaRPr lang="en-US" sz="1150" dirty="0"/>
+          </a:p>
+        </p:txBody>
+      </p:sp>
+      <p:sp>
+        <p:nvSpPr>
+          <p:cNvPr id="11" name="Text 8"/>
+          <p:cNvSpPr/>
+          <p:nvPr/>
+        </p:nvSpPr>
+        <p:spPr>
+          <a:xfrm>
+            <a:off x="548640" y="1225296"/>
+            <a:ext cx="4114800" cy="237744"/>
+          </a:xfrm>
+          <a:prstGeom prst="rect">
+            <a:avLst/>
+          </a:prstGeom>
+          <a:noFill/>
+          <a:ln/>
+        </p:spPr>
+        <p:txBody>
+          <a:bodyPr wrap="square" rtlCol="0" anchor="ctr"/>
+          <a:lstStyle/>
+          <a:p>
+            <a:pPr indent="0" marL="0">
+              <a:buNone/>
+            </a:pPr>
+            <a:r>
+              <a:rPr lang="en-US" sz="1100" b="1" dirty="0">
                 <a:solidFill>
                   <a:srgbClr val="009845"/>
                 </a:solidFill>
@@ -2565,9 +2880,2288 @@
                 <a:ea typeface="Inter" pitchFamily="34" charset="-122"/>
                 <a:cs typeface="Inter" pitchFamily="34" charset="-120"/>
               </a:rPr>
-              <a:t>$127M in annual data quality costs</a:t>
-            </a:r>
-            <a:endParaRPr lang="en-US" sz="1600" dirty="0"/>
+              <a:t>AUTHOR THE PIPELINE</a:t>
+            </a:r>
+            <a:endParaRPr lang="en-US" sz="1100" dirty="0"/>
+          </a:p>
+        </p:txBody>
+      </p:sp>
+      <p:sp>
+        <p:nvSpPr>
+          <p:cNvPr id="12" name="Text 9"/>
+          <p:cNvSpPr/>
+          <p:nvPr/>
+        </p:nvSpPr>
+        <p:spPr>
+          <a:xfrm>
+            <a:off x="5669280" y="1225296"/>
+            <a:ext cx="5943600" cy="237744"/>
+          </a:xfrm>
+          <a:prstGeom prst="rect">
+            <a:avLst/>
+          </a:prstGeom>
+          <a:noFill/>
+          <a:ln/>
+        </p:spPr>
+        <p:txBody>
+          <a:bodyPr wrap="square" rtlCol="0" anchor="ctr"/>
+          <a:lstStyle/>
+          <a:p>
+            <a:pPr algn="r" indent="0" marL="0">
+              <a:buNone/>
+            </a:pPr>
+            <a:r>
+              <a:rPr lang="en-US" sz="900" i="1" dirty="0">
+                <a:solidFill>
+                  <a:srgbClr val="A9B3B6"/>
+                </a:solidFill>
+                <a:latin typeface="Inter" pitchFamily="34" charset="0"/>
+                <a:ea typeface="Inter" pitchFamily="34" charset="-122"/>
+                <a:cs typeface="Inter" pitchFamily="34" charset="-120"/>
+              </a:rPr>
+              <a:t>Declarative Data Pipelines are a Qlik internal preview capability</a:t>
+            </a:r>
+            <a:endParaRPr lang="en-US" sz="900" dirty="0"/>
+          </a:p>
+        </p:txBody>
+      </p:sp>
+      <p:sp>
+        <p:nvSpPr>
+          <p:cNvPr id="13" name="Shape 10"/>
+          <p:cNvSpPr/>
+          <p:nvPr/>
+        </p:nvSpPr>
+        <p:spPr>
+          <a:xfrm>
+            <a:off x="548640" y="1499616"/>
+            <a:ext cx="3566160" cy="932688"/>
+          </a:xfrm>
+          <a:prstGeom prst="roundRect">
+            <a:avLst>
+              <a:gd name="adj" fmla="val 9804"/>
+            </a:avLst>
+          </a:prstGeom>
+          <a:solidFill>
+            <a:srgbClr val="009845"/>
+          </a:solidFill>
+          <a:ln w="6350">
+            <a:solidFill>
+              <a:srgbClr val="009845"/>
+            </a:solidFill>
+            <a:prstDash val="solid"/>
+          </a:ln>
+          <a:effectLst>
+            <a:outerShdw sx="100000" sy="100000" kx="0" ky="0" algn="bl" rotWithShape="0" blurRad="50800" dist="19050" dir="16200000">
+              <a:srgbClr val="000000">
+                <a:alpha val="8000"/>
+              </a:srgbClr>
+            </a:outerShdw>
+          </a:effectLst>
+        </p:spPr>
+      </p:sp>
+      <p:sp>
+        <p:nvSpPr>
+          <p:cNvPr id="14" name="Shape 11"/>
+          <p:cNvSpPr/>
+          <p:nvPr/>
+        </p:nvSpPr>
+        <p:spPr>
+          <a:xfrm>
+            <a:off x="667512" y="1682496"/>
+            <a:ext cx="566928" cy="566928"/>
+          </a:xfrm>
+          <a:prstGeom prst="ellipse">
+            <a:avLst/>
+          </a:prstGeom>
+          <a:solidFill>
+            <a:srgbClr val="FFFFFF"/>
+          </a:solidFill>
+          <a:ln w="12700">
+            <a:solidFill>
+              <a:srgbClr val="FFFFFF"/>
+            </a:solidFill>
+            <a:prstDash val="solid"/>
+          </a:ln>
+          <a:effectLst>
+            <a:outerShdw sx="100000" sy="100000" kx="0" ky="0" algn="bl" rotWithShape="0" blurRad="38100" dist="12700" dir="16200000">
+              <a:srgbClr val="000000">
+                <a:alpha val="15000"/>
+              </a:srgbClr>
+            </a:outerShdw>
+          </a:effectLst>
+        </p:spPr>
+      </p:sp>
+      <p:pic>
+        <p:nvPicPr>
+          <p:cNvPr id="15" name="Image 1" descr="C:\Claude\MCG Full Stack\generators\assets\icons\agent.png">    </p:cNvPr>
+          <p:cNvPicPr>
+            <a:picLocks noChangeAspect="1"/>
+          </p:cNvPicPr>
+          <p:nvPr/>
+        </p:nvPicPr>
+        <p:blipFill>
+          <a:blip r:embed="rId2"/>
+          <a:stretch>
+            <a:fillRect/>
+          </a:stretch>
+        </p:blipFill>
+        <p:spPr>
+          <a:xfrm>
+            <a:off x="775228" y="1790212"/>
+            <a:ext cx="351495" cy="351495"/>
+          </a:xfrm>
+          <a:prstGeom prst="rect">
+            <a:avLst/>
+          </a:prstGeom>
+        </p:spPr>
+      </p:pic>
+      <p:sp>
+        <p:nvSpPr>
+          <p:cNvPr id="16" name="Text 12"/>
+          <p:cNvSpPr/>
+          <p:nvPr/>
+        </p:nvSpPr>
+        <p:spPr>
+          <a:xfrm>
+            <a:off x="1362456" y="1572768"/>
+            <a:ext cx="2660904" cy="448056"/>
+          </a:xfrm>
+          <a:prstGeom prst="rect">
+            <a:avLst/>
+          </a:prstGeom>
+          <a:noFill/>
+          <a:ln/>
+        </p:spPr>
+        <p:txBody>
+          <a:bodyPr wrap="square" rtlCol="0" anchor="b"/>
+          <a:lstStyle/>
+          <a:p>
+            <a:pPr algn="l" indent="0" marL="0">
+              <a:buNone/>
+            </a:pPr>
+            <a:r>
+              <a:rPr lang="en-US" sz="1200" b="1" dirty="0">
+                <a:solidFill>
+                  <a:srgbClr val="FFFFFF"/>
+                </a:solidFill>
+                <a:latin typeface="Inter" pitchFamily="34" charset="0"/>
+                <a:ea typeface="Inter" pitchFamily="34" charset="-122"/>
+                <a:cs typeface="Inter" pitchFamily="34" charset="-120"/>
+              </a:rPr>
+              <a:t>AI Coding Agent · VS Code</a:t>
+            </a:r>
+            <a:endParaRPr lang="en-US" sz="1200" dirty="0"/>
+          </a:p>
+        </p:txBody>
+      </p:sp>
+      <p:sp>
+        <p:nvSpPr>
+          <p:cNvPr id="17" name="Text 13"/>
+          <p:cNvSpPr/>
+          <p:nvPr/>
+        </p:nvSpPr>
+        <p:spPr>
+          <a:xfrm>
+            <a:off x="1362456" y="1965960"/>
+            <a:ext cx="2660904" cy="411480"/>
+          </a:xfrm>
+          <a:prstGeom prst="rect">
+            <a:avLst/>
+          </a:prstGeom>
+          <a:noFill/>
+          <a:ln/>
+        </p:spPr>
+        <p:txBody>
+          <a:bodyPr wrap="square" rtlCol="0" anchor="t"/>
+          <a:lstStyle/>
+          <a:p>
+            <a:pPr algn="l" indent="0" marL="0">
+              <a:lnSpc>
+                <a:spcPct val="102000"/>
+              </a:lnSpc>
+              <a:buNone/>
+            </a:pPr>
+            <a:r>
+              <a:rPr lang="en-US" sz="950" dirty="0">
+                <a:solidFill>
+                  <a:srgbClr val="D8DCE0"/>
+                </a:solidFill>
+                <a:latin typeface="Inter" pitchFamily="34" charset="0"/>
+                <a:ea typeface="Inter" pitchFamily="34" charset="-122"/>
+                <a:cs typeface="Inter" pitchFamily="34" charset="-120"/>
+              </a:rPr>
+              <a:t>Authors declarative pipeline YAML</a:t>
+            </a:r>
+            <a:endParaRPr lang="en-US" sz="950" dirty="0"/>
+          </a:p>
+          <a:p>
+            <a:pPr algn="l" indent="0" marL="0">
+              <a:lnSpc>
+                <a:spcPct val="102000"/>
+              </a:lnSpc>
+              <a:buNone/>
+            </a:pPr>
+            <a:r>
+              <a:rPr lang="en-US" sz="950" dirty="0">
+                <a:solidFill>
+                  <a:srgbClr val="D8DCE0"/>
+                </a:solidFill>
+                <a:latin typeface="Inter" pitchFamily="34" charset="0"/>
+                <a:ea typeface="Inter" pitchFamily="34" charset="-122"/>
+                <a:cs typeface="Inter" pitchFamily="34" charset="-120"/>
+              </a:rPr>
+              <a:t>Git version control • CI/CD</a:t>
+            </a:r>
+            <a:endParaRPr lang="en-US" sz="950" dirty="0"/>
+          </a:p>
+        </p:txBody>
+      </p:sp>
+      <p:sp>
+        <p:nvSpPr>
+          <p:cNvPr id="18" name="Shape 14"/>
+          <p:cNvSpPr/>
+          <p:nvPr/>
+        </p:nvSpPr>
+        <p:spPr>
+          <a:xfrm>
+            <a:off x="4297680" y="1499616"/>
+            <a:ext cx="3566160" cy="932688"/>
+          </a:xfrm>
+          <a:prstGeom prst="roundRect">
+            <a:avLst>
+              <a:gd name="adj" fmla="val 9804"/>
+            </a:avLst>
+          </a:prstGeom>
+          <a:solidFill>
+            <a:srgbClr val="009845"/>
+          </a:solidFill>
+          <a:ln w="6350">
+            <a:solidFill>
+              <a:srgbClr val="009845"/>
+            </a:solidFill>
+            <a:prstDash val="solid"/>
+          </a:ln>
+          <a:effectLst>
+            <a:outerShdw sx="100000" sy="100000" kx="0" ky="0" algn="bl" rotWithShape="0" blurRad="50800" dist="19050" dir="16200000">
+              <a:srgbClr val="000000">
+                <a:alpha val="8000"/>
+              </a:srgbClr>
+            </a:outerShdw>
+          </a:effectLst>
+        </p:spPr>
+      </p:sp>
+      <p:sp>
+        <p:nvSpPr>
+          <p:cNvPr id="19" name="Shape 15"/>
+          <p:cNvSpPr/>
+          <p:nvPr/>
+        </p:nvSpPr>
+        <p:spPr>
+          <a:xfrm>
+            <a:off x="4416552" y="1682496"/>
+            <a:ext cx="566928" cy="566928"/>
+          </a:xfrm>
+          <a:prstGeom prst="ellipse">
+            <a:avLst/>
+          </a:prstGeom>
+          <a:solidFill>
+            <a:srgbClr val="FFFFFF"/>
+          </a:solidFill>
+          <a:ln w="12700">
+            <a:solidFill>
+              <a:srgbClr val="FFFFFF"/>
+            </a:solidFill>
+            <a:prstDash val="solid"/>
+          </a:ln>
+          <a:effectLst>
+            <a:outerShdw sx="100000" sy="100000" kx="0" ky="0" algn="bl" rotWithShape="0" blurRad="38100" dist="12700" dir="16200000">
+              <a:srgbClr val="000000">
+                <a:alpha val="15000"/>
+              </a:srgbClr>
+            </a:outerShdw>
+          </a:effectLst>
+        </p:spPr>
+      </p:sp>
+      <p:pic>
+        <p:nvPicPr>
+          <p:cNvPr id="20" name="Image 2" descr="C:\Claude\MCG Full Stack\generators\assets\icons\pipeline.png">    </p:cNvPr>
+          <p:cNvPicPr>
+            <a:picLocks noChangeAspect="1"/>
+          </p:cNvPicPr>
+          <p:nvPr/>
+        </p:nvPicPr>
+        <p:blipFill>
+          <a:blip r:embed="rId3"/>
+          <a:stretch>
+            <a:fillRect/>
+          </a:stretch>
+        </p:blipFill>
+        <p:spPr>
+          <a:xfrm>
+            <a:off x="4524268" y="1790212"/>
+            <a:ext cx="351495" cy="351495"/>
+          </a:xfrm>
+          <a:prstGeom prst="rect">
+            <a:avLst/>
+          </a:prstGeom>
+        </p:spPr>
+      </p:pic>
+      <p:sp>
+        <p:nvSpPr>
+          <p:cNvPr id="21" name="Text 16"/>
+          <p:cNvSpPr/>
+          <p:nvPr/>
+        </p:nvSpPr>
+        <p:spPr>
+          <a:xfrm>
+            <a:off x="5111496" y="1572768"/>
+            <a:ext cx="2660904" cy="448056"/>
+          </a:xfrm>
+          <a:prstGeom prst="rect">
+            <a:avLst/>
+          </a:prstGeom>
+          <a:noFill/>
+          <a:ln/>
+        </p:spPr>
+        <p:txBody>
+          <a:bodyPr wrap="square" rtlCol="0" anchor="b"/>
+          <a:lstStyle/>
+          <a:p>
+            <a:pPr algn="l" indent="0" marL="0">
+              <a:buNone/>
+            </a:pPr>
+            <a:r>
+              <a:rPr lang="en-US" sz="1200" b="1" dirty="0">
+                <a:solidFill>
+                  <a:srgbClr val="FFFFFF"/>
+                </a:solidFill>
+                <a:latin typeface="Inter" pitchFamily="34" charset="0"/>
+                <a:ea typeface="Inter" pitchFamily="34" charset="-122"/>
+                <a:cs typeface="Inter" pitchFamily="34" charset="-120"/>
+              </a:rPr>
+              <a:t>Declarative Data Pipelines</a:t>
+            </a:r>
+            <a:endParaRPr lang="en-US" sz="1200" dirty="0"/>
+          </a:p>
+        </p:txBody>
+      </p:sp>
+      <p:sp>
+        <p:nvSpPr>
+          <p:cNvPr id="22" name="Text 17"/>
+          <p:cNvSpPr/>
+          <p:nvPr/>
+        </p:nvSpPr>
+        <p:spPr>
+          <a:xfrm>
+            <a:off x="5111496" y="1965960"/>
+            <a:ext cx="2660904" cy="411480"/>
+          </a:xfrm>
+          <a:prstGeom prst="rect">
+            <a:avLst/>
+          </a:prstGeom>
+          <a:noFill/>
+          <a:ln/>
+        </p:spPr>
+        <p:txBody>
+          <a:bodyPr wrap="square" rtlCol="0" anchor="t"/>
+          <a:lstStyle/>
+          <a:p>
+            <a:pPr algn="l" indent="0" marL="0">
+              <a:lnSpc>
+                <a:spcPct val="102000"/>
+              </a:lnSpc>
+              <a:buNone/>
+            </a:pPr>
+            <a:r>
+              <a:rPr lang="en-US" sz="950" dirty="0">
+                <a:solidFill>
+                  <a:srgbClr val="D8DCE0"/>
+                </a:solidFill>
+                <a:latin typeface="Inter" pitchFamily="34" charset="0"/>
+                <a:ea typeface="Inter" pitchFamily="34" charset="-122"/>
+                <a:cs typeface="Inter" pitchFamily="34" charset="-120"/>
+              </a:rPr>
+              <a:t>One YAML: landing · transform · datamart</a:t>
+            </a:r>
+            <a:endParaRPr lang="en-US" sz="950" dirty="0"/>
+          </a:p>
+          <a:p>
+            <a:pPr algn="l" indent="0" marL="0">
+              <a:lnSpc>
+                <a:spcPct val="102000"/>
+              </a:lnSpc>
+              <a:buNone/>
+            </a:pPr>
+            <a:r>
+              <a:rPr lang="en-US" sz="950" dirty="0">
+                <a:solidFill>
+                  <a:srgbClr val="D8DCE0"/>
+                </a:solidFill>
+                <a:latin typeface="Inter" pitchFamily="34" charset="0"/>
+                <a:ea typeface="Inter" pitchFamily="34" charset="-122"/>
+                <a:cs typeface="Inter" pitchFamily="34" charset="-120"/>
+              </a:rPr>
+              <a:t>UI · IDE · AI-agent authorable · Preview</a:t>
+            </a:r>
+            <a:endParaRPr lang="en-US" sz="950" dirty="0"/>
+          </a:p>
+        </p:txBody>
+      </p:sp>
+      <p:sp>
+        <p:nvSpPr>
+          <p:cNvPr id="23" name="Shape 18"/>
+          <p:cNvSpPr/>
+          <p:nvPr/>
+        </p:nvSpPr>
+        <p:spPr>
+          <a:xfrm>
+            <a:off x="8046720" y="1499616"/>
+            <a:ext cx="3566160" cy="932688"/>
+          </a:xfrm>
+          <a:prstGeom prst="roundRect">
+            <a:avLst>
+              <a:gd name="adj" fmla="val 9804"/>
+            </a:avLst>
+          </a:prstGeom>
+          <a:solidFill>
+            <a:srgbClr val="009845"/>
+          </a:solidFill>
+          <a:ln w="6350">
+            <a:solidFill>
+              <a:srgbClr val="009845"/>
+            </a:solidFill>
+            <a:prstDash val="solid"/>
+          </a:ln>
+          <a:effectLst>
+            <a:outerShdw sx="100000" sy="100000" kx="0" ky="0" algn="bl" rotWithShape="0" blurRad="50800" dist="19050" dir="16200000">
+              <a:srgbClr val="000000">
+                <a:alpha val="8000"/>
+              </a:srgbClr>
+            </a:outerShdw>
+          </a:effectLst>
+        </p:spPr>
+      </p:sp>
+      <p:sp>
+        <p:nvSpPr>
+          <p:cNvPr id="24" name="Shape 19"/>
+          <p:cNvSpPr/>
+          <p:nvPr/>
+        </p:nvSpPr>
+        <p:spPr>
+          <a:xfrm>
+            <a:off x="8165592" y="1682496"/>
+            <a:ext cx="566928" cy="566928"/>
+          </a:xfrm>
+          <a:prstGeom prst="ellipse">
+            <a:avLst/>
+          </a:prstGeom>
+          <a:solidFill>
+            <a:srgbClr val="FFFFFF"/>
+          </a:solidFill>
+          <a:ln w="12700">
+            <a:solidFill>
+              <a:srgbClr val="FFFFFF"/>
+            </a:solidFill>
+            <a:prstDash val="solid"/>
+          </a:ln>
+          <a:effectLst>
+            <a:outerShdw sx="100000" sy="100000" kx="0" ky="0" algn="bl" rotWithShape="0" blurRad="38100" dist="12700" dir="16200000">
+              <a:srgbClr val="000000">
+                <a:alpha val="15000"/>
+              </a:srgbClr>
+            </a:outerShdw>
+          </a:effectLst>
+        </p:spPr>
+      </p:sp>
+      <p:pic>
+        <p:nvPicPr>
+          <p:cNvPr id="25" name="Image 3" descr="C:\Claude\MCG Full Stack\generators\assets\icons\transform.png">    </p:cNvPr>
+          <p:cNvPicPr>
+            <a:picLocks noChangeAspect="1"/>
+          </p:cNvPicPr>
+          <p:nvPr/>
+        </p:nvPicPr>
+        <p:blipFill>
+          <a:blip r:embed="rId4"/>
+          <a:stretch>
+            <a:fillRect/>
+          </a:stretch>
+        </p:blipFill>
+        <p:spPr>
+          <a:xfrm>
+            <a:off x="8273308" y="1790212"/>
+            <a:ext cx="351495" cy="351495"/>
+          </a:xfrm>
+          <a:prstGeom prst="rect">
+            <a:avLst/>
+          </a:prstGeom>
+        </p:spPr>
+      </p:pic>
+      <p:sp>
+        <p:nvSpPr>
+          <p:cNvPr id="26" name="Text 20"/>
+          <p:cNvSpPr/>
+          <p:nvPr/>
+        </p:nvSpPr>
+        <p:spPr>
+          <a:xfrm>
+            <a:off x="8860536" y="1572768"/>
+            <a:ext cx="2660904" cy="448056"/>
+          </a:xfrm>
+          <a:prstGeom prst="rect">
+            <a:avLst/>
+          </a:prstGeom>
+          <a:noFill/>
+          <a:ln/>
+        </p:spPr>
+        <p:txBody>
+          <a:bodyPr wrap="square" rtlCol="0" anchor="b"/>
+          <a:lstStyle/>
+          <a:p>
+            <a:pPr algn="l" indent="0" marL="0">
+              <a:buNone/>
+            </a:pPr>
+            <a:r>
+              <a:rPr lang="en-US" sz="1200" b="1" dirty="0">
+                <a:solidFill>
+                  <a:srgbClr val="FFFFFF"/>
+                </a:solidFill>
+                <a:latin typeface="Inter" pitchFamily="34" charset="0"/>
+                <a:ea typeface="Inter" pitchFamily="34" charset="-122"/>
+                <a:cs typeface="Inter" pitchFamily="34" charset="-120"/>
+              </a:rPr>
+              <a:t>Talend Agentic Routes</a:t>
+            </a:r>
+            <a:endParaRPr lang="en-US" sz="1200" dirty="0"/>
+          </a:p>
+        </p:txBody>
+      </p:sp>
+      <p:sp>
+        <p:nvSpPr>
+          <p:cNvPr id="27" name="Text 21"/>
+          <p:cNvSpPr/>
+          <p:nvPr/>
+        </p:nvSpPr>
+        <p:spPr>
+          <a:xfrm>
+            <a:off x="8860536" y="1965960"/>
+            <a:ext cx="2660904" cy="411480"/>
+          </a:xfrm>
+          <a:prstGeom prst="rect">
+            <a:avLst/>
+          </a:prstGeom>
+          <a:noFill/>
+          <a:ln/>
+        </p:spPr>
+        <p:txBody>
+          <a:bodyPr wrap="square" rtlCol="0" anchor="t"/>
+          <a:lstStyle/>
+          <a:p>
+            <a:pPr algn="l" indent="0" marL="0">
+              <a:lnSpc>
+                <a:spcPct val="102000"/>
+              </a:lnSpc>
+              <a:buNone/>
+            </a:pPr>
+            <a:r>
+              <a:rPr lang="en-US" sz="950" dirty="0">
+                <a:solidFill>
+                  <a:srgbClr val="D8DCE0"/>
+                </a:solidFill>
+                <a:latin typeface="Inter" pitchFamily="34" charset="0"/>
+                <a:ea typeface="Inter" pitchFamily="34" charset="-122"/>
+                <a:cs typeface="Inter" pitchFamily="34" charset="-120"/>
+              </a:rPr>
+              <a:t>LLM + RAG inside pipeline tasks</a:t>
+            </a:r>
+            <a:endParaRPr lang="en-US" sz="950" dirty="0"/>
+          </a:p>
+          <a:p>
+            <a:pPr algn="l" indent="0" marL="0">
+              <a:lnSpc>
+                <a:spcPct val="102000"/>
+              </a:lnSpc>
+              <a:buNone/>
+            </a:pPr>
+            <a:r>
+              <a:rPr lang="en-US" sz="950" dirty="0">
+                <a:solidFill>
+                  <a:srgbClr val="D8DCE0"/>
+                </a:solidFill>
+                <a:latin typeface="Inter" pitchFamily="34" charset="0"/>
+                <a:ea typeface="Inter" pitchFamily="34" charset="-122"/>
+                <a:cs typeface="Inter" pitchFamily="34" charset="-120"/>
+              </a:rPr>
+              <a:t>Claude · Bedrock · Ollama · Pinecone</a:t>
+            </a:r>
+            <a:endParaRPr lang="en-US" sz="950" dirty="0"/>
+          </a:p>
+        </p:txBody>
+      </p:sp>
+      <p:sp>
+        <p:nvSpPr>
+          <p:cNvPr id="28" name="Text 22"/>
+          <p:cNvSpPr/>
+          <p:nvPr/>
+        </p:nvSpPr>
+        <p:spPr>
+          <a:xfrm>
+            <a:off x="548640" y="2468880"/>
+            <a:ext cx="11064240" cy="219456"/>
+          </a:xfrm>
+          <a:prstGeom prst="rect">
+            <a:avLst/>
+          </a:prstGeom>
+          <a:noFill/>
+          <a:ln/>
+        </p:spPr>
+        <p:txBody>
+          <a:bodyPr wrap="square" rtlCol="0" anchor="ctr"/>
+          <a:lstStyle/>
+          <a:p>
+            <a:pPr algn="ctr" indent="0" marL="0">
+              <a:buNone/>
+            </a:pPr>
+            <a:r>
+              <a:rPr lang="en-US" sz="1000" b="1" dirty="0">
+                <a:solidFill>
+                  <a:srgbClr val="006580"/>
+                </a:solidFill>
+                <a:latin typeface="Inter" pitchFamily="34" charset="0"/>
+                <a:ea typeface="Inter" pitchFamily="34" charset="-122"/>
+                <a:cs typeface="Inter" pitchFamily="34" charset="-120"/>
+              </a:rPr>
+              <a:t>Human-in-the-loop coding agent:   Prompt  →  Generate  →  Schema-validate  →  Review</a:t>
+            </a:r>
+            <a:endParaRPr lang="en-US" sz="1000" dirty="0"/>
+          </a:p>
+        </p:txBody>
+      </p:sp>
+      <p:sp>
+        <p:nvSpPr>
+          <p:cNvPr id="29" name="Text 23"/>
+          <p:cNvSpPr/>
+          <p:nvPr/>
+        </p:nvSpPr>
+        <p:spPr>
+          <a:xfrm>
+            <a:off x="548640" y="2761488"/>
+            <a:ext cx="4114800" cy="237744"/>
+          </a:xfrm>
+          <a:prstGeom prst="rect">
+            <a:avLst/>
+          </a:prstGeom>
+          <a:noFill/>
+          <a:ln/>
+        </p:spPr>
+        <p:txBody>
+          <a:bodyPr wrap="square" rtlCol="0" anchor="ctr"/>
+          <a:lstStyle/>
+          <a:p>
+            <a:pPr indent="0" marL="0">
+              <a:buNone/>
+            </a:pPr>
+            <a:r>
+              <a:rPr lang="en-US" sz="1100" b="1" dirty="0">
+                <a:solidFill>
+                  <a:srgbClr val="006580"/>
+                </a:solidFill>
+                <a:latin typeface="Inter" pitchFamily="34" charset="0"/>
+                <a:ea typeface="Inter" pitchFamily="34" charset="-122"/>
+                <a:cs typeface="Inter" pitchFamily="34" charset="-120"/>
+              </a:rPr>
+              <a:t>GOVERN THE DATA</a:t>
+            </a:r>
+            <a:endParaRPr lang="en-US" sz="1100" dirty="0"/>
+          </a:p>
+        </p:txBody>
+      </p:sp>
+      <p:sp>
+        <p:nvSpPr>
+          <p:cNvPr id="30" name="Text 24"/>
+          <p:cNvSpPr/>
+          <p:nvPr/>
+        </p:nvSpPr>
+        <p:spPr>
+          <a:xfrm>
+            <a:off x="5120640" y="2761488"/>
+            <a:ext cx="6492240" cy="237744"/>
+          </a:xfrm>
+          <a:prstGeom prst="rect">
+            <a:avLst/>
+          </a:prstGeom>
+          <a:noFill/>
+          <a:ln/>
+        </p:spPr>
+        <p:txBody>
+          <a:bodyPr wrap="square" rtlCol="0" anchor="ctr"/>
+          <a:lstStyle/>
+          <a:p>
+            <a:pPr algn="r" indent="0" marL="0">
+              <a:buNone/>
+            </a:pPr>
+            <a:r>
+              <a:rPr lang="en-US" sz="900" i="1" dirty="0">
+                <a:solidFill>
+                  <a:srgbClr val="A9B3B6"/>
+                </a:solidFill>
+                <a:latin typeface="Inter" pitchFamily="34" charset="0"/>
+                <a:ea typeface="Inter" pitchFamily="34" charset="-122"/>
+                <a:cs typeface="Inter" pitchFamily="34" charset="-120"/>
+              </a:rPr>
+              <a:t>Three conversational agents are Qlik Answers capabilities, not separate products</a:t>
+            </a:r>
+            <a:endParaRPr lang="en-US" sz="900" dirty="0"/>
+          </a:p>
+        </p:txBody>
+      </p:sp>
+      <p:sp>
+        <p:nvSpPr>
+          <p:cNvPr id="31" name="Shape 25"/>
+          <p:cNvSpPr/>
+          <p:nvPr/>
+        </p:nvSpPr>
+        <p:spPr>
+          <a:xfrm>
+            <a:off x="548640" y="3035808"/>
+            <a:ext cx="2651760" cy="932688"/>
+          </a:xfrm>
+          <a:prstGeom prst="roundRect">
+            <a:avLst>
+              <a:gd name="adj" fmla="val 9804"/>
+            </a:avLst>
+          </a:prstGeom>
+          <a:solidFill>
+            <a:srgbClr val="006580"/>
+          </a:solidFill>
+          <a:ln w="6350">
+            <a:solidFill>
+              <a:srgbClr val="006580"/>
+            </a:solidFill>
+            <a:prstDash val="solid"/>
+          </a:ln>
+          <a:effectLst>
+            <a:outerShdw sx="100000" sy="100000" kx="0" ky="0" algn="bl" rotWithShape="0" blurRad="50800" dist="19050" dir="16200000">
+              <a:srgbClr val="000000">
+                <a:alpha val="8000"/>
+              </a:srgbClr>
+            </a:outerShdw>
+          </a:effectLst>
+        </p:spPr>
+      </p:sp>
+      <p:sp>
+        <p:nvSpPr>
+          <p:cNvPr id="32" name="Shape 26"/>
+          <p:cNvSpPr/>
+          <p:nvPr/>
+        </p:nvSpPr>
+        <p:spPr>
+          <a:xfrm>
+            <a:off x="667512" y="3218688"/>
+            <a:ext cx="566928" cy="566928"/>
+          </a:xfrm>
+          <a:prstGeom prst="ellipse">
+            <a:avLst/>
+          </a:prstGeom>
+          <a:solidFill>
+            <a:srgbClr val="FFFFFF"/>
+          </a:solidFill>
+          <a:ln w="12700">
+            <a:solidFill>
+              <a:srgbClr val="FFFFFF"/>
+            </a:solidFill>
+            <a:prstDash val="solid"/>
+          </a:ln>
+          <a:effectLst>
+            <a:outerShdw sx="100000" sy="100000" kx="0" ky="0" algn="bl" rotWithShape="0" blurRad="38100" dist="12700" dir="16200000">
+              <a:srgbClr val="000000">
+                <a:alpha val="15000"/>
+              </a:srgbClr>
+            </a:outerShdw>
+          </a:effectLst>
+        </p:spPr>
+      </p:sp>
+      <p:pic>
+        <p:nvPicPr>
+          <p:cNvPr id="33" name="Image 4" descr="C:\Claude\MCG Full Stack\generators\assets\icons\governance.png">    </p:cNvPr>
+          <p:cNvPicPr>
+            <a:picLocks noChangeAspect="1"/>
+          </p:cNvPicPr>
+          <p:nvPr/>
+        </p:nvPicPr>
+        <p:blipFill>
+          <a:blip r:embed="rId5"/>
+          <a:stretch>
+            <a:fillRect/>
+          </a:stretch>
+        </p:blipFill>
+        <p:spPr>
+          <a:xfrm>
+            <a:off x="775228" y="3326404"/>
+            <a:ext cx="351495" cy="351495"/>
+          </a:xfrm>
+          <a:prstGeom prst="rect">
+            <a:avLst/>
+          </a:prstGeom>
+        </p:spPr>
+      </p:pic>
+      <p:sp>
+        <p:nvSpPr>
+          <p:cNvPr id="34" name="Text 27"/>
+          <p:cNvSpPr/>
+          <p:nvPr/>
+        </p:nvSpPr>
+        <p:spPr>
+          <a:xfrm>
+            <a:off x="1362456" y="3108960"/>
+            <a:ext cx="1746504" cy="448056"/>
+          </a:xfrm>
+          <a:prstGeom prst="rect">
+            <a:avLst/>
+          </a:prstGeom>
+          <a:noFill/>
+          <a:ln/>
+        </p:spPr>
+        <p:txBody>
+          <a:bodyPr wrap="square" rtlCol="0" anchor="b"/>
+          <a:lstStyle/>
+          <a:p>
+            <a:pPr algn="l" indent="0" marL="0">
+              <a:buNone/>
+            </a:pPr>
+            <a:r>
+              <a:rPr lang="en-US" sz="1200" b="1" dirty="0">
+                <a:solidFill>
+                  <a:srgbClr val="FFFFFF"/>
+                </a:solidFill>
+                <a:latin typeface="Inter" pitchFamily="34" charset="0"/>
+                <a:ea typeface="Inter" pitchFamily="34" charset="-122"/>
+                <a:cs typeface="Inter" pitchFamily="34" charset="-120"/>
+              </a:rPr>
+              <a:t>Data Product Agent</a:t>
+            </a:r>
+            <a:endParaRPr lang="en-US" sz="1200" dirty="0"/>
+          </a:p>
+        </p:txBody>
+      </p:sp>
+      <p:sp>
+        <p:nvSpPr>
+          <p:cNvPr id="35" name="Text 28"/>
+          <p:cNvSpPr/>
+          <p:nvPr/>
+        </p:nvSpPr>
+        <p:spPr>
+          <a:xfrm>
+            <a:off x="1362456" y="3502152"/>
+            <a:ext cx="1746504" cy="411480"/>
+          </a:xfrm>
+          <a:prstGeom prst="rect">
+            <a:avLst/>
+          </a:prstGeom>
+          <a:noFill/>
+          <a:ln/>
+        </p:spPr>
+        <p:txBody>
+          <a:bodyPr wrap="square" rtlCol="0" anchor="t"/>
+          <a:lstStyle/>
+          <a:p>
+            <a:pPr algn="l" indent="0" marL="0">
+              <a:lnSpc>
+                <a:spcPct val="102000"/>
+              </a:lnSpc>
+              <a:buNone/>
+            </a:pPr>
+            <a:r>
+              <a:rPr lang="en-US" sz="950" dirty="0">
+                <a:solidFill>
+                  <a:srgbClr val="D8DCE0"/>
+                </a:solidFill>
+                <a:latin typeface="Inter" pitchFamily="34" charset="0"/>
+                <a:ea typeface="Inter" pitchFamily="34" charset="-122"/>
+                <a:cs typeface="Inter" pitchFamily="34" charset="-120"/>
+              </a:rPr>
+              <a:t>Create &amp; manage data products</a:t>
+            </a:r>
+            <a:endParaRPr lang="en-US" sz="950" dirty="0"/>
+          </a:p>
+          <a:p>
+            <a:pPr algn="l" indent="0" marL="0">
+              <a:lnSpc>
+                <a:spcPct val="102000"/>
+              </a:lnSpc>
+              <a:buNone/>
+            </a:pPr>
+            <a:r>
+              <a:rPr lang="en-US" sz="950" dirty="0">
+                <a:solidFill>
+                  <a:srgbClr val="D8DCE0"/>
+                </a:solidFill>
+                <a:latin typeface="Inter" pitchFamily="34" charset="0"/>
+                <a:ea typeface="Inter" pitchFamily="34" charset="-122"/>
+                <a:cs typeface="Inter" pitchFamily="34" charset="-120"/>
+              </a:rPr>
+              <a:t>by natural language</a:t>
+            </a:r>
+            <a:endParaRPr lang="en-US" sz="950" dirty="0"/>
+          </a:p>
+        </p:txBody>
+      </p:sp>
+      <p:sp>
+        <p:nvSpPr>
+          <p:cNvPr id="36" name="Shape 29"/>
+          <p:cNvSpPr/>
+          <p:nvPr/>
+        </p:nvSpPr>
+        <p:spPr>
+          <a:xfrm>
+            <a:off x="3319272" y="3035808"/>
+            <a:ext cx="2651760" cy="932688"/>
+          </a:xfrm>
+          <a:prstGeom prst="roundRect">
+            <a:avLst>
+              <a:gd name="adj" fmla="val 9804"/>
+            </a:avLst>
+          </a:prstGeom>
+          <a:solidFill>
+            <a:srgbClr val="006580"/>
+          </a:solidFill>
+          <a:ln w="6350">
+            <a:solidFill>
+              <a:srgbClr val="006580"/>
+            </a:solidFill>
+            <a:prstDash val="solid"/>
+          </a:ln>
+          <a:effectLst>
+            <a:outerShdw sx="100000" sy="100000" kx="0" ky="0" algn="bl" rotWithShape="0" blurRad="50800" dist="19050" dir="16200000">
+              <a:srgbClr val="000000">
+                <a:alpha val="8000"/>
+              </a:srgbClr>
+            </a:outerShdw>
+          </a:effectLst>
+        </p:spPr>
+      </p:sp>
+      <p:sp>
+        <p:nvSpPr>
+          <p:cNvPr id="37" name="Shape 30"/>
+          <p:cNvSpPr/>
+          <p:nvPr/>
+        </p:nvSpPr>
+        <p:spPr>
+          <a:xfrm>
+            <a:off x="3438144" y="3218688"/>
+            <a:ext cx="566928" cy="566928"/>
+          </a:xfrm>
+          <a:prstGeom prst="ellipse">
+            <a:avLst/>
+          </a:prstGeom>
+          <a:solidFill>
+            <a:srgbClr val="FFFFFF"/>
+          </a:solidFill>
+          <a:ln w="12700">
+            <a:solidFill>
+              <a:srgbClr val="FFFFFF"/>
+            </a:solidFill>
+            <a:prstDash val="solid"/>
+          </a:ln>
+          <a:effectLst>
+            <a:outerShdw sx="100000" sy="100000" kx="0" ky="0" algn="bl" rotWithShape="0" blurRad="38100" dist="12700" dir="16200000">
+              <a:srgbClr val="000000">
+                <a:alpha val="15000"/>
+              </a:srgbClr>
+            </a:outerShdw>
+          </a:effectLst>
+        </p:spPr>
+      </p:sp>
+      <p:pic>
+        <p:nvPicPr>
+          <p:cNvPr id="38" name="Image 5" descr="C:\Claude\MCG Full Stack\generators\assets\icons\answers.png">    </p:cNvPr>
+          <p:cNvPicPr>
+            <a:picLocks noChangeAspect="1"/>
+          </p:cNvPicPr>
+          <p:nvPr/>
+        </p:nvPicPr>
+        <p:blipFill>
+          <a:blip r:embed="rId6"/>
+          <a:stretch>
+            <a:fillRect/>
+          </a:stretch>
+        </p:blipFill>
+        <p:spPr>
+          <a:xfrm>
+            <a:off x="3545860" y="3326404"/>
+            <a:ext cx="351495" cy="351495"/>
+          </a:xfrm>
+          <a:prstGeom prst="rect">
+            <a:avLst/>
+          </a:prstGeom>
+        </p:spPr>
+      </p:pic>
+      <p:sp>
+        <p:nvSpPr>
+          <p:cNvPr id="39" name="Text 31"/>
+          <p:cNvSpPr/>
+          <p:nvPr/>
+        </p:nvSpPr>
+        <p:spPr>
+          <a:xfrm>
+            <a:off x="4133088" y="3108960"/>
+            <a:ext cx="1746504" cy="448056"/>
+          </a:xfrm>
+          <a:prstGeom prst="rect">
+            <a:avLst/>
+          </a:prstGeom>
+          <a:noFill/>
+          <a:ln/>
+        </p:spPr>
+        <p:txBody>
+          <a:bodyPr wrap="square" rtlCol="0" anchor="b"/>
+          <a:lstStyle/>
+          <a:p>
+            <a:pPr algn="l" indent="0" marL="0">
+              <a:buNone/>
+            </a:pPr>
+            <a:r>
+              <a:rPr lang="en-US" sz="1200" b="1" dirty="0">
+                <a:solidFill>
+                  <a:srgbClr val="FFFFFF"/>
+                </a:solidFill>
+                <a:latin typeface="Inter" pitchFamily="34" charset="0"/>
+                <a:ea typeface="Inter" pitchFamily="34" charset="-122"/>
+                <a:cs typeface="Inter" pitchFamily="34" charset="-120"/>
+              </a:rPr>
+              <a:t>Data Quality Agent</a:t>
+            </a:r>
+            <a:endParaRPr lang="en-US" sz="1200" dirty="0"/>
+          </a:p>
+        </p:txBody>
+      </p:sp>
+      <p:sp>
+        <p:nvSpPr>
+          <p:cNvPr id="40" name="Text 32"/>
+          <p:cNvSpPr/>
+          <p:nvPr/>
+        </p:nvSpPr>
+        <p:spPr>
+          <a:xfrm>
+            <a:off x="4133088" y="3502152"/>
+            <a:ext cx="1746504" cy="411480"/>
+          </a:xfrm>
+          <a:prstGeom prst="rect">
+            <a:avLst/>
+          </a:prstGeom>
+          <a:noFill/>
+          <a:ln/>
+        </p:spPr>
+        <p:txBody>
+          <a:bodyPr wrap="square" rtlCol="0" anchor="t"/>
+          <a:lstStyle/>
+          <a:p>
+            <a:pPr algn="l" indent="0" marL="0">
+              <a:lnSpc>
+                <a:spcPct val="102000"/>
+              </a:lnSpc>
+              <a:buNone/>
+            </a:pPr>
+            <a:r>
+              <a:rPr lang="en-US" sz="950" dirty="0">
+                <a:solidFill>
+                  <a:srgbClr val="D8DCE0"/>
+                </a:solidFill>
+                <a:latin typeface="Inter" pitchFamily="34" charset="0"/>
+                <a:ea typeface="Inter" pitchFamily="34" charset="-122"/>
+                <a:cs typeface="Inter" pitchFamily="34" charset="-120"/>
+              </a:rPr>
+              <a:t>Assess, define &amp; enforce</a:t>
+            </a:r>
+            <a:endParaRPr lang="en-US" sz="950" dirty="0"/>
+          </a:p>
+          <a:p>
+            <a:pPr algn="l" indent="0" marL="0">
+              <a:lnSpc>
+                <a:spcPct val="102000"/>
+              </a:lnSpc>
+              <a:buNone/>
+            </a:pPr>
+            <a:r>
+              <a:rPr lang="en-US" sz="950" dirty="0">
+                <a:solidFill>
+                  <a:srgbClr val="D8DCE0"/>
+                </a:solidFill>
+                <a:latin typeface="Inter" pitchFamily="34" charset="0"/>
+                <a:ea typeface="Inter" pitchFamily="34" charset="-122"/>
+                <a:cs typeface="Inter" pitchFamily="34" charset="-120"/>
+              </a:rPr>
+              <a:t>DQ rules conversationally</a:t>
+            </a:r>
+            <a:endParaRPr lang="en-US" sz="950" dirty="0"/>
+          </a:p>
+        </p:txBody>
+      </p:sp>
+      <p:sp>
+        <p:nvSpPr>
+          <p:cNvPr id="41" name="Shape 33"/>
+          <p:cNvSpPr/>
+          <p:nvPr/>
+        </p:nvSpPr>
+        <p:spPr>
+          <a:xfrm>
+            <a:off x="6089904" y="3035808"/>
+            <a:ext cx="2651760" cy="932688"/>
+          </a:xfrm>
+          <a:prstGeom prst="roundRect">
+            <a:avLst>
+              <a:gd name="adj" fmla="val 9804"/>
+            </a:avLst>
+          </a:prstGeom>
+          <a:solidFill>
+            <a:srgbClr val="006580"/>
+          </a:solidFill>
+          <a:ln w="6350">
+            <a:solidFill>
+              <a:srgbClr val="006580"/>
+            </a:solidFill>
+            <a:prstDash val="solid"/>
+          </a:ln>
+          <a:effectLst>
+            <a:outerShdw sx="100000" sy="100000" kx="0" ky="0" algn="bl" rotWithShape="0" blurRad="50800" dist="19050" dir="16200000">
+              <a:srgbClr val="000000">
+                <a:alpha val="8000"/>
+              </a:srgbClr>
+            </a:outerShdw>
+          </a:effectLst>
+        </p:spPr>
+      </p:sp>
+      <p:sp>
+        <p:nvSpPr>
+          <p:cNvPr id="42" name="Shape 34"/>
+          <p:cNvSpPr/>
+          <p:nvPr/>
+        </p:nvSpPr>
+        <p:spPr>
+          <a:xfrm>
+            <a:off x="6208776" y="3218688"/>
+            <a:ext cx="566928" cy="566928"/>
+          </a:xfrm>
+          <a:prstGeom prst="ellipse">
+            <a:avLst/>
+          </a:prstGeom>
+          <a:solidFill>
+            <a:srgbClr val="FFFFFF"/>
+          </a:solidFill>
+          <a:ln w="12700">
+            <a:solidFill>
+              <a:srgbClr val="FFFFFF"/>
+            </a:solidFill>
+            <a:prstDash val="solid"/>
+          </a:ln>
+          <a:effectLst>
+            <a:outerShdw sx="100000" sy="100000" kx="0" ky="0" algn="bl" rotWithShape="0" blurRad="38100" dist="12700" dir="16200000">
+              <a:srgbClr val="000000">
+                <a:alpha val="15000"/>
+              </a:srgbClr>
+            </a:outerShdw>
+          </a:effectLst>
+        </p:spPr>
+      </p:sp>
+      <p:pic>
+        <p:nvPicPr>
+          <p:cNvPr id="43" name="Image 6" descr="C:\Claude\MCG Full Stack\generators\assets\icons\agent.png">    </p:cNvPr>
+          <p:cNvPicPr>
+            <a:picLocks noChangeAspect="1"/>
+          </p:cNvPicPr>
+          <p:nvPr/>
+        </p:nvPicPr>
+        <p:blipFill>
+          <a:blip r:embed="rId7"/>
+          <a:stretch>
+            <a:fillRect/>
+          </a:stretch>
+        </p:blipFill>
+        <p:spPr>
+          <a:xfrm>
+            <a:off x="6316492" y="3326404"/>
+            <a:ext cx="351495" cy="351495"/>
+          </a:xfrm>
+          <a:prstGeom prst="rect">
+            <a:avLst/>
+          </a:prstGeom>
+        </p:spPr>
+      </p:pic>
+      <p:sp>
+        <p:nvSpPr>
+          <p:cNvPr id="44" name="Text 35"/>
+          <p:cNvSpPr/>
+          <p:nvPr/>
+        </p:nvSpPr>
+        <p:spPr>
+          <a:xfrm>
+            <a:off x="6903720" y="3108960"/>
+            <a:ext cx="1746504" cy="448056"/>
+          </a:xfrm>
+          <a:prstGeom prst="rect">
+            <a:avLst/>
+          </a:prstGeom>
+          <a:noFill/>
+          <a:ln/>
+        </p:spPr>
+        <p:txBody>
+          <a:bodyPr wrap="square" rtlCol="0" anchor="b"/>
+          <a:lstStyle/>
+          <a:p>
+            <a:pPr algn="l" indent="0" marL="0">
+              <a:buNone/>
+            </a:pPr>
+            <a:r>
+              <a:rPr lang="en-US" sz="1200" b="1" dirty="0">
+                <a:solidFill>
+                  <a:srgbClr val="FFFFFF"/>
+                </a:solidFill>
+                <a:latin typeface="Inter" pitchFamily="34" charset="0"/>
+                <a:ea typeface="Inter" pitchFamily="34" charset="-122"/>
+                <a:cs typeface="Inter" pitchFamily="34" charset="-120"/>
+              </a:rPr>
+              <a:t>Catalog &amp; Glossary Agent</a:t>
+            </a:r>
+            <a:endParaRPr lang="en-US" sz="1200" dirty="0"/>
+          </a:p>
+        </p:txBody>
+      </p:sp>
+      <p:sp>
+        <p:nvSpPr>
+          <p:cNvPr id="45" name="Text 36"/>
+          <p:cNvSpPr/>
+          <p:nvPr/>
+        </p:nvSpPr>
+        <p:spPr>
+          <a:xfrm>
+            <a:off x="6903720" y="3502152"/>
+            <a:ext cx="1746504" cy="411480"/>
+          </a:xfrm>
+          <a:prstGeom prst="rect">
+            <a:avLst/>
+          </a:prstGeom>
+          <a:noFill/>
+          <a:ln/>
+        </p:spPr>
+        <p:txBody>
+          <a:bodyPr wrap="square" rtlCol="0" anchor="t"/>
+          <a:lstStyle/>
+          <a:p>
+            <a:pPr algn="l" indent="0" marL="0">
+              <a:lnSpc>
+                <a:spcPct val="102000"/>
+              </a:lnSpc>
+              <a:buNone/>
+            </a:pPr>
+            <a:r>
+              <a:rPr lang="en-US" sz="950" dirty="0">
+                <a:solidFill>
+                  <a:srgbClr val="D8DCE0"/>
+                </a:solidFill>
+                <a:latin typeface="Inter" pitchFamily="34" charset="0"/>
+                <a:ea typeface="Inter" pitchFamily="34" charset="-122"/>
+                <a:cs typeface="Inter" pitchFamily="34" charset="-120"/>
+              </a:rPr>
+              <a:t>Discover assets · draft glossary</a:t>
+            </a:r>
+            <a:endParaRPr lang="en-US" sz="950" dirty="0"/>
+          </a:p>
+          <a:p>
+            <a:pPr algn="l" indent="0" marL="0">
+              <a:lnSpc>
+                <a:spcPct val="102000"/>
+              </a:lnSpc>
+              <a:buNone/>
+            </a:pPr>
+            <a:r>
+              <a:rPr lang="en-US" sz="950" dirty="0">
+                <a:solidFill>
+                  <a:srgbClr val="D8DCE0"/>
+                </a:solidFill>
+                <a:latin typeface="Inter" pitchFamily="34" charset="0"/>
+                <a:ea typeface="Inter" pitchFamily="34" charset="-122"/>
+                <a:cs typeface="Inter" pitchFamily="34" charset="-120"/>
+              </a:rPr>
+              <a:t>terms (human-reviewed)</a:t>
+            </a:r>
+            <a:endParaRPr lang="en-US" sz="950" dirty="0"/>
+          </a:p>
+        </p:txBody>
+      </p:sp>
+      <p:sp>
+        <p:nvSpPr>
+          <p:cNvPr id="46" name="Shape 37"/>
+          <p:cNvSpPr/>
+          <p:nvPr/>
+        </p:nvSpPr>
+        <p:spPr>
+          <a:xfrm>
+            <a:off x="8860536" y="3035808"/>
+            <a:ext cx="2743200" cy="932688"/>
+          </a:xfrm>
+          <a:prstGeom prst="roundRect">
+            <a:avLst>
+              <a:gd name="adj" fmla="val 9804"/>
+            </a:avLst>
+          </a:prstGeom>
+          <a:solidFill>
+            <a:srgbClr val="19416C"/>
+          </a:solidFill>
+          <a:ln w="6350">
+            <a:solidFill>
+              <a:srgbClr val="19416C"/>
+            </a:solidFill>
+            <a:prstDash val="solid"/>
+          </a:ln>
+          <a:effectLst>
+            <a:outerShdw sx="100000" sy="100000" kx="0" ky="0" algn="bl" rotWithShape="0" blurRad="50800" dist="19050" dir="16200000">
+              <a:srgbClr val="000000">
+                <a:alpha val="8000"/>
+              </a:srgbClr>
+            </a:outerShdw>
+          </a:effectLst>
+        </p:spPr>
+      </p:sp>
+      <p:sp>
+        <p:nvSpPr>
+          <p:cNvPr id="47" name="Shape 38"/>
+          <p:cNvSpPr/>
+          <p:nvPr/>
+        </p:nvSpPr>
+        <p:spPr>
+          <a:xfrm>
+            <a:off x="8979408" y="3218688"/>
+            <a:ext cx="566928" cy="566928"/>
+          </a:xfrm>
+          <a:prstGeom prst="ellipse">
+            <a:avLst/>
+          </a:prstGeom>
+          <a:solidFill>
+            <a:srgbClr val="FFFFFF"/>
+          </a:solidFill>
+          <a:ln w="12700">
+            <a:solidFill>
+              <a:srgbClr val="FFFFFF"/>
+            </a:solidFill>
+            <a:prstDash val="solid"/>
+          </a:ln>
+          <a:effectLst>
+            <a:outerShdw sx="100000" sy="100000" kx="0" ky="0" algn="bl" rotWithShape="0" blurRad="38100" dist="12700" dir="16200000">
+              <a:srgbClr val="000000">
+                <a:alpha val="15000"/>
+              </a:srgbClr>
+            </a:outerShdw>
+          </a:effectLst>
+        </p:spPr>
+      </p:sp>
+      <p:pic>
+        <p:nvPicPr>
+          <p:cNvPr id="48" name="Image 7" descr="C:\Claude\MCG Full Stack\generators\assets\icons\mcp.png">    </p:cNvPr>
+          <p:cNvPicPr>
+            <a:picLocks noChangeAspect="1"/>
+          </p:cNvPicPr>
+          <p:nvPr/>
+        </p:nvPicPr>
+        <p:blipFill>
+          <a:blip r:embed="rId8"/>
+          <a:stretch>
+            <a:fillRect/>
+          </a:stretch>
+        </p:blipFill>
+        <p:spPr>
+          <a:xfrm>
+            <a:off x="9087124" y="3326404"/>
+            <a:ext cx="351495" cy="351495"/>
+          </a:xfrm>
+          <a:prstGeom prst="rect">
+            <a:avLst/>
+          </a:prstGeom>
+        </p:spPr>
+      </p:pic>
+      <p:sp>
+        <p:nvSpPr>
+          <p:cNvPr id="49" name="Text 39"/>
+          <p:cNvSpPr/>
+          <p:nvPr/>
+        </p:nvSpPr>
+        <p:spPr>
+          <a:xfrm>
+            <a:off x="9674352" y="3108960"/>
+            <a:ext cx="1837944" cy="448056"/>
+          </a:xfrm>
+          <a:prstGeom prst="rect">
+            <a:avLst/>
+          </a:prstGeom>
+          <a:noFill/>
+          <a:ln/>
+        </p:spPr>
+        <p:txBody>
+          <a:bodyPr wrap="square" rtlCol="0" anchor="b"/>
+          <a:lstStyle/>
+          <a:p>
+            <a:pPr algn="l" indent="0" marL="0">
+              <a:buNone/>
+            </a:pPr>
+            <a:r>
+              <a:rPr lang="en-US" sz="1200" b="1" dirty="0">
+                <a:solidFill>
+                  <a:srgbClr val="FFFFFF"/>
+                </a:solidFill>
+                <a:latin typeface="Inter" pitchFamily="34" charset="0"/>
+                <a:ea typeface="Inter" pitchFamily="34" charset="-122"/>
+                <a:cs typeface="Inter" pitchFamily="34" charset="-120"/>
+              </a:rPr>
+              <a:t>Qlik MCP Server</a:t>
+            </a:r>
+            <a:endParaRPr lang="en-US" sz="1200" dirty="0"/>
+          </a:p>
+        </p:txBody>
+      </p:sp>
+      <p:sp>
+        <p:nvSpPr>
+          <p:cNvPr id="50" name="Text 40"/>
+          <p:cNvSpPr/>
+          <p:nvPr/>
+        </p:nvSpPr>
+        <p:spPr>
+          <a:xfrm>
+            <a:off x="9674352" y="3502152"/>
+            <a:ext cx="1837944" cy="411480"/>
+          </a:xfrm>
+          <a:prstGeom prst="rect">
+            <a:avLst/>
+          </a:prstGeom>
+          <a:noFill/>
+          <a:ln/>
+        </p:spPr>
+        <p:txBody>
+          <a:bodyPr wrap="square" rtlCol="0" anchor="t"/>
+          <a:lstStyle/>
+          <a:p>
+            <a:pPr algn="l" indent="0" marL="0">
+              <a:lnSpc>
+                <a:spcPct val="102000"/>
+              </a:lnSpc>
+              <a:buNone/>
+            </a:pPr>
+            <a:r>
+              <a:rPr lang="en-US" sz="950" dirty="0">
+                <a:solidFill>
+                  <a:srgbClr val="D8DCE0"/>
+                </a:solidFill>
+                <a:latin typeface="Inter" pitchFamily="34" charset="0"/>
+                <a:ea typeface="Inter" pitchFamily="34" charset="-122"/>
+                <a:cs typeface="Inter" pitchFamily="34" charset="-120"/>
+              </a:rPr>
+              <a:t>Exposes governance to external</a:t>
+            </a:r>
+            <a:endParaRPr lang="en-US" sz="950" dirty="0"/>
+          </a:p>
+          <a:p>
+            <a:pPr algn="l" indent="0" marL="0">
+              <a:lnSpc>
+                <a:spcPct val="102000"/>
+              </a:lnSpc>
+              <a:buNone/>
+            </a:pPr>
+            <a:r>
+              <a:rPr lang="en-US" sz="950" dirty="0">
+                <a:solidFill>
+                  <a:srgbClr val="D8DCE0"/>
+                </a:solidFill>
+                <a:latin typeface="Inter" pitchFamily="34" charset="0"/>
+                <a:ea typeface="Inter" pitchFamily="34" charset="-122"/>
+                <a:cs typeface="Inter" pitchFamily="34" charset="-120"/>
+              </a:rPr>
+              <a:t>AI assistants (Claude) · Preview</a:t>
+            </a:r>
+            <a:endParaRPr lang="en-US" sz="950" dirty="0"/>
+          </a:p>
+        </p:txBody>
+      </p:sp>
+      <p:sp>
+        <p:nvSpPr>
+          <p:cNvPr id="51" name="Shape 41"/>
+          <p:cNvSpPr/>
+          <p:nvPr/>
+        </p:nvSpPr>
+        <p:spPr>
+          <a:xfrm>
+            <a:off x="1554480" y="4041648"/>
+            <a:ext cx="0" cy="274320"/>
+          </a:xfrm>
+          <a:prstGeom prst="line">
+            <a:avLst/>
+          </a:prstGeom>
+          <a:noFill/>
+          <a:ln w="19050">
+            <a:solidFill>
+              <a:srgbClr val="A9B3B6"/>
+            </a:solidFill>
+            <a:prstDash val="solid"/>
+            <a:tailEnd type="triangle"/>
+          </a:ln>
+        </p:spPr>
+      </p:sp>
+      <p:sp>
+        <p:nvSpPr>
+          <p:cNvPr id="52" name="Shape 42"/>
+          <p:cNvSpPr/>
+          <p:nvPr/>
+        </p:nvSpPr>
+        <p:spPr>
+          <a:xfrm>
+            <a:off x="10607040" y="4041648"/>
+            <a:ext cx="0" cy="274320"/>
+          </a:xfrm>
+          <a:prstGeom prst="line">
+            <a:avLst/>
+          </a:prstGeom>
+          <a:noFill/>
+          <a:ln w="19050">
+            <a:solidFill>
+              <a:srgbClr val="A9B3B6"/>
+            </a:solidFill>
+            <a:prstDash val="solid"/>
+            <a:tailEnd type="triangle"/>
+          </a:ln>
+        </p:spPr>
+      </p:sp>
+      <p:sp>
+        <p:nvSpPr>
+          <p:cNvPr id="53" name="Text 43"/>
+          <p:cNvSpPr/>
+          <p:nvPr/>
+        </p:nvSpPr>
+        <p:spPr>
+          <a:xfrm>
+            <a:off x="2194560" y="4041648"/>
+            <a:ext cx="7772400" cy="256032"/>
+          </a:xfrm>
+          <a:prstGeom prst="rect">
+            <a:avLst/>
+          </a:prstGeom>
+          <a:noFill/>
+          <a:ln/>
+        </p:spPr>
+        <p:txBody>
+          <a:bodyPr wrap="square" rtlCol="0" anchor="ctr"/>
+          <a:lstStyle/>
+          <a:p>
+            <a:pPr algn="ctr" indent="0" marL="0">
+              <a:buNone/>
+            </a:pPr>
+            <a:r>
+              <a:rPr lang="en-US" sz="1000" i="1" dirty="0">
+                <a:solidFill>
+                  <a:srgbClr val="006580"/>
+                </a:solidFill>
+                <a:latin typeface="Inter" pitchFamily="34" charset="0"/>
+                <a:ea typeface="Inter" pitchFamily="34" charset="-122"/>
+                <a:cs typeface="Inter" pitchFamily="34" charset="-120"/>
+              </a:rPr>
+              <a:t>The agentic layer sits over the medallion — authoring the YAML and governing the outputs</a:t>
+            </a:r>
+            <a:endParaRPr lang="en-US" sz="1000" dirty="0"/>
+          </a:p>
+        </p:txBody>
+      </p:sp>
+      <p:sp>
+        <p:nvSpPr>
+          <p:cNvPr id="54" name="Shape 44"/>
+          <p:cNvSpPr/>
+          <p:nvPr/>
+        </p:nvSpPr>
+        <p:spPr>
+          <a:xfrm>
+            <a:off x="457200" y="4334256"/>
+            <a:ext cx="11274552" cy="1920240"/>
+          </a:xfrm>
+          <a:prstGeom prst="roundRect">
+            <a:avLst>
+              <a:gd name="adj" fmla="val 5714"/>
+            </a:avLst>
+          </a:prstGeom>
+          <a:solidFill>
+            <a:srgbClr val="F6F7F8"/>
+          </a:solidFill>
+          <a:ln w="12700">
+            <a:solidFill>
+              <a:srgbClr val="A9B3B6"/>
+            </a:solidFill>
+            <a:prstDash val="solid"/>
+          </a:ln>
+        </p:spPr>
+      </p:sp>
+      <p:sp>
+        <p:nvSpPr>
+          <p:cNvPr id="55" name="Shape 45"/>
+          <p:cNvSpPr/>
+          <p:nvPr/>
+        </p:nvSpPr>
+        <p:spPr>
+          <a:xfrm>
+            <a:off x="621792" y="4370832"/>
+            <a:ext cx="274320" cy="274320"/>
+          </a:xfrm>
+          <a:prstGeom prst="ellipse">
+            <a:avLst/>
+          </a:prstGeom>
+          <a:solidFill>
+            <a:srgbClr val="FFFFFF"/>
+          </a:solidFill>
+          <a:ln w="12700">
+            <a:solidFill>
+              <a:srgbClr val="009845"/>
+            </a:solidFill>
+            <a:prstDash val="solid"/>
+          </a:ln>
+          <a:effectLst>
+            <a:outerShdw sx="100000" sy="100000" kx="0" ky="0" algn="bl" rotWithShape="0" blurRad="38100" dist="12700" dir="16200000">
+              <a:srgbClr val="000000">
+                <a:alpha val="15000"/>
+              </a:srgbClr>
+            </a:outerShdw>
+          </a:effectLst>
+        </p:spPr>
+      </p:sp>
+      <p:pic>
+        <p:nvPicPr>
+          <p:cNvPr id="56" name="Image 8" descr="C:\Claude\MCG Full Stack\generators\assets\icons\lakehouse.png">    </p:cNvPr>
+          <p:cNvPicPr>
+            <a:picLocks noChangeAspect="1"/>
+          </p:cNvPicPr>
+          <p:nvPr/>
+        </p:nvPicPr>
+        <p:blipFill>
+          <a:blip r:embed="rId9"/>
+          <a:stretch>
+            <a:fillRect/>
+          </a:stretch>
+        </p:blipFill>
+        <p:spPr>
+          <a:xfrm>
+            <a:off x="673913" y="4422953"/>
+            <a:ext cx="170078" cy="170078"/>
+          </a:xfrm>
+          <a:prstGeom prst="rect">
+            <a:avLst/>
+          </a:prstGeom>
+        </p:spPr>
+      </p:pic>
+      <p:sp>
+        <p:nvSpPr>
+          <p:cNvPr id="57" name="Text 46"/>
+          <p:cNvSpPr/>
+          <p:nvPr/>
+        </p:nvSpPr>
+        <p:spPr>
+          <a:xfrm>
+            <a:off x="987552" y="4379976"/>
+            <a:ext cx="10515600" cy="292608"/>
+          </a:xfrm>
+          <a:prstGeom prst="rect">
+            <a:avLst/>
+          </a:prstGeom>
+          <a:noFill/>
+          <a:ln/>
+        </p:spPr>
+        <p:txBody>
+          <a:bodyPr wrap="square" rtlCol="0" anchor="ctr"/>
+          <a:lstStyle/>
+          <a:p>
+            <a:pPr indent="0" marL="0">
+              <a:buNone/>
+            </a:pPr>
+            <a:r>
+              <a:rPr lang="en-US" sz="1100" b="1" dirty="0">
+                <a:solidFill>
+                  <a:srgbClr val="19416C"/>
+                </a:solidFill>
+                <a:latin typeface="Inter" pitchFamily="34" charset="0"/>
+                <a:ea typeface="Inter" pitchFamily="34" charset="-122"/>
+                <a:cs typeface="Inter" pitchFamily="34" charset="-120"/>
+              </a:rPr>
+              <a:t>Qlik Open Lakehouse — the declarative pipeline the agents author &amp; govern  (Bronze · Silver · Gold on Apache Iceberg)</a:t>
+            </a:r>
+            <a:endParaRPr lang="en-US" sz="1100" dirty="0"/>
+          </a:p>
+        </p:txBody>
+      </p:sp>
+      <p:sp>
+        <p:nvSpPr>
+          <p:cNvPr id="58" name="Shape 47"/>
+          <p:cNvSpPr/>
+          <p:nvPr/>
+        </p:nvSpPr>
+        <p:spPr>
+          <a:xfrm>
+            <a:off x="685800" y="4773168"/>
+            <a:ext cx="3291840" cy="347472"/>
+          </a:xfrm>
+          <a:prstGeom prst="roundRect">
+            <a:avLst>
+              <a:gd name="adj" fmla="val 15789"/>
+            </a:avLst>
+          </a:prstGeom>
+          <a:solidFill>
+            <a:srgbClr val="006580"/>
+          </a:solidFill>
+          <a:ln/>
+        </p:spPr>
+      </p:sp>
+      <p:sp>
+        <p:nvSpPr>
+          <p:cNvPr id="59" name="Text 48"/>
+          <p:cNvSpPr/>
+          <p:nvPr/>
+        </p:nvSpPr>
+        <p:spPr>
+          <a:xfrm>
+            <a:off x="685800" y="4773168"/>
+            <a:ext cx="3291840" cy="347472"/>
+          </a:xfrm>
+          <a:prstGeom prst="rect">
+            <a:avLst/>
+          </a:prstGeom>
+          <a:noFill/>
+          <a:ln/>
+        </p:spPr>
+        <p:txBody>
+          <a:bodyPr wrap="square" rtlCol="0" anchor="ctr"/>
+          <a:lstStyle/>
+          <a:p>
+            <a:pPr algn="ctr" indent="0" marL="0">
+              <a:buNone/>
+            </a:pPr>
+            <a:r>
+              <a:rPr lang="en-US" sz="1100" b="1" dirty="0">
+                <a:solidFill>
+                  <a:srgbClr val="FFFFFF"/>
+                </a:solidFill>
+                <a:latin typeface="Inter" pitchFamily="34" charset="0"/>
+                <a:ea typeface="Inter" pitchFamily="34" charset="-122"/>
+                <a:cs typeface="Inter" pitchFamily="34" charset="-120"/>
+              </a:rPr>
+              <a:t>BRONZE · Landing</a:t>
+            </a:r>
+            <a:endParaRPr lang="en-US" sz="1100" dirty="0"/>
+          </a:p>
+        </p:txBody>
+      </p:sp>
+      <p:sp>
+        <p:nvSpPr>
+          <p:cNvPr id="60" name="Shape 49"/>
+          <p:cNvSpPr/>
+          <p:nvPr/>
+        </p:nvSpPr>
+        <p:spPr>
+          <a:xfrm>
+            <a:off x="685800" y="5175504"/>
+            <a:ext cx="3291840" cy="960120"/>
+          </a:xfrm>
+          <a:prstGeom prst="roundRect">
+            <a:avLst>
+              <a:gd name="adj" fmla="val 5714"/>
+            </a:avLst>
+          </a:prstGeom>
+          <a:solidFill>
+            <a:srgbClr val="FFFFFF"/>
+          </a:solidFill>
+          <a:ln w="9525">
+            <a:solidFill>
+              <a:srgbClr val="006580"/>
+            </a:solidFill>
+            <a:prstDash val="solid"/>
+          </a:ln>
+        </p:spPr>
+      </p:sp>
+      <p:sp>
+        <p:nvSpPr>
+          <p:cNvPr id="61" name="Text 50"/>
+          <p:cNvSpPr/>
+          <p:nvPr/>
+        </p:nvSpPr>
+        <p:spPr>
+          <a:xfrm>
+            <a:off x="822960" y="5230368"/>
+            <a:ext cx="3017520" cy="850392"/>
+          </a:xfrm>
+          <a:prstGeom prst="rect">
+            <a:avLst/>
+          </a:prstGeom>
+          <a:noFill/>
+          <a:ln/>
+        </p:spPr>
+        <p:txBody>
+          <a:bodyPr wrap="square" rtlCol="0" anchor="ctr"/>
+          <a:lstStyle/>
+          <a:p>
+            <a:pPr indent="0" marL="0">
+              <a:lnSpc>
+                <a:spcPct val="125000"/>
+              </a:lnSpc>
+              <a:buNone/>
+            </a:pPr>
+            <a:r>
+              <a:rPr lang="en-US" sz="950" dirty="0">
+                <a:solidFill>
+                  <a:srgbClr val="454659"/>
+                </a:solidFill>
+                <a:latin typeface="Inter" pitchFamily="34" charset="0"/>
+                <a:ea typeface="Inter" pitchFamily="34" charset="-122"/>
+                <a:cs typeface="Inter" pitchFamily="34" charset="-120"/>
+              </a:rPr>
+              <a:t>•  MCG WMS CDC Landing</a:t>
+            </a:r>
+            <a:endParaRPr lang="en-US" sz="950" dirty="0"/>
+          </a:p>
+          <a:p>
+            <a:pPr indent="0" marL="0">
+              <a:lnSpc>
+                <a:spcPct val="125000"/>
+              </a:lnSpc>
+              <a:buNone/>
+            </a:pPr>
+            <a:r>
+              <a:rPr lang="en-US" sz="950" dirty="0">
+                <a:solidFill>
+                  <a:srgbClr val="454659"/>
+                </a:solidFill>
+                <a:latin typeface="Inter" pitchFamily="34" charset="0"/>
+                <a:ea typeface="Inter" pitchFamily="34" charset="-122"/>
+                <a:cs typeface="Inter" pitchFamily="34" charset="-120"/>
+              </a:rPr>
+              <a:t>•  MCG CRM Landing</a:t>
+            </a:r>
+            <a:endParaRPr lang="en-US" sz="950" dirty="0"/>
+          </a:p>
+          <a:p>
+            <a:pPr indent="0" marL="0">
+              <a:lnSpc>
+                <a:spcPct val="125000"/>
+              </a:lnSpc>
+              <a:buNone/>
+            </a:pPr>
+            <a:r>
+              <a:rPr lang="en-US" sz="950" dirty="0">
+                <a:solidFill>
+                  <a:srgbClr val="454659"/>
+                </a:solidFill>
+                <a:latin typeface="Inter" pitchFamily="34" charset="0"/>
+                <a:ea typeface="Inter" pitchFamily="34" charset="-122"/>
+                <a:cs typeface="Inter" pitchFamily="34" charset="-120"/>
+              </a:rPr>
+              <a:t>•  MCG IoT Streaming Landing</a:t>
+            </a:r>
+            <a:endParaRPr lang="en-US" sz="950" dirty="0"/>
+          </a:p>
+        </p:txBody>
+      </p:sp>
+      <p:sp>
+        <p:nvSpPr>
+          <p:cNvPr id="62" name="Shape 51"/>
+          <p:cNvSpPr/>
+          <p:nvPr/>
+        </p:nvSpPr>
+        <p:spPr>
+          <a:xfrm>
+            <a:off x="4251960" y="4773168"/>
+            <a:ext cx="3291840" cy="347472"/>
+          </a:xfrm>
+          <a:prstGeom prst="roundRect">
+            <a:avLst>
+              <a:gd name="adj" fmla="val 15789"/>
+            </a:avLst>
+          </a:prstGeom>
+          <a:solidFill>
+            <a:srgbClr val="009845"/>
+          </a:solidFill>
+          <a:ln/>
+        </p:spPr>
+      </p:sp>
+      <p:sp>
+        <p:nvSpPr>
+          <p:cNvPr id="63" name="Text 52"/>
+          <p:cNvSpPr/>
+          <p:nvPr/>
+        </p:nvSpPr>
+        <p:spPr>
+          <a:xfrm>
+            <a:off x="4251960" y="4773168"/>
+            <a:ext cx="3291840" cy="347472"/>
+          </a:xfrm>
+          <a:prstGeom prst="rect">
+            <a:avLst/>
+          </a:prstGeom>
+          <a:noFill/>
+          <a:ln/>
+        </p:spPr>
+        <p:txBody>
+          <a:bodyPr wrap="square" rtlCol="0" anchor="ctr"/>
+          <a:lstStyle/>
+          <a:p>
+            <a:pPr algn="ctr" indent="0" marL="0">
+              <a:buNone/>
+            </a:pPr>
+            <a:r>
+              <a:rPr lang="en-US" sz="1100" b="1" dirty="0">
+                <a:solidFill>
+                  <a:srgbClr val="FFFFFF"/>
+                </a:solidFill>
+                <a:latin typeface="Inter" pitchFamily="34" charset="0"/>
+                <a:ea typeface="Inter" pitchFamily="34" charset="-122"/>
+                <a:cs typeface="Inter" pitchFamily="34" charset="-120"/>
+              </a:rPr>
+              <a:t>SILVER · Transform</a:t>
+            </a:r>
+            <a:endParaRPr lang="en-US" sz="1100" dirty="0"/>
+          </a:p>
+        </p:txBody>
+      </p:sp>
+      <p:sp>
+        <p:nvSpPr>
+          <p:cNvPr id="64" name="Shape 53"/>
+          <p:cNvSpPr/>
+          <p:nvPr/>
+        </p:nvSpPr>
+        <p:spPr>
+          <a:xfrm>
+            <a:off x="4251960" y="5175504"/>
+            <a:ext cx="3291840" cy="960120"/>
+          </a:xfrm>
+          <a:prstGeom prst="roundRect">
+            <a:avLst>
+              <a:gd name="adj" fmla="val 5714"/>
+            </a:avLst>
+          </a:prstGeom>
+          <a:solidFill>
+            <a:srgbClr val="FFFFFF"/>
+          </a:solidFill>
+          <a:ln w="9525">
+            <a:solidFill>
+              <a:srgbClr val="009845"/>
+            </a:solidFill>
+            <a:prstDash val="solid"/>
+          </a:ln>
+        </p:spPr>
+      </p:sp>
+      <p:sp>
+        <p:nvSpPr>
+          <p:cNvPr id="65" name="Text 54"/>
+          <p:cNvSpPr/>
+          <p:nvPr/>
+        </p:nvSpPr>
+        <p:spPr>
+          <a:xfrm>
+            <a:off x="4389120" y="5230368"/>
+            <a:ext cx="3017520" cy="850392"/>
+          </a:xfrm>
+          <a:prstGeom prst="rect">
+            <a:avLst/>
+          </a:prstGeom>
+          <a:noFill/>
+          <a:ln/>
+        </p:spPr>
+        <p:txBody>
+          <a:bodyPr wrap="square" rtlCol="0" anchor="ctr"/>
+          <a:lstStyle/>
+          <a:p>
+            <a:pPr indent="0" marL="0">
+              <a:lnSpc>
+                <a:spcPct val="125000"/>
+              </a:lnSpc>
+              <a:buNone/>
+            </a:pPr>
+            <a:r>
+              <a:rPr lang="en-US" sz="950" dirty="0">
+                <a:solidFill>
+                  <a:srgbClr val="454659"/>
+                </a:solidFill>
+                <a:latin typeface="Inter" pitchFamily="34" charset="0"/>
+                <a:ea typeface="Inter" pitchFamily="34" charset="-122"/>
+                <a:cs typeface="Inter" pitchFamily="34" charset="-120"/>
+              </a:rPr>
+              <a:t>•  MCG Silver Transform · 7 datasets</a:t>
+            </a:r>
+            <a:endParaRPr lang="en-US" sz="950" dirty="0"/>
+          </a:p>
+          <a:p>
+            <a:pPr indent="0" marL="0">
+              <a:lnSpc>
+                <a:spcPct val="125000"/>
+              </a:lnSpc>
+              <a:buNone/>
+            </a:pPr>
+            <a:r>
+              <a:rPr lang="en-US" sz="950" dirty="0">
+                <a:solidFill>
+                  <a:srgbClr val="454659"/>
+                </a:solidFill>
+                <a:latin typeface="Inter" pitchFamily="34" charset="0"/>
+                <a:ea typeface="Inter" pitchFamily="34" charset="-122"/>
+                <a:cs typeface="Inter" pitchFamily="34" charset="-120"/>
+              </a:rPr>
+              <a:t>•  MCG IoT Streaming Transform</a:t>
+            </a:r>
+            <a:endParaRPr lang="en-US" sz="950" dirty="0"/>
+          </a:p>
+        </p:txBody>
+      </p:sp>
+      <p:sp>
+        <p:nvSpPr>
+          <p:cNvPr id="66" name="Shape 55"/>
+          <p:cNvSpPr/>
+          <p:nvPr/>
+        </p:nvSpPr>
+        <p:spPr>
+          <a:xfrm>
+            <a:off x="7818120" y="4773168"/>
+            <a:ext cx="3566160" cy="347472"/>
+          </a:xfrm>
+          <a:prstGeom prst="roundRect">
+            <a:avLst>
+              <a:gd name="adj" fmla="val 15789"/>
+            </a:avLst>
+          </a:prstGeom>
+          <a:solidFill>
+            <a:srgbClr val="19416C"/>
+          </a:solidFill>
+          <a:ln/>
+        </p:spPr>
+      </p:sp>
+      <p:sp>
+        <p:nvSpPr>
+          <p:cNvPr id="67" name="Text 56"/>
+          <p:cNvSpPr/>
+          <p:nvPr/>
+        </p:nvSpPr>
+        <p:spPr>
+          <a:xfrm>
+            <a:off x="7818120" y="4773168"/>
+            <a:ext cx="3566160" cy="347472"/>
+          </a:xfrm>
+          <a:prstGeom prst="rect">
+            <a:avLst/>
+          </a:prstGeom>
+          <a:noFill/>
+          <a:ln/>
+        </p:spPr>
+        <p:txBody>
+          <a:bodyPr wrap="square" rtlCol="0" anchor="ctr"/>
+          <a:lstStyle/>
+          <a:p>
+            <a:pPr algn="ctr" indent="0" marL="0">
+              <a:buNone/>
+            </a:pPr>
+            <a:r>
+              <a:rPr lang="en-US" sz="1100" b="1" dirty="0">
+                <a:solidFill>
+                  <a:srgbClr val="FFFFFF"/>
+                </a:solidFill>
+                <a:latin typeface="Inter" pitchFamily="34" charset="0"/>
+                <a:ea typeface="Inter" pitchFamily="34" charset="-122"/>
+                <a:cs typeface="Inter" pitchFamily="34" charset="-120"/>
+              </a:rPr>
+              <a:t>GOLD · Datamart</a:t>
+            </a:r>
+            <a:endParaRPr lang="en-US" sz="1100" dirty="0"/>
+          </a:p>
+        </p:txBody>
+      </p:sp>
+      <p:sp>
+        <p:nvSpPr>
+          <p:cNvPr id="68" name="Shape 57"/>
+          <p:cNvSpPr/>
+          <p:nvPr/>
+        </p:nvSpPr>
+        <p:spPr>
+          <a:xfrm>
+            <a:off x="7818120" y="5175504"/>
+            <a:ext cx="3566160" cy="960120"/>
+          </a:xfrm>
+          <a:prstGeom prst="roundRect">
+            <a:avLst>
+              <a:gd name="adj" fmla="val 5714"/>
+            </a:avLst>
+          </a:prstGeom>
+          <a:solidFill>
+            <a:srgbClr val="FFFFFF"/>
+          </a:solidFill>
+          <a:ln w="9525">
+            <a:solidFill>
+              <a:srgbClr val="19416C"/>
+            </a:solidFill>
+            <a:prstDash val="solid"/>
+          </a:ln>
+        </p:spPr>
+      </p:sp>
+      <p:sp>
+        <p:nvSpPr>
+          <p:cNvPr id="69" name="Text 58"/>
+          <p:cNvSpPr/>
+          <p:nvPr/>
+        </p:nvSpPr>
+        <p:spPr>
+          <a:xfrm>
+            <a:off x="7955280" y="5230368"/>
+            <a:ext cx="3291840" cy="850392"/>
+          </a:xfrm>
+          <a:prstGeom prst="rect">
+            <a:avLst/>
+          </a:prstGeom>
+          <a:noFill/>
+          <a:ln/>
+        </p:spPr>
+        <p:txBody>
+          <a:bodyPr wrap="square" rtlCol="0" anchor="ctr"/>
+          <a:lstStyle/>
+          <a:p>
+            <a:pPr indent="0" marL="0">
+              <a:lnSpc>
+                <a:spcPct val="125000"/>
+              </a:lnSpc>
+              <a:buNone/>
+            </a:pPr>
+            <a:r>
+              <a:rPr lang="en-US" sz="950" dirty="0">
+                <a:solidFill>
+                  <a:srgbClr val="454659"/>
+                </a:solidFill>
+                <a:latin typeface="Inter" pitchFamily="34" charset="0"/>
+                <a:ea typeface="Inter" pitchFamily="34" charset="-122"/>
+                <a:cs typeface="Inter" pitchFamily="34" charset="-120"/>
+              </a:rPr>
+              <a:t>•  MCG Gold Datamart · 2 datasets</a:t>
+            </a:r>
+            <a:endParaRPr lang="en-US" sz="950" dirty="0"/>
+          </a:p>
+          <a:p>
+            <a:pPr indent="0" marL="0">
+              <a:lnSpc>
+                <a:spcPct val="125000"/>
+              </a:lnSpc>
+              <a:buNone/>
+            </a:pPr>
+            <a:r>
+              <a:rPr lang="en-US" sz="950" dirty="0">
+                <a:solidFill>
+                  <a:srgbClr val="454659"/>
+                </a:solidFill>
+                <a:latin typeface="Inter" pitchFamily="34" charset="0"/>
+                <a:ea typeface="Inter" pitchFamily="34" charset="-122"/>
+                <a:cs typeface="Inter" pitchFamily="34" charset="-120"/>
+              </a:rPr>
+              <a:t>•  Supply Chain Health</a:t>
+            </a:r>
+            <a:endParaRPr lang="en-US" sz="950" dirty="0"/>
+          </a:p>
+          <a:p>
+            <a:pPr indent="0" marL="0">
+              <a:lnSpc>
+                <a:spcPct val="125000"/>
+              </a:lnSpc>
+              <a:buNone/>
+            </a:pPr>
+            <a:r>
+              <a:rPr lang="en-US" sz="950" dirty="0">
+                <a:solidFill>
+                  <a:srgbClr val="454659"/>
+                </a:solidFill>
+                <a:latin typeface="Inter" pitchFamily="34" charset="0"/>
+                <a:ea typeface="Inter" pitchFamily="34" charset="-122"/>
+                <a:cs typeface="Inter" pitchFamily="34" charset="-120"/>
+              </a:rPr>
+              <a:t>•  Last Mile Performance</a:t>
+            </a:r>
+            <a:endParaRPr lang="en-US" sz="950" dirty="0"/>
+          </a:p>
+        </p:txBody>
+      </p:sp>
+      <p:sp>
+        <p:nvSpPr>
+          <p:cNvPr id="70" name="Shape 59"/>
+          <p:cNvSpPr/>
+          <p:nvPr/>
+        </p:nvSpPr>
+        <p:spPr>
+          <a:xfrm>
+            <a:off x="3986784" y="5650992"/>
+            <a:ext cx="246888" cy="0"/>
+          </a:xfrm>
+          <a:prstGeom prst="line">
+            <a:avLst/>
+          </a:prstGeom>
+          <a:noFill/>
+          <a:ln w="19050">
+            <a:solidFill>
+              <a:srgbClr val="009845"/>
+            </a:solidFill>
+            <a:prstDash val="solid"/>
+            <a:tailEnd type="triangle"/>
+          </a:ln>
+        </p:spPr>
+      </p:sp>
+      <p:sp>
+        <p:nvSpPr>
+          <p:cNvPr id="71" name="Shape 60"/>
+          <p:cNvSpPr/>
+          <p:nvPr/>
+        </p:nvSpPr>
+        <p:spPr>
+          <a:xfrm>
+            <a:off x="7571232" y="5650992"/>
+            <a:ext cx="228600" cy="0"/>
+          </a:xfrm>
+          <a:prstGeom prst="line">
+            <a:avLst/>
+          </a:prstGeom>
+          <a:noFill/>
+          <a:ln w="19050">
+            <a:solidFill>
+              <a:srgbClr val="19416C"/>
+            </a:solidFill>
+            <a:prstDash val="solid"/>
+            <a:tailEnd type="triangle"/>
+          </a:ln>
+        </p:spPr>
+      </p:sp>
+      <p:sp>
+        <p:nvSpPr>
+          <p:cNvPr id="72" name="Text 61"/>
+          <p:cNvSpPr/>
+          <p:nvPr/>
+        </p:nvSpPr>
+        <p:spPr>
+          <a:xfrm>
+            <a:off x="548640" y="6291072"/>
+            <a:ext cx="11064240" cy="146304"/>
+          </a:xfrm>
+          <a:prstGeom prst="rect">
+            <a:avLst/>
+          </a:prstGeom>
+          <a:noFill/>
+          <a:ln/>
+        </p:spPr>
+        <p:txBody>
+          <a:bodyPr wrap="square" rtlCol="0" anchor="ctr"/>
+          <a:lstStyle/>
+          <a:p>
+            <a:pPr indent="0" marL="0">
+              <a:buNone/>
+            </a:pPr>
+            <a:r>
+              <a:rPr lang="en-US" sz="800" i="1" dirty="0">
+                <a:solidFill>
+                  <a:srgbClr val="A9B3B6"/>
+                </a:solidFill>
+                <a:latin typeface="Inter" pitchFamily="34" charset="0"/>
+                <a:ea typeface="Inter" pitchFamily="34" charset="-122"/>
+                <a:cs typeface="Inter" pitchFamily="34" charset="-120"/>
+              </a:rPr>
+              <a:t>Preview capabilities (Declarative Pipelines, Qlik MCP Server) reflect Qlik internal preview, June 2026, and are subject to change.</a:t>
+            </a:r>
+            <a:endParaRPr lang="en-US" sz="800" dirty="0"/>
           </a:p>
         </p:txBody>
       </p:sp>
@@ -2603,49 +5197,9 @@
           <a:chExt cx="0" cy="0"/>
         </a:xfrm>
       </p:grpSpPr>
-      <p:sp>
-        <p:nvSpPr>
-          <p:cNvPr id="2" name="Shape 0"/>
-          <p:cNvSpPr/>
-          <p:nvPr/>
-        </p:nvSpPr>
-        <p:spPr>
-          <a:xfrm>
-            <a:off x="0" y="0"/>
-            <a:ext cx="12188952" cy="54864"/>
-          </a:xfrm>
-          <a:prstGeom prst="rect">
-            <a:avLst/>
-          </a:prstGeom>
-          <a:solidFill>
-            <a:srgbClr val="19416C"/>
-          </a:solidFill>
-          <a:ln/>
-        </p:spPr>
-      </p:sp>
-      <p:sp>
-        <p:nvSpPr>
-          <p:cNvPr id="3" name="Shape 1"/>
-          <p:cNvSpPr/>
-          <p:nvPr/>
-        </p:nvSpPr>
-        <p:spPr>
-          <a:xfrm>
-            <a:off x="457200" y="6446520"/>
-            <a:ext cx="11274552" cy="7315"/>
-          </a:xfrm>
-          <a:prstGeom prst="rect">
-            <a:avLst/>
-          </a:prstGeom>
-          <a:solidFill>
-            <a:srgbClr val="A9B3B6"/>
-          </a:solidFill>
-          <a:ln/>
-        </p:spPr>
-      </p:sp>
       <p:pic>
         <p:nvPicPr>
-          <p:cNvPr id="4" name="Image 0" descr="C:\Claude\MCG Full Stack\generators\assets\qlik_logo.png">    </p:cNvPr>
+          <p:cNvPr id="2" name="Image 0" descr="C:\Claude\MCG Full Stack\generators\assets\qlik_divider_bg.png">    </p:cNvPr>
           <p:cNvPicPr>
             <a:picLocks noChangeAspect="1"/>
           </p:cNvPicPr>
@@ -2659,8 +5213,8 @@
         </p:blipFill>
         <p:spPr>
           <a:xfrm>
-            <a:off x="457200" y="6510528"/>
-            <a:ext cx="594360" cy="256032"/>
+            <a:off x="0" y="0"/>
+            <a:ext cx="12188952" cy="6858000"/>
           </a:xfrm>
           <a:prstGeom prst="rect">
             <a:avLst/>
@@ -2669,14 +5223,14 @@
       </p:pic>
       <p:sp>
         <p:nvSpPr>
-          <p:cNvPr id="5" name="Text 2"/>
-          <p:cNvSpPr/>
-          <p:nvPr/>
-        </p:nvSpPr>
-        <p:spPr>
-          <a:xfrm>
-            <a:off x="1188720" y="6510528"/>
-            <a:ext cx="7315200" cy="256032"/>
+          <p:cNvPr id="3" name="Text 0"/>
+          <p:cNvSpPr/>
+          <p:nvPr/>
+        </p:nvSpPr>
+        <p:spPr>
+          <a:xfrm>
+            <a:off x="731520" y="2194560"/>
+            <a:ext cx="7315200" cy="1188720"/>
           </a:xfrm>
           <a:prstGeom prst="rect">
             <a:avLst/>
@@ -2692,30 +5246,30 @@
               <a:buNone/>
             </a:pPr>
             <a:r>
-              <a:rPr lang="en-US" sz="800" dirty="0">
-                <a:solidFill>
-                  <a:srgbClr val="A9B3B6"/>
-                </a:solidFill>
-                <a:latin typeface="Inter" pitchFamily="34" charset="0"/>
-                <a:ea typeface="Inter" pitchFamily="34" charset="-122"/>
-                <a:cs typeface="Inter" pitchFamily="34" charset="-120"/>
-              </a:rPr>
-              <a:t>Project Qlarity  •  MCG Technology Architecture  •  Qlik Cloud</a:t>
-            </a:r>
-            <a:endParaRPr lang="en-US" sz="800" dirty="0"/>
-          </a:p>
-        </p:txBody>
-      </p:sp>
-      <p:sp>
-        <p:nvSpPr>
-          <p:cNvPr id="6" name="Text 3"/>
-          <p:cNvSpPr/>
-          <p:nvPr/>
-        </p:nvSpPr>
-        <p:spPr>
-          <a:xfrm>
-            <a:off x="10972800" y="6510528"/>
-            <a:ext cx="914400" cy="256032"/>
+              <a:rPr lang="en-US" sz="3600" b="1" dirty="0">
+                <a:solidFill>
+                  <a:srgbClr val="19416C"/>
+                </a:solidFill>
+                <a:latin typeface="Inter" pitchFamily="34" charset="0"/>
+                <a:ea typeface="Inter" pitchFamily="34" charset="-122"/>
+                <a:cs typeface="Inter" pitchFamily="34" charset="-120"/>
+              </a:rPr>
+              <a:t>The 7 Nightmares</a:t>
+            </a:r>
+            <a:endParaRPr lang="en-US" sz="3600" dirty="0"/>
+          </a:p>
+        </p:txBody>
+      </p:sp>
+      <p:sp>
+        <p:nvSpPr>
+          <p:cNvPr id="4" name="Text 1"/>
+          <p:cNvSpPr/>
+          <p:nvPr/>
+        </p:nvSpPr>
+        <p:spPr>
+          <a:xfrm>
+            <a:off x="731520" y="3383280"/>
+            <a:ext cx="7315200" cy="548640"/>
           </a:xfrm>
           <a:prstGeom prst="rect">
             <a:avLst/>
@@ -2727,1412 +5281,21 @@
           <a:bodyPr wrap="square" rtlCol="0" anchor="ctr"/>
           <a:lstStyle/>
           <a:p>
-            <a:pPr algn="r" indent="0" marL="0">
-              <a:buNone/>
-            </a:pPr>
-            <a:r>
-              <a:rPr lang="en-US" sz="800" dirty="0">
-                <a:solidFill>
-                  <a:srgbClr val="A9B3B6"/>
-                </a:solidFill>
-                <a:latin typeface="Inter" pitchFamily="34" charset="0"/>
-                <a:ea typeface="Inter" pitchFamily="34" charset="-122"/>
-                <a:cs typeface="Inter" pitchFamily="34" charset="-120"/>
-              </a:rPr>
-              <a:t>11</a:t>
-            </a:r>
-            <a:endParaRPr lang="en-US" sz="800" dirty="0"/>
-          </a:p>
-        </p:txBody>
-      </p:sp>
-      <p:sp>
-        <p:nvSpPr>
-          <p:cNvPr id="7" name="Text 4"/>
-          <p:cNvSpPr/>
-          <p:nvPr/>
-        </p:nvSpPr>
-        <p:spPr>
-          <a:xfrm>
-            <a:off x="548640" y="228600"/>
-            <a:ext cx="10972800" cy="548640"/>
-          </a:xfrm>
-          <a:prstGeom prst="rect">
-            <a:avLst/>
-          </a:prstGeom>
-          <a:noFill/>
-          <a:ln/>
-        </p:spPr>
-        <p:txBody>
-          <a:bodyPr wrap="square" rtlCol="0" anchor="ctr"/>
-          <a:lstStyle/>
-          <a:p>
             <a:pPr indent="0" marL="0">
               <a:buNone/>
             </a:pPr>
             <a:r>
-              <a:rPr lang="en-US" sz="2200" b="1" dirty="0">
-                <a:solidFill>
-                  <a:srgbClr val="19416C"/>
-                </a:solidFill>
-                <a:latin typeface="Inter" pitchFamily="34" charset="0"/>
-                <a:ea typeface="Inter" pitchFamily="34" charset="-122"/>
-                <a:cs typeface="Inter" pitchFamily="34" charset="-120"/>
-              </a:rPr>
-              <a:t>The 7 Data Quality Nightmares — $127M Annual Impact</a:t>
-            </a:r>
-            <a:endParaRPr lang="en-US" sz="2200" dirty="0"/>
-          </a:p>
-        </p:txBody>
-      </p:sp>
-      <p:sp>
-        <p:nvSpPr>
-          <p:cNvPr id="8" name="Shape 5"/>
-          <p:cNvSpPr/>
-          <p:nvPr/>
-        </p:nvSpPr>
-        <p:spPr>
-          <a:xfrm>
-            <a:off x="548640" y="1097280"/>
-            <a:ext cx="512064" cy="512064"/>
-          </a:xfrm>
-          <a:prstGeom prst="ellipse">
-            <a:avLst/>
-          </a:prstGeom>
-          <a:solidFill>
-            <a:srgbClr val="19416C"/>
-          </a:solidFill>
-          <a:ln/>
-        </p:spPr>
-      </p:sp>
-      <p:sp>
-        <p:nvSpPr>
-          <p:cNvPr id="9" name="Text 6"/>
-          <p:cNvSpPr/>
-          <p:nvPr/>
-        </p:nvSpPr>
-        <p:spPr>
-          <a:xfrm>
-            <a:off x="548640" y="1097280"/>
-            <a:ext cx="512064" cy="512064"/>
-          </a:xfrm>
-          <a:prstGeom prst="rect">
-            <a:avLst/>
-          </a:prstGeom>
-          <a:noFill/>
-          <a:ln/>
-        </p:spPr>
-        <p:txBody>
-          <a:bodyPr wrap="square" rtlCol="0" anchor="ctr"/>
-          <a:lstStyle/>
-          <a:p>
-            <a:pPr algn="ctr" indent="0" marL="0">
-              <a:buNone/>
-            </a:pPr>
-            <a:r>
-              <a:rPr lang="en-US" sz="1800" b="1" dirty="0">
-                <a:solidFill>
-                  <a:srgbClr val="FFFFFF"/>
-                </a:solidFill>
-                <a:latin typeface="Inter" pitchFamily="34" charset="0"/>
-                <a:ea typeface="Inter" pitchFamily="34" charset="-122"/>
-                <a:cs typeface="Inter" pitchFamily="34" charset="-120"/>
-              </a:rPr>
-              <a:t>1</a:t>
-            </a:r>
-            <a:endParaRPr lang="en-US" sz="1800" dirty="0"/>
-          </a:p>
-        </p:txBody>
-      </p:sp>
-      <p:sp>
-        <p:nvSpPr>
-          <p:cNvPr id="10" name="Text 7"/>
-          <p:cNvSpPr/>
-          <p:nvPr/>
-        </p:nvSpPr>
-        <p:spPr>
-          <a:xfrm>
-            <a:off x="1280160" y="1051560"/>
-            <a:ext cx="2743200" cy="347472"/>
-          </a:xfrm>
-          <a:prstGeom prst="rect">
-            <a:avLst/>
-          </a:prstGeom>
-          <a:noFill/>
-          <a:ln/>
-        </p:spPr>
-        <p:txBody>
-          <a:bodyPr wrap="square" rtlCol="0" anchor="ctr"/>
-          <a:lstStyle/>
-          <a:p>
-            <a:pPr indent="0" marL="0">
-              <a:buNone/>
-            </a:pPr>
-            <a:r>
-              <a:rPr lang="en-US" sz="1300" b="1" dirty="0">
-                <a:solidFill>
-                  <a:srgbClr val="19416C"/>
-                </a:solidFill>
-                <a:latin typeface="Inter" pitchFamily="34" charset="0"/>
-                <a:ea typeface="Inter" pitchFamily="34" charset="-122"/>
-                <a:cs typeface="Inter" pitchFamily="34" charset="-120"/>
-              </a:rPr>
-              <a:t>Phantom Inventory</a:t>
-            </a:r>
-            <a:endParaRPr lang="en-US" sz="1300" dirty="0"/>
-          </a:p>
-        </p:txBody>
-      </p:sp>
-      <p:sp>
-        <p:nvSpPr>
-          <p:cNvPr id="11" name="Text 8"/>
-          <p:cNvSpPr/>
-          <p:nvPr/>
-        </p:nvSpPr>
-        <p:spPr>
-          <a:xfrm>
-            <a:off x="1280160" y="1371600"/>
-            <a:ext cx="1828800" cy="274320"/>
-          </a:xfrm>
-          <a:prstGeom prst="rect">
-            <a:avLst/>
-          </a:prstGeom>
-          <a:noFill/>
-          <a:ln/>
-        </p:spPr>
-        <p:txBody>
-          <a:bodyPr wrap="square" rtlCol="0" anchor="ctr"/>
-          <a:lstStyle/>
-          <a:p>
-            <a:pPr indent="0" marL="0">
-              <a:buNone/>
-            </a:pPr>
-            <a:r>
-              <a:rPr lang="en-US" sz="1100" b="1" dirty="0">
-                <a:solidFill>
-                  <a:srgbClr val="006580"/>
-                </a:solidFill>
-                <a:latin typeface="Inter" pitchFamily="34" charset="0"/>
-                <a:ea typeface="Inter" pitchFamily="34" charset="-122"/>
-                <a:cs typeface="Inter" pitchFamily="34" charset="-120"/>
-              </a:rPr>
-              <a:t>$48M / year</a:t>
-            </a:r>
-            <a:endParaRPr lang="en-US" sz="1100" dirty="0"/>
-          </a:p>
-        </p:txBody>
-      </p:sp>
-      <p:sp>
-        <p:nvSpPr>
-          <p:cNvPr id="12" name="Text 9"/>
-          <p:cNvSpPr/>
-          <p:nvPr/>
-        </p:nvSpPr>
-        <p:spPr>
-          <a:xfrm>
-            <a:off x="4206240" y="1051560"/>
-            <a:ext cx="7498080" cy="621792"/>
-          </a:xfrm>
-          <a:prstGeom prst="rect">
-            <a:avLst/>
-          </a:prstGeom>
-          <a:noFill/>
-          <a:ln/>
-        </p:spPr>
-        <p:txBody>
-          <a:bodyPr wrap="square" rtlCol="0" anchor="ctr"/>
-          <a:lstStyle/>
-          <a:p>
-            <a:pPr indent="0" marL="0">
-              <a:buNone/>
-            </a:pPr>
-            <a:r>
-              <a:rPr lang="en-US" sz="1100" dirty="0">
-                <a:solidFill>
-                  <a:srgbClr val="454659"/>
-                </a:solidFill>
-                <a:latin typeface="Inter" pitchFamily="34" charset="0"/>
-                <a:ea typeface="Inter" pitchFamily="34" charset="-122"/>
-                <a:cs typeface="Inter" pitchFamily="34" charset="-120"/>
-              </a:rPr>
-              <a:t>ERP says 50, WMS says 42. Stockouts from ghost inventory.</a:t>
-            </a:r>
-            <a:endParaRPr lang="en-US" sz="1100" dirty="0"/>
-          </a:p>
-        </p:txBody>
-      </p:sp>
-      <p:sp>
-        <p:nvSpPr>
-          <p:cNvPr id="13" name="Shape 10"/>
-          <p:cNvSpPr/>
-          <p:nvPr/>
-        </p:nvSpPr>
-        <p:spPr>
-          <a:xfrm>
-            <a:off x="457200" y="1728216"/>
-            <a:ext cx="11274552" cy="4572"/>
-          </a:xfrm>
-          <a:prstGeom prst="rect">
-            <a:avLst/>
-          </a:prstGeom>
-          <a:solidFill>
-            <a:srgbClr val="F6F7F8"/>
-          </a:solidFill>
-          <a:ln/>
-        </p:spPr>
-      </p:sp>
-      <p:sp>
-        <p:nvSpPr>
-          <p:cNvPr id="14" name="Shape 11"/>
-          <p:cNvSpPr/>
-          <p:nvPr/>
-        </p:nvSpPr>
-        <p:spPr>
-          <a:xfrm>
-            <a:off x="548640" y="1828800"/>
-            <a:ext cx="512064" cy="512064"/>
-          </a:xfrm>
-          <a:prstGeom prst="ellipse">
-            <a:avLst/>
-          </a:prstGeom>
-          <a:solidFill>
-            <a:srgbClr val="19416C"/>
-          </a:solidFill>
-          <a:ln/>
-        </p:spPr>
-      </p:sp>
-      <p:sp>
-        <p:nvSpPr>
-          <p:cNvPr id="15" name="Text 12"/>
-          <p:cNvSpPr/>
-          <p:nvPr/>
-        </p:nvSpPr>
-        <p:spPr>
-          <a:xfrm>
-            <a:off x="548640" y="1828800"/>
-            <a:ext cx="512064" cy="512064"/>
-          </a:xfrm>
-          <a:prstGeom prst="rect">
-            <a:avLst/>
-          </a:prstGeom>
-          <a:noFill/>
-          <a:ln/>
-        </p:spPr>
-        <p:txBody>
-          <a:bodyPr wrap="square" rtlCol="0" anchor="ctr"/>
-          <a:lstStyle/>
-          <a:p>
-            <a:pPr algn="ctr" indent="0" marL="0">
-              <a:buNone/>
-            </a:pPr>
-            <a:r>
-              <a:rPr lang="en-US" sz="1800" b="1" dirty="0">
-                <a:solidFill>
-                  <a:srgbClr val="FFFFFF"/>
-                </a:solidFill>
-                <a:latin typeface="Inter" pitchFamily="34" charset="0"/>
-                <a:ea typeface="Inter" pitchFamily="34" charset="-122"/>
-                <a:cs typeface="Inter" pitchFamily="34" charset="-120"/>
-              </a:rPr>
-              <a:t>2</a:t>
-            </a:r>
-            <a:endParaRPr lang="en-US" sz="1800" dirty="0"/>
-          </a:p>
-        </p:txBody>
-      </p:sp>
-      <p:sp>
-        <p:nvSpPr>
-          <p:cNvPr id="16" name="Text 13"/>
-          <p:cNvSpPr/>
-          <p:nvPr/>
-        </p:nvSpPr>
-        <p:spPr>
-          <a:xfrm>
-            <a:off x="1280160" y="1783080"/>
-            <a:ext cx="2743200" cy="347472"/>
-          </a:xfrm>
-          <a:prstGeom prst="rect">
-            <a:avLst/>
-          </a:prstGeom>
-          <a:noFill/>
-          <a:ln/>
-        </p:spPr>
-        <p:txBody>
-          <a:bodyPr wrap="square" rtlCol="0" anchor="ctr"/>
-          <a:lstStyle/>
-          <a:p>
-            <a:pPr indent="0" marL="0">
-              <a:buNone/>
-            </a:pPr>
-            <a:r>
-              <a:rPr lang="en-US" sz="1300" b="1" dirty="0">
-                <a:solidFill>
-                  <a:srgbClr val="19416C"/>
-                </a:solidFill>
-                <a:latin typeface="Inter" pitchFamily="34" charset="0"/>
-                <a:ea typeface="Inter" pitchFamily="34" charset="-122"/>
-                <a:cs typeface="Inter" pitchFamily="34" charset="-120"/>
-              </a:rPr>
-              <a:t>Address Catastrophe</a:t>
-            </a:r>
-            <a:endParaRPr lang="en-US" sz="1300" dirty="0"/>
-          </a:p>
-        </p:txBody>
-      </p:sp>
-      <p:sp>
-        <p:nvSpPr>
-          <p:cNvPr id="17" name="Text 14"/>
-          <p:cNvSpPr/>
-          <p:nvPr/>
-        </p:nvSpPr>
-        <p:spPr>
-          <a:xfrm>
-            <a:off x="1280160" y="2103120"/>
-            <a:ext cx="1828800" cy="274320"/>
-          </a:xfrm>
-          <a:prstGeom prst="rect">
-            <a:avLst/>
-          </a:prstGeom>
-          <a:noFill/>
-          <a:ln/>
-        </p:spPr>
-        <p:txBody>
-          <a:bodyPr wrap="square" rtlCol="0" anchor="ctr"/>
-          <a:lstStyle/>
-          <a:p>
-            <a:pPr indent="0" marL="0">
-              <a:buNone/>
-            </a:pPr>
-            <a:r>
-              <a:rPr lang="en-US" sz="1100" b="1" dirty="0">
-                <a:solidFill>
-                  <a:srgbClr val="006580"/>
-                </a:solidFill>
-                <a:latin typeface="Inter" pitchFamily="34" charset="0"/>
-                <a:ea typeface="Inter" pitchFamily="34" charset="-122"/>
-                <a:cs typeface="Inter" pitchFamily="34" charset="-120"/>
-              </a:rPr>
-              <a:t>$3.1M / year</a:t>
-            </a:r>
-            <a:endParaRPr lang="en-US" sz="1100" dirty="0"/>
-          </a:p>
-        </p:txBody>
-      </p:sp>
-      <p:sp>
-        <p:nvSpPr>
-          <p:cNvPr id="18" name="Text 15"/>
-          <p:cNvSpPr/>
-          <p:nvPr/>
-        </p:nvSpPr>
-        <p:spPr>
-          <a:xfrm>
-            <a:off x="4206240" y="1783080"/>
-            <a:ext cx="7498080" cy="621792"/>
-          </a:xfrm>
-          <a:prstGeom prst="rect">
-            <a:avLst/>
-          </a:prstGeom>
-          <a:noFill/>
-          <a:ln/>
-        </p:spPr>
-        <p:txBody>
-          <a:bodyPr wrap="square" rtlCol="0" anchor="ctr"/>
-          <a:lstStyle/>
-          <a:p>
-            <a:pPr indent="0" marL="0">
-              <a:buNone/>
-            </a:pPr>
-            <a:r>
-              <a:rPr lang="en-US" sz="1100" dirty="0">
-                <a:solidFill>
-                  <a:srgbClr val="454659"/>
-                </a:solidFill>
-                <a:latin typeface="Inter" pitchFamily="34" charset="0"/>
-                <a:ea typeface="Inter" pitchFamily="34" charset="-122"/>
-                <a:cs typeface="Inter" pitchFamily="34" charset="-120"/>
-              </a:rPr>
-              <a:t>11% format issues, 6% truncated. 4.7% carrier rejection.</a:t>
-            </a:r>
-            <a:endParaRPr lang="en-US" sz="1100" dirty="0"/>
-          </a:p>
-        </p:txBody>
-      </p:sp>
-      <p:sp>
-        <p:nvSpPr>
-          <p:cNvPr id="19" name="Shape 16"/>
-          <p:cNvSpPr/>
-          <p:nvPr/>
-        </p:nvSpPr>
-        <p:spPr>
-          <a:xfrm>
-            <a:off x="457200" y="2459736"/>
-            <a:ext cx="11274552" cy="4572"/>
-          </a:xfrm>
-          <a:prstGeom prst="rect">
-            <a:avLst/>
-          </a:prstGeom>
-          <a:solidFill>
-            <a:srgbClr val="F6F7F8"/>
-          </a:solidFill>
-          <a:ln/>
-        </p:spPr>
-      </p:sp>
-      <p:sp>
-        <p:nvSpPr>
-          <p:cNvPr id="20" name="Shape 17"/>
-          <p:cNvSpPr/>
-          <p:nvPr/>
-        </p:nvSpPr>
-        <p:spPr>
-          <a:xfrm>
-            <a:off x="548640" y="2560320"/>
-            <a:ext cx="512064" cy="512064"/>
-          </a:xfrm>
-          <a:prstGeom prst="ellipse">
-            <a:avLst/>
-          </a:prstGeom>
-          <a:solidFill>
-            <a:srgbClr val="19416C"/>
-          </a:solidFill>
-          <a:ln/>
-        </p:spPr>
-      </p:sp>
-      <p:sp>
-        <p:nvSpPr>
-          <p:cNvPr id="21" name="Text 18"/>
-          <p:cNvSpPr/>
-          <p:nvPr/>
-        </p:nvSpPr>
-        <p:spPr>
-          <a:xfrm>
-            <a:off x="548640" y="2560320"/>
-            <a:ext cx="512064" cy="512064"/>
-          </a:xfrm>
-          <a:prstGeom prst="rect">
-            <a:avLst/>
-          </a:prstGeom>
-          <a:noFill/>
-          <a:ln/>
-        </p:spPr>
-        <p:txBody>
-          <a:bodyPr wrap="square" rtlCol="0" anchor="ctr"/>
-          <a:lstStyle/>
-          <a:p>
-            <a:pPr algn="ctr" indent="0" marL="0">
-              <a:buNone/>
-            </a:pPr>
-            <a:r>
-              <a:rPr lang="en-US" sz="1800" b="1" dirty="0">
-                <a:solidFill>
-                  <a:srgbClr val="FFFFFF"/>
-                </a:solidFill>
-                <a:latin typeface="Inter" pitchFamily="34" charset="0"/>
-                <a:ea typeface="Inter" pitchFamily="34" charset="-122"/>
-                <a:cs typeface="Inter" pitchFamily="34" charset="-120"/>
-              </a:rPr>
-              <a:t>3</a:t>
-            </a:r>
-            <a:endParaRPr lang="en-US" sz="1800" dirty="0"/>
-          </a:p>
-        </p:txBody>
-      </p:sp>
-      <p:sp>
-        <p:nvSpPr>
-          <p:cNvPr id="22" name="Text 19"/>
-          <p:cNvSpPr/>
-          <p:nvPr/>
-        </p:nvSpPr>
-        <p:spPr>
-          <a:xfrm>
-            <a:off x="1280160" y="2514600"/>
-            <a:ext cx="2743200" cy="347472"/>
-          </a:xfrm>
-          <a:prstGeom prst="rect">
-            <a:avLst/>
-          </a:prstGeom>
-          <a:noFill/>
-          <a:ln/>
-        </p:spPr>
-        <p:txBody>
-          <a:bodyPr wrap="square" rtlCol="0" anchor="ctr"/>
-          <a:lstStyle/>
-          <a:p>
-            <a:pPr indent="0" marL="0">
-              <a:buNone/>
-            </a:pPr>
-            <a:r>
-              <a:rPr lang="en-US" sz="1300" b="1" dirty="0">
-                <a:solidFill>
-                  <a:srgbClr val="19416C"/>
-                </a:solidFill>
-                <a:latin typeface="Inter" pitchFamily="34" charset="0"/>
-                <a:ea typeface="Inter" pitchFamily="34" charset="-122"/>
-                <a:cs typeface="Inter" pitchFamily="34" charset="-120"/>
-              </a:rPr>
-              <a:t>Product Master Mess</a:t>
-            </a:r>
-            <a:endParaRPr lang="en-US" sz="1300" dirty="0"/>
-          </a:p>
-        </p:txBody>
-      </p:sp>
-      <p:sp>
-        <p:nvSpPr>
-          <p:cNvPr id="23" name="Text 20"/>
-          <p:cNvSpPr/>
-          <p:nvPr/>
-        </p:nvSpPr>
-        <p:spPr>
-          <a:xfrm>
-            <a:off x="1280160" y="2834640"/>
-            <a:ext cx="1828800" cy="274320"/>
-          </a:xfrm>
-          <a:prstGeom prst="rect">
-            <a:avLst/>
-          </a:prstGeom>
-          <a:noFill/>
-          <a:ln/>
-        </p:spPr>
-        <p:txBody>
-          <a:bodyPr wrap="square" rtlCol="0" anchor="ctr"/>
-          <a:lstStyle/>
-          <a:p>
-            <a:pPr indent="0" marL="0">
-              <a:buNone/>
-            </a:pPr>
-            <a:r>
-              <a:rPr lang="en-US" sz="1100" b="1" dirty="0">
-                <a:solidFill>
-                  <a:srgbClr val="006580"/>
-                </a:solidFill>
-                <a:latin typeface="Inter" pitchFamily="34" charset="0"/>
-                <a:ea typeface="Inter" pitchFamily="34" charset="-122"/>
-                <a:cs typeface="Inter" pitchFamily="34" charset="-120"/>
-              </a:rPr>
-              <a:t>$8.2M / year</a:t>
-            </a:r>
-            <a:endParaRPr lang="en-US" sz="1100" dirty="0"/>
-          </a:p>
-        </p:txBody>
-      </p:sp>
-      <p:sp>
-        <p:nvSpPr>
-          <p:cNvPr id="24" name="Text 21"/>
-          <p:cNvSpPr/>
-          <p:nvPr/>
-        </p:nvSpPr>
-        <p:spPr>
-          <a:xfrm>
-            <a:off x="4206240" y="2514600"/>
-            <a:ext cx="7498080" cy="621792"/>
-          </a:xfrm>
-          <a:prstGeom prst="rect">
-            <a:avLst/>
-          </a:prstGeom>
-          <a:noFill/>
-          <a:ln/>
-        </p:spPr>
-        <p:txBody>
-          <a:bodyPr wrap="square" rtlCol="0" anchor="ctr"/>
-          <a:lstStyle/>
-          <a:p>
-            <a:pPr indent="0" marL="0">
-              <a:buNone/>
-            </a:pPr>
-            <a:r>
-              <a:rPr lang="en-US" sz="1100" dirty="0">
-                <a:solidFill>
-                  <a:srgbClr val="454659"/>
-                </a:solidFill>
-                <a:latin typeface="Inter" pitchFamily="34" charset="0"/>
-                <a:ea typeface="Inter" pitchFamily="34" charset="-122"/>
-                <a:cs typeface="Inter" pitchFamily="34" charset="-120"/>
-              </a:rPr>
-              <a:t>8,200 missing weights, duplicated suppliers, SKU chaos.</a:t>
-            </a:r>
-            <a:endParaRPr lang="en-US" sz="1100" dirty="0"/>
-          </a:p>
-        </p:txBody>
-      </p:sp>
-      <p:sp>
-        <p:nvSpPr>
-          <p:cNvPr id="25" name="Shape 22"/>
-          <p:cNvSpPr/>
-          <p:nvPr/>
-        </p:nvSpPr>
-        <p:spPr>
-          <a:xfrm>
-            <a:off x="457200" y="3191256"/>
-            <a:ext cx="11274552" cy="4572"/>
-          </a:xfrm>
-          <a:prstGeom prst="rect">
-            <a:avLst/>
-          </a:prstGeom>
-          <a:solidFill>
-            <a:srgbClr val="F6F7F8"/>
-          </a:solidFill>
-          <a:ln/>
-        </p:spPr>
-      </p:sp>
-      <p:sp>
-        <p:nvSpPr>
-          <p:cNvPr id="26" name="Shape 23"/>
-          <p:cNvSpPr/>
-          <p:nvPr/>
-        </p:nvSpPr>
-        <p:spPr>
-          <a:xfrm>
-            <a:off x="548640" y="3291840"/>
-            <a:ext cx="512064" cy="512064"/>
-          </a:xfrm>
-          <a:prstGeom prst="ellipse">
-            <a:avLst/>
-          </a:prstGeom>
-          <a:solidFill>
-            <a:srgbClr val="19416C"/>
-          </a:solidFill>
-          <a:ln/>
-        </p:spPr>
-      </p:sp>
-      <p:sp>
-        <p:nvSpPr>
-          <p:cNvPr id="27" name="Text 24"/>
-          <p:cNvSpPr/>
-          <p:nvPr/>
-        </p:nvSpPr>
-        <p:spPr>
-          <a:xfrm>
-            <a:off x="548640" y="3291840"/>
-            <a:ext cx="512064" cy="512064"/>
-          </a:xfrm>
-          <a:prstGeom prst="rect">
-            <a:avLst/>
-          </a:prstGeom>
-          <a:noFill/>
-          <a:ln/>
-        </p:spPr>
-        <p:txBody>
-          <a:bodyPr wrap="square" rtlCol="0" anchor="ctr"/>
-          <a:lstStyle/>
-          <a:p>
-            <a:pPr algn="ctr" indent="0" marL="0">
-              <a:buNone/>
-            </a:pPr>
-            <a:r>
-              <a:rPr lang="en-US" sz="1800" b="1" dirty="0">
-                <a:solidFill>
-                  <a:srgbClr val="FFFFFF"/>
-                </a:solidFill>
-                <a:latin typeface="Inter" pitchFamily="34" charset="0"/>
-                <a:ea typeface="Inter" pitchFamily="34" charset="-122"/>
-                <a:cs typeface="Inter" pitchFamily="34" charset="-120"/>
-              </a:rPr>
-              <a:t>4</a:t>
-            </a:r>
-            <a:endParaRPr lang="en-US" sz="1800" dirty="0"/>
-          </a:p>
-        </p:txBody>
-      </p:sp>
-      <p:sp>
-        <p:nvSpPr>
-          <p:cNvPr id="28" name="Text 25"/>
-          <p:cNvSpPr/>
-          <p:nvPr/>
-        </p:nvSpPr>
-        <p:spPr>
-          <a:xfrm>
-            <a:off x="1280160" y="3246120"/>
-            <a:ext cx="2743200" cy="347472"/>
-          </a:xfrm>
-          <a:prstGeom prst="rect">
-            <a:avLst/>
-          </a:prstGeom>
-          <a:noFill/>
-          <a:ln/>
-        </p:spPr>
-        <p:txBody>
-          <a:bodyPr wrap="square" rtlCol="0" anchor="ctr"/>
-          <a:lstStyle/>
-          <a:p>
-            <a:pPr indent="0" marL="0">
-              <a:buNone/>
-            </a:pPr>
-            <a:r>
-              <a:rPr lang="en-US" sz="1300" b="1" dirty="0">
-                <a:solidFill>
-                  <a:srgbClr val="19416C"/>
-                </a:solidFill>
-                <a:latin typeface="Inter" pitchFamily="34" charset="0"/>
-                <a:ea typeface="Inter" pitchFamily="34" charset="-122"/>
-                <a:cs typeface="Inter" pitchFamily="34" charset="-120"/>
-              </a:rPr>
-              <a:t>Silent Pipeline Failures</a:t>
-            </a:r>
-            <a:endParaRPr lang="en-US" sz="1300" dirty="0"/>
-          </a:p>
-        </p:txBody>
-      </p:sp>
-      <p:sp>
-        <p:nvSpPr>
-          <p:cNvPr id="29" name="Text 26"/>
-          <p:cNvSpPr/>
-          <p:nvPr/>
-        </p:nvSpPr>
-        <p:spPr>
-          <a:xfrm>
-            <a:off x="1280160" y="3566160"/>
-            <a:ext cx="1828800" cy="274320"/>
-          </a:xfrm>
-          <a:prstGeom prst="rect">
-            <a:avLst/>
-          </a:prstGeom>
-          <a:noFill/>
-          <a:ln/>
-        </p:spPr>
-        <p:txBody>
-          <a:bodyPr wrap="square" rtlCol="0" anchor="ctr"/>
-          <a:lstStyle/>
-          <a:p>
-            <a:pPr indent="0" marL="0">
-              <a:buNone/>
-            </a:pPr>
-            <a:r>
-              <a:rPr lang="en-US" sz="1100" b="1" dirty="0">
-                <a:solidFill>
-                  <a:srgbClr val="006580"/>
-                </a:solidFill>
-                <a:latin typeface="Inter" pitchFamily="34" charset="0"/>
-                <a:ea typeface="Inter" pitchFamily="34" charset="-122"/>
-                <a:cs typeface="Inter" pitchFamily="34" charset="-120"/>
-              </a:rPr>
-              <a:t>$12M / year</a:t>
-            </a:r>
-            <a:endParaRPr lang="en-US" sz="1100" dirty="0"/>
-          </a:p>
-        </p:txBody>
-      </p:sp>
-      <p:sp>
-        <p:nvSpPr>
-          <p:cNvPr id="30" name="Text 27"/>
-          <p:cNvSpPr/>
-          <p:nvPr/>
-        </p:nvSpPr>
-        <p:spPr>
-          <a:xfrm>
-            <a:off x="4206240" y="3246120"/>
-            <a:ext cx="7498080" cy="621792"/>
-          </a:xfrm>
-          <a:prstGeom prst="rect">
-            <a:avLst/>
-          </a:prstGeom>
-          <a:noFill/>
-          <a:ln/>
-        </p:spPr>
-        <p:txBody>
-          <a:bodyPr wrap="square" rtlCol="0" anchor="ctr"/>
-          <a:lstStyle/>
-          <a:p>
-            <a:pPr indent="0" marL="0">
-              <a:buNone/>
-            </a:pPr>
-            <a:r>
-              <a:rPr lang="en-US" sz="1100" dirty="0">
-                <a:solidFill>
-                  <a:srgbClr val="454659"/>
-                </a:solidFill>
-                <a:latin typeface="Inter" pitchFamily="34" charset="0"/>
-                <a:ea typeface="Inter" pitchFamily="34" charset="-122"/>
-                <a:cs typeface="Inter" pitchFamily="34" charset="-120"/>
-              </a:rPr>
-              <a:t>Rotterdam CDC sync: 72h undetected. 847 phantom units.</a:t>
-            </a:r>
-            <a:endParaRPr lang="en-US" sz="1100" dirty="0"/>
-          </a:p>
-        </p:txBody>
-      </p:sp>
-      <p:sp>
-        <p:nvSpPr>
-          <p:cNvPr id="31" name="Shape 28"/>
-          <p:cNvSpPr/>
-          <p:nvPr/>
-        </p:nvSpPr>
-        <p:spPr>
-          <a:xfrm>
-            <a:off x="457200" y="3922776"/>
-            <a:ext cx="11274552" cy="4572"/>
-          </a:xfrm>
-          <a:prstGeom prst="rect">
-            <a:avLst/>
-          </a:prstGeom>
-          <a:solidFill>
-            <a:srgbClr val="F6F7F8"/>
-          </a:solidFill>
-          <a:ln/>
-        </p:spPr>
-      </p:sp>
-      <p:sp>
-        <p:nvSpPr>
-          <p:cNvPr id="32" name="Shape 29"/>
-          <p:cNvSpPr/>
-          <p:nvPr/>
-        </p:nvSpPr>
-        <p:spPr>
-          <a:xfrm>
-            <a:off x="548640" y="4023360"/>
-            <a:ext cx="512064" cy="512064"/>
-          </a:xfrm>
-          <a:prstGeom prst="ellipse">
-            <a:avLst/>
-          </a:prstGeom>
-          <a:solidFill>
-            <a:srgbClr val="19416C"/>
-          </a:solidFill>
-          <a:ln/>
-        </p:spPr>
-      </p:sp>
-      <p:sp>
-        <p:nvSpPr>
-          <p:cNvPr id="33" name="Text 30"/>
-          <p:cNvSpPr/>
-          <p:nvPr/>
-        </p:nvSpPr>
-        <p:spPr>
-          <a:xfrm>
-            <a:off x="548640" y="4023360"/>
-            <a:ext cx="512064" cy="512064"/>
-          </a:xfrm>
-          <a:prstGeom prst="rect">
-            <a:avLst/>
-          </a:prstGeom>
-          <a:noFill/>
-          <a:ln/>
-        </p:spPr>
-        <p:txBody>
-          <a:bodyPr wrap="square" rtlCol="0" anchor="ctr"/>
-          <a:lstStyle/>
-          <a:p>
-            <a:pPr algn="ctr" indent="0" marL="0">
-              <a:buNone/>
-            </a:pPr>
-            <a:r>
-              <a:rPr lang="en-US" sz="1800" b="1" dirty="0">
-                <a:solidFill>
-                  <a:srgbClr val="FFFFFF"/>
-                </a:solidFill>
-                <a:latin typeface="Inter" pitchFamily="34" charset="0"/>
-                <a:ea typeface="Inter" pitchFamily="34" charset="-122"/>
-                <a:cs typeface="Inter" pitchFamily="34" charset="-120"/>
-              </a:rPr>
-              <a:t>5</a:t>
-            </a:r>
-            <a:endParaRPr lang="en-US" sz="1800" dirty="0"/>
-          </a:p>
-        </p:txBody>
-      </p:sp>
-      <p:sp>
-        <p:nvSpPr>
-          <p:cNvPr id="34" name="Text 31"/>
-          <p:cNvSpPr/>
-          <p:nvPr/>
-        </p:nvSpPr>
-        <p:spPr>
-          <a:xfrm>
-            <a:off x="1280160" y="3977640"/>
-            <a:ext cx="2743200" cy="347472"/>
-          </a:xfrm>
-          <a:prstGeom prst="rect">
-            <a:avLst/>
-          </a:prstGeom>
-          <a:noFill/>
-          <a:ln/>
-        </p:spPr>
-        <p:txBody>
-          <a:bodyPr wrap="square" rtlCol="0" anchor="ctr"/>
-          <a:lstStyle/>
-          <a:p>
-            <a:pPr indent="0" marL="0">
-              <a:buNone/>
-            </a:pPr>
-            <a:r>
-              <a:rPr lang="en-US" sz="1300" b="1" dirty="0">
-                <a:solidFill>
-                  <a:srgbClr val="19416C"/>
-                </a:solidFill>
-                <a:latin typeface="Inter" pitchFamily="34" charset="0"/>
-                <a:ea typeface="Inter" pitchFamily="34" charset="-122"/>
-                <a:cs typeface="Inter" pitchFamily="34" charset="-120"/>
-              </a:rPr>
-              <a:t>Timestamp Tower of Babel</a:t>
-            </a:r>
-            <a:endParaRPr lang="en-US" sz="1300" dirty="0"/>
-          </a:p>
-        </p:txBody>
-      </p:sp>
-      <p:sp>
-        <p:nvSpPr>
-          <p:cNvPr id="35" name="Text 32"/>
-          <p:cNvSpPr/>
-          <p:nvPr/>
-        </p:nvSpPr>
-        <p:spPr>
-          <a:xfrm>
-            <a:off x="1280160" y="4297680"/>
-            <a:ext cx="1828800" cy="274320"/>
-          </a:xfrm>
-          <a:prstGeom prst="rect">
-            <a:avLst/>
-          </a:prstGeom>
-          <a:noFill/>
-          <a:ln/>
-        </p:spPr>
-        <p:txBody>
-          <a:bodyPr wrap="square" rtlCol="0" anchor="ctr"/>
-          <a:lstStyle/>
-          <a:p>
-            <a:pPr indent="0" marL="0">
-              <a:buNone/>
-            </a:pPr>
-            <a:r>
-              <a:rPr lang="en-US" sz="1100" b="1" dirty="0">
-                <a:solidFill>
-                  <a:srgbClr val="006580"/>
-                </a:solidFill>
-                <a:latin typeface="Inter" pitchFamily="34" charset="0"/>
-                <a:ea typeface="Inter" pitchFamily="34" charset="-122"/>
-                <a:cs typeface="Inter" pitchFamily="34" charset="-120"/>
-              </a:rPr>
-              <a:t>$6.5M / year</a:t>
-            </a:r>
-            <a:endParaRPr lang="en-US" sz="1100" dirty="0"/>
-          </a:p>
-        </p:txBody>
-      </p:sp>
-      <p:sp>
-        <p:nvSpPr>
-          <p:cNvPr id="36" name="Text 33"/>
-          <p:cNvSpPr/>
-          <p:nvPr/>
-        </p:nvSpPr>
-        <p:spPr>
-          <a:xfrm>
-            <a:off x="4206240" y="3977640"/>
-            <a:ext cx="7498080" cy="621792"/>
-          </a:xfrm>
-          <a:prstGeom prst="rect">
-            <a:avLst/>
-          </a:prstGeom>
-          <a:noFill/>
-          <a:ln/>
-        </p:spPr>
-        <p:txBody>
-          <a:bodyPr wrap="square" rtlCol="0" anchor="ctr"/>
-          <a:lstStyle/>
-          <a:p>
-            <a:pPr indent="0" marL="0">
-              <a:buNone/>
-            </a:pPr>
-            <a:r>
-              <a:rPr lang="en-US" sz="1100" dirty="0">
-                <a:solidFill>
-                  <a:srgbClr val="454659"/>
-                </a:solidFill>
-                <a:latin typeface="Inter" pitchFamily="34" charset="0"/>
-                <a:ea typeface="Inter" pitchFamily="34" charset="-122"/>
-                <a:cs typeface="Inter" pitchFamily="34" charset="-120"/>
-              </a:rPr>
-              <a:t>Mixed UTC/local/bare timestamps across 3 sources.</a:t>
-            </a:r>
-            <a:endParaRPr lang="en-US" sz="1100" dirty="0"/>
-          </a:p>
-        </p:txBody>
-      </p:sp>
-      <p:sp>
-        <p:nvSpPr>
-          <p:cNvPr id="37" name="Shape 34"/>
-          <p:cNvSpPr/>
-          <p:nvPr/>
-        </p:nvSpPr>
-        <p:spPr>
-          <a:xfrm>
-            <a:off x="457200" y="4654296"/>
-            <a:ext cx="11274552" cy="4572"/>
-          </a:xfrm>
-          <a:prstGeom prst="rect">
-            <a:avLst/>
-          </a:prstGeom>
-          <a:solidFill>
-            <a:srgbClr val="F6F7F8"/>
-          </a:solidFill>
-          <a:ln/>
-        </p:spPr>
-      </p:sp>
-      <p:sp>
-        <p:nvSpPr>
-          <p:cNvPr id="38" name="Shape 35"/>
-          <p:cNvSpPr/>
-          <p:nvPr/>
-        </p:nvSpPr>
-        <p:spPr>
-          <a:xfrm>
-            <a:off x="548640" y="4754880"/>
-            <a:ext cx="512064" cy="512064"/>
-          </a:xfrm>
-          <a:prstGeom prst="ellipse">
-            <a:avLst/>
-          </a:prstGeom>
-          <a:solidFill>
-            <a:srgbClr val="19416C"/>
-          </a:solidFill>
-          <a:ln/>
-        </p:spPr>
-      </p:sp>
-      <p:sp>
-        <p:nvSpPr>
-          <p:cNvPr id="39" name="Text 36"/>
-          <p:cNvSpPr/>
-          <p:nvPr/>
-        </p:nvSpPr>
-        <p:spPr>
-          <a:xfrm>
-            <a:off x="548640" y="4754880"/>
-            <a:ext cx="512064" cy="512064"/>
-          </a:xfrm>
-          <a:prstGeom prst="rect">
-            <a:avLst/>
-          </a:prstGeom>
-          <a:noFill/>
-          <a:ln/>
-        </p:spPr>
-        <p:txBody>
-          <a:bodyPr wrap="square" rtlCol="0" anchor="ctr"/>
-          <a:lstStyle/>
-          <a:p>
-            <a:pPr algn="ctr" indent="0" marL="0">
-              <a:buNone/>
-            </a:pPr>
-            <a:r>
-              <a:rPr lang="en-US" sz="1800" b="1" dirty="0">
-                <a:solidFill>
-                  <a:srgbClr val="FFFFFF"/>
-                </a:solidFill>
-                <a:latin typeface="Inter" pitchFamily="34" charset="0"/>
-                <a:ea typeface="Inter" pitchFamily="34" charset="-122"/>
-                <a:cs typeface="Inter" pitchFamily="34" charset="-120"/>
-              </a:rPr>
-              <a:t>6</a:t>
-            </a:r>
-            <a:endParaRPr lang="en-US" sz="1800" dirty="0"/>
-          </a:p>
-        </p:txBody>
-      </p:sp>
-      <p:sp>
-        <p:nvSpPr>
-          <p:cNvPr id="40" name="Text 37"/>
-          <p:cNvSpPr/>
-          <p:nvPr/>
-        </p:nvSpPr>
-        <p:spPr>
-          <a:xfrm>
-            <a:off x="1280160" y="4709160"/>
-            <a:ext cx="2743200" cy="347472"/>
-          </a:xfrm>
-          <a:prstGeom prst="rect">
-            <a:avLst/>
-          </a:prstGeom>
-          <a:noFill/>
-          <a:ln/>
-        </p:spPr>
-        <p:txBody>
-          <a:bodyPr wrap="square" rtlCol="0" anchor="ctr"/>
-          <a:lstStyle/>
-          <a:p>
-            <a:pPr indent="0" marL="0">
-              <a:buNone/>
-            </a:pPr>
-            <a:r>
-              <a:rPr lang="en-US" sz="1300" b="1" dirty="0">
-                <a:solidFill>
-                  <a:srgbClr val="19416C"/>
-                </a:solidFill>
-                <a:latin typeface="Inter" pitchFamily="34" charset="0"/>
-                <a:ea typeface="Inter" pitchFamily="34" charset="-122"/>
-                <a:cs typeface="Inter" pitchFamily="34" charset="-120"/>
-              </a:rPr>
-              <a:t>Carrier Data Black Hole</a:t>
-            </a:r>
-            <a:endParaRPr lang="en-US" sz="1300" dirty="0"/>
-          </a:p>
-        </p:txBody>
-      </p:sp>
-      <p:sp>
-        <p:nvSpPr>
-          <p:cNvPr id="41" name="Text 38"/>
-          <p:cNvSpPr/>
-          <p:nvPr/>
-        </p:nvSpPr>
-        <p:spPr>
-          <a:xfrm>
-            <a:off x="1280160" y="5029200"/>
-            <a:ext cx="1828800" cy="274320"/>
-          </a:xfrm>
-          <a:prstGeom prst="rect">
-            <a:avLst/>
-          </a:prstGeom>
-          <a:noFill/>
-          <a:ln/>
-        </p:spPr>
-        <p:txBody>
-          <a:bodyPr wrap="square" rtlCol="0" anchor="ctr"/>
-          <a:lstStyle/>
-          <a:p>
-            <a:pPr indent="0" marL="0">
-              <a:buNone/>
-            </a:pPr>
-            <a:r>
-              <a:rPr lang="en-US" sz="1100" b="1" dirty="0">
-                <a:solidFill>
-                  <a:srgbClr val="006580"/>
-                </a:solidFill>
-                <a:latin typeface="Inter" pitchFamily="34" charset="0"/>
-                <a:ea typeface="Inter" pitchFamily="34" charset="-122"/>
-                <a:cs typeface="Inter" pitchFamily="34" charset="-120"/>
-              </a:rPr>
-              <a:t>$14.8M / year</a:t>
-            </a:r>
-            <a:endParaRPr lang="en-US" sz="1100" dirty="0"/>
-          </a:p>
-        </p:txBody>
-      </p:sp>
-      <p:sp>
-        <p:nvSpPr>
-          <p:cNvPr id="42" name="Text 39"/>
-          <p:cNvSpPr/>
-          <p:nvPr/>
-        </p:nvSpPr>
-        <p:spPr>
-          <a:xfrm>
-            <a:off x="4206240" y="4709160"/>
-            <a:ext cx="7498080" cy="621792"/>
-          </a:xfrm>
-          <a:prstGeom prst="rect">
-            <a:avLst/>
-          </a:prstGeom>
-          <a:noFill/>
-          <a:ln/>
-        </p:spPr>
-        <p:txBody>
-          <a:bodyPr wrap="square" rtlCol="0" anchor="ctr"/>
-          <a:lstStyle/>
-          <a:p>
-            <a:pPr indent="0" marL="0">
-              <a:buNone/>
-            </a:pPr>
-            <a:r>
-              <a:rPr lang="en-US" sz="1100" dirty="0">
-                <a:solidFill>
-                  <a:srgbClr val="454659"/>
-                </a:solidFill>
-                <a:latin typeface="Inter" pitchFamily="34" charset="0"/>
-                <a:ea typeface="Inter" pitchFamily="34" charset="-122"/>
-                <a:cs typeface="Inter" pitchFamily="34" charset="-120"/>
-              </a:rPr>
-              <a:t>6 carriers, 5 languages, no canonical status mapping.</a:t>
-            </a:r>
-            <a:endParaRPr lang="en-US" sz="1100" dirty="0"/>
-          </a:p>
-        </p:txBody>
-      </p:sp>
-      <p:sp>
-        <p:nvSpPr>
-          <p:cNvPr id="43" name="Shape 40"/>
-          <p:cNvSpPr/>
-          <p:nvPr/>
-        </p:nvSpPr>
-        <p:spPr>
-          <a:xfrm>
-            <a:off x="457200" y="5385816"/>
-            <a:ext cx="11274552" cy="4572"/>
-          </a:xfrm>
-          <a:prstGeom prst="rect">
-            <a:avLst/>
-          </a:prstGeom>
-          <a:solidFill>
-            <a:srgbClr val="F6F7F8"/>
-          </a:solidFill>
-          <a:ln/>
-        </p:spPr>
-      </p:sp>
-      <p:sp>
-        <p:nvSpPr>
-          <p:cNvPr id="44" name="Shape 41"/>
-          <p:cNvSpPr/>
-          <p:nvPr/>
-        </p:nvSpPr>
-        <p:spPr>
-          <a:xfrm>
-            <a:off x="548640" y="5486400"/>
-            <a:ext cx="512064" cy="512064"/>
-          </a:xfrm>
-          <a:prstGeom prst="ellipse">
-            <a:avLst/>
-          </a:prstGeom>
-          <a:solidFill>
-            <a:srgbClr val="19416C"/>
-          </a:solidFill>
-          <a:ln/>
-        </p:spPr>
-      </p:sp>
-      <p:sp>
-        <p:nvSpPr>
-          <p:cNvPr id="45" name="Text 42"/>
-          <p:cNvSpPr/>
-          <p:nvPr/>
-        </p:nvSpPr>
-        <p:spPr>
-          <a:xfrm>
-            <a:off x="548640" y="5486400"/>
-            <a:ext cx="512064" cy="512064"/>
-          </a:xfrm>
-          <a:prstGeom prst="rect">
-            <a:avLst/>
-          </a:prstGeom>
-          <a:noFill/>
-          <a:ln/>
-        </p:spPr>
-        <p:txBody>
-          <a:bodyPr wrap="square" rtlCol="0" anchor="ctr"/>
-          <a:lstStyle/>
-          <a:p>
-            <a:pPr algn="ctr" indent="0" marL="0">
-              <a:buNone/>
-            </a:pPr>
-            <a:r>
-              <a:rPr lang="en-US" sz="1800" b="1" dirty="0">
-                <a:solidFill>
-                  <a:srgbClr val="FFFFFF"/>
-                </a:solidFill>
-                <a:latin typeface="Inter" pitchFamily="34" charset="0"/>
-                <a:ea typeface="Inter" pitchFamily="34" charset="-122"/>
-                <a:cs typeface="Inter" pitchFamily="34" charset="-120"/>
-              </a:rPr>
-              <a:t>7</a:t>
-            </a:r>
-            <a:endParaRPr lang="en-US" sz="1800" dirty="0"/>
-          </a:p>
-        </p:txBody>
-      </p:sp>
-      <p:sp>
-        <p:nvSpPr>
-          <p:cNvPr id="46" name="Text 43"/>
-          <p:cNvSpPr/>
-          <p:nvPr/>
-        </p:nvSpPr>
-        <p:spPr>
-          <a:xfrm>
-            <a:off x="1280160" y="5440680"/>
-            <a:ext cx="2743200" cy="347472"/>
-          </a:xfrm>
-          <a:prstGeom prst="rect">
-            <a:avLst/>
-          </a:prstGeom>
-          <a:noFill/>
-          <a:ln/>
-        </p:spPr>
-        <p:txBody>
-          <a:bodyPr wrap="square" rtlCol="0" anchor="ctr"/>
-          <a:lstStyle/>
-          <a:p>
-            <a:pPr indent="0" marL="0">
-              <a:buNone/>
-            </a:pPr>
-            <a:r>
-              <a:rPr lang="en-US" sz="1300" b="1" dirty="0">
-                <a:solidFill>
-                  <a:srgbClr val="19416C"/>
-                </a:solidFill>
-                <a:latin typeface="Inter" pitchFamily="34" charset="0"/>
-                <a:ea typeface="Inter" pitchFamily="34" charset="-122"/>
-                <a:cs typeface="Inter" pitchFamily="34" charset="-120"/>
-              </a:rPr>
-              <a:t>Compliance Traceability Gap</a:t>
-            </a:r>
-            <a:endParaRPr lang="en-US" sz="1300" dirty="0"/>
-          </a:p>
-        </p:txBody>
-      </p:sp>
-      <p:sp>
-        <p:nvSpPr>
-          <p:cNvPr id="47" name="Text 44"/>
-          <p:cNvSpPr/>
-          <p:nvPr/>
-        </p:nvSpPr>
-        <p:spPr>
-          <a:xfrm>
-            <a:off x="1280160" y="5760720"/>
-            <a:ext cx="1828800" cy="274320"/>
-          </a:xfrm>
-          <a:prstGeom prst="rect">
-            <a:avLst/>
-          </a:prstGeom>
-          <a:noFill/>
-          <a:ln/>
-        </p:spPr>
-        <p:txBody>
-          <a:bodyPr wrap="square" rtlCol="0" anchor="ctr"/>
-          <a:lstStyle/>
-          <a:p>
-            <a:pPr indent="0" marL="0">
-              <a:buNone/>
-            </a:pPr>
-            <a:r>
-              <a:rPr lang="en-US" sz="1100" b="1" dirty="0">
-                <a:solidFill>
-                  <a:srgbClr val="006580"/>
-                </a:solidFill>
-                <a:latin typeface="Inter" pitchFamily="34" charset="0"/>
-                <a:ea typeface="Inter" pitchFamily="34" charset="-122"/>
-                <a:cs typeface="Inter" pitchFamily="34" charset="-120"/>
-              </a:rPr>
-              <a:t>$4.2M / year</a:t>
-            </a:r>
-            <a:endParaRPr lang="en-US" sz="1100" dirty="0"/>
-          </a:p>
-        </p:txBody>
-      </p:sp>
-      <p:sp>
-        <p:nvSpPr>
-          <p:cNvPr id="48" name="Text 45"/>
-          <p:cNvSpPr/>
-          <p:nvPr/>
-        </p:nvSpPr>
-        <p:spPr>
-          <a:xfrm>
-            <a:off x="4206240" y="5440680"/>
-            <a:ext cx="7498080" cy="621792"/>
-          </a:xfrm>
-          <a:prstGeom prst="rect">
-            <a:avLst/>
-          </a:prstGeom>
-          <a:noFill/>
-          <a:ln/>
-        </p:spPr>
-        <p:txBody>
-          <a:bodyPr wrap="square" rtlCol="0" anchor="ctr"/>
-          <a:lstStyle/>
-          <a:p>
-            <a:pPr indent="0" marL="0">
-              <a:buNone/>
-            </a:pPr>
-            <a:r>
-              <a:rPr lang="en-US" sz="1100" dirty="0">
-                <a:solidFill>
-                  <a:srgbClr val="454659"/>
-                </a:solidFill>
-                <a:latin typeface="Inter" pitchFamily="34" charset="0"/>
-                <a:ea typeface="Inter" pitchFamily="34" charset="-122"/>
-                <a:cs typeface="Inter" pitchFamily="34" charset="-120"/>
-              </a:rPr>
-              <a:t>Lettuce recall: 11 days vs 24h requirement. NVWA citation.</a:t>
-            </a:r>
-            <a:endParaRPr lang="en-US" sz="1100" dirty="0"/>
+              <a:rPr lang="en-US" sz="1600" dirty="0">
+                <a:solidFill>
+                  <a:srgbClr val="009845"/>
+                </a:solidFill>
+                <a:latin typeface="Inter" pitchFamily="34" charset="0"/>
+                <a:ea typeface="Inter" pitchFamily="34" charset="-122"/>
+                <a:cs typeface="Inter" pitchFamily="34" charset="-120"/>
+              </a:rPr>
+              <a:t>$127M in annual data quality costs</a:t>
+            </a:r>
+            <a:endParaRPr lang="en-US" sz="1600" dirty="0"/>
           </a:p>
         </p:txBody>
       </p:sp>
@@ -4183,7 +5346,7 @@
             <a:avLst/>
           </a:prstGeom>
           <a:solidFill>
-            <a:srgbClr val="006580"/>
+            <a:srgbClr val="19416C"/>
           </a:solidFill>
           <a:ln/>
         </p:spPr>
@@ -4343,7 +5506,7 @@
                 <a:ea typeface="Inter" pitchFamily="34" charset="-122"/>
                 <a:cs typeface="Inter" pitchFamily="34" charset="-120"/>
               </a:rPr>
-              <a:t>Pipeline &amp; Cluster Architecture</a:t>
+              <a:t>The 7 Data Quality Nightmares — $127M Annual Impact</a:t>
             </a:r>
             <a:endParaRPr lang="en-US" sz="2200" dirty="0"/>
           </a:p>
@@ -4357,23 +5520,16 @@
         </p:nvSpPr>
         <p:spPr>
           <a:xfrm>
-            <a:off x="457200" y="1005840"/>
-            <a:ext cx="5486400" cy="3200400"/>
-          </a:xfrm>
-          <a:prstGeom prst="roundRect">
-            <a:avLst>
-              <a:gd name="adj" fmla="val 3429"/>
-            </a:avLst>
+            <a:off x="548640" y="1097280"/>
+            <a:ext cx="512064" cy="512064"/>
+          </a:xfrm>
+          <a:prstGeom prst="ellipse">
+            <a:avLst/>
           </a:prstGeom>
           <a:solidFill>
-            <a:srgbClr val="E0F2F5"/>
+            <a:srgbClr val="19416C"/>
           </a:solidFill>
-          <a:ln w="19050">
-            <a:solidFill>
-              <a:srgbClr val="006580"/>
-            </a:solidFill>
-            <a:prstDash val="solid"/>
-          </a:ln>
+          <a:ln/>
         </p:spPr>
       </p:sp>
       <p:sp>
@@ -4384,8 +5540,8 @@
         </p:nvSpPr>
         <p:spPr>
           <a:xfrm>
-            <a:off x="457200" y="1024128"/>
-            <a:ext cx="5486400" cy="384048"/>
+            <a:off x="548640" y="1097280"/>
+            <a:ext cx="512064" cy="512064"/>
           </a:xfrm>
           <a:prstGeom prst="rect">
             <a:avLst/>
@@ -4401,7 +5557,85 @@
               <a:buNone/>
             </a:pPr>
             <a:r>
-              <a:rPr lang="en-US" sz="1600" b="1" dirty="0">
+              <a:rPr lang="en-US" sz="1800" b="1" dirty="0">
+                <a:solidFill>
+                  <a:srgbClr val="FFFFFF"/>
+                </a:solidFill>
+                <a:latin typeface="Inter" pitchFamily="34" charset="0"/>
+                <a:ea typeface="Inter" pitchFamily="34" charset="-122"/>
+                <a:cs typeface="Inter" pitchFamily="34" charset="-120"/>
+              </a:rPr>
+              <a:t>1</a:t>
+            </a:r>
+            <a:endParaRPr lang="en-US" sz="1800" dirty="0"/>
+          </a:p>
+        </p:txBody>
+      </p:sp>
+      <p:sp>
+        <p:nvSpPr>
+          <p:cNvPr id="10" name="Text 7"/>
+          <p:cNvSpPr/>
+          <p:nvPr/>
+        </p:nvSpPr>
+        <p:spPr>
+          <a:xfrm>
+            <a:off x="1280160" y="1051560"/>
+            <a:ext cx="2743200" cy="347472"/>
+          </a:xfrm>
+          <a:prstGeom prst="rect">
+            <a:avLst/>
+          </a:prstGeom>
+          <a:noFill/>
+          <a:ln/>
+        </p:spPr>
+        <p:txBody>
+          <a:bodyPr wrap="square" rtlCol="0" anchor="ctr"/>
+          <a:lstStyle/>
+          <a:p>
+            <a:pPr indent="0" marL="0">
+              <a:buNone/>
+            </a:pPr>
+            <a:r>
+              <a:rPr lang="en-US" sz="1300" b="1" dirty="0">
+                <a:solidFill>
+                  <a:srgbClr val="19416C"/>
+                </a:solidFill>
+                <a:latin typeface="Inter" pitchFamily="34" charset="0"/>
+                <a:ea typeface="Inter" pitchFamily="34" charset="-122"/>
+                <a:cs typeface="Inter" pitchFamily="34" charset="-120"/>
+              </a:rPr>
+              <a:t>Phantom Inventory</a:t>
+            </a:r>
+            <a:endParaRPr lang="en-US" sz="1300" dirty="0"/>
+          </a:p>
+        </p:txBody>
+      </p:sp>
+      <p:sp>
+        <p:nvSpPr>
+          <p:cNvPr id="11" name="Text 8"/>
+          <p:cNvSpPr/>
+          <p:nvPr/>
+        </p:nvSpPr>
+        <p:spPr>
+          <a:xfrm>
+            <a:off x="1280160" y="1371600"/>
+            <a:ext cx="1828800" cy="274320"/>
+          </a:xfrm>
+          <a:prstGeom prst="rect">
+            <a:avLst/>
+          </a:prstGeom>
+          <a:noFill/>
+          <a:ln/>
+        </p:spPr>
+        <p:txBody>
+          <a:bodyPr wrap="square" rtlCol="0" anchor="ctr"/>
+          <a:lstStyle/>
+          <a:p>
+            <a:pPr indent="0" marL="0">
+              <a:buNone/>
+            </a:pPr>
+            <a:r>
+              <a:rPr lang="en-US" sz="1100" b="1" dirty="0">
                 <a:solidFill>
                   <a:srgbClr val="006580"/>
                 </a:solidFill>
@@ -4409,22 +5643,22 @@
                 <a:ea typeface="Inter" pitchFamily="34" charset="-122"/>
                 <a:cs typeface="Inter" pitchFamily="34" charset="-120"/>
               </a:rPr>
-              <a:t>CDC Cluster</a:t>
-            </a:r>
-            <a:endParaRPr lang="en-US" sz="1600" dirty="0"/>
-          </a:p>
-        </p:txBody>
-      </p:sp>
-      <p:sp>
-        <p:nvSpPr>
-          <p:cNvPr id="10" name="Text 7"/>
-          <p:cNvSpPr/>
-          <p:nvPr/>
-        </p:nvSpPr>
-        <p:spPr>
-          <a:xfrm>
-            <a:off x="457200" y="1389888"/>
-            <a:ext cx="5486400" cy="274320"/>
+              <a:t>$48M / year</a:t>
+            </a:r>
+            <a:endParaRPr lang="en-US" sz="1100" dirty="0"/>
+          </a:p>
+        </p:txBody>
+      </p:sp>
+      <p:sp>
+        <p:nvSpPr>
+          <p:cNvPr id="12" name="Text 9"/>
+          <p:cNvSpPr/>
+          <p:nvPr/>
+        </p:nvSpPr>
+        <p:spPr>
+          <a:xfrm>
+            <a:off x="4206240" y="1051560"/>
+            <a:ext cx="7498080" cy="621792"/>
           </a:xfrm>
           <a:prstGeom prst="rect">
             <a:avLst/>
@@ -4436,47 +5670,6 @@
           <a:bodyPr wrap="square" rtlCol="0" anchor="ctr"/>
           <a:lstStyle/>
           <a:p>
-            <a:pPr algn="ctr" indent="0" marL="0">
-              <a:buNone/>
-            </a:pPr>
-            <a:r>
-              <a:rPr lang="en-US" sz="1000" dirty="0">
-                <a:solidFill>
-                  <a:srgbClr val="6B7280"/>
-                </a:solidFill>
-                <a:latin typeface="Inter" pitchFamily="34" charset="0"/>
-                <a:ea typeface="Inter" pitchFamily="34" charset="-122"/>
-                <a:cs typeface="Inter" pitchFamily="34" charset="-120"/>
-              </a:rPr>
-              <a:t>PostgreSQL CDC + Salesforce incremental sync</a:t>
-            </a:r>
-            <a:endParaRPr lang="en-US" sz="1000" dirty="0"/>
-          </a:p>
-        </p:txBody>
-      </p:sp>
-      <p:sp>
-        <p:nvSpPr>
-          <p:cNvPr id="11" name="Text 8"/>
-          <p:cNvSpPr/>
-          <p:nvPr/>
-        </p:nvSpPr>
-        <p:spPr>
-          <a:xfrm>
-            <a:off x="685800" y="1828800"/>
-            <a:ext cx="5029200" cy="347472"/>
-          </a:xfrm>
-          <a:prstGeom prst="rect">
-            <a:avLst/>
-          </a:prstGeom>
-          <a:solidFill>
-            <a:srgbClr val="FFFFFF"/>
-          </a:solidFill>
-          <a:ln/>
-        </p:spPr>
-        <p:txBody>
-          <a:bodyPr wrap="square" rtlCol="0" anchor="ctr"/>
-          <a:lstStyle/>
-          <a:p>
             <a:pPr indent="0" marL="0">
               <a:buNone/>
             </a:pPr>
@@ -4489,7 +5682,7 @@
                 <a:ea typeface="Inter" pitchFamily="34" charset="-122"/>
                 <a:cs typeface="Inter" pitchFamily="34" charset="-120"/>
               </a:rPr>
-              <a:t>Pipeline 1: inventory_positions (CDC, real-time)</a:t>
+              <a:t>ERP says 50, WMS says 42. Stockouts from ghost inventory.</a:t>
             </a:r>
             <a:endParaRPr lang="en-US" sz="1100" dirty="0"/>
           </a:p>
@@ -4497,14 +5690,14 @@
       </p:sp>
       <p:sp>
         <p:nvSpPr>
-          <p:cNvPr id="12" name="Text 9"/>
-          <p:cNvSpPr/>
-          <p:nvPr/>
-        </p:nvSpPr>
-        <p:spPr>
-          <a:xfrm>
-            <a:off x="685800" y="2212848"/>
-            <a:ext cx="5029200" cy="347472"/>
+          <p:cNvPr id="13" name="Shape 10"/>
+          <p:cNvSpPr/>
+          <p:nvPr/>
+        </p:nvSpPr>
+        <p:spPr>
+          <a:xfrm>
+            <a:off x="457200" y="1728216"/>
+            <a:ext cx="11274552" cy="4572"/>
           </a:xfrm>
           <a:prstGeom prst="rect">
             <a:avLst/>
@@ -4514,14 +5707,169 @@
           </a:solidFill>
           <a:ln/>
         </p:spPr>
+      </p:sp>
+      <p:sp>
+        <p:nvSpPr>
+          <p:cNvPr id="14" name="Shape 11"/>
+          <p:cNvSpPr/>
+          <p:nvPr/>
+        </p:nvSpPr>
+        <p:spPr>
+          <a:xfrm>
+            <a:off x="548640" y="1828800"/>
+            <a:ext cx="512064" cy="512064"/>
+          </a:xfrm>
+          <a:prstGeom prst="ellipse">
+            <a:avLst/>
+          </a:prstGeom>
+          <a:solidFill>
+            <a:srgbClr val="19416C"/>
+          </a:solidFill>
+          <a:ln/>
+        </p:spPr>
+      </p:sp>
+      <p:sp>
+        <p:nvSpPr>
+          <p:cNvPr id="15" name="Text 12"/>
+          <p:cNvSpPr/>
+          <p:nvPr/>
+        </p:nvSpPr>
+        <p:spPr>
+          <a:xfrm>
+            <a:off x="548640" y="1828800"/>
+            <a:ext cx="512064" cy="512064"/>
+          </a:xfrm>
+          <a:prstGeom prst="rect">
+            <a:avLst/>
+          </a:prstGeom>
+          <a:noFill/>
+          <a:ln/>
+        </p:spPr>
         <p:txBody>
           <a:bodyPr wrap="square" rtlCol="0" anchor="ctr"/>
           <a:lstStyle/>
           <a:p>
+            <a:pPr algn="ctr" indent="0" marL="0">
+              <a:buNone/>
+            </a:pPr>
+            <a:r>
+              <a:rPr lang="en-US" sz="1800" b="1" dirty="0">
+                <a:solidFill>
+                  <a:srgbClr val="FFFFFF"/>
+                </a:solidFill>
+                <a:latin typeface="Inter" pitchFamily="34" charset="0"/>
+                <a:ea typeface="Inter" pitchFamily="34" charset="-122"/>
+                <a:cs typeface="Inter" pitchFamily="34" charset="-120"/>
+              </a:rPr>
+              <a:t>2</a:t>
+            </a:r>
+            <a:endParaRPr lang="en-US" sz="1800" dirty="0"/>
+          </a:p>
+        </p:txBody>
+      </p:sp>
+      <p:sp>
+        <p:nvSpPr>
+          <p:cNvPr id="16" name="Text 13"/>
+          <p:cNvSpPr/>
+          <p:nvPr/>
+        </p:nvSpPr>
+        <p:spPr>
+          <a:xfrm>
+            <a:off x="1280160" y="1783080"/>
+            <a:ext cx="2743200" cy="347472"/>
+          </a:xfrm>
+          <a:prstGeom prst="rect">
+            <a:avLst/>
+          </a:prstGeom>
+          <a:noFill/>
+          <a:ln/>
+        </p:spPr>
+        <p:txBody>
+          <a:bodyPr wrap="square" rtlCol="0" anchor="ctr"/>
+          <a:lstStyle/>
+          <a:p>
             <a:pPr indent="0" marL="0">
               <a:buNone/>
             </a:pPr>
             <a:r>
+              <a:rPr lang="en-US" sz="1300" b="1" dirty="0">
+                <a:solidFill>
+                  <a:srgbClr val="19416C"/>
+                </a:solidFill>
+                <a:latin typeface="Inter" pitchFamily="34" charset="0"/>
+                <a:ea typeface="Inter" pitchFamily="34" charset="-122"/>
+                <a:cs typeface="Inter" pitchFamily="34" charset="-120"/>
+              </a:rPr>
+              <a:t>Address Catastrophe</a:t>
+            </a:r>
+            <a:endParaRPr lang="en-US" sz="1300" dirty="0"/>
+          </a:p>
+        </p:txBody>
+      </p:sp>
+      <p:sp>
+        <p:nvSpPr>
+          <p:cNvPr id="17" name="Text 14"/>
+          <p:cNvSpPr/>
+          <p:nvPr/>
+        </p:nvSpPr>
+        <p:spPr>
+          <a:xfrm>
+            <a:off x="1280160" y="2103120"/>
+            <a:ext cx="1828800" cy="274320"/>
+          </a:xfrm>
+          <a:prstGeom prst="rect">
+            <a:avLst/>
+          </a:prstGeom>
+          <a:noFill/>
+          <a:ln/>
+        </p:spPr>
+        <p:txBody>
+          <a:bodyPr wrap="square" rtlCol="0" anchor="ctr"/>
+          <a:lstStyle/>
+          <a:p>
+            <a:pPr indent="0" marL="0">
+              <a:buNone/>
+            </a:pPr>
+            <a:r>
+              <a:rPr lang="en-US" sz="1100" b="1" dirty="0">
+                <a:solidFill>
+                  <a:srgbClr val="006580"/>
+                </a:solidFill>
+                <a:latin typeface="Inter" pitchFamily="34" charset="0"/>
+                <a:ea typeface="Inter" pitchFamily="34" charset="-122"/>
+                <a:cs typeface="Inter" pitchFamily="34" charset="-120"/>
+              </a:rPr>
+              <a:t>$3.1M / year</a:t>
+            </a:r>
+            <a:endParaRPr lang="en-US" sz="1100" dirty="0"/>
+          </a:p>
+        </p:txBody>
+      </p:sp>
+      <p:sp>
+        <p:nvSpPr>
+          <p:cNvPr id="18" name="Text 15"/>
+          <p:cNvSpPr/>
+          <p:nvPr/>
+        </p:nvSpPr>
+        <p:spPr>
+          <a:xfrm>
+            <a:off x="4206240" y="1783080"/>
+            <a:ext cx="7498080" cy="621792"/>
+          </a:xfrm>
+          <a:prstGeom prst="rect">
+            <a:avLst/>
+          </a:prstGeom>
+          <a:noFill/>
+          <a:ln/>
+        </p:spPr>
+        <p:txBody>
+          <a:bodyPr wrap="square" rtlCol="0" anchor="ctr"/>
+          <a:lstStyle/>
+          <a:p>
+            <a:pPr indent="0" marL="0">
+              <a:buNone/>
+            </a:pPr>
+            <a:r>
               <a:rPr lang="en-US" sz="1100" dirty="0">
                 <a:solidFill>
                   <a:srgbClr val="454659"/>
@@ -4530,7 +5878,7 @@
                 <a:ea typeface="Inter" pitchFamily="34" charset="-122"/>
                 <a:cs typeface="Inter" pitchFamily="34" charset="-120"/>
               </a:rPr>
-              <a:t>Pipeline 2: warehouse_events (CDC, real-time)</a:t>
+              <a:t>11% format issues, 6% truncated. 4.7% carrier rejection.</a:t>
             </a:r>
             <a:endParaRPr lang="en-US" sz="1100" dirty="0"/>
           </a:p>
@@ -4538,55 +5886,14 @@
       </p:sp>
       <p:sp>
         <p:nvSpPr>
-          <p:cNvPr id="13" name="Text 10"/>
-          <p:cNvSpPr/>
-          <p:nvPr/>
-        </p:nvSpPr>
-        <p:spPr>
-          <a:xfrm>
-            <a:off x="685800" y="2596896"/>
-            <a:ext cx="5029200" cy="347472"/>
-          </a:xfrm>
-          <a:prstGeom prst="rect">
-            <a:avLst/>
-          </a:prstGeom>
-          <a:solidFill>
-            <a:srgbClr val="FFFFFF"/>
-          </a:solidFill>
-          <a:ln/>
-        </p:spPr>
-        <p:txBody>
-          <a:bodyPr wrap="square" rtlCol="0" anchor="ctr"/>
-          <a:lstStyle/>
-          <a:p>
-            <a:pPr indent="0" marL="0">
-              <a:buNone/>
-            </a:pPr>
-            <a:r>
-              <a:rPr lang="en-US" sz="1100" dirty="0">
-                <a:solidFill>
-                  <a:srgbClr val="454659"/>
-                </a:solidFill>
-                <a:latin typeface="Inter" pitchFamily="34" charset="0"/>
-                <a:ea typeface="Inter" pitchFamily="34" charset="-122"/>
-                <a:cs typeface="Inter" pitchFamily="34" charset="-120"/>
-              </a:rPr>
-              <a:t>Pipeline 3: shipments (CDC, real-time)</a:t>
-            </a:r>
-            <a:endParaRPr lang="en-US" sz="1100" dirty="0"/>
-          </a:p>
-        </p:txBody>
-      </p:sp>
-      <p:sp>
-        <p:nvSpPr>
-          <p:cNvPr id="14" name="Text 11"/>
-          <p:cNvSpPr/>
-          <p:nvPr/>
-        </p:nvSpPr>
-        <p:spPr>
-          <a:xfrm>
-            <a:off x="685800" y="2980944"/>
-            <a:ext cx="5029200" cy="347472"/>
+          <p:cNvPr id="19" name="Shape 16"/>
+          <p:cNvSpPr/>
+          <p:nvPr/>
+        </p:nvSpPr>
+        <p:spPr>
+          <a:xfrm>
+            <a:off x="457200" y="2459736"/>
+            <a:ext cx="11274552" cy="4572"/>
           </a:xfrm>
           <a:prstGeom prst="rect">
             <a:avLst/>
@@ -4596,14 +5903,169 @@
           </a:solidFill>
           <a:ln/>
         </p:spPr>
+      </p:sp>
+      <p:sp>
+        <p:nvSpPr>
+          <p:cNvPr id="20" name="Shape 17"/>
+          <p:cNvSpPr/>
+          <p:nvPr/>
+        </p:nvSpPr>
+        <p:spPr>
+          <a:xfrm>
+            <a:off x="548640" y="2560320"/>
+            <a:ext cx="512064" cy="512064"/>
+          </a:xfrm>
+          <a:prstGeom prst="ellipse">
+            <a:avLst/>
+          </a:prstGeom>
+          <a:solidFill>
+            <a:srgbClr val="19416C"/>
+          </a:solidFill>
+          <a:ln/>
+        </p:spPr>
+      </p:sp>
+      <p:sp>
+        <p:nvSpPr>
+          <p:cNvPr id="21" name="Text 18"/>
+          <p:cNvSpPr/>
+          <p:nvPr/>
+        </p:nvSpPr>
+        <p:spPr>
+          <a:xfrm>
+            <a:off x="548640" y="2560320"/>
+            <a:ext cx="512064" cy="512064"/>
+          </a:xfrm>
+          <a:prstGeom prst="rect">
+            <a:avLst/>
+          </a:prstGeom>
+          <a:noFill/>
+          <a:ln/>
+        </p:spPr>
         <p:txBody>
           <a:bodyPr wrap="square" rtlCol="0" anchor="ctr"/>
           <a:lstStyle/>
           <a:p>
+            <a:pPr algn="ctr" indent="0" marL="0">
+              <a:buNone/>
+            </a:pPr>
+            <a:r>
+              <a:rPr lang="en-US" sz="1800" b="1" dirty="0">
+                <a:solidFill>
+                  <a:srgbClr val="FFFFFF"/>
+                </a:solidFill>
+                <a:latin typeface="Inter" pitchFamily="34" charset="0"/>
+                <a:ea typeface="Inter" pitchFamily="34" charset="-122"/>
+                <a:cs typeface="Inter" pitchFamily="34" charset="-120"/>
+              </a:rPr>
+              <a:t>3</a:t>
+            </a:r>
+            <a:endParaRPr lang="en-US" sz="1800" dirty="0"/>
+          </a:p>
+        </p:txBody>
+      </p:sp>
+      <p:sp>
+        <p:nvSpPr>
+          <p:cNvPr id="22" name="Text 19"/>
+          <p:cNvSpPr/>
+          <p:nvPr/>
+        </p:nvSpPr>
+        <p:spPr>
+          <a:xfrm>
+            <a:off x="1280160" y="2514600"/>
+            <a:ext cx="2743200" cy="347472"/>
+          </a:xfrm>
+          <a:prstGeom prst="rect">
+            <a:avLst/>
+          </a:prstGeom>
+          <a:noFill/>
+          <a:ln/>
+        </p:spPr>
+        <p:txBody>
+          <a:bodyPr wrap="square" rtlCol="0" anchor="ctr"/>
+          <a:lstStyle/>
+          <a:p>
             <a:pPr indent="0" marL="0">
               <a:buNone/>
             </a:pPr>
             <a:r>
+              <a:rPr lang="en-US" sz="1300" b="1" dirty="0">
+                <a:solidFill>
+                  <a:srgbClr val="19416C"/>
+                </a:solidFill>
+                <a:latin typeface="Inter" pitchFamily="34" charset="0"/>
+                <a:ea typeface="Inter" pitchFamily="34" charset="-122"/>
+                <a:cs typeface="Inter" pitchFamily="34" charset="-120"/>
+              </a:rPr>
+              <a:t>Product Master Mess</a:t>
+            </a:r>
+            <a:endParaRPr lang="en-US" sz="1300" dirty="0"/>
+          </a:p>
+        </p:txBody>
+      </p:sp>
+      <p:sp>
+        <p:nvSpPr>
+          <p:cNvPr id="23" name="Text 20"/>
+          <p:cNvSpPr/>
+          <p:nvPr/>
+        </p:nvSpPr>
+        <p:spPr>
+          <a:xfrm>
+            <a:off x="1280160" y="2834640"/>
+            <a:ext cx="1828800" cy="274320"/>
+          </a:xfrm>
+          <a:prstGeom prst="rect">
+            <a:avLst/>
+          </a:prstGeom>
+          <a:noFill/>
+          <a:ln/>
+        </p:spPr>
+        <p:txBody>
+          <a:bodyPr wrap="square" rtlCol="0" anchor="ctr"/>
+          <a:lstStyle/>
+          <a:p>
+            <a:pPr indent="0" marL="0">
+              <a:buNone/>
+            </a:pPr>
+            <a:r>
+              <a:rPr lang="en-US" sz="1100" b="1" dirty="0">
+                <a:solidFill>
+                  <a:srgbClr val="006580"/>
+                </a:solidFill>
+                <a:latin typeface="Inter" pitchFamily="34" charset="0"/>
+                <a:ea typeface="Inter" pitchFamily="34" charset="-122"/>
+                <a:cs typeface="Inter" pitchFamily="34" charset="-120"/>
+              </a:rPr>
+              <a:t>$8.2M / year</a:t>
+            </a:r>
+            <a:endParaRPr lang="en-US" sz="1100" dirty="0"/>
+          </a:p>
+        </p:txBody>
+      </p:sp>
+      <p:sp>
+        <p:nvSpPr>
+          <p:cNvPr id="24" name="Text 21"/>
+          <p:cNvSpPr/>
+          <p:nvPr/>
+        </p:nvSpPr>
+        <p:spPr>
+          <a:xfrm>
+            <a:off x="4206240" y="2514600"/>
+            <a:ext cx="7498080" cy="621792"/>
+          </a:xfrm>
+          <a:prstGeom prst="rect">
+            <a:avLst/>
+          </a:prstGeom>
+          <a:noFill/>
+          <a:ln/>
+        </p:spPr>
+        <p:txBody>
+          <a:bodyPr wrap="square" rtlCol="0" anchor="ctr"/>
+          <a:lstStyle/>
+          <a:p>
+            <a:pPr indent="0" marL="0">
+              <a:buNone/>
+            </a:pPr>
+            <a:r>
               <a:rPr lang="en-US" sz="1100" dirty="0">
                 <a:solidFill>
                   <a:srgbClr val="454659"/>
@@ -4612,7 +6074,7 @@
                 <a:ea typeface="Inter" pitchFamily="34" charset="-122"/>
                 <a:cs typeface="Inter" pitchFamily="34" charset="-120"/>
               </a:rPr>
-              <a:t>Pipeline 6: sf_contacts (API, 15 min)</a:t>
+              <a:t>8,200 missing weights, duplicated suppliers, SKU chaos.</a:t>
             </a:r>
             <a:endParaRPr lang="en-US" sz="1100" dirty="0"/>
           </a:p>
@@ -4620,55 +6082,14 @@
       </p:sp>
       <p:sp>
         <p:nvSpPr>
-          <p:cNvPr id="15" name="Text 12"/>
-          <p:cNvSpPr/>
-          <p:nvPr/>
-        </p:nvSpPr>
-        <p:spPr>
-          <a:xfrm>
-            <a:off x="685800" y="3364992"/>
-            <a:ext cx="5029200" cy="347472"/>
-          </a:xfrm>
-          <a:prstGeom prst="rect">
-            <a:avLst/>
-          </a:prstGeom>
-          <a:solidFill>
-            <a:srgbClr val="FFFFFF"/>
-          </a:solidFill>
-          <a:ln/>
-        </p:spPr>
-        <p:txBody>
-          <a:bodyPr wrap="square" rtlCol="0" anchor="ctr"/>
-          <a:lstStyle/>
-          <a:p>
-            <a:pPr indent="0" marL="0">
-              <a:buNone/>
-            </a:pPr>
-            <a:r>
-              <a:rPr lang="en-US" sz="1100" dirty="0">
-                <a:solidFill>
-                  <a:srgbClr val="454659"/>
-                </a:solidFill>
-                <a:latin typeface="Inter" pitchFamily="34" charset="0"/>
-                <a:ea typeface="Inter" pitchFamily="34" charset="-122"/>
-                <a:cs typeface="Inter" pitchFamily="34" charset="-120"/>
-              </a:rPr>
-              <a:t>Pipeline 7: sf_orders (API, 15 min)</a:t>
-            </a:r>
-            <a:endParaRPr lang="en-US" sz="1100" dirty="0"/>
-          </a:p>
-        </p:txBody>
-      </p:sp>
-      <p:sp>
-        <p:nvSpPr>
-          <p:cNvPr id="16" name="Text 13"/>
-          <p:cNvSpPr/>
-          <p:nvPr/>
-        </p:nvSpPr>
-        <p:spPr>
-          <a:xfrm>
-            <a:off x="685800" y="3749040"/>
-            <a:ext cx="5029200" cy="347472"/>
+          <p:cNvPr id="25" name="Shape 22"/>
+          <p:cNvSpPr/>
+          <p:nvPr/>
+        </p:nvSpPr>
+        <p:spPr>
+          <a:xfrm>
+            <a:off x="457200" y="3191256"/>
+            <a:ext cx="11274552" cy="4572"/>
           </a:xfrm>
           <a:prstGeom prst="rect">
             <a:avLst/>
@@ -4678,14 +6099,169 @@
           </a:solidFill>
           <a:ln/>
         </p:spPr>
+      </p:sp>
+      <p:sp>
+        <p:nvSpPr>
+          <p:cNvPr id="26" name="Shape 23"/>
+          <p:cNvSpPr/>
+          <p:nvPr/>
+        </p:nvSpPr>
+        <p:spPr>
+          <a:xfrm>
+            <a:off x="548640" y="3291840"/>
+            <a:ext cx="512064" cy="512064"/>
+          </a:xfrm>
+          <a:prstGeom prst="ellipse">
+            <a:avLst/>
+          </a:prstGeom>
+          <a:solidFill>
+            <a:srgbClr val="19416C"/>
+          </a:solidFill>
+          <a:ln/>
+        </p:spPr>
+      </p:sp>
+      <p:sp>
+        <p:nvSpPr>
+          <p:cNvPr id="27" name="Text 24"/>
+          <p:cNvSpPr/>
+          <p:nvPr/>
+        </p:nvSpPr>
+        <p:spPr>
+          <a:xfrm>
+            <a:off x="548640" y="3291840"/>
+            <a:ext cx="512064" cy="512064"/>
+          </a:xfrm>
+          <a:prstGeom prst="rect">
+            <a:avLst/>
+          </a:prstGeom>
+          <a:noFill/>
+          <a:ln/>
+        </p:spPr>
         <p:txBody>
           <a:bodyPr wrap="square" rtlCol="0" anchor="ctr"/>
           <a:lstStyle/>
           <a:p>
+            <a:pPr algn="ctr" indent="0" marL="0">
+              <a:buNone/>
+            </a:pPr>
+            <a:r>
+              <a:rPr lang="en-US" sz="1800" b="1" dirty="0">
+                <a:solidFill>
+                  <a:srgbClr val="FFFFFF"/>
+                </a:solidFill>
+                <a:latin typeface="Inter" pitchFamily="34" charset="0"/>
+                <a:ea typeface="Inter" pitchFamily="34" charset="-122"/>
+                <a:cs typeface="Inter" pitchFamily="34" charset="-120"/>
+              </a:rPr>
+              <a:t>4</a:t>
+            </a:r>
+            <a:endParaRPr lang="en-US" sz="1800" dirty="0"/>
+          </a:p>
+        </p:txBody>
+      </p:sp>
+      <p:sp>
+        <p:nvSpPr>
+          <p:cNvPr id="28" name="Text 25"/>
+          <p:cNvSpPr/>
+          <p:nvPr/>
+        </p:nvSpPr>
+        <p:spPr>
+          <a:xfrm>
+            <a:off x="1280160" y="3246120"/>
+            <a:ext cx="2743200" cy="347472"/>
+          </a:xfrm>
+          <a:prstGeom prst="rect">
+            <a:avLst/>
+          </a:prstGeom>
+          <a:noFill/>
+          <a:ln/>
+        </p:spPr>
+        <p:txBody>
+          <a:bodyPr wrap="square" rtlCol="0" anchor="ctr"/>
+          <a:lstStyle/>
+          <a:p>
             <a:pPr indent="0" marL="0">
               <a:buNone/>
             </a:pPr>
             <a:r>
+              <a:rPr lang="en-US" sz="1300" b="1" dirty="0">
+                <a:solidFill>
+                  <a:srgbClr val="19416C"/>
+                </a:solidFill>
+                <a:latin typeface="Inter" pitchFamily="34" charset="0"/>
+                <a:ea typeface="Inter" pitchFamily="34" charset="-122"/>
+                <a:cs typeface="Inter" pitchFamily="34" charset="-120"/>
+              </a:rPr>
+              <a:t>Silent Pipeline Failures</a:t>
+            </a:r>
+            <a:endParaRPr lang="en-US" sz="1300" dirty="0"/>
+          </a:p>
+        </p:txBody>
+      </p:sp>
+      <p:sp>
+        <p:nvSpPr>
+          <p:cNvPr id="29" name="Text 26"/>
+          <p:cNvSpPr/>
+          <p:nvPr/>
+        </p:nvSpPr>
+        <p:spPr>
+          <a:xfrm>
+            <a:off x="1280160" y="3566160"/>
+            <a:ext cx="1828800" cy="274320"/>
+          </a:xfrm>
+          <a:prstGeom prst="rect">
+            <a:avLst/>
+          </a:prstGeom>
+          <a:noFill/>
+          <a:ln/>
+        </p:spPr>
+        <p:txBody>
+          <a:bodyPr wrap="square" rtlCol="0" anchor="ctr"/>
+          <a:lstStyle/>
+          <a:p>
+            <a:pPr indent="0" marL="0">
+              <a:buNone/>
+            </a:pPr>
+            <a:r>
+              <a:rPr lang="en-US" sz="1100" b="1" dirty="0">
+                <a:solidFill>
+                  <a:srgbClr val="006580"/>
+                </a:solidFill>
+                <a:latin typeface="Inter" pitchFamily="34" charset="0"/>
+                <a:ea typeface="Inter" pitchFamily="34" charset="-122"/>
+                <a:cs typeface="Inter" pitchFamily="34" charset="-120"/>
+              </a:rPr>
+              <a:t>$12M / year</a:t>
+            </a:r>
+            <a:endParaRPr lang="en-US" sz="1100" dirty="0"/>
+          </a:p>
+        </p:txBody>
+      </p:sp>
+      <p:sp>
+        <p:nvSpPr>
+          <p:cNvPr id="30" name="Text 27"/>
+          <p:cNvSpPr/>
+          <p:nvPr/>
+        </p:nvSpPr>
+        <p:spPr>
+          <a:xfrm>
+            <a:off x="4206240" y="3246120"/>
+            <a:ext cx="7498080" cy="621792"/>
+          </a:xfrm>
+          <a:prstGeom prst="rect">
+            <a:avLst/>
+          </a:prstGeom>
+          <a:noFill/>
+          <a:ln/>
+        </p:spPr>
+        <p:txBody>
+          <a:bodyPr wrap="square" rtlCol="0" anchor="ctr"/>
+          <a:lstStyle/>
+          <a:p>
+            <a:pPr indent="0" marL="0">
+              <a:buNone/>
+            </a:pPr>
+            <a:r>
               <a:rPr lang="en-US" sz="1100" dirty="0">
                 <a:solidFill>
                   <a:srgbClr val="454659"/>
@@ -4694,7 +6270,7 @@
                 <a:ea typeface="Inter" pitchFamily="34" charset="-122"/>
                 <a:cs typeface="Inter" pitchFamily="34" charset="-120"/>
               </a:rPr>
-              <a:t>Pipeline 8: sf_products (API, 15 min)</a:t>
+              <a:t>Rotterdam CDC sync: 72h undetected. 847 phantom units.</a:t>
             </a:r>
             <a:endParaRPr lang="en-US" sz="1100" dirty="0"/>
           </a:p>
@@ -4702,160 +6278,14 @@
       </p:sp>
       <p:sp>
         <p:nvSpPr>
-          <p:cNvPr id="17" name="Shape 14"/>
-          <p:cNvSpPr/>
-          <p:nvPr/>
-        </p:nvSpPr>
-        <p:spPr>
-          <a:xfrm>
-            <a:off x="6217920" y="1005840"/>
-            <a:ext cx="5486400" cy="3200400"/>
-          </a:xfrm>
-          <a:prstGeom prst="roundRect">
-            <a:avLst>
-              <a:gd name="adj" fmla="val 3429"/>
-            </a:avLst>
-          </a:prstGeom>
-          <a:solidFill>
-            <a:srgbClr val="E0F5EA"/>
-          </a:solidFill>
-          <a:ln w="19050">
-            <a:solidFill>
-              <a:srgbClr val="009845"/>
-            </a:solidFill>
-            <a:prstDash val="solid"/>
-          </a:ln>
-        </p:spPr>
-      </p:sp>
-      <p:sp>
-        <p:nvSpPr>
-          <p:cNvPr id="18" name="Text 15"/>
-          <p:cNvSpPr/>
-          <p:nvPr/>
-        </p:nvSpPr>
-        <p:spPr>
-          <a:xfrm>
-            <a:off x="6217920" y="1024128"/>
-            <a:ext cx="5486400" cy="384048"/>
-          </a:xfrm>
-          <a:prstGeom prst="rect">
-            <a:avLst/>
-          </a:prstGeom>
-          <a:noFill/>
-          <a:ln/>
-        </p:spPr>
-        <p:txBody>
-          <a:bodyPr wrap="square" rtlCol="0" anchor="ctr"/>
-          <a:lstStyle/>
-          <a:p>
-            <a:pPr algn="ctr" indent="0" marL="0">
-              <a:buNone/>
-            </a:pPr>
-            <a:r>
-              <a:rPr lang="en-US" sz="1600" b="1" dirty="0">
-                <a:solidFill>
-                  <a:srgbClr val="009845"/>
-                </a:solidFill>
-                <a:latin typeface="Inter" pitchFamily="34" charset="0"/>
-                <a:ea typeface="Inter" pitchFamily="34" charset="-122"/>
-                <a:cs typeface="Inter" pitchFamily="34" charset="-120"/>
-              </a:rPr>
-              <a:t>Streaming Cluster</a:t>
-            </a:r>
-            <a:endParaRPr lang="en-US" sz="1600" dirty="0"/>
-          </a:p>
-        </p:txBody>
-      </p:sp>
-      <p:sp>
-        <p:nvSpPr>
-          <p:cNvPr id="19" name="Text 16"/>
-          <p:cNvSpPr/>
-          <p:nvPr/>
-        </p:nvSpPr>
-        <p:spPr>
-          <a:xfrm>
-            <a:off x="6217920" y="1389888"/>
-            <a:ext cx="5486400" cy="274320"/>
-          </a:xfrm>
-          <a:prstGeom prst="rect">
-            <a:avLst/>
-          </a:prstGeom>
-          <a:noFill/>
-          <a:ln/>
-        </p:spPr>
-        <p:txBody>
-          <a:bodyPr wrap="square" rtlCol="0" anchor="ctr"/>
-          <a:lstStyle/>
-          <a:p>
-            <a:pPr algn="ctr" indent="0" marL="0">
-              <a:buNone/>
-            </a:pPr>
-            <a:r>
-              <a:rPr lang="en-US" sz="1000" dirty="0">
-                <a:solidFill>
-                  <a:srgbClr val="6B7280"/>
-                </a:solidFill>
-                <a:latin typeface="Inter" pitchFamily="34" charset="0"/>
-                <a:ea typeface="Inter" pitchFamily="34" charset="-122"/>
-                <a:cs typeface="Inter" pitchFamily="34" charset="-120"/>
-              </a:rPr>
-              <a:t>Real-time Kafka ingestion from IoT topics</a:t>
-            </a:r>
-            <a:endParaRPr lang="en-US" sz="1000" dirty="0"/>
-          </a:p>
-        </p:txBody>
-      </p:sp>
-      <p:sp>
-        <p:nvSpPr>
-          <p:cNvPr id="20" name="Text 17"/>
-          <p:cNvSpPr/>
-          <p:nvPr/>
-        </p:nvSpPr>
-        <p:spPr>
-          <a:xfrm>
-            <a:off x="6446520" y="1828800"/>
-            <a:ext cx="5029200" cy="347472"/>
-          </a:xfrm>
-          <a:prstGeom prst="rect">
-            <a:avLst/>
-          </a:prstGeom>
-          <a:solidFill>
-            <a:srgbClr val="FFFFFF"/>
-          </a:solidFill>
-          <a:ln/>
-        </p:spPr>
-        <p:txBody>
-          <a:bodyPr wrap="square" rtlCol="0" anchor="ctr"/>
-          <a:lstStyle/>
-          <a:p>
-            <a:pPr indent="0" marL="0">
-              <a:buNone/>
-            </a:pPr>
-            <a:r>
-              <a:rPr lang="en-US" sz="1100" dirty="0">
-                <a:solidFill>
-                  <a:srgbClr val="454659"/>
-                </a:solidFill>
-                <a:latin typeface="Inter" pitchFamily="34" charset="0"/>
-                <a:ea typeface="Inter" pitchFamily="34" charset="-122"/>
-                <a:cs typeface="Inter" pitchFamily="34" charset="-120"/>
-              </a:rPr>
-              <a:t>Pipeline 4: mcg.iot.cold-chain → bronze.iot_cold_chain</a:t>
-            </a:r>
-            <a:endParaRPr lang="en-US" sz="1100" dirty="0"/>
-          </a:p>
-        </p:txBody>
-      </p:sp>
-      <p:sp>
-        <p:nvSpPr>
-          <p:cNvPr id="21" name="Text 18"/>
-          <p:cNvSpPr/>
-          <p:nvPr/>
-        </p:nvSpPr>
-        <p:spPr>
-          <a:xfrm>
-            <a:off x="6446520" y="2212848"/>
-            <a:ext cx="5029200" cy="347472"/>
+          <p:cNvPr id="31" name="Shape 28"/>
+          <p:cNvSpPr/>
+          <p:nvPr/>
+        </p:nvSpPr>
+        <p:spPr>
+          <a:xfrm>
+            <a:off x="457200" y="3922776"/>
+            <a:ext cx="11274552" cy="4572"/>
           </a:xfrm>
           <a:prstGeom prst="rect">
             <a:avLst/>
@@ -4865,14 +6295,169 @@
           </a:solidFill>
           <a:ln/>
         </p:spPr>
+      </p:sp>
+      <p:sp>
+        <p:nvSpPr>
+          <p:cNvPr id="32" name="Shape 29"/>
+          <p:cNvSpPr/>
+          <p:nvPr/>
+        </p:nvSpPr>
+        <p:spPr>
+          <a:xfrm>
+            <a:off x="548640" y="4023360"/>
+            <a:ext cx="512064" cy="512064"/>
+          </a:xfrm>
+          <a:prstGeom prst="ellipse">
+            <a:avLst/>
+          </a:prstGeom>
+          <a:solidFill>
+            <a:srgbClr val="19416C"/>
+          </a:solidFill>
+          <a:ln/>
+        </p:spPr>
+      </p:sp>
+      <p:sp>
+        <p:nvSpPr>
+          <p:cNvPr id="33" name="Text 30"/>
+          <p:cNvSpPr/>
+          <p:nvPr/>
+        </p:nvSpPr>
+        <p:spPr>
+          <a:xfrm>
+            <a:off x="548640" y="4023360"/>
+            <a:ext cx="512064" cy="512064"/>
+          </a:xfrm>
+          <a:prstGeom prst="rect">
+            <a:avLst/>
+          </a:prstGeom>
+          <a:noFill/>
+          <a:ln/>
+        </p:spPr>
         <p:txBody>
           <a:bodyPr wrap="square" rtlCol="0" anchor="ctr"/>
           <a:lstStyle/>
           <a:p>
+            <a:pPr algn="ctr" indent="0" marL="0">
+              <a:buNone/>
+            </a:pPr>
+            <a:r>
+              <a:rPr lang="en-US" sz="1800" b="1" dirty="0">
+                <a:solidFill>
+                  <a:srgbClr val="FFFFFF"/>
+                </a:solidFill>
+                <a:latin typeface="Inter" pitchFamily="34" charset="0"/>
+                <a:ea typeface="Inter" pitchFamily="34" charset="-122"/>
+                <a:cs typeface="Inter" pitchFamily="34" charset="-120"/>
+              </a:rPr>
+              <a:t>5</a:t>
+            </a:r>
+            <a:endParaRPr lang="en-US" sz="1800" dirty="0"/>
+          </a:p>
+        </p:txBody>
+      </p:sp>
+      <p:sp>
+        <p:nvSpPr>
+          <p:cNvPr id="34" name="Text 31"/>
+          <p:cNvSpPr/>
+          <p:nvPr/>
+        </p:nvSpPr>
+        <p:spPr>
+          <a:xfrm>
+            <a:off x="1280160" y="3977640"/>
+            <a:ext cx="2743200" cy="347472"/>
+          </a:xfrm>
+          <a:prstGeom prst="rect">
+            <a:avLst/>
+          </a:prstGeom>
+          <a:noFill/>
+          <a:ln/>
+        </p:spPr>
+        <p:txBody>
+          <a:bodyPr wrap="square" rtlCol="0" anchor="ctr"/>
+          <a:lstStyle/>
+          <a:p>
             <a:pPr indent="0" marL="0">
               <a:buNone/>
             </a:pPr>
             <a:r>
+              <a:rPr lang="en-US" sz="1300" b="1" dirty="0">
+                <a:solidFill>
+                  <a:srgbClr val="19416C"/>
+                </a:solidFill>
+                <a:latin typeface="Inter" pitchFamily="34" charset="0"/>
+                <a:ea typeface="Inter" pitchFamily="34" charset="-122"/>
+                <a:cs typeface="Inter" pitchFamily="34" charset="-120"/>
+              </a:rPr>
+              <a:t>Timestamp Tower of Babel</a:t>
+            </a:r>
+            <a:endParaRPr lang="en-US" sz="1300" dirty="0"/>
+          </a:p>
+        </p:txBody>
+      </p:sp>
+      <p:sp>
+        <p:nvSpPr>
+          <p:cNvPr id="35" name="Text 32"/>
+          <p:cNvSpPr/>
+          <p:nvPr/>
+        </p:nvSpPr>
+        <p:spPr>
+          <a:xfrm>
+            <a:off x="1280160" y="4297680"/>
+            <a:ext cx="1828800" cy="274320"/>
+          </a:xfrm>
+          <a:prstGeom prst="rect">
+            <a:avLst/>
+          </a:prstGeom>
+          <a:noFill/>
+          <a:ln/>
+        </p:spPr>
+        <p:txBody>
+          <a:bodyPr wrap="square" rtlCol="0" anchor="ctr"/>
+          <a:lstStyle/>
+          <a:p>
+            <a:pPr indent="0" marL="0">
+              <a:buNone/>
+            </a:pPr>
+            <a:r>
+              <a:rPr lang="en-US" sz="1100" b="1" dirty="0">
+                <a:solidFill>
+                  <a:srgbClr val="006580"/>
+                </a:solidFill>
+                <a:latin typeface="Inter" pitchFamily="34" charset="0"/>
+                <a:ea typeface="Inter" pitchFamily="34" charset="-122"/>
+                <a:cs typeface="Inter" pitchFamily="34" charset="-120"/>
+              </a:rPr>
+              <a:t>$6.5M / year</a:t>
+            </a:r>
+            <a:endParaRPr lang="en-US" sz="1100" dirty="0"/>
+          </a:p>
+        </p:txBody>
+      </p:sp>
+      <p:sp>
+        <p:nvSpPr>
+          <p:cNvPr id="36" name="Text 33"/>
+          <p:cNvSpPr/>
+          <p:nvPr/>
+        </p:nvSpPr>
+        <p:spPr>
+          <a:xfrm>
+            <a:off x="4206240" y="3977640"/>
+            <a:ext cx="7498080" cy="621792"/>
+          </a:xfrm>
+          <a:prstGeom prst="rect">
+            <a:avLst/>
+          </a:prstGeom>
+          <a:noFill/>
+          <a:ln/>
+        </p:spPr>
+        <p:txBody>
+          <a:bodyPr wrap="square" rtlCol="0" anchor="ctr"/>
+          <a:lstStyle/>
+          <a:p>
+            <a:pPr indent="0" marL="0">
+              <a:buNone/>
+            </a:pPr>
+            <a:r>
               <a:rPr lang="en-US" sz="1100" dirty="0">
                 <a:solidFill>
                   <a:srgbClr val="454659"/>
@@ -4881,7 +6466,7 @@
                 <a:ea typeface="Inter" pitchFamily="34" charset="-122"/>
                 <a:cs typeface="Inter" pitchFamily="34" charset="-120"/>
               </a:rPr>
-              <a:t>Pipeline 5: mcg.iot.carrier-events → bronze.iot_carrier_events</a:t>
+              <a:t>Mixed UTC/local/bare timestamps across 3 sources.</a:t>
             </a:r>
             <a:endParaRPr lang="en-US" sz="1100" dirty="0"/>
           </a:p>
@@ -4889,41 +6474,54 @@
       </p:sp>
       <p:sp>
         <p:nvSpPr>
-          <p:cNvPr id="22" name="Shape 19"/>
-          <p:cNvSpPr/>
-          <p:nvPr/>
-        </p:nvSpPr>
-        <p:spPr>
-          <a:xfrm>
-            <a:off x="457200" y="4572000"/>
-            <a:ext cx="11247120" cy="1554480"/>
-          </a:xfrm>
-          <a:prstGeom prst="roundRect">
-            <a:avLst>
-              <a:gd name="adj" fmla="val 5882"/>
-            </a:avLst>
+          <p:cNvPr id="37" name="Shape 34"/>
+          <p:cNvSpPr/>
+          <p:nvPr/>
+        </p:nvSpPr>
+        <p:spPr>
+          <a:xfrm>
+            <a:off x="457200" y="4654296"/>
+            <a:ext cx="11274552" cy="4572"/>
+          </a:xfrm>
+          <a:prstGeom prst="rect">
+            <a:avLst/>
           </a:prstGeom>
           <a:solidFill>
             <a:srgbClr val="F6F7F8"/>
           </a:solidFill>
-          <a:ln w="12700">
-            <a:solidFill>
-              <a:srgbClr val="A9B3B6"/>
-            </a:solidFill>
-            <a:prstDash val="solid"/>
-          </a:ln>
-        </p:spPr>
-      </p:sp>
-      <p:sp>
-        <p:nvSpPr>
-          <p:cNvPr id="23" name="Text 20"/>
-          <p:cNvSpPr/>
-          <p:nvPr/>
-        </p:nvSpPr>
-        <p:spPr>
-          <a:xfrm>
-            <a:off x="457200" y="4572000"/>
-            <a:ext cx="11247120" cy="347472"/>
+          <a:ln/>
+        </p:spPr>
+      </p:sp>
+      <p:sp>
+        <p:nvSpPr>
+          <p:cNvPr id="38" name="Shape 35"/>
+          <p:cNvSpPr/>
+          <p:nvPr/>
+        </p:nvSpPr>
+        <p:spPr>
+          <a:xfrm>
+            <a:off x="548640" y="4754880"/>
+            <a:ext cx="512064" cy="512064"/>
+          </a:xfrm>
+          <a:prstGeom prst="ellipse">
+            <a:avLst/>
+          </a:prstGeom>
+          <a:solidFill>
+            <a:srgbClr val="19416C"/>
+          </a:solidFill>
+          <a:ln/>
+        </p:spPr>
+      </p:sp>
+      <p:sp>
+        <p:nvSpPr>
+          <p:cNvPr id="39" name="Text 36"/>
+          <p:cNvSpPr/>
+          <p:nvPr/>
+        </p:nvSpPr>
+        <p:spPr>
+          <a:xfrm>
+            <a:off x="548640" y="4754880"/>
+            <a:ext cx="512064" cy="512064"/>
           </a:xfrm>
           <a:prstGeom prst="rect">
             <a:avLst/>
@@ -4939,15 +6537,250 @@
               <a:buNone/>
             </a:pPr>
             <a:r>
+              <a:rPr lang="en-US" sz="1800" b="1" dirty="0">
+                <a:solidFill>
+                  <a:srgbClr val="FFFFFF"/>
+                </a:solidFill>
+                <a:latin typeface="Inter" pitchFamily="34" charset="0"/>
+                <a:ea typeface="Inter" pitchFamily="34" charset="-122"/>
+                <a:cs typeface="Inter" pitchFamily="34" charset="-120"/>
+              </a:rPr>
+              <a:t>6</a:t>
+            </a:r>
+            <a:endParaRPr lang="en-US" sz="1800" dirty="0"/>
+          </a:p>
+        </p:txBody>
+      </p:sp>
+      <p:sp>
+        <p:nvSpPr>
+          <p:cNvPr id="40" name="Text 37"/>
+          <p:cNvSpPr/>
+          <p:nvPr/>
+        </p:nvSpPr>
+        <p:spPr>
+          <a:xfrm>
+            <a:off x="1280160" y="4709160"/>
+            <a:ext cx="2743200" cy="347472"/>
+          </a:xfrm>
+          <a:prstGeom prst="rect">
+            <a:avLst/>
+          </a:prstGeom>
+          <a:noFill/>
+          <a:ln/>
+        </p:spPr>
+        <p:txBody>
+          <a:bodyPr wrap="square" rtlCol="0" anchor="ctr"/>
+          <a:lstStyle/>
+          <a:p>
+            <a:pPr indent="0" marL="0">
+              <a:buNone/>
+            </a:pPr>
+            <a:r>
               <a:rPr lang="en-US" sz="1300" b="1" dirty="0">
                 <a:solidFill>
+                  <a:srgbClr val="19416C"/>
+                </a:solidFill>
+                <a:latin typeface="Inter" pitchFamily="34" charset="0"/>
+                <a:ea typeface="Inter" pitchFamily="34" charset="-122"/>
+                <a:cs typeface="Inter" pitchFamily="34" charset="-120"/>
+              </a:rPr>
+              <a:t>Carrier Data Black Hole</a:t>
+            </a:r>
+            <a:endParaRPr lang="en-US" sz="1300" dirty="0"/>
+          </a:p>
+        </p:txBody>
+      </p:sp>
+      <p:sp>
+        <p:nvSpPr>
+          <p:cNvPr id="41" name="Text 38"/>
+          <p:cNvSpPr/>
+          <p:nvPr/>
+        </p:nvSpPr>
+        <p:spPr>
+          <a:xfrm>
+            <a:off x="1280160" y="5029200"/>
+            <a:ext cx="1828800" cy="274320"/>
+          </a:xfrm>
+          <a:prstGeom prst="rect">
+            <a:avLst/>
+          </a:prstGeom>
+          <a:noFill/>
+          <a:ln/>
+        </p:spPr>
+        <p:txBody>
+          <a:bodyPr wrap="square" rtlCol="0" anchor="ctr"/>
+          <a:lstStyle/>
+          <a:p>
+            <a:pPr indent="0" marL="0">
+              <a:buNone/>
+            </a:pPr>
+            <a:r>
+              <a:rPr lang="en-US" sz="1100" b="1" dirty="0">
+                <a:solidFill>
+                  <a:srgbClr val="006580"/>
+                </a:solidFill>
+                <a:latin typeface="Inter" pitchFamily="34" charset="0"/>
+                <a:ea typeface="Inter" pitchFamily="34" charset="-122"/>
+                <a:cs typeface="Inter" pitchFamily="34" charset="-120"/>
+              </a:rPr>
+              <a:t>$14.8M / year</a:t>
+            </a:r>
+            <a:endParaRPr lang="en-US" sz="1100" dirty="0"/>
+          </a:p>
+        </p:txBody>
+      </p:sp>
+      <p:sp>
+        <p:nvSpPr>
+          <p:cNvPr id="42" name="Text 39"/>
+          <p:cNvSpPr/>
+          <p:nvPr/>
+        </p:nvSpPr>
+        <p:spPr>
+          <a:xfrm>
+            <a:off x="4206240" y="4709160"/>
+            <a:ext cx="7498080" cy="621792"/>
+          </a:xfrm>
+          <a:prstGeom prst="rect">
+            <a:avLst/>
+          </a:prstGeom>
+          <a:noFill/>
+          <a:ln/>
+        </p:spPr>
+        <p:txBody>
+          <a:bodyPr wrap="square" rtlCol="0" anchor="ctr"/>
+          <a:lstStyle/>
+          <a:p>
+            <a:pPr indent="0" marL="0">
+              <a:buNone/>
+            </a:pPr>
+            <a:r>
+              <a:rPr lang="en-US" sz="1100" dirty="0">
+                <a:solidFill>
                   <a:srgbClr val="454659"/>
                 </a:solidFill>
                 <a:latin typeface="Inter" pitchFamily="34" charset="0"/>
                 <a:ea typeface="Inter" pitchFamily="34" charset="-122"/>
                 <a:cs typeface="Inter" pitchFamily="34" charset="-120"/>
               </a:rPr>
-              <a:t>Infrastructure Components</a:t>
+              <a:t>6 carriers, 5 languages, no canonical status mapping.</a:t>
+            </a:r>
+            <a:endParaRPr lang="en-US" sz="1100" dirty="0"/>
+          </a:p>
+        </p:txBody>
+      </p:sp>
+      <p:sp>
+        <p:nvSpPr>
+          <p:cNvPr id="43" name="Shape 40"/>
+          <p:cNvSpPr/>
+          <p:nvPr/>
+        </p:nvSpPr>
+        <p:spPr>
+          <a:xfrm>
+            <a:off x="457200" y="5385816"/>
+            <a:ext cx="11274552" cy="4572"/>
+          </a:xfrm>
+          <a:prstGeom prst="rect">
+            <a:avLst/>
+          </a:prstGeom>
+          <a:solidFill>
+            <a:srgbClr val="F6F7F8"/>
+          </a:solidFill>
+          <a:ln/>
+        </p:spPr>
+      </p:sp>
+      <p:sp>
+        <p:nvSpPr>
+          <p:cNvPr id="44" name="Shape 41"/>
+          <p:cNvSpPr/>
+          <p:nvPr/>
+        </p:nvSpPr>
+        <p:spPr>
+          <a:xfrm>
+            <a:off x="548640" y="5486400"/>
+            <a:ext cx="512064" cy="512064"/>
+          </a:xfrm>
+          <a:prstGeom prst="ellipse">
+            <a:avLst/>
+          </a:prstGeom>
+          <a:solidFill>
+            <a:srgbClr val="19416C"/>
+          </a:solidFill>
+          <a:ln/>
+        </p:spPr>
+      </p:sp>
+      <p:sp>
+        <p:nvSpPr>
+          <p:cNvPr id="45" name="Text 42"/>
+          <p:cNvSpPr/>
+          <p:nvPr/>
+        </p:nvSpPr>
+        <p:spPr>
+          <a:xfrm>
+            <a:off x="548640" y="5486400"/>
+            <a:ext cx="512064" cy="512064"/>
+          </a:xfrm>
+          <a:prstGeom prst="rect">
+            <a:avLst/>
+          </a:prstGeom>
+          <a:noFill/>
+          <a:ln/>
+        </p:spPr>
+        <p:txBody>
+          <a:bodyPr wrap="square" rtlCol="0" anchor="ctr"/>
+          <a:lstStyle/>
+          <a:p>
+            <a:pPr algn="ctr" indent="0" marL="0">
+              <a:buNone/>
+            </a:pPr>
+            <a:r>
+              <a:rPr lang="en-US" sz="1800" b="1" dirty="0">
+                <a:solidFill>
+                  <a:srgbClr val="FFFFFF"/>
+                </a:solidFill>
+                <a:latin typeface="Inter" pitchFamily="34" charset="0"/>
+                <a:ea typeface="Inter" pitchFamily="34" charset="-122"/>
+                <a:cs typeface="Inter" pitchFamily="34" charset="-120"/>
+              </a:rPr>
+              <a:t>7</a:t>
+            </a:r>
+            <a:endParaRPr lang="en-US" sz="1800" dirty="0"/>
+          </a:p>
+        </p:txBody>
+      </p:sp>
+      <p:sp>
+        <p:nvSpPr>
+          <p:cNvPr id="46" name="Text 43"/>
+          <p:cNvSpPr/>
+          <p:nvPr/>
+        </p:nvSpPr>
+        <p:spPr>
+          <a:xfrm>
+            <a:off x="1280160" y="5440680"/>
+            <a:ext cx="2743200" cy="347472"/>
+          </a:xfrm>
+          <a:prstGeom prst="rect">
+            <a:avLst/>
+          </a:prstGeom>
+          <a:noFill/>
+          <a:ln/>
+        </p:spPr>
+        <p:txBody>
+          <a:bodyPr wrap="square" rtlCol="0" anchor="ctr"/>
+          <a:lstStyle/>
+          <a:p>
+            <a:pPr indent="0" marL="0">
+              <a:buNone/>
+            </a:pPr>
+            <a:r>
+              <a:rPr lang="en-US" sz="1300" b="1" dirty="0">
+                <a:solidFill>
+                  <a:srgbClr val="19416C"/>
+                </a:solidFill>
+                <a:latin typeface="Inter" pitchFamily="34" charset="0"/>
+                <a:ea typeface="Inter" pitchFamily="34" charset="-122"/>
+                <a:cs typeface="Inter" pitchFamily="34" charset="-120"/>
+              </a:rPr>
+              <a:t>Compliance Traceability Gap</a:t>
             </a:r>
             <a:endParaRPr lang="en-US" sz="1300" dirty="0"/>
           </a:p>
@@ -4955,560 +6788,79 @@
       </p:sp>
       <p:sp>
         <p:nvSpPr>
-          <p:cNvPr id="24" name="Shape 21"/>
-          <p:cNvSpPr/>
-          <p:nvPr/>
-        </p:nvSpPr>
-        <p:spPr>
-          <a:xfrm>
-            <a:off x="685800" y="5029200"/>
-            <a:ext cx="2057400" cy="914400"/>
-          </a:xfrm>
-          <a:prstGeom prst="roundRect">
-            <a:avLst>
-              <a:gd name="adj" fmla="val 6000"/>
-            </a:avLst>
-          </a:prstGeom>
-          <a:solidFill>
-            <a:srgbClr val="FFFFFF"/>
-          </a:solidFill>
-          <a:ln w="9525">
-            <a:solidFill>
-              <a:srgbClr val="A9B3B6"/>
-            </a:solidFill>
-            <a:prstDash val="solid"/>
-          </a:ln>
-        </p:spPr>
-      </p:sp>
-      <p:sp>
-        <p:nvSpPr>
-          <p:cNvPr id="25" name="Text 22"/>
-          <p:cNvSpPr/>
-          <p:nvPr/>
-        </p:nvSpPr>
-        <p:spPr>
-          <a:xfrm>
-            <a:off x="685800" y="5047488"/>
-            <a:ext cx="2057400" cy="475488"/>
-          </a:xfrm>
-          <a:prstGeom prst="rect">
-            <a:avLst/>
-          </a:prstGeom>
-          <a:noFill/>
-          <a:ln/>
-        </p:spPr>
-        <p:txBody>
-          <a:bodyPr wrap="square" rtlCol="0" anchor="b"/>
-          <a:lstStyle/>
-          <a:p>
-            <a:pPr algn="ctr" indent="0" marL="0">
-              <a:buNone/>
-            </a:pPr>
-            <a:r>
-              <a:rPr lang="en-US" sz="1000" b="1" dirty="0">
-                <a:solidFill>
-                  <a:srgbClr val="19416C"/>
-                </a:solidFill>
-                <a:latin typeface="Inter" pitchFamily="34" charset="0"/>
-                <a:ea typeface="Inter" pitchFamily="34" charset="-122"/>
-                <a:cs typeface="Inter" pitchFamily="34" charset="-120"/>
-              </a:rPr>
-              <a:t>Data Movement</a:t>
-            </a:r>
-            <a:endParaRPr lang="en-US" sz="1000" dirty="0"/>
-          </a:p>
-          <a:p>
-            <a:pPr algn="ctr" indent="0" marL="0">
-              <a:buNone/>
-            </a:pPr>
-            <a:r>
-              <a:rPr lang="en-US" sz="1000" b="1" dirty="0">
-                <a:solidFill>
-                  <a:srgbClr val="19416C"/>
-                </a:solidFill>
-                <a:latin typeface="Inter" pitchFamily="34" charset="0"/>
-                <a:ea typeface="Inter" pitchFamily="34" charset="-122"/>
-                <a:cs typeface="Inter" pitchFamily="34" charset="-120"/>
-              </a:rPr>
-              <a:t>Gateway</a:t>
-            </a:r>
-            <a:endParaRPr lang="en-US" sz="1000" dirty="0"/>
-          </a:p>
-        </p:txBody>
-      </p:sp>
-      <p:sp>
-        <p:nvSpPr>
-          <p:cNvPr id="26" name="Text 23"/>
-          <p:cNvSpPr/>
-          <p:nvPr/>
-        </p:nvSpPr>
-        <p:spPr>
-          <a:xfrm>
-            <a:off x="685800" y="5504688"/>
-            <a:ext cx="2057400" cy="365760"/>
-          </a:xfrm>
-          <a:prstGeom prst="rect">
-            <a:avLst/>
-          </a:prstGeom>
-          <a:noFill/>
-          <a:ln/>
-        </p:spPr>
-        <p:txBody>
-          <a:bodyPr wrap="square" rtlCol="0" anchor="t"/>
-          <a:lstStyle/>
-          <a:p>
-            <a:pPr algn="ctr" indent="0" marL="0">
-              <a:buNone/>
-            </a:pPr>
-            <a:r>
-              <a:rPr lang="en-US" sz="900" dirty="0">
-                <a:solidFill>
-                  <a:srgbClr val="6B7280"/>
-                </a:solidFill>
-                <a:latin typeface="Inter" pitchFamily="34" charset="0"/>
-                <a:ea typeface="Inter" pitchFamily="34" charset="-122"/>
-                <a:cs typeface="Inter" pitchFamily="34" charset="-120"/>
-              </a:rPr>
-              <a:t>On-prem PostgreSQL</a:t>
-            </a:r>
-            <a:endParaRPr lang="en-US" sz="900" dirty="0"/>
-          </a:p>
-        </p:txBody>
-      </p:sp>
-      <p:sp>
-        <p:nvSpPr>
-          <p:cNvPr id="27" name="Shape 24"/>
-          <p:cNvSpPr/>
-          <p:nvPr/>
-        </p:nvSpPr>
-        <p:spPr>
-          <a:xfrm>
-            <a:off x="2971800" y="5029200"/>
-            <a:ext cx="2057400" cy="914400"/>
-          </a:xfrm>
-          <a:prstGeom prst="roundRect">
-            <a:avLst>
-              <a:gd name="adj" fmla="val 6000"/>
-            </a:avLst>
-          </a:prstGeom>
-          <a:solidFill>
-            <a:srgbClr val="FFFFFF"/>
-          </a:solidFill>
-          <a:ln w="9525">
-            <a:solidFill>
-              <a:srgbClr val="A9B3B6"/>
-            </a:solidFill>
-            <a:prstDash val="solid"/>
-          </a:ln>
-        </p:spPr>
-      </p:sp>
-      <p:sp>
-        <p:nvSpPr>
-          <p:cNvPr id="28" name="Text 25"/>
-          <p:cNvSpPr/>
-          <p:nvPr/>
-        </p:nvSpPr>
-        <p:spPr>
-          <a:xfrm>
-            <a:off x="2971800" y="5047488"/>
-            <a:ext cx="2057400" cy="475488"/>
-          </a:xfrm>
-          <a:prstGeom prst="rect">
-            <a:avLst/>
-          </a:prstGeom>
-          <a:noFill/>
-          <a:ln/>
-        </p:spPr>
-        <p:txBody>
-          <a:bodyPr wrap="square" rtlCol="0" anchor="b"/>
-          <a:lstStyle/>
-          <a:p>
-            <a:pPr algn="ctr" indent="0" marL="0">
-              <a:buNone/>
-            </a:pPr>
-            <a:r>
-              <a:rPr lang="en-US" sz="1000" b="1" dirty="0">
-                <a:solidFill>
-                  <a:srgbClr val="19416C"/>
-                </a:solidFill>
-                <a:latin typeface="Inter" pitchFamily="34" charset="0"/>
-                <a:ea typeface="Inter" pitchFamily="34" charset="-122"/>
-                <a:cs typeface="Inter" pitchFamily="34" charset="-120"/>
-              </a:rPr>
-              <a:t>Data Gateway</a:t>
-            </a:r>
-            <a:endParaRPr lang="en-US" sz="1000" dirty="0"/>
-          </a:p>
-          <a:p>
-            <a:pPr algn="ctr" indent="0" marL="0">
-              <a:buNone/>
-            </a:pPr>
-            <a:r>
-              <a:rPr lang="en-US" sz="1000" b="1" dirty="0">
-                <a:solidFill>
-                  <a:srgbClr val="19416C"/>
-                </a:solidFill>
-                <a:latin typeface="Inter" pitchFamily="34" charset="0"/>
-                <a:ea typeface="Inter" pitchFamily="34" charset="-122"/>
-                <a:cs typeface="Inter" pitchFamily="34" charset="-120"/>
-              </a:rPr>
-              <a:t>Streaming</a:t>
-            </a:r>
-            <a:endParaRPr lang="en-US" sz="1000" dirty="0"/>
-          </a:p>
-        </p:txBody>
-      </p:sp>
-      <p:sp>
-        <p:nvSpPr>
-          <p:cNvPr id="29" name="Text 26"/>
-          <p:cNvSpPr/>
-          <p:nvPr/>
-        </p:nvSpPr>
-        <p:spPr>
-          <a:xfrm>
-            <a:off x="2971800" y="5504688"/>
-            <a:ext cx="2057400" cy="365760"/>
-          </a:xfrm>
-          <a:prstGeom prst="rect">
-            <a:avLst/>
-          </a:prstGeom>
-          <a:noFill/>
-          <a:ln/>
-        </p:spPr>
-        <p:txBody>
-          <a:bodyPr wrap="square" rtlCol="0" anchor="t"/>
-          <a:lstStyle/>
-          <a:p>
-            <a:pPr algn="ctr" indent="0" marL="0">
-              <a:buNone/>
-            </a:pPr>
-            <a:r>
-              <a:rPr lang="en-US" sz="900" dirty="0">
-                <a:solidFill>
-                  <a:srgbClr val="6B7280"/>
-                </a:solidFill>
-                <a:latin typeface="Inter" pitchFamily="34" charset="0"/>
-                <a:ea typeface="Inter" pitchFamily="34" charset="-122"/>
-                <a:cs typeface="Inter" pitchFamily="34" charset="-120"/>
-              </a:rPr>
-              <a:t>Kafka connectivity</a:t>
-            </a:r>
-            <a:endParaRPr lang="en-US" sz="900" dirty="0"/>
-          </a:p>
-        </p:txBody>
-      </p:sp>
-      <p:sp>
-        <p:nvSpPr>
-          <p:cNvPr id="30" name="Shape 27"/>
-          <p:cNvSpPr/>
-          <p:nvPr/>
-        </p:nvSpPr>
-        <p:spPr>
-          <a:xfrm>
-            <a:off x="5257800" y="5029200"/>
-            <a:ext cx="2057400" cy="914400"/>
-          </a:xfrm>
-          <a:prstGeom prst="roundRect">
-            <a:avLst>
-              <a:gd name="adj" fmla="val 6000"/>
-            </a:avLst>
-          </a:prstGeom>
-          <a:solidFill>
-            <a:srgbClr val="FFFFFF"/>
-          </a:solidFill>
-          <a:ln w="9525">
-            <a:solidFill>
-              <a:srgbClr val="A9B3B6"/>
-            </a:solidFill>
-            <a:prstDash val="solid"/>
-          </a:ln>
-        </p:spPr>
-      </p:sp>
-      <p:sp>
-        <p:nvSpPr>
-          <p:cNvPr id="31" name="Text 28"/>
-          <p:cNvSpPr/>
-          <p:nvPr/>
-        </p:nvSpPr>
-        <p:spPr>
-          <a:xfrm>
-            <a:off x="5257800" y="5047488"/>
-            <a:ext cx="2057400" cy="475488"/>
-          </a:xfrm>
-          <a:prstGeom prst="rect">
-            <a:avLst/>
-          </a:prstGeom>
-          <a:noFill/>
-          <a:ln/>
-        </p:spPr>
-        <p:txBody>
-          <a:bodyPr wrap="square" rtlCol="0" anchor="b"/>
-          <a:lstStyle/>
-          <a:p>
-            <a:pPr algn="ctr" indent="0" marL="0">
-              <a:buNone/>
-            </a:pPr>
-            <a:r>
-              <a:rPr lang="en-US" sz="1000" b="1" dirty="0">
-                <a:solidFill>
-                  <a:srgbClr val="19416C"/>
-                </a:solidFill>
-                <a:latin typeface="Inter" pitchFamily="34" charset="0"/>
-                <a:ea typeface="Inter" pitchFamily="34" charset="-122"/>
-                <a:cs typeface="Inter" pitchFamily="34" charset="-120"/>
-              </a:rPr>
-              <a:t>Docker Compose</a:t>
-            </a:r>
-            <a:endParaRPr lang="en-US" sz="1000" dirty="0"/>
-          </a:p>
-        </p:txBody>
-      </p:sp>
-      <p:sp>
-        <p:nvSpPr>
-          <p:cNvPr id="32" name="Text 29"/>
-          <p:cNvSpPr/>
-          <p:nvPr/>
-        </p:nvSpPr>
-        <p:spPr>
-          <a:xfrm>
-            <a:off x="5257800" y="5504688"/>
-            <a:ext cx="2057400" cy="365760"/>
-          </a:xfrm>
-          <a:prstGeom prst="rect">
-            <a:avLst/>
-          </a:prstGeom>
-          <a:noFill/>
-          <a:ln/>
-        </p:spPr>
-        <p:txBody>
-          <a:bodyPr wrap="square" rtlCol="0" anchor="t"/>
-          <a:lstStyle/>
-          <a:p>
-            <a:pPr algn="ctr" indent="0" marL="0">
-              <a:buNone/>
-            </a:pPr>
-            <a:r>
-              <a:rPr lang="en-US" sz="900" dirty="0">
-                <a:solidFill>
-                  <a:srgbClr val="6B7280"/>
-                </a:solidFill>
-                <a:latin typeface="Inter" pitchFamily="34" charset="0"/>
-                <a:ea typeface="Inter" pitchFamily="34" charset="-122"/>
-                <a:cs typeface="Inter" pitchFamily="34" charset="-120"/>
-              </a:rPr>
-              <a:t>Confluent Platform</a:t>
-            </a:r>
-            <a:endParaRPr lang="en-US" sz="900" dirty="0"/>
-          </a:p>
-        </p:txBody>
-      </p:sp>
-      <p:sp>
-        <p:nvSpPr>
-          <p:cNvPr id="33" name="Shape 30"/>
-          <p:cNvSpPr/>
-          <p:nvPr/>
-        </p:nvSpPr>
-        <p:spPr>
-          <a:xfrm>
-            <a:off x="7543800" y="5029200"/>
-            <a:ext cx="2057400" cy="914400"/>
-          </a:xfrm>
-          <a:prstGeom prst="roundRect">
-            <a:avLst>
-              <a:gd name="adj" fmla="val 6000"/>
-            </a:avLst>
-          </a:prstGeom>
-          <a:solidFill>
-            <a:srgbClr val="FFFFFF"/>
-          </a:solidFill>
-          <a:ln w="9525">
-            <a:solidFill>
-              <a:srgbClr val="A9B3B6"/>
-            </a:solidFill>
-            <a:prstDash val="solid"/>
-          </a:ln>
-        </p:spPr>
-      </p:sp>
-      <p:sp>
-        <p:nvSpPr>
-          <p:cNvPr id="34" name="Text 31"/>
-          <p:cNvSpPr/>
-          <p:nvPr/>
-        </p:nvSpPr>
-        <p:spPr>
-          <a:xfrm>
-            <a:off x="7543800" y="5047488"/>
-            <a:ext cx="2057400" cy="475488"/>
-          </a:xfrm>
-          <a:prstGeom prst="rect">
-            <a:avLst/>
-          </a:prstGeom>
-          <a:noFill/>
-          <a:ln/>
-        </p:spPr>
-        <p:txBody>
-          <a:bodyPr wrap="square" rtlCol="0" anchor="b"/>
-          <a:lstStyle/>
-          <a:p>
-            <a:pPr algn="ctr" indent="0" marL="0">
-              <a:buNone/>
-            </a:pPr>
-            <a:r>
-              <a:rPr lang="en-US" sz="1000" b="1" dirty="0">
-                <a:solidFill>
-                  <a:srgbClr val="19416C"/>
-                </a:solidFill>
-                <a:latin typeface="Inter" pitchFamily="34" charset="0"/>
-                <a:ea typeface="Inter" pitchFamily="34" charset="-122"/>
-                <a:cs typeface="Inter" pitchFamily="34" charset="-120"/>
-              </a:rPr>
-              <a:t>IoT Simulator</a:t>
-            </a:r>
-            <a:endParaRPr lang="en-US" sz="1000" dirty="0"/>
-          </a:p>
-        </p:txBody>
-      </p:sp>
-      <p:sp>
-        <p:nvSpPr>
-          <p:cNvPr id="35" name="Text 32"/>
-          <p:cNvSpPr/>
-          <p:nvPr/>
-        </p:nvSpPr>
-        <p:spPr>
-          <a:xfrm>
-            <a:off x="7543800" y="5504688"/>
-            <a:ext cx="2057400" cy="365760"/>
-          </a:xfrm>
-          <a:prstGeom prst="rect">
-            <a:avLst/>
-          </a:prstGeom>
-          <a:noFill/>
-          <a:ln/>
-        </p:spPr>
-        <p:txBody>
-          <a:bodyPr wrap="square" rtlCol="0" anchor="t"/>
-          <a:lstStyle/>
-          <a:p>
-            <a:pPr algn="ctr" indent="0" marL="0">
-              <a:buNone/>
-            </a:pPr>
-            <a:r>
-              <a:rPr lang="en-US" sz="900" dirty="0">
-                <a:solidFill>
-                  <a:srgbClr val="6B7280"/>
-                </a:solidFill>
-                <a:latin typeface="Inter" pitchFamily="34" charset="0"/>
-                <a:ea typeface="Inter" pitchFamily="34" charset="-122"/>
-                <a:cs typeface="Inter" pitchFamily="34" charset="-120"/>
-              </a:rPr>
-              <a:t>kafka_iot_simulator.py</a:t>
-            </a:r>
-            <a:endParaRPr lang="en-US" sz="900" dirty="0"/>
-          </a:p>
-        </p:txBody>
-      </p:sp>
-      <p:sp>
-        <p:nvSpPr>
-          <p:cNvPr id="36" name="Shape 33"/>
-          <p:cNvSpPr/>
-          <p:nvPr/>
-        </p:nvSpPr>
-        <p:spPr>
-          <a:xfrm>
-            <a:off x="9646920" y="5029200"/>
-            <a:ext cx="2057400" cy="914400"/>
-          </a:xfrm>
-          <a:prstGeom prst="roundRect">
-            <a:avLst>
-              <a:gd name="adj" fmla="val 6000"/>
-            </a:avLst>
-          </a:prstGeom>
-          <a:solidFill>
-            <a:srgbClr val="FFFFFF"/>
-          </a:solidFill>
-          <a:ln w="9525">
-            <a:solidFill>
-              <a:srgbClr val="A9B3B6"/>
-            </a:solidFill>
-            <a:prstDash val="solid"/>
-          </a:ln>
-        </p:spPr>
-      </p:sp>
-      <p:sp>
-        <p:nvSpPr>
-          <p:cNvPr id="37" name="Text 34"/>
-          <p:cNvSpPr/>
-          <p:nvPr/>
-        </p:nvSpPr>
-        <p:spPr>
-          <a:xfrm>
-            <a:off x="9646920" y="5047488"/>
-            <a:ext cx="2057400" cy="475488"/>
-          </a:xfrm>
-          <a:prstGeom prst="rect">
-            <a:avLst/>
-          </a:prstGeom>
-          <a:noFill/>
-          <a:ln/>
-        </p:spPr>
-        <p:txBody>
-          <a:bodyPr wrap="square" rtlCol="0" anchor="b"/>
-          <a:lstStyle/>
-          <a:p>
-            <a:pPr algn="ctr" indent="0" marL="0">
-              <a:buNone/>
-            </a:pPr>
-            <a:r>
-              <a:rPr lang="en-US" sz="1000" b="1" dirty="0">
-                <a:solidFill>
-                  <a:srgbClr val="19416C"/>
-                </a:solidFill>
-                <a:latin typeface="Inter" pitchFamily="34" charset="0"/>
-                <a:ea typeface="Inter" pitchFamily="34" charset="-122"/>
-                <a:cs typeface="Inter" pitchFamily="34" charset="-120"/>
-              </a:rPr>
-              <a:t>WMS Simulator</a:t>
-            </a:r>
-            <a:endParaRPr lang="en-US" sz="1000" dirty="0"/>
-          </a:p>
-        </p:txBody>
-      </p:sp>
-      <p:sp>
-        <p:nvSpPr>
-          <p:cNvPr id="38" name="Text 35"/>
-          <p:cNvSpPr/>
-          <p:nvPr/>
-        </p:nvSpPr>
-        <p:spPr>
-          <a:xfrm>
-            <a:off x="9646920" y="5504688"/>
-            <a:ext cx="2057400" cy="365760"/>
-          </a:xfrm>
-          <a:prstGeom prst="rect">
-            <a:avLst/>
-          </a:prstGeom>
-          <a:noFill/>
-          <a:ln/>
-        </p:spPr>
-        <p:txBody>
-          <a:bodyPr wrap="square" rtlCol="0" anchor="t"/>
-          <a:lstStyle/>
-          <a:p>
-            <a:pPr algn="ctr" indent="0" marL="0">
-              <a:buNone/>
-            </a:pPr>
-            <a:r>
-              <a:rPr lang="en-US" sz="900" dirty="0">
-                <a:solidFill>
-                  <a:srgbClr val="6B7280"/>
-                </a:solidFill>
-                <a:latin typeface="Inter" pitchFamily="34" charset="0"/>
-                <a:ea typeface="Inter" pitchFamily="34" charset="-122"/>
-                <a:cs typeface="Inter" pitchFamily="34" charset="-120"/>
-              </a:rPr>
-              <a:t>postgres_simulator.py</a:t>
-            </a:r>
-            <a:endParaRPr lang="en-US" sz="900" dirty="0"/>
+          <p:cNvPr id="47" name="Text 44"/>
+          <p:cNvSpPr/>
+          <p:nvPr/>
+        </p:nvSpPr>
+        <p:spPr>
+          <a:xfrm>
+            <a:off x="1280160" y="5760720"/>
+            <a:ext cx="1828800" cy="274320"/>
+          </a:xfrm>
+          <a:prstGeom prst="rect">
+            <a:avLst/>
+          </a:prstGeom>
+          <a:noFill/>
+          <a:ln/>
+        </p:spPr>
+        <p:txBody>
+          <a:bodyPr wrap="square" rtlCol="0" anchor="ctr"/>
+          <a:lstStyle/>
+          <a:p>
+            <a:pPr indent="0" marL="0">
+              <a:buNone/>
+            </a:pPr>
+            <a:r>
+              <a:rPr lang="en-US" sz="1100" b="1" dirty="0">
+                <a:solidFill>
+                  <a:srgbClr val="006580"/>
+                </a:solidFill>
+                <a:latin typeface="Inter" pitchFamily="34" charset="0"/>
+                <a:ea typeface="Inter" pitchFamily="34" charset="-122"/>
+                <a:cs typeface="Inter" pitchFamily="34" charset="-120"/>
+              </a:rPr>
+              <a:t>$4.2M / year</a:t>
+            </a:r>
+            <a:endParaRPr lang="en-US" sz="1100" dirty="0"/>
+          </a:p>
+        </p:txBody>
+      </p:sp>
+      <p:sp>
+        <p:nvSpPr>
+          <p:cNvPr id="48" name="Text 45"/>
+          <p:cNvSpPr/>
+          <p:nvPr/>
+        </p:nvSpPr>
+        <p:spPr>
+          <a:xfrm>
+            <a:off x="4206240" y="5440680"/>
+            <a:ext cx="7498080" cy="621792"/>
+          </a:xfrm>
+          <a:prstGeom prst="rect">
+            <a:avLst/>
+          </a:prstGeom>
+          <a:noFill/>
+          <a:ln/>
+        </p:spPr>
+        <p:txBody>
+          <a:bodyPr wrap="square" rtlCol="0" anchor="ctr"/>
+          <a:lstStyle/>
+          <a:p>
+            <a:pPr indent="0" marL="0">
+              <a:buNone/>
+            </a:pPr>
+            <a:r>
+              <a:rPr lang="en-US" sz="1100" dirty="0">
+                <a:solidFill>
+                  <a:srgbClr val="454659"/>
+                </a:solidFill>
+                <a:latin typeface="Inter" pitchFamily="34" charset="0"/>
+                <a:ea typeface="Inter" pitchFamily="34" charset="-122"/>
+                <a:cs typeface="Inter" pitchFamily="34" charset="-120"/>
+              </a:rPr>
+              <a:t>Lettuce recall: 11 days vs 24h requirement. NVWA citation.</a:t>
+            </a:r>
+            <a:endParaRPr lang="en-US" sz="1100" dirty="0"/>
           </a:p>
         </p:txBody>
       </p:sp>
@@ -5559,7 +6911,7 @@
             <a:avLst/>
           </a:prstGeom>
           <a:solidFill>
-            <a:srgbClr val="009845"/>
+            <a:srgbClr val="006580"/>
           </a:solidFill>
           <a:ln/>
         </p:spPr>
@@ -5681,6 +7033,1382 @@
                 <a:cs typeface="Inter" pitchFamily="34" charset="-120"/>
               </a:rPr>
               <a:t>13</a:t>
+            </a:r>
+            <a:endParaRPr lang="en-US" sz="800" dirty="0"/>
+          </a:p>
+        </p:txBody>
+      </p:sp>
+      <p:sp>
+        <p:nvSpPr>
+          <p:cNvPr id="7" name="Text 4"/>
+          <p:cNvSpPr/>
+          <p:nvPr/>
+        </p:nvSpPr>
+        <p:spPr>
+          <a:xfrm>
+            <a:off x="548640" y="228600"/>
+            <a:ext cx="10972800" cy="548640"/>
+          </a:xfrm>
+          <a:prstGeom prst="rect">
+            <a:avLst/>
+          </a:prstGeom>
+          <a:noFill/>
+          <a:ln/>
+        </p:spPr>
+        <p:txBody>
+          <a:bodyPr wrap="square" rtlCol="0" anchor="ctr"/>
+          <a:lstStyle/>
+          <a:p>
+            <a:pPr indent="0" marL="0">
+              <a:buNone/>
+            </a:pPr>
+            <a:r>
+              <a:rPr lang="en-US" sz="2200" b="1" dirty="0">
+                <a:solidFill>
+                  <a:srgbClr val="19416C"/>
+                </a:solidFill>
+                <a:latin typeface="Inter" pitchFamily="34" charset="0"/>
+                <a:ea typeface="Inter" pitchFamily="34" charset="-122"/>
+                <a:cs typeface="Inter" pitchFamily="34" charset="-120"/>
+              </a:rPr>
+              <a:t>Pipeline &amp; Cluster Architecture</a:t>
+            </a:r>
+            <a:endParaRPr lang="en-US" sz="2200" dirty="0"/>
+          </a:p>
+        </p:txBody>
+      </p:sp>
+      <p:sp>
+        <p:nvSpPr>
+          <p:cNvPr id="8" name="Shape 5"/>
+          <p:cNvSpPr/>
+          <p:nvPr/>
+        </p:nvSpPr>
+        <p:spPr>
+          <a:xfrm>
+            <a:off x="457200" y="1005840"/>
+            <a:ext cx="5486400" cy="3200400"/>
+          </a:xfrm>
+          <a:prstGeom prst="roundRect">
+            <a:avLst>
+              <a:gd name="adj" fmla="val 3429"/>
+            </a:avLst>
+          </a:prstGeom>
+          <a:solidFill>
+            <a:srgbClr val="E0F2F5"/>
+          </a:solidFill>
+          <a:ln w="19050">
+            <a:solidFill>
+              <a:srgbClr val="006580"/>
+            </a:solidFill>
+            <a:prstDash val="solid"/>
+          </a:ln>
+        </p:spPr>
+      </p:sp>
+      <p:sp>
+        <p:nvSpPr>
+          <p:cNvPr id="9" name="Text 6"/>
+          <p:cNvSpPr/>
+          <p:nvPr/>
+        </p:nvSpPr>
+        <p:spPr>
+          <a:xfrm>
+            <a:off x="457200" y="1024128"/>
+            <a:ext cx="5486400" cy="384048"/>
+          </a:xfrm>
+          <a:prstGeom prst="rect">
+            <a:avLst/>
+          </a:prstGeom>
+          <a:noFill/>
+          <a:ln/>
+        </p:spPr>
+        <p:txBody>
+          <a:bodyPr wrap="square" rtlCol="0" anchor="ctr"/>
+          <a:lstStyle/>
+          <a:p>
+            <a:pPr algn="ctr" indent="0" marL="0">
+              <a:buNone/>
+            </a:pPr>
+            <a:r>
+              <a:rPr lang="en-US" sz="1600" b="1" dirty="0">
+                <a:solidFill>
+                  <a:srgbClr val="006580"/>
+                </a:solidFill>
+                <a:latin typeface="Inter" pitchFamily="34" charset="0"/>
+                <a:ea typeface="Inter" pitchFamily="34" charset="-122"/>
+                <a:cs typeface="Inter" pitchFamily="34" charset="-120"/>
+              </a:rPr>
+              <a:t>CDC Cluster</a:t>
+            </a:r>
+            <a:endParaRPr lang="en-US" sz="1600" dirty="0"/>
+          </a:p>
+        </p:txBody>
+      </p:sp>
+      <p:sp>
+        <p:nvSpPr>
+          <p:cNvPr id="10" name="Text 7"/>
+          <p:cNvSpPr/>
+          <p:nvPr/>
+        </p:nvSpPr>
+        <p:spPr>
+          <a:xfrm>
+            <a:off x="457200" y="1389888"/>
+            <a:ext cx="5486400" cy="274320"/>
+          </a:xfrm>
+          <a:prstGeom prst="rect">
+            <a:avLst/>
+          </a:prstGeom>
+          <a:noFill/>
+          <a:ln/>
+        </p:spPr>
+        <p:txBody>
+          <a:bodyPr wrap="square" rtlCol="0" anchor="ctr"/>
+          <a:lstStyle/>
+          <a:p>
+            <a:pPr algn="ctr" indent="0" marL="0">
+              <a:buNone/>
+            </a:pPr>
+            <a:r>
+              <a:rPr lang="en-US" sz="1000" dirty="0">
+                <a:solidFill>
+                  <a:srgbClr val="6B7280"/>
+                </a:solidFill>
+                <a:latin typeface="Inter" pitchFamily="34" charset="0"/>
+                <a:ea typeface="Inter" pitchFamily="34" charset="-122"/>
+                <a:cs typeface="Inter" pitchFamily="34" charset="-120"/>
+              </a:rPr>
+              <a:t>PostgreSQL CDC + Salesforce incremental sync</a:t>
+            </a:r>
+            <a:endParaRPr lang="en-US" sz="1000" dirty="0"/>
+          </a:p>
+        </p:txBody>
+      </p:sp>
+      <p:sp>
+        <p:nvSpPr>
+          <p:cNvPr id="11" name="Text 8"/>
+          <p:cNvSpPr/>
+          <p:nvPr/>
+        </p:nvSpPr>
+        <p:spPr>
+          <a:xfrm>
+            <a:off x="685800" y="1828800"/>
+            <a:ext cx="5029200" cy="347472"/>
+          </a:xfrm>
+          <a:prstGeom prst="rect">
+            <a:avLst/>
+          </a:prstGeom>
+          <a:solidFill>
+            <a:srgbClr val="FFFFFF"/>
+          </a:solidFill>
+          <a:ln/>
+        </p:spPr>
+        <p:txBody>
+          <a:bodyPr wrap="square" rtlCol="0" anchor="ctr"/>
+          <a:lstStyle/>
+          <a:p>
+            <a:pPr indent="0" marL="0">
+              <a:buNone/>
+            </a:pPr>
+            <a:r>
+              <a:rPr lang="en-US" sz="1100" dirty="0">
+                <a:solidFill>
+                  <a:srgbClr val="454659"/>
+                </a:solidFill>
+                <a:latin typeface="Inter" pitchFamily="34" charset="0"/>
+                <a:ea typeface="Inter" pitchFamily="34" charset="-122"/>
+                <a:cs typeface="Inter" pitchFamily="34" charset="-120"/>
+              </a:rPr>
+              <a:t>Pipeline 1: inventory_positions (CDC, real-time)</a:t>
+            </a:r>
+            <a:endParaRPr lang="en-US" sz="1100" dirty="0"/>
+          </a:p>
+        </p:txBody>
+      </p:sp>
+      <p:sp>
+        <p:nvSpPr>
+          <p:cNvPr id="12" name="Text 9"/>
+          <p:cNvSpPr/>
+          <p:nvPr/>
+        </p:nvSpPr>
+        <p:spPr>
+          <a:xfrm>
+            <a:off x="685800" y="2212848"/>
+            <a:ext cx="5029200" cy="347472"/>
+          </a:xfrm>
+          <a:prstGeom prst="rect">
+            <a:avLst/>
+          </a:prstGeom>
+          <a:solidFill>
+            <a:srgbClr val="F6F7F8"/>
+          </a:solidFill>
+          <a:ln/>
+        </p:spPr>
+        <p:txBody>
+          <a:bodyPr wrap="square" rtlCol="0" anchor="ctr"/>
+          <a:lstStyle/>
+          <a:p>
+            <a:pPr indent="0" marL="0">
+              <a:buNone/>
+            </a:pPr>
+            <a:r>
+              <a:rPr lang="en-US" sz="1100" dirty="0">
+                <a:solidFill>
+                  <a:srgbClr val="454659"/>
+                </a:solidFill>
+                <a:latin typeface="Inter" pitchFamily="34" charset="0"/>
+                <a:ea typeface="Inter" pitchFamily="34" charset="-122"/>
+                <a:cs typeface="Inter" pitchFamily="34" charset="-120"/>
+              </a:rPr>
+              <a:t>Pipeline 2: warehouse_events (CDC, real-time)</a:t>
+            </a:r>
+            <a:endParaRPr lang="en-US" sz="1100" dirty="0"/>
+          </a:p>
+        </p:txBody>
+      </p:sp>
+      <p:sp>
+        <p:nvSpPr>
+          <p:cNvPr id="13" name="Text 10"/>
+          <p:cNvSpPr/>
+          <p:nvPr/>
+        </p:nvSpPr>
+        <p:spPr>
+          <a:xfrm>
+            <a:off x="685800" y="2596896"/>
+            <a:ext cx="5029200" cy="347472"/>
+          </a:xfrm>
+          <a:prstGeom prst="rect">
+            <a:avLst/>
+          </a:prstGeom>
+          <a:solidFill>
+            <a:srgbClr val="FFFFFF"/>
+          </a:solidFill>
+          <a:ln/>
+        </p:spPr>
+        <p:txBody>
+          <a:bodyPr wrap="square" rtlCol="0" anchor="ctr"/>
+          <a:lstStyle/>
+          <a:p>
+            <a:pPr indent="0" marL="0">
+              <a:buNone/>
+            </a:pPr>
+            <a:r>
+              <a:rPr lang="en-US" sz="1100" dirty="0">
+                <a:solidFill>
+                  <a:srgbClr val="454659"/>
+                </a:solidFill>
+                <a:latin typeface="Inter" pitchFamily="34" charset="0"/>
+                <a:ea typeface="Inter" pitchFamily="34" charset="-122"/>
+                <a:cs typeface="Inter" pitchFamily="34" charset="-120"/>
+              </a:rPr>
+              <a:t>Pipeline 3: shipments (CDC, real-time)</a:t>
+            </a:r>
+            <a:endParaRPr lang="en-US" sz="1100" dirty="0"/>
+          </a:p>
+        </p:txBody>
+      </p:sp>
+      <p:sp>
+        <p:nvSpPr>
+          <p:cNvPr id="14" name="Text 11"/>
+          <p:cNvSpPr/>
+          <p:nvPr/>
+        </p:nvSpPr>
+        <p:spPr>
+          <a:xfrm>
+            <a:off x="685800" y="2980944"/>
+            <a:ext cx="5029200" cy="347472"/>
+          </a:xfrm>
+          <a:prstGeom prst="rect">
+            <a:avLst/>
+          </a:prstGeom>
+          <a:solidFill>
+            <a:srgbClr val="F6F7F8"/>
+          </a:solidFill>
+          <a:ln/>
+        </p:spPr>
+        <p:txBody>
+          <a:bodyPr wrap="square" rtlCol="0" anchor="ctr"/>
+          <a:lstStyle/>
+          <a:p>
+            <a:pPr indent="0" marL="0">
+              <a:buNone/>
+            </a:pPr>
+            <a:r>
+              <a:rPr lang="en-US" sz="1100" dirty="0">
+                <a:solidFill>
+                  <a:srgbClr val="454659"/>
+                </a:solidFill>
+                <a:latin typeface="Inter" pitchFamily="34" charset="0"/>
+                <a:ea typeface="Inter" pitchFamily="34" charset="-122"/>
+                <a:cs typeface="Inter" pitchFamily="34" charset="-120"/>
+              </a:rPr>
+              <a:t>Pipeline 6: sf_contacts (API, 15 min)</a:t>
+            </a:r>
+            <a:endParaRPr lang="en-US" sz="1100" dirty="0"/>
+          </a:p>
+        </p:txBody>
+      </p:sp>
+      <p:sp>
+        <p:nvSpPr>
+          <p:cNvPr id="15" name="Text 12"/>
+          <p:cNvSpPr/>
+          <p:nvPr/>
+        </p:nvSpPr>
+        <p:spPr>
+          <a:xfrm>
+            <a:off x="685800" y="3364992"/>
+            <a:ext cx="5029200" cy="347472"/>
+          </a:xfrm>
+          <a:prstGeom prst="rect">
+            <a:avLst/>
+          </a:prstGeom>
+          <a:solidFill>
+            <a:srgbClr val="FFFFFF"/>
+          </a:solidFill>
+          <a:ln/>
+        </p:spPr>
+        <p:txBody>
+          <a:bodyPr wrap="square" rtlCol="0" anchor="ctr"/>
+          <a:lstStyle/>
+          <a:p>
+            <a:pPr indent="0" marL="0">
+              <a:buNone/>
+            </a:pPr>
+            <a:r>
+              <a:rPr lang="en-US" sz="1100" dirty="0">
+                <a:solidFill>
+                  <a:srgbClr val="454659"/>
+                </a:solidFill>
+                <a:latin typeface="Inter" pitchFamily="34" charset="0"/>
+                <a:ea typeface="Inter" pitchFamily="34" charset="-122"/>
+                <a:cs typeface="Inter" pitchFamily="34" charset="-120"/>
+              </a:rPr>
+              <a:t>Pipeline 7: sf_orders (API, 15 min)</a:t>
+            </a:r>
+            <a:endParaRPr lang="en-US" sz="1100" dirty="0"/>
+          </a:p>
+        </p:txBody>
+      </p:sp>
+      <p:sp>
+        <p:nvSpPr>
+          <p:cNvPr id="16" name="Text 13"/>
+          <p:cNvSpPr/>
+          <p:nvPr/>
+        </p:nvSpPr>
+        <p:spPr>
+          <a:xfrm>
+            <a:off x="685800" y="3749040"/>
+            <a:ext cx="5029200" cy="347472"/>
+          </a:xfrm>
+          <a:prstGeom prst="rect">
+            <a:avLst/>
+          </a:prstGeom>
+          <a:solidFill>
+            <a:srgbClr val="F6F7F8"/>
+          </a:solidFill>
+          <a:ln/>
+        </p:spPr>
+        <p:txBody>
+          <a:bodyPr wrap="square" rtlCol="0" anchor="ctr"/>
+          <a:lstStyle/>
+          <a:p>
+            <a:pPr indent="0" marL="0">
+              <a:buNone/>
+            </a:pPr>
+            <a:r>
+              <a:rPr lang="en-US" sz="1100" dirty="0">
+                <a:solidFill>
+                  <a:srgbClr val="454659"/>
+                </a:solidFill>
+                <a:latin typeface="Inter" pitchFamily="34" charset="0"/>
+                <a:ea typeface="Inter" pitchFamily="34" charset="-122"/>
+                <a:cs typeface="Inter" pitchFamily="34" charset="-120"/>
+              </a:rPr>
+              <a:t>Pipeline 8: sf_products (API, 15 min)</a:t>
+            </a:r>
+            <a:endParaRPr lang="en-US" sz="1100" dirty="0"/>
+          </a:p>
+        </p:txBody>
+      </p:sp>
+      <p:sp>
+        <p:nvSpPr>
+          <p:cNvPr id="17" name="Shape 14"/>
+          <p:cNvSpPr/>
+          <p:nvPr/>
+        </p:nvSpPr>
+        <p:spPr>
+          <a:xfrm>
+            <a:off x="6217920" y="1005840"/>
+            <a:ext cx="5486400" cy="3200400"/>
+          </a:xfrm>
+          <a:prstGeom prst="roundRect">
+            <a:avLst>
+              <a:gd name="adj" fmla="val 3429"/>
+            </a:avLst>
+          </a:prstGeom>
+          <a:solidFill>
+            <a:srgbClr val="E0F5EA"/>
+          </a:solidFill>
+          <a:ln w="19050">
+            <a:solidFill>
+              <a:srgbClr val="009845"/>
+            </a:solidFill>
+            <a:prstDash val="solid"/>
+          </a:ln>
+        </p:spPr>
+      </p:sp>
+      <p:sp>
+        <p:nvSpPr>
+          <p:cNvPr id="18" name="Text 15"/>
+          <p:cNvSpPr/>
+          <p:nvPr/>
+        </p:nvSpPr>
+        <p:spPr>
+          <a:xfrm>
+            <a:off x="6217920" y="1024128"/>
+            <a:ext cx="5486400" cy="384048"/>
+          </a:xfrm>
+          <a:prstGeom prst="rect">
+            <a:avLst/>
+          </a:prstGeom>
+          <a:noFill/>
+          <a:ln/>
+        </p:spPr>
+        <p:txBody>
+          <a:bodyPr wrap="square" rtlCol="0" anchor="ctr"/>
+          <a:lstStyle/>
+          <a:p>
+            <a:pPr algn="ctr" indent="0" marL="0">
+              <a:buNone/>
+            </a:pPr>
+            <a:r>
+              <a:rPr lang="en-US" sz="1600" b="1" dirty="0">
+                <a:solidFill>
+                  <a:srgbClr val="009845"/>
+                </a:solidFill>
+                <a:latin typeface="Inter" pitchFamily="34" charset="0"/>
+                <a:ea typeface="Inter" pitchFamily="34" charset="-122"/>
+                <a:cs typeface="Inter" pitchFamily="34" charset="-120"/>
+              </a:rPr>
+              <a:t>Streaming Cluster</a:t>
+            </a:r>
+            <a:endParaRPr lang="en-US" sz="1600" dirty="0"/>
+          </a:p>
+        </p:txBody>
+      </p:sp>
+      <p:sp>
+        <p:nvSpPr>
+          <p:cNvPr id="19" name="Text 16"/>
+          <p:cNvSpPr/>
+          <p:nvPr/>
+        </p:nvSpPr>
+        <p:spPr>
+          <a:xfrm>
+            <a:off x="6217920" y="1389888"/>
+            <a:ext cx="5486400" cy="274320"/>
+          </a:xfrm>
+          <a:prstGeom prst="rect">
+            <a:avLst/>
+          </a:prstGeom>
+          <a:noFill/>
+          <a:ln/>
+        </p:spPr>
+        <p:txBody>
+          <a:bodyPr wrap="square" rtlCol="0" anchor="ctr"/>
+          <a:lstStyle/>
+          <a:p>
+            <a:pPr algn="ctr" indent="0" marL="0">
+              <a:buNone/>
+            </a:pPr>
+            <a:r>
+              <a:rPr lang="en-US" sz="1000" dirty="0">
+                <a:solidFill>
+                  <a:srgbClr val="6B7280"/>
+                </a:solidFill>
+                <a:latin typeface="Inter" pitchFamily="34" charset="0"/>
+                <a:ea typeface="Inter" pitchFamily="34" charset="-122"/>
+                <a:cs typeface="Inter" pitchFamily="34" charset="-120"/>
+              </a:rPr>
+              <a:t>Real-time Kafka ingestion from IoT topics</a:t>
+            </a:r>
+            <a:endParaRPr lang="en-US" sz="1000" dirty="0"/>
+          </a:p>
+        </p:txBody>
+      </p:sp>
+      <p:sp>
+        <p:nvSpPr>
+          <p:cNvPr id="20" name="Text 17"/>
+          <p:cNvSpPr/>
+          <p:nvPr/>
+        </p:nvSpPr>
+        <p:spPr>
+          <a:xfrm>
+            <a:off x="6446520" y="1828800"/>
+            <a:ext cx="5029200" cy="347472"/>
+          </a:xfrm>
+          <a:prstGeom prst="rect">
+            <a:avLst/>
+          </a:prstGeom>
+          <a:solidFill>
+            <a:srgbClr val="FFFFFF"/>
+          </a:solidFill>
+          <a:ln/>
+        </p:spPr>
+        <p:txBody>
+          <a:bodyPr wrap="square" rtlCol="0" anchor="ctr"/>
+          <a:lstStyle/>
+          <a:p>
+            <a:pPr indent="0" marL="0">
+              <a:buNone/>
+            </a:pPr>
+            <a:r>
+              <a:rPr lang="en-US" sz="1100" dirty="0">
+                <a:solidFill>
+                  <a:srgbClr val="454659"/>
+                </a:solidFill>
+                <a:latin typeface="Inter" pitchFamily="34" charset="0"/>
+                <a:ea typeface="Inter" pitchFamily="34" charset="-122"/>
+                <a:cs typeface="Inter" pitchFamily="34" charset="-120"/>
+              </a:rPr>
+              <a:t>Pipeline 4: mcg.iot.cold-chain → bronze.iot_cold_chain</a:t>
+            </a:r>
+            <a:endParaRPr lang="en-US" sz="1100" dirty="0"/>
+          </a:p>
+        </p:txBody>
+      </p:sp>
+      <p:sp>
+        <p:nvSpPr>
+          <p:cNvPr id="21" name="Text 18"/>
+          <p:cNvSpPr/>
+          <p:nvPr/>
+        </p:nvSpPr>
+        <p:spPr>
+          <a:xfrm>
+            <a:off x="6446520" y="2212848"/>
+            <a:ext cx="5029200" cy="347472"/>
+          </a:xfrm>
+          <a:prstGeom prst="rect">
+            <a:avLst/>
+          </a:prstGeom>
+          <a:solidFill>
+            <a:srgbClr val="F6F7F8"/>
+          </a:solidFill>
+          <a:ln/>
+        </p:spPr>
+        <p:txBody>
+          <a:bodyPr wrap="square" rtlCol="0" anchor="ctr"/>
+          <a:lstStyle/>
+          <a:p>
+            <a:pPr indent="0" marL="0">
+              <a:buNone/>
+            </a:pPr>
+            <a:r>
+              <a:rPr lang="en-US" sz="1100" dirty="0">
+                <a:solidFill>
+                  <a:srgbClr val="454659"/>
+                </a:solidFill>
+                <a:latin typeface="Inter" pitchFamily="34" charset="0"/>
+                <a:ea typeface="Inter" pitchFamily="34" charset="-122"/>
+                <a:cs typeface="Inter" pitchFamily="34" charset="-120"/>
+              </a:rPr>
+              <a:t>Pipeline 5: mcg.iot.carrier-events → bronze.iot_carrier_events</a:t>
+            </a:r>
+            <a:endParaRPr lang="en-US" sz="1100" dirty="0"/>
+          </a:p>
+        </p:txBody>
+      </p:sp>
+      <p:sp>
+        <p:nvSpPr>
+          <p:cNvPr id="22" name="Shape 19"/>
+          <p:cNvSpPr/>
+          <p:nvPr/>
+        </p:nvSpPr>
+        <p:spPr>
+          <a:xfrm>
+            <a:off x="457200" y="4572000"/>
+            <a:ext cx="11247120" cy="1554480"/>
+          </a:xfrm>
+          <a:prstGeom prst="roundRect">
+            <a:avLst>
+              <a:gd name="adj" fmla="val 5882"/>
+            </a:avLst>
+          </a:prstGeom>
+          <a:solidFill>
+            <a:srgbClr val="F6F7F8"/>
+          </a:solidFill>
+          <a:ln w="12700">
+            <a:solidFill>
+              <a:srgbClr val="A9B3B6"/>
+            </a:solidFill>
+            <a:prstDash val="solid"/>
+          </a:ln>
+        </p:spPr>
+      </p:sp>
+      <p:sp>
+        <p:nvSpPr>
+          <p:cNvPr id="23" name="Text 20"/>
+          <p:cNvSpPr/>
+          <p:nvPr/>
+        </p:nvSpPr>
+        <p:spPr>
+          <a:xfrm>
+            <a:off x="457200" y="4572000"/>
+            <a:ext cx="11247120" cy="347472"/>
+          </a:xfrm>
+          <a:prstGeom prst="rect">
+            <a:avLst/>
+          </a:prstGeom>
+          <a:noFill/>
+          <a:ln/>
+        </p:spPr>
+        <p:txBody>
+          <a:bodyPr wrap="square" rtlCol="0" anchor="ctr"/>
+          <a:lstStyle/>
+          <a:p>
+            <a:pPr algn="ctr" indent="0" marL="0">
+              <a:buNone/>
+            </a:pPr>
+            <a:r>
+              <a:rPr lang="en-US" sz="1300" b="1" dirty="0">
+                <a:solidFill>
+                  <a:srgbClr val="454659"/>
+                </a:solidFill>
+                <a:latin typeface="Inter" pitchFamily="34" charset="0"/>
+                <a:ea typeface="Inter" pitchFamily="34" charset="-122"/>
+                <a:cs typeface="Inter" pitchFamily="34" charset="-120"/>
+              </a:rPr>
+              <a:t>Infrastructure Components</a:t>
+            </a:r>
+            <a:endParaRPr lang="en-US" sz="1300" dirty="0"/>
+          </a:p>
+        </p:txBody>
+      </p:sp>
+      <p:sp>
+        <p:nvSpPr>
+          <p:cNvPr id="24" name="Shape 21"/>
+          <p:cNvSpPr/>
+          <p:nvPr/>
+        </p:nvSpPr>
+        <p:spPr>
+          <a:xfrm>
+            <a:off x="685800" y="5029200"/>
+            <a:ext cx="2057400" cy="914400"/>
+          </a:xfrm>
+          <a:prstGeom prst="roundRect">
+            <a:avLst>
+              <a:gd name="adj" fmla="val 6000"/>
+            </a:avLst>
+          </a:prstGeom>
+          <a:solidFill>
+            <a:srgbClr val="FFFFFF"/>
+          </a:solidFill>
+          <a:ln w="9525">
+            <a:solidFill>
+              <a:srgbClr val="A9B3B6"/>
+            </a:solidFill>
+            <a:prstDash val="solid"/>
+          </a:ln>
+        </p:spPr>
+      </p:sp>
+      <p:sp>
+        <p:nvSpPr>
+          <p:cNvPr id="25" name="Text 22"/>
+          <p:cNvSpPr/>
+          <p:nvPr/>
+        </p:nvSpPr>
+        <p:spPr>
+          <a:xfrm>
+            <a:off x="685800" y="5047488"/>
+            <a:ext cx="2057400" cy="475488"/>
+          </a:xfrm>
+          <a:prstGeom prst="rect">
+            <a:avLst/>
+          </a:prstGeom>
+          <a:noFill/>
+          <a:ln/>
+        </p:spPr>
+        <p:txBody>
+          <a:bodyPr wrap="square" rtlCol="0" anchor="b"/>
+          <a:lstStyle/>
+          <a:p>
+            <a:pPr algn="ctr" indent="0" marL="0">
+              <a:buNone/>
+            </a:pPr>
+            <a:r>
+              <a:rPr lang="en-US" sz="1000" b="1" dirty="0">
+                <a:solidFill>
+                  <a:srgbClr val="19416C"/>
+                </a:solidFill>
+                <a:latin typeface="Inter" pitchFamily="34" charset="0"/>
+                <a:ea typeface="Inter" pitchFamily="34" charset="-122"/>
+                <a:cs typeface="Inter" pitchFamily="34" charset="-120"/>
+              </a:rPr>
+              <a:t>Data Movement</a:t>
+            </a:r>
+            <a:endParaRPr lang="en-US" sz="1000" dirty="0"/>
+          </a:p>
+          <a:p>
+            <a:pPr algn="ctr" indent="0" marL="0">
+              <a:buNone/>
+            </a:pPr>
+            <a:r>
+              <a:rPr lang="en-US" sz="1000" b="1" dirty="0">
+                <a:solidFill>
+                  <a:srgbClr val="19416C"/>
+                </a:solidFill>
+                <a:latin typeface="Inter" pitchFamily="34" charset="0"/>
+                <a:ea typeface="Inter" pitchFamily="34" charset="-122"/>
+                <a:cs typeface="Inter" pitchFamily="34" charset="-120"/>
+              </a:rPr>
+              <a:t>Gateway</a:t>
+            </a:r>
+            <a:endParaRPr lang="en-US" sz="1000" dirty="0"/>
+          </a:p>
+        </p:txBody>
+      </p:sp>
+      <p:sp>
+        <p:nvSpPr>
+          <p:cNvPr id="26" name="Text 23"/>
+          <p:cNvSpPr/>
+          <p:nvPr/>
+        </p:nvSpPr>
+        <p:spPr>
+          <a:xfrm>
+            <a:off x="685800" y="5504688"/>
+            <a:ext cx="2057400" cy="365760"/>
+          </a:xfrm>
+          <a:prstGeom prst="rect">
+            <a:avLst/>
+          </a:prstGeom>
+          <a:noFill/>
+          <a:ln/>
+        </p:spPr>
+        <p:txBody>
+          <a:bodyPr wrap="square" rtlCol="0" anchor="t"/>
+          <a:lstStyle/>
+          <a:p>
+            <a:pPr algn="ctr" indent="0" marL="0">
+              <a:buNone/>
+            </a:pPr>
+            <a:r>
+              <a:rPr lang="en-US" sz="900" dirty="0">
+                <a:solidFill>
+                  <a:srgbClr val="6B7280"/>
+                </a:solidFill>
+                <a:latin typeface="Inter" pitchFamily="34" charset="0"/>
+                <a:ea typeface="Inter" pitchFamily="34" charset="-122"/>
+                <a:cs typeface="Inter" pitchFamily="34" charset="-120"/>
+              </a:rPr>
+              <a:t>On-prem PostgreSQL</a:t>
+            </a:r>
+            <a:endParaRPr lang="en-US" sz="900" dirty="0"/>
+          </a:p>
+        </p:txBody>
+      </p:sp>
+      <p:sp>
+        <p:nvSpPr>
+          <p:cNvPr id="27" name="Shape 24"/>
+          <p:cNvSpPr/>
+          <p:nvPr/>
+        </p:nvSpPr>
+        <p:spPr>
+          <a:xfrm>
+            <a:off x="2971800" y="5029200"/>
+            <a:ext cx="2057400" cy="914400"/>
+          </a:xfrm>
+          <a:prstGeom prst="roundRect">
+            <a:avLst>
+              <a:gd name="adj" fmla="val 6000"/>
+            </a:avLst>
+          </a:prstGeom>
+          <a:solidFill>
+            <a:srgbClr val="FFFFFF"/>
+          </a:solidFill>
+          <a:ln w="9525">
+            <a:solidFill>
+              <a:srgbClr val="A9B3B6"/>
+            </a:solidFill>
+            <a:prstDash val="solid"/>
+          </a:ln>
+        </p:spPr>
+      </p:sp>
+      <p:sp>
+        <p:nvSpPr>
+          <p:cNvPr id="28" name="Text 25"/>
+          <p:cNvSpPr/>
+          <p:nvPr/>
+        </p:nvSpPr>
+        <p:spPr>
+          <a:xfrm>
+            <a:off x="2971800" y="5047488"/>
+            <a:ext cx="2057400" cy="475488"/>
+          </a:xfrm>
+          <a:prstGeom prst="rect">
+            <a:avLst/>
+          </a:prstGeom>
+          <a:noFill/>
+          <a:ln/>
+        </p:spPr>
+        <p:txBody>
+          <a:bodyPr wrap="square" rtlCol="0" anchor="b"/>
+          <a:lstStyle/>
+          <a:p>
+            <a:pPr algn="ctr" indent="0" marL="0">
+              <a:buNone/>
+            </a:pPr>
+            <a:r>
+              <a:rPr lang="en-US" sz="1000" b="1" dirty="0">
+                <a:solidFill>
+                  <a:srgbClr val="19416C"/>
+                </a:solidFill>
+                <a:latin typeface="Inter" pitchFamily="34" charset="0"/>
+                <a:ea typeface="Inter" pitchFamily="34" charset="-122"/>
+                <a:cs typeface="Inter" pitchFamily="34" charset="-120"/>
+              </a:rPr>
+              <a:t>Data Gateway</a:t>
+            </a:r>
+            <a:endParaRPr lang="en-US" sz="1000" dirty="0"/>
+          </a:p>
+          <a:p>
+            <a:pPr algn="ctr" indent="0" marL="0">
+              <a:buNone/>
+            </a:pPr>
+            <a:r>
+              <a:rPr lang="en-US" sz="1000" b="1" dirty="0">
+                <a:solidFill>
+                  <a:srgbClr val="19416C"/>
+                </a:solidFill>
+                <a:latin typeface="Inter" pitchFamily="34" charset="0"/>
+                <a:ea typeface="Inter" pitchFamily="34" charset="-122"/>
+                <a:cs typeface="Inter" pitchFamily="34" charset="-120"/>
+              </a:rPr>
+              <a:t>Streaming</a:t>
+            </a:r>
+            <a:endParaRPr lang="en-US" sz="1000" dirty="0"/>
+          </a:p>
+        </p:txBody>
+      </p:sp>
+      <p:sp>
+        <p:nvSpPr>
+          <p:cNvPr id="29" name="Text 26"/>
+          <p:cNvSpPr/>
+          <p:nvPr/>
+        </p:nvSpPr>
+        <p:spPr>
+          <a:xfrm>
+            <a:off x="2971800" y="5504688"/>
+            <a:ext cx="2057400" cy="365760"/>
+          </a:xfrm>
+          <a:prstGeom prst="rect">
+            <a:avLst/>
+          </a:prstGeom>
+          <a:noFill/>
+          <a:ln/>
+        </p:spPr>
+        <p:txBody>
+          <a:bodyPr wrap="square" rtlCol="0" anchor="t"/>
+          <a:lstStyle/>
+          <a:p>
+            <a:pPr algn="ctr" indent="0" marL="0">
+              <a:buNone/>
+            </a:pPr>
+            <a:r>
+              <a:rPr lang="en-US" sz="900" dirty="0">
+                <a:solidFill>
+                  <a:srgbClr val="6B7280"/>
+                </a:solidFill>
+                <a:latin typeface="Inter" pitchFamily="34" charset="0"/>
+                <a:ea typeface="Inter" pitchFamily="34" charset="-122"/>
+                <a:cs typeface="Inter" pitchFamily="34" charset="-120"/>
+              </a:rPr>
+              <a:t>Kafka connectivity</a:t>
+            </a:r>
+            <a:endParaRPr lang="en-US" sz="900" dirty="0"/>
+          </a:p>
+        </p:txBody>
+      </p:sp>
+      <p:sp>
+        <p:nvSpPr>
+          <p:cNvPr id="30" name="Shape 27"/>
+          <p:cNvSpPr/>
+          <p:nvPr/>
+        </p:nvSpPr>
+        <p:spPr>
+          <a:xfrm>
+            <a:off x="5257800" y="5029200"/>
+            <a:ext cx="2057400" cy="914400"/>
+          </a:xfrm>
+          <a:prstGeom prst="roundRect">
+            <a:avLst>
+              <a:gd name="adj" fmla="val 6000"/>
+            </a:avLst>
+          </a:prstGeom>
+          <a:solidFill>
+            <a:srgbClr val="FFFFFF"/>
+          </a:solidFill>
+          <a:ln w="9525">
+            <a:solidFill>
+              <a:srgbClr val="A9B3B6"/>
+            </a:solidFill>
+            <a:prstDash val="solid"/>
+          </a:ln>
+        </p:spPr>
+      </p:sp>
+      <p:sp>
+        <p:nvSpPr>
+          <p:cNvPr id="31" name="Text 28"/>
+          <p:cNvSpPr/>
+          <p:nvPr/>
+        </p:nvSpPr>
+        <p:spPr>
+          <a:xfrm>
+            <a:off x="5257800" y="5047488"/>
+            <a:ext cx="2057400" cy="475488"/>
+          </a:xfrm>
+          <a:prstGeom prst="rect">
+            <a:avLst/>
+          </a:prstGeom>
+          <a:noFill/>
+          <a:ln/>
+        </p:spPr>
+        <p:txBody>
+          <a:bodyPr wrap="square" rtlCol="0" anchor="b"/>
+          <a:lstStyle/>
+          <a:p>
+            <a:pPr algn="ctr" indent="0" marL="0">
+              <a:buNone/>
+            </a:pPr>
+            <a:r>
+              <a:rPr lang="en-US" sz="1000" b="1" dirty="0">
+                <a:solidFill>
+                  <a:srgbClr val="19416C"/>
+                </a:solidFill>
+                <a:latin typeface="Inter" pitchFamily="34" charset="0"/>
+                <a:ea typeface="Inter" pitchFamily="34" charset="-122"/>
+                <a:cs typeface="Inter" pitchFamily="34" charset="-120"/>
+              </a:rPr>
+              <a:t>Docker Compose</a:t>
+            </a:r>
+            <a:endParaRPr lang="en-US" sz="1000" dirty="0"/>
+          </a:p>
+        </p:txBody>
+      </p:sp>
+      <p:sp>
+        <p:nvSpPr>
+          <p:cNvPr id="32" name="Text 29"/>
+          <p:cNvSpPr/>
+          <p:nvPr/>
+        </p:nvSpPr>
+        <p:spPr>
+          <a:xfrm>
+            <a:off x="5257800" y="5504688"/>
+            <a:ext cx="2057400" cy="365760"/>
+          </a:xfrm>
+          <a:prstGeom prst="rect">
+            <a:avLst/>
+          </a:prstGeom>
+          <a:noFill/>
+          <a:ln/>
+        </p:spPr>
+        <p:txBody>
+          <a:bodyPr wrap="square" rtlCol="0" anchor="t"/>
+          <a:lstStyle/>
+          <a:p>
+            <a:pPr algn="ctr" indent="0" marL="0">
+              <a:buNone/>
+            </a:pPr>
+            <a:r>
+              <a:rPr lang="en-US" sz="900" dirty="0">
+                <a:solidFill>
+                  <a:srgbClr val="6B7280"/>
+                </a:solidFill>
+                <a:latin typeface="Inter" pitchFamily="34" charset="0"/>
+                <a:ea typeface="Inter" pitchFamily="34" charset="-122"/>
+                <a:cs typeface="Inter" pitchFamily="34" charset="-120"/>
+              </a:rPr>
+              <a:t>Confluent Platform</a:t>
+            </a:r>
+            <a:endParaRPr lang="en-US" sz="900" dirty="0"/>
+          </a:p>
+        </p:txBody>
+      </p:sp>
+      <p:sp>
+        <p:nvSpPr>
+          <p:cNvPr id="33" name="Shape 30"/>
+          <p:cNvSpPr/>
+          <p:nvPr/>
+        </p:nvSpPr>
+        <p:spPr>
+          <a:xfrm>
+            <a:off x="7543800" y="5029200"/>
+            <a:ext cx="2057400" cy="914400"/>
+          </a:xfrm>
+          <a:prstGeom prst="roundRect">
+            <a:avLst>
+              <a:gd name="adj" fmla="val 6000"/>
+            </a:avLst>
+          </a:prstGeom>
+          <a:solidFill>
+            <a:srgbClr val="FFFFFF"/>
+          </a:solidFill>
+          <a:ln w="9525">
+            <a:solidFill>
+              <a:srgbClr val="A9B3B6"/>
+            </a:solidFill>
+            <a:prstDash val="solid"/>
+          </a:ln>
+        </p:spPr>
+      </p:sp>
+      <p:sp>
+        <p:nvSpPr>
+          <p:cNvPr id="34" name="Text 31"/>
+          <p:cNvSpPr/>
+          <p:nvPr/>
+        </p:nvSpPr>
+        <p:spPr>
+          <a:xfrm>
+            <a:off x="7543800" y="5047488"/>
+            <a:ext cx="2057400" cy="475488"/>
+          </a:xfrm>
+          <a:prstGeom prst="rect">
+            <a:avLst/>
+          </a:prstGeom>
+          <a:noFill/>
+          <a:ln/>
+        </p:spPr>
+        <p:txBody>
+          <a:bodyPr wrap="square" rtlCol="0" anchor="b"/>
+          <a:lstStyle/>
+          <a:p>
+            <a:pPr algn="ctr" indent="0" marL="0">
+              <a:buNone/>
+            </a:pPr>
+            <a:r>
+              <a:rPr lang="en-US" sz="1000" b="1" dirty="0">
+                <a:solidFill>
+                  <a:srgbClr val="19416C"/>
+                </a:solidFill>
+                <a:latin typeface="Inter" pitchFamily="34" charset="0"/>
+                <a:ea typeface="Inter" pitchFamily="34" charset="-122"/>
+                <a:cs typeface="Inter" pitchFamily="34" charset="-120"/>
+              </a:rPr>
+              <a:t>IoT Simulator</a:t>
+            </a:r>
+            <a:endParaRPr lang="en-US" sz="1000" dirty="0"/>
+          </a:p>
+        </p:txBody>
+      </p:sp>
+      <p:sp>
+        <p:nvSpPr>
+          <p:cNvPr id="35" name="Text 32"/>
+          <p:cNvSpPr/>
+          <p:nvPr/>
+        </p:nvSpPr>
+        <p:spPr>
+          <a:xfrm>
+            <a:off x="7543800" y="5504688"/>
+            <a:ext cx="2057400" cy="365760"/>
+          </a:xfrm>
+          <a:prstGeom prst="rect">
+            <a:avLst/>
+          </a:prstGeom>
+          <a:noFill/>
+          <a:ln/>
+        </p:spPr>
+        <p:txBody>
+          <a:bodyPr wrap="square" rtlCol="0" anchor="t"/>
+          <a:lstStyle/>
+          <a:p>
+            <a:pPr algn="ctr" indent="0" marL="0">
+              <a:buNone/>
+            </a:pPr>
+            <a:r>
+              <a:rPr lang="en-US" sz="900" dirty="0">
+                <a:solidFill>
+                  <a:srgbClr val="6B7280"/>
+                </a:solidFill>
+                <a:latin typeface="Inter" pitchFamily="34" charset="0"/>
+                <a:ea typeface="Inter" pitchFamily="34" charset="-122"/>
+                <a:cs typeface="Inter" pitchFamily="34" charset="-120"/>
+              </a:rPr>
+              <a:t>kafka_iot_simulator.py</a:t>
+            </a:r>
+            <a:endParaRPr lang="en-US" sz="900" dirty="0"/>
+          </a:p>
+        </p:txBody>
+      </p:sp>
+      <p:sp>
+        <p:nvSpPr>
+          <p:cNvPr id="36" name="Shape 33"/>
+          <p:cNvSpPr/>
+          <p:nvPr/>
+        </p:nvSpPr>
+        <p:spPr>
+          <a:xfrm>
+            <a:off x="9646920" y="5029200"/>
+            <a:ext cx="2057400" cy="914400"/>
+          </a:xfrm>
+          <a:prstGeom prst="roundRect">
+            <a:avLst>
+              <a:gd name="adj" fmla="val 6000"/>
+            </a:avLst>
+          </a:prstGeom>
+          <a:solidFill>
+            <a:srgbClr val="FFFFFF"/>
+          </a:solidFill>
+          <a:ln w="9525">
+            <a:solidFill>
+              <a:srgbClr val="A9B3B6"/>
+            </a:solidFill>
+            <a:prstDash val="solid"/>
+          </a:ln>
+        </p:spPr>
+      </p:sp>
+      <p:sp>
+        <p:nvSpPr>
+          <p:cNvPr id="37" name="Text 34"/>
+          <p:cNvSpPr/>
+          <p:nvPr/>
+        </p:nvSpPr>
+        <p:spPr>
+          <a:xfrm>
+            <a:off x="9646920" y="5047488"/>
+            <a:ext cx="2057400" cy="475488"/>
+          </a:xfrm>
+          <a:prstGeom prst="rect">
+            <a:avLst/>
+          </a:prstGeom>
+          <a:noFill/>
+          <a:ln/>
+        </p:spPr>
+        <p:txBody>
+          <a:bodyPr wrap="square" rtlCol="0" anchor="b"/>
+          <a:lstStyle/>
+          <a:p>
+            <a:pPr algn="ctr" indent="0" marL="0">
+              <a:buNone/>
+            </a:pPr>
+            <a:r>
+              <a:rPr lang="en-US" sz="1000" b="1" dirty="0">
+                <a:solidFill>
+                  <a:srgbClr val="19416C"/>
+                </a:solidFill>
+                <a:latin typeface="Inter" pitchFamily="34" charset="0"/>
+                <a:ea typeface="Inter" pitchFamily="34" charset="-122"/>
+                <a:cs typeface="Inter" pitchFamily="34" charset="-120"/>
+              </a:rPr>
+              <a:t>WMS Simulator</a:t>
+            </a:r>
+            <a:endParaRPr lang="en-US" sz="1000" dirty="0"/>
+          </a:p>
+        </p:txBody>
+      </p:sp>
+      <p:sp>
+        <p:nvSpPr>
+          <p:cNvPr id="38" name="Text 35"/>
+          <p:cNvSpPr/>
+          <p:nvPr/>
+        </p:nvSpPr>
+        <p:spPr>
+          <a:xfrm>
+            <a:off x="9646920" y="5504688"/>
+            <a:ext cx="2057400" cy="365760"/>
+          </a:xfrm>
+          <a:prstGeom prst="rect">
+            <a:avLst/>
+          </a:prstGeom>
+          <a:noFill/>
+          <a:ln/>
+        </p:spPr>
+        <p:txBody>
+          <a:bodyPr wrap="square" rtlCol="0" anchor="t"/>
+          <a:lstStyle/>
+          <a:p>
+            <a:pPr algn="ctr" indent="0" marL="0">
+              <a:buNone/>
+            </a:pPr>
+            <a:r>
+              <a:rPr lang="en-US" sz="900" dirty="0">
+                <a:solidFill>
+                  <a:srgbClr val="6B7280"/>
+                </a:solidFill>
+                <a:latin typeface="Inter" pitchFamily="34" charset="0"/>
+                <a:ea typeface="Inter" pitchFamily="34" charset="-122"/>
+                <a:cs typeface="Inter" pitchFamily="34" charset="-120"/>
+              </a:rPr>
+              <a:t>postgres_simulator.py</a:t>
+            </a:r>
+            <a:endParaRPr lang="en-US" sz="900" dirty="0"/>
+          </a:p>
+        </p:txBody>
+      </p:sp>
+    </p:spTree>
+  </p:cSld>
+  <p:clrMapOvr>
+    <a:masterClrMapping/>
+  </p:clrMapOvr>
+</p:sld>
+</file>
+
+<file path=ppt/slides/slide14.xml><?xml version="1.0" encoding="utf-8"?>
+<p:sld xmlns:a="http://schemas.openxmlformats.org/drawingml/2006/main" xmlns:r="http://schemas.openxmlformats.org/officeDocument/2006/relationships" xmlns:p="http://schemas.openxmlformats.org/presentationml/2006/main">
+  <p:cSld name="Slide 14">
+    <p:bg>
+      <p:bgPr>
+        <a:solidFill>
+          <a:srgbClr val="FFFFFF"/>
+        </a:solidFill>
+      </p:bgPr>
+    </p:bg>
+    <p:spTree>
+      <p:nvGrpSpPr>
+        <p:cNvPr id="1" name=""/>
+        <p:cNvGrpSpPr/>
+        <p:nvPr/>
+      </p:nvGrpSpPr>
+      <p:grpSpPr>
+        <a:xfrm>
+          <a:off x="0" y="0"/>
+          <a:ext cx="0" cy="0"/>
+          <a:chOff x="0" y="0"/>
+          <a:chExt cx="0" cy="0"/>
+        </a:xfrm>
+      </p:grpSpPr>
+      <p:sp>
+        <p:nvSpPr>
+          <p:cNvPr id="2" name="Shape 0"/>
+          <p:cNvSpPr/>
+          <p:nvPr/>
+        </p:nvSpPr>
+        <p:spPr>
+          <a:xfrm>
+            <a:off x="0" y="0"/>
+            <a:ext cx="12188952" cy="54864"/>
+          </a:xfrm>
+          <a:prstGeom prst="rect">
+            <a:avLst/>
+          </a:prstGeom>
+          <a:solidFill>
+            <a:srgbClr val="009845"/>
+          </a:solidFill>
+          <a:ln/>
+        </p:spPr>
+      </p:sp>
+      <p:sp>
+        <p:nvSpPr>
+          <p:cNvPr id="3" name="Shape 1"/>
+          <p:cNvSpPr/>
+          <p:nvPr/>
+        </p:nvSpPr>
+        <p:spPr>
+          <a:xfrm>
+            <a:off x="457200" y="6446520"/>
+            <a:ext cx="11274552" cy="7315"/>
+          </a:xfrm>
+          <a:prstGeom prst="rect">
+            <a:avLst/>
+          </a:prstGeom>
+          <a:solidFill>
+            <a:srgbClr val="A9B3B6"/>
+          </a:solidFill>
+          <a:ln/>
+        </p:spPr>
+      </p:sp>
+      <p:pic>
+        <p:nvPicPr>
+          <p:cNvPr id="4" name="Image 0" descr="C:\Claude\MCG Full Stack\generators\assets\qlik_logo.png">    </p:cNvPr>
+          <p:cNvPicPr>
+            <a:picLocks noChangeAspect="1"/>
+          </p:cNvPicPr>
+          <p:nvPr/>
+        </p:nvPicPr>
+        <p:blipFill>
+          <a:blip r:embed="rId1"/>
+          <a:stretch>
+            <a:fillRect/>
+          </a:stretch>
+        </p:blipFill>
+        <p:spPr>
+          <a:xfrm>
+            <a:off x="457200" y="6510528"/>
+            <a:ext cx="594360" cy="256032"/>
+          </a:xfrm>
+          <a:prstGeom prst="rect">
+            <a:avLst/>
+          </a:prstGeom>
+        </p:spPr>
+      </p:pic>
+      <p:sp>
+        <p:nvSpPr>
+          <p:cNvPr id="5" name="Text 2"/>
+          <p:cNvSpPr/>
+          <p:nvPr/>
+        </p:nvSpPr>
+        <p:spPr>
+          <a:xfrm>
+            <a:off x="1188720" y="6510528"/>
+            <a:ext cx="7315200" cy="256032"/>
+          </a:xfrm>
+          <a:prstGeom prst="rect">
+            <a:avLst/>
+          </a:prstGeom>
+          <a:noFill/>
+          <a:ln/>
+        </p:spPr>
+        <p:txBody>
+          <a:bodyPr wrap="square" rtlCol="0" anchor="ctr"/>
+          <a:lstStyle/>
+          <a:p>
+            <a:pPr indent="0" marL="0">
+              <a:buNone/>
+            </a:pPr>
+            <a:r>
+              <a:rPr lang="en-US" sz="800" dirty="0">
+                <a:solidFill>
+                  <a:srgbClr val="A9B3B6"/>
+                </a:solidFill>
+                <a:latin typeface="Inter" pitchFamily="34" charset="0"/>
+                <a:ea typeface="Inter" pitchFamily="34" charset="-122"/>
+                <a:cs typeface="Inter" pitchFamily="34" charset="-120"/>
+              </a:rPr>
+              <a:t>Project Qlarity  •  MCG Technology Architecture  •  Qlik Cloud</a:t>
+            </a:r>
+            <a:endParaRPr lang="en-US" sz="800" dirty="0"/>
+          </a:p>
+        </p:txBody>
+      </p:sp>
+      <p:sp>
+        <p:nvSpPr>
+          <p:cNvPr id="6" name="Text 3"/>
+          <p:cNvSpPr/>
+          <p:nvPr/>
+        </p:nvSpPr>
+        <p:spPr>
+          <a:xfrm>
+            <a:off x="10972800" y="6510528"/>
+            <a:ext cx="914400" cy="256032"/>
+          </a:xfrm>
+          <a:prstGeom prst="rect">
+            <a:avLst/>
+          </a:prstGeom>
+          <a:noFill/>
+          <a:ln/>
+        </p:spPr>
+        <p:txBody>
+          <a:bodyPr wrap="square" rtlCol="0" anchor="ctr"/>
+          <a:lstStyle/>
+          <a:p>
+            <a:pPr algn="r" indent="0" marL="0">
+              <a:buNone/>
+            </a:pPr>
+            <a:r>
+              <a:rPr lang="en-US" sz="800" dirty="0">
+                <a:solidFill>
+                  <a:srgbClr val="A9B3B6"/>
+                </a:solidFill>
+                <a:latin typeface="Inter" pitchFamily="34" charset="0"/>
+                <a:ea typeface="Inter" pitchFamily="34" charset="-122"/>
+                <a:cs typeface="Inter" pitchFamily="34" charset="-120"/>
+              </a:rPr>
+              <a:t>14</a:t>
             </a:r>
             <a:endParaRPr lang="en-US" sz="800" dirty="0"/>
           </a:p>

--- a/MCG_Technology_Architecture.pptx
+++ b/MCG_Technology_Architecture.pptx
@@ -2073,7 +2073,7 @@
         <p:spPr>
           <a:xfrm>
             <a:off x="548640" y="457200"/>
-            <a:ext cx="1371600" cy="603504"/>
+            <a:ext cx="1088136" cy="603504"/>
           </a:xfrm>
           <a:prstGeom prst="rect">
             <a:avLst/>
@@ -2615,7 +2615,7 @@
         <p:spPr>
           <a:xfrm>
             <a:off x="457200" y="6510528"/>
-            <a:ext cx="594360" cy="256032"/>
+            <a:ext cx="457200" cy="256032"/>
           </a:xfrm>
           <a:prstGeom prst="rect">
             <a:avLst/>
@@ -5388,7 +5388,7 @@
         <p:spPr>
           <a:xfrm>
             <a:off x="457200" y="6510528"/>
-            <a:ext cx="594360" cy="256032"/>
+            <a:ext cx="457200" cy="256032"/>
           </a:xfrm>
           <a:prstGeom prst="rect">
             <a:avLst/>
@@ -6953,7 +6953,7 @@
         <p:spPr>
           <a:xfrm>
             <a:off x="457200" y="6510528"/>
-            <a:ext cx="594360" cy="256032"/>
+            <a:ext cx="457200" cy="256032"/>
           </a:xfrm>
           <a:prstGeom prst="rect">
             <a:avLst/>
@@ -8329,7 +8329,7 @@
         <p:spPr>
           <a:xfrm>
             <a:off x="457200" y="6510528"/>
-            <a:ext cx="594360" cy="256032"/>
+            <a:ext cx="457200" cy="256032"/>
           </a:xfrm>
           <a:prstGeom prst="rect">
             <a:avLst/>
@@ -9303,7 +9303,7 @@
         <p:spPr>
           <a:xfrm>
             <a:off x="457200" y="6510528"/>
-            <a:ext cx="594360" cy="256032"/>
+            <a:ext cx="457200" cy="256032"/>
           </a:xfrm>
           <a:prstGeom prst="rect">
             <a:avLst/>
@@ -12733,7 +12733,7 @@
         <p:spPr>
           <a:xfrm>
             <a:off x="457200" y="6510528"/>
-            <a:ext cx="594360" cy="256032"/>
+            <a:ext cx="457200" cy="256032"/>
           </a:xfrm>
           <a:prstGeom prst="rect">
             <a:avLst/>
@@ -14544,7 +14544,7 @@
         <p:spPr>
           <a:xfrm>
             <a:off x="457200" y="6510528"/>
-            <a:ext cx="594360" cy="256032"/>
+            <a:ext cx="457200" cy="256032"/>
           </a:xfrm>
           <a:prstGeom prst="rect">
             <a:avLst/>
@@ -15798,7 +15798,7 @@
         <p:spPr>
           <a:xfrm>
             <a:off x="457200" y="6510528"/>
-            <a:ext cx="594360" cy="256032"/>
+            <a:ext cx="457200" cy="256032"/>
           </a:xfrm>
           <a:prstGeom prst="rect">
             <a:avLst/>
@@ -17740,7 +17740,7 @@
         <p:spPr>
           <a:xfrm>
             <a:off x="457200" y="6510528"/>
-            <a:ext cx="594360" cy="256032"/>
+            <a:ext cx="457200" cy="256032"/>
           </a:xfrm>
           <a:prstGeom prst="rect">
             <a:avLst/>
@@ -19254,7 +19254,7 @@
         <p:spPr>
           <a:xfrm>
             <a:off x="457200" y="6510528"/>
-            <a:ext cx="594360" cy="256032"/>
+            <a:ext cx="457200" cy="256032"/>
           </a:xfrm>
           <a:prstGeom prst="rect">
             <a:avLst/>
@@ -20155,7 +20155,7 @@
         <p:spPr>
           <a:xfrm>
             <a:off x="457200" y="6510528"/>
-            <a:ext cx="594360" cy="256032"/>
+            <a:ext cx="457200" cy="256032"/>
           </a:xfrm>
           <a:prstGeom prst="rect">
             <a:avLst/>

--- a/MCG_Technology_Architecture.pptx
+++ b/MCG_Technology_Architecture.pptx
@@ -19,9 +19,11 @@
     <p:sldId id="267" r:id="rId13"/>
     <p:sldId id="268" r:id="rId14"/>
     <p:sldId id="269" r:id="rId15"/>
+    <p:sldId id="270" r:id="rId16"/>
+    <p:sldId id="271" r:id="rId17"/>
   </p:sldIdLst>
   <p:notesMasterIdLst>
-    <p:notesMasterId r:id="rId16"/>
+    <p:notesMasterId r:id="rId18"/>
   </p:notesMasterIdLst>
   <p:sldSz cx="12192000" cy="6858000"/>
   <p:notesSz cx="6858000" cy="12192000"/>
@@ -979,6 +981,182 @@
             <a:fld id="{F7021451-1387-4CA6-816F-3879F97B5CBC}" type="slidenum">
               <a:rPr lang="en-US"/>
               <a:t>14</a:t>
+            </a:fld>
+            <a:endParaRPr lang="en-US"/>
+          </a:p>
+        </p:txBody>
+      </p:sp>
+    </p:spTree>
+    <p:extLst>
+      <p:ext uri="{BB962C8B-B14F-4D97-AF65-F5344CB8AC3E}">
+        <p14:creationId xmlns:p14="http://schemas.microsoft.com/office/powerpoint/2010/main" val="1024086991"/>
+      </p:ext>
+    </p:extLst>
+  </p:cSld>
+  <p:clrMapOvr>
+    <a:masterClrMapping/>
+  </p:clrMapOvr>
+</p:notes>
+</file>
+
+<file path=ppt/notesSlides/notesSlide15.xml><?xml version="1.0" encoding="utf-8"?>
+<p:notes xmlns:a="http://schemas.openxmlformats.org/drawingml/2006/main" xmlns:r="http://schemas.openxmlformats.org/officeDocument/2006/relationships" xmlns:p="http://schemas.openxmlformats.org/presentationml/2006/main">
+  <p:cSld>
+    <p:spTree>
+      <p:nvGrpSpPr>
+        <p:cNvPr id="1" name=""/>
+        <p:cNvGrpSpPr/>
+        <p:nvPr/>
+      </p:nvGrpSpPr>
+      <p:grpSpPr>
+        <a:xfrm>
+          <a:off x="0" y="0"/>
+          <a:ext cx="0" cy="0"/>
+          <a:chOff x="0" y="0"/>
+          <a:chExt cx="0" cy="0"/>
+        </a:xfrm>
+      </p:grpSpPr>
+      <p:sp>
+        <p:nvSpPr>
+          <p:cNvPr id="2" name="Slide Image Placeholder 1"/>
+          <p:cNvSpPr>
+            <a:spLocks noGrp="1" noRot="1" noChangeAspect="1"/>
+          </p:cNvSpPr>
+          <p:nvPr>
+            <p:ph type="sldImg"/>
+          </p:nvPr>
+        </p:nvSpPr>
+        <p:spPr/>
+      </p:sp>
+      <p:sp>
+        <p:nvSpPr>
+          <p:cNvPr id="3" name="Notes Placeholder 2"/>
+          <p:cNvSpPr>
+            <a:spLocks noGrp="1"/>
+          </p:cNvSpPr>
+          <p:nvPr>
+            <p:ph type="body" idx="1"/>
+          </p:nvPr>
+        </p:nvSpPr>
+        <p:spPr/>
+        <p:txBody>
+          <a:bodyPr/>
+          <a:lstStyle/>
+          <a:p>
+            <a:r>
+              <a:rPr lang="en-US" dirty="0"/>
+              <a:t/>
+            </a:r>
+            <a:endParaRPr lang="en-US" dirty="0"/>
+          </a:p>
+        </p:txBody>
+      </p:sp>
+      <p:sp>
+        <p:nvSpPr>
+          <p:cNvPr id="4" name="Slide Number Placeholder 3"/>
+          <p:cNvSpPr>
+            <a:spLocks noGrp="1"/>
+          </p:cNvSpPr>
+          <p:nvPr>
+            <p:ph type="sldNum" sz="quarter" idx="10"/>
+          </p:nvPr>
+        </p:nvSpPr>
+        <p:spPr/>
+        <p:txBody>
+          <a:bodyPr/>
+          <a:lstStyle/>
+          <a:p>
+            <a:fld id="{F7021451-1387-4CA6-816F-3879F97B5CBC}" type="slidenum">
+              <a:rPr lang="en-US"/>
+              <a:t>15</a:t>
+            </a:fld>
+            <a:endParaRPr lang="en-US"/>
+          </a:p>
+        </p:txBody>
+      </p:sp>
+    </p:spTree>
+    <p:extLst>
+      <p:ext uri="{BB962C8B-B14F-4D97-AF65-F5344CB8AC3E}">
+        <p14:creationId xmlns:p14="http://schemas.microsoft.com/office/powerpoint/2010/main" val="1024086991"/>
+      </p:ext>
+    </p:extLst>
+  </p:cSld>
+  <p:clrMapOvr>
+    <a:masterClrMapping/>
+  </p:clrMapOvr>
+</p:notes>
+</file>
+
+<file path=ppt/notesSlides/notesSlide16.xml><?xml version="1.0" encoding="utf-8"?>
+<p:notes xmlns:a="http://schemas.openxmlformats.org/drawingml/2006/main" xmlns:r="http://schemas.openxmlformats.org/officeDocument/2006/relationships" xmlns:p="http://schemas.openxmlformats.org/presentationml/2006/main">
+  <p:cSld>
+    <p:spTree>
+      <p:nvGrpSpPr>
+        <p:cNvPr id="1" name=""/>
+        <p:cNvGrpSpPr/>
+        <p:nvPr/>
+      </p:nvGrpSpPr>
+      <p:grpSpPr>
+        <a:xfrm>
+          <a:off x="0" y="0"/>
+          <a:ext cx="0" cy="0"/>
+          <a:chOff x="0" y="0"/>
+          <a:chExt cx="0" cy="0"/>
+        </a:xfrm>
+      </p:grpSpPr>
+      <p:sp>
+        <p:nvSpPr>
+          <p:cNvPr id="2" name="Slide Image Placeholder 1"/>
+          <p:cNvSpPr>
+            <a:spLocks noGrp="1" noRot="1" noChangeAspect="1"/>
+          </p:cNvSpPr>
+          <p:nvPr>
+            <p:ph type="sldImg"/>
+          </p:nvPr>
+        </p:nvSpPr>
+        <p:spPr/>
+      </p:sp>
+      <p:sp>
+        <p:nvSpPr>
+          <p:cNvPr id="3" name="Notes Placeholder 2"/>
+          <p:cNvSpPr>
+            <a:spLocks noGrp="1"/>
+          </p:cNvSpPr>
+          <p:nvPr>
+            <p:ph type="body" idx="1"/>
+          </p:nvPr>
+        </p:nvSpPr>
+        <p:spPr/>
+        <p:txBody>
+          <a:bodyPr/>
+          <a:lstStyle/>
+          <a:p>
+            <a:r>
+              <a:rPr lang="en-US" dirty="0"/>
+              <a:t/>
+            </a:r>
+            <a:endParaRPr lang="en-US" dirty="0"/>
+          </a:p>
+        </p:txBody>
+      </p:sp>
+      <p:sp>
+        <p:nvSpPr>
+          <p:cNvPr id="4" name="Slide Number Placeholder 3"/>
+          <p:cNvSpPr>
+            <a:spLocks noGrp="1"/>
+          </p:cNvSpPr>
+          <p:nvPr>
+            <p:ph type="sldNum" sz="quarter" idx="10"/>
+          </p:nvPr>
+        </p:nvSpPr>
+        <p:spPr/>
+        <p:txBody>
+          <a:bodyPr/>
+          <a:lstStyle/>
+          <a:p>
+            <a:fld id="{F7021451-1387-4CA6-816F-3879F97B5CBC}" type="slidenum">
+              <a:rPr lang="en-US"/>
+              <a:t>16</a:t>
             </a:fld>
             <a:endParaRPr lang="en-US"/>
           </a:p>
@@ -8747,7 +8925,7 @@
                 <a:ea typeface="Inter" pitchFamily="34" charset="-122"/>
                 <a:cs typeface="Inter" pitchFamily="34" charset="-120"/>
               </a:rPr>
-              <a:t>Trust Score  •  Data Lineage  •  Impact Analysis  •  Profiling  •  25-term Glossary  •  4 Stewardship campaigns</a:t>
+              <a:t>Trust Score  •  Data Lineage  •  Impact Analysis  •  Profiling  •  25-term Glossary  •  4 Stewardship sprints</a:t>
             </a:r>
             <a:endParaRPr lang="en-US" sz="1100" dirty="0"/>
           </a:p>
@@ -9047,7 +9225,7 @@
                 <a:ea typeface="Inter" pitchFamily="34" charset="-122"/>
                 <a:cs typeface="Inter" pitchFamily="34" charset="-120"/>
               </a:rPr>
-              <a:t>5 automations: App Reload, Cold Chain Alert, Pipeline Health, WISMO, Address Correction</a:t>
+              <a:t>5 automations: App Reload, Cold Chain Alert, Pipeline Health, Sprint Summary, Address Correction</a:t>
             </a:r>
             <a:endParaRPr lang="en-US" sz="1100" dirty="0"/>
           </a:p>
@@ -9211,6 +9389,704 @@
               <a:t>3 Sources  •  2 Pipelines  •  18 Tables  •  2 Products  •  10 Sheets  •  2 Models  •  25 Docs  •  5 Automations  •  1 MCP Server</a:t>
             </a:r>
             <a:endParaRPr lang="en-US" sz="1100" dirty="0"/>
+          </a:p>
+        </p:txBody>
+      </p:sp>
+    </p:spTree>
+  </p:cSld>
+  <p:clrMapOvr>
+    <a:masterClrMapping/>
+  </p:clrMapOvr>
+</p:sld>
+</file>
+
+<file path=ppt/slides/slide15.xml><?xml version="1.0" encoding="utf-8"?>
+<p:sld xmlns:a="http://schemas.openxmlformats.org/drawingml/2006/main" xmlns:r="http://schemas.openxmlformats.org/officeDocument/2006/relationships" xmlns:p="http://schemas.openxmlformats.org/presentationml/2006/main">
+  <p:cSld name="Slide 15">
+    <p:bg>
+      <p:bgPr>
+        <a:solidFill>
+          <a:srgbClr val="FFFFFF"/>
+        </a:solidFill>
+      </p:bgPr>
+    </p:bg>
+    <p:spTree>
+      <p:nvGrpSpPr>
+        <p:cNvPr id="1" name=""/>
+        <p:cNvGrpSpPr/>
+        <p:nvPr/>
+      </p:nvGrpSpPr>
+      <p:grpSpPr>
+        <a:xfrm>
+          <a:off x="0" y="0"/>
+          <a:ext cx="0" cy="0"/>
+          <a:chOff x="0" y="0"/>
+          <a:chExt cx="0" cy="0"/>
+        </a:xfrm>
+      </p:grpSpPr>
+      <p:sp>
+        <p:nvSpPr>
+          <p:cNvPr id="2" name="Shape 0"/>
+          <p:cNvSpPr/>
+          <p:nvPr/>
+        </p:nvSpPr>
+        <p:spPr>
+          <a:xfrm>
+            <a:off x="0" y="0"/>
+            <a:ext cx="12188952" cy="54864"/>
+          </a:xfrm>
+          <a:prstGeom prst="rect">
+            <a:avLst/>
+          </a:prstGeom>
+          <a:solidFill>
+            <a:srgbClr val="006580"/>
+          </a:solidFill>
+          <a:ln/>
+        </p:spPr>
+      </p:sp>
+      <p:sp>
+        <p:nvSpPr>
+          <p:cNvPr id="3" name="Shape 1"/>
+          <p:cNvSpPr/>
+          <p:nvPr/>
+        </p:nvSpPr>
+        <p:spPr>
+          <a:xfrm>
+            <a:off x="457200" y="6446520"/>
+            <a:ext cx="11274552" cy="7315"/>
+          </a:xfrm>
+          <a:prstGeom prst="rect">
+            <a:avLst/>
+          </a:prstGeom>
+          <a:solidFill>
+            <a:srgbClr val="A9B3B6"/>
+          </a:solidFill>
+          <a:ln/>
+        </p:spPr>
+      </p:sp>
+      <p:pic>
+        <p:nvPicPr>
+          <p:cNvPr id="4" name="Image 0" descr="C:\Claude\MCG Full Stack\generators\assets\qlik_logo.png">    </p:cNvPr>
+          <p:cNvPicPr>
+            <a:picLocks noChangeAspect="1"/>
+          </p:cNvPicPr>
+          <p:nvPr/>
+        </p:nvPicPr>
+        <p:blipFill>
+          <a:blip r:embed="rId1"/>
+          <a:stretch>
+            <a:fillRect/>
+          </a:stretch>
+        </p:blipFill>
+        <p:spPr>
+          <a:xfrm>
+            <a:off x="457200" y="6510528"/>
+            <a:ext cx="457200" cy="256032"/>
+          </a:xfrm>
+          <a:prstGeom prst="rect">
+            <a:avLst/>
+          </a:prstGeom>
+        </p:spPr>
+      </p:pic>
+      <p:sp>
+        <p:nvSpPr>
+          <p:cNvPr id="5" name="Text 2"/>
+          <p:cNvSpPr/>
+          <p:nvPr/>
+        </p:nvSpPr>
+        <p:spPr>
+          <a:xfrm>
+            <a:off x="1188720" y="6510528"/>
+            <a:ext cx="7315200" cy="256032"/>
+          </a:xfrm>
+          <a:prstGeom prst="rect">
+            <a:avLst/>
+          </a:prstGeom>
+          <a:noFill/>
+          <a:ln/>
+        </p:spPr>
+        <p:txBody>
+          <a:bodyPr wrap="square" rtlCol="0" anchor="ctr"/>
+          <a:lstStyle/>
+          <a:p>
+            <a:pPr indent="0" marL="0">
+              <a:buNone/>
+            </a:pPr>
+            <a:r>
+              <a:rPr lang="en-US" sz="800" dirty="0">
+                <a:solidFill>
+                  <a:srgbClr val="A9B3B6"/>
+                </a:solidFill>
+                <a:latin typeface="Inter" pitchFamily="34" charset="0"/>
+                <a:ea typeface="Inter" pitchFamily="34" charset="-122"/>
+                <a:cs typeface="Inter" pitchFamily="34" charset="-120"/>
+              </a:rPr>
+              <a:t>Project Qlarity  •  MCG Technology Architecture  •  Qlik Cloud</a:t>
+            </a:r>
+            <a:endParaRPr lang="en-US" sz="800" dirty="0"/>
+          </a:p>
+        </p:txBody>
+      </p:sp>
+      <p:sp>
+        <p:nvSpPr>
+          <p:cNvPr id="6" name="Text 3"/>
+          <p:cNvSpPr/>
+          <p:nvPr/>
+        </p:nvSpPr>
+        <p:spPr>
+          <a:xfrm>
+            <a:off x="10972800" y="6510528"/>
+            <a:ext cx="914400" cy="256032"/>
+          </a:xfrm>
+          <a:prstGeom prst="rect">
+            <a:avLst/>
+          </a:prstGeom>
+          <a:noFill/>
+          <a:ln/>
+        </p:spPr>
+        <p:txBody>
+          <a:bodyPr wrap="square" rtlCol="0" anchor="ctr"/>
+          <a:lstStyle/>
+          <a:p>
+            <a:pPr algn="r" indent="0" marL="0">
+              <a:buNone/>
+            </a:pPr>
+            <a:r>
+              <a:rPr lang="en-US" sz="800" dirty="0">
+                <a:solidFill>
+                  <a:srgbClr val="A9B3B6"/>
+                </a:solidFill>
+                <a:latin typeface="Inter" pitchFamily="34" charset="0"/>
+                <a:ea typeface="Inter" pitchFamily="34" charset="-122"/>
+                <a:cs typeface="Inter" pitchFamily="34" charset="-120"/>
+              </a:rPr>
+              <a:t>15</a:t>
+            </a:r>
+            <a:endParaRPr lang="en-US" sz="800" dirty="0"/>
+          </a:p>
+        </p:txBody>
+      </p:sp>
+      <p:sp>
+        <p:nvSpPr>
+          <p:cNvPr id="7" name="Text 4"/>
+          <p:cNvSpPr/>
+          <p:nvPr/>
+        </p:nvSpPr>
+        <p:spPr>
+          <a:xfrm>
+            <a:off x="548640" y="228600"/>
+            <a:ext cx="10972800" cy="548640"/>
+          </a:xfrm>
+          <a:prstGeom prst="rect">
+            <a:avLst/>
+          </a:prstGeom>
+          <a:noFill/>
+          <a:ln/>
+        </p:spPr>
+        <p:txBody>
+          <a:bodyPr wrap="square" rtlCol="0" anchor="ctr"/>
+          <a:lstStyle/>
+          <a:p>
+            <a:pPr indent="0" marL="0">
+              <a:buNone/>
+            </a:pPr>
+            <a:r>
+              <a:rPr lang="en-US" sz="2200" b="1" dirty="0">
+                <a:solidFill>
+                  <a:srgbClr val="19416C"/>
+                </a:solidFill>
+                <a:latin typeface="Inter" pitchFamily="34" charset="0"/>
+                <a:ea typeface="Inter" pitchFamily="34" charset="-122"/>
+                <a:cs typeface="Inter" pitchFamily="34" charset="-120"/>
+              </a:rPr>
+              <a:t>Deploy Console</a:t>
+            </a:r>
+            <a:endParaRPr lang="en-US" sz="2200" dirty="0"/>
+          </a:p>
+        </p:txBody>
+      </p:sp>
+      <p:sp>
+        <p:nvSpPr>
+          <p:cNvPr id="8" name="Text 5"/>
+          <p:cNvSpPr/>
+          <p:nvPr/>
+        </p:nvSpPr>
+        <p:spPr>
+          <a:xfrm>
+            <a:off x="548640" y="749808"/>
+            <a:ext cx="11064240" cy="292608"/>
+          </a:xfrm>
+          <a:prstGeom prst="rect">
+            <a:avLst/>
+          </a:prstGeom>
+          <a:noFill/>
+          <a:ln/>
+        </p:spPr>
+        <p:txBody>
+          <a:bodyPr wrap="square" rtlCol="0" anchor="ctr"/>
+          <a:lstStyle/>
+          <a:p>
+            <a:pPr indent="0" marL="0">
+              <a:buNone/>
+            </a:pPr>
+            <a:r>
+              <a:rPr lang="en-US" sz="1100" dirty="0">
+                <a:solidFill>
+                  <a:srgbClr val="454659"/>
+                </a:solidFill>
+                <a:latin typeface="Inter" pitchFamily="34" charset="0"/>
+                <a:ea typeface="Inter" pitchFamily="34" charset="-122"/>
+                <a:cs typeface="Inter" pitchFamily="34" charset="-120"/>
+              </a:rPr>
+              <a:t>The whole environment deploys from one repository - 11 wizard steps or a single command.</a:t>
+            </a:r>
+            <a:endParaRPr lang="en-US" sz="1100" dirty="0"/>
+          </a:p>
+        </p:txBody>
+      </p:sp>
+      <p:sp>
+        <p:nvSpPr>
+          <p:cNvPr id="9" name="Shape 6"/>
+          <p:cNvSpPr/>
+          <p:nvPr/>
+        </p:nvSpPr>
+        <p:spPr>
+          <a:xfrm>
+            <a:off x="1344168" y="1133856"/>
+            <a:ext cx="7754112" cy="4901184"/>
+          </a:xfrm>
+          <a:prstGeom prst="roundRect">
+            <a:avLst>
+              <a:gd name="adj" fmla="val 746"/>
+            </a:avLst>
+          </a:prstGeom>
+          <a:solidFill>
+            <a:srgbClr val="FFFFFF"/>
+          </a:solidFill>
+          <a:ln w="12700">
+            <a:solidFill>
+              <a:srgbClr val="A9B3B6"/>
+            </a:solidFill>
+            <a:prstDash val="solid"/>
+          </a:ln>
+          <a:effectLst>
+            <a:outerShdw sx="100000" sy="100000" kx="0" ky="0" algn="bl" rotWithShape="0" blurRad="76200" dist="25400" dir="16200000">
+              <a:srgbClr val="000000">
+                <a:alpha val="18000"/>
+              </a:srgbClr>
+            </a:outerShdw>
+          </a:effectLst>
+        </p:spPr>
+      </p:sp>
+      <p:pic>
+        <p:nvPicPr>
+          <p:cNvPr id="10" name="Image 1" descr="C:\Claude\MCG Full Stack\generators\assets\screenshots\deploy-ui-wizard.png">    </p:cNvPr>
+          <p:cNvPicPr>
+            <a:picLocks noChangeAspect="1"/>
+          </p:cNvPicPr>
+          <p:nvPr/>
+        </p:nvPicPr>
+        <p:blipFill>
+          <a:blip r:embed="rId2"/>
+          <a:stretch>
+            <a:fillRect/>
+          </a:stretch>
+        </p:blipFill>
+        <p:spPr>
+          <a:xfrm>
+            <a:off x="1417320" y="1207008"/>
+            <a:ext cx="7607808" cy="4754880"/>
+          </a:xfrm>
+          <a:prstGeom prst="rect">
+            <a:avLst/>
+          </a:prstGeom>
+        </p:spPr>
+      </p:pic>
+      <p:sp>
+        <p:nvSpPr>
+          <p:cNvPr id="11" name="Text 7"/>
+          <p:cNvSpPr/>
+          <p:nvPr/>
+        </p:nvSpPr>
+        <p:spPr>
+          <a:xfrm>
+            <a:off x="1344168" y="6089904"/>
+            <a:ext cx="7754112" cy="274320"/>
+          </a:xfrm>
+          <a:prstGeom prst="rect">
+            <a:avLst/>
+          </a:prstGeom>
+          <a:noFill/>
+          <a:ln/>
+        </p:spPr>
+        <p:txBody>
+          <a:bodyPr wrap="square" rtlCol="0" anchor="t"/>
+          <a:lstStyle/>
+          <a:p>
+            <a:pPr algn="ctr" indent="0" marL="0">
+              <a:buNone/>
+            </a:pPr>
+            <a:r>
+              <a:rPr lang="en-US" sz="1000" i="1" dirty="0">
+                <a:solidFill>
+                  <a:srgbClr val="6B7280"/>
+                </a:solidFill>
+                <a:latin typeface="Inter" pitchFamily="34" charset="0"/>
+                <a:ea typeface="Inter" pitchFamily="34" charset="-122"/>
+                <a:cs typeface="Inter" pitchFamily="34" charset="-120"/>
+              </a:rPr>
+              <a:t>The MCG deploy console — 11 setup steps, Stewardship at step 11</a:t>
+            </a:r>
+            <a:endParaRPr lang="en-US" sz="1000" dirty="0"/>
+          </a:p>
+        </p:txBody>
+      </p:sp>
+    </p:spTree>
+  </p:cSld>
+  <p:clrMapOvr>
+    <a:masterClrMapping/>
+  </p:clrMapOvr>
+</p:sld>
+</file>
+
+<file path=ppt/slides/slide16.xml><?xml version="1.0" encoding="utf-8"?>
+<p:sld xmlns:a="http://schemas.openxmlformats.org/drawingml/2006/main" xmlns:r="http://schemas.openxmlformats.org/officeDocument/2006/relationships" xmlns:p="http://schemas.openxmlformats.org/presentationml/2006/main">
+  <p:cSld name="Slide 16">
+    <p:bg>
+      <p:bgPr>
+        <a:solidFill>
+          <a:srgbClr val="FFFFFF"/>
+        </a:solidFill>
+      </p:bgPr>
+    </p:bg>
+    <p:spTree>
+      <p:nvGrpSpPr>
+        <p:cNvPr id="1" name=""/>
+        <p:cNvGrpSpPr/>
+        <p:nvPr/>
+      </p:nvGrpSpPr>
+      <p:grpSpPr>
+        <a:xfrm>
+          <a:off x="0" y="0"/>
+          <a:ext cx="0" cy="0"/>
+          <a:chOff x="0" y="0"/>
+          <a:chExt cx="0" cy="0"/>
+        </a:xfrm>
+      </p:grpSpPr>
+      <p:sp>
+        <p:nvSpPr>
+          <p:cNvPr id="2" name="Shape 0"/>
+          <p:cNvSpPr/>
+          <p:nvPr/>
+        </p:nvSpPr>
+        <p:spPr>
+          <a:xfrm>
+            <a:off x="0" y="0"/>
+            <a:ext cx="12188952" cy="54864"/>
+          </a:xfrm>
+          <a:prstGeom prst="rect">
+            <a:avLst/>
+          </a:prstGeom>
+          <a:solidFill>
+            <a:srgbClr val="006580"/>
+          </a:solidFill>
+          <a:ln/>
+        </p:spPr>
+      </p:sp>
+      <p:sp>
+        <p:nvSpPr>
+          <p:cNvPr id="3" name="Shape 1"/>
+          <p:cNvSpPr/>
+          <p:nvPr/>
+        </p:nvSpPr>
+        <p:spPr>
+          <a:xfrm>
+            <a:off x="457200" y="6446520"/>
+            <a:ext cx="11274552" cy="7315"/>
+          </a:xfrm>
+          <a:prstGeom prst="rect">
+            <a:avLst/>
+          </a:prstGeom>
+          <a:solidFill>
+            <a:srgbClr val="A9B3B6"/>
+          </a:solidFill>
+          <a:ln/>
+        </p:spPr>
+      </p:sp>
+      <p:pic>
+        <p:nvPicPr>
+          <p:cNvPr id="4" name="Image 0" descr="C:\Claude\MCG Full Stack\generators\assets\qlik_logo.png">    </p:cNvPr>
+          <p:cNvPicPr>
+            <a:picLocks noChangeAspect="1"/>
+          </p:cNvPicPr>
+          <p:nvPr/>
+        </p:nvPicPr>
+        <p:blipFill>
+          <a:blip r:embed="rId1"/>
+          <a:stretch>
+            <a:fillRect/>
+          </a:stretch>
+        </p:blipFill>
+        <p:spPr>
+          <a:xfrm>
+            <a:off x="457200" y="6510528"/>
+            <a:ext cx="457200" cy="256032"/>
+          </a:xfrm>
+          <a:prstGeom prst="rect">
+            <a:avLst/>
+          </a:prstGeom>
+        </p:spPr>
+      </p:pic>
+      <p:sp>
+        <p:nvSpPr>
+          <p:cNvPr id="5" name="Text 2"/>
+          <p:cNvSpPr/>
+          <p:nvPr/>
+        </p:nvSpPr>
+        <p:spPr>
+          <a:xfrm>
+            <a:off x="1188720" y="6510528"/>
+            <a:ext cx="7315200" cy="256032"/>
+          </a:xfrm>
+          <a:prstGeom prst="rect">
+            <a:avLst/>
+          </a:prstGeom>
+          <a:noFill/>
+          <a:ln/>
+        </p:spPr>
+        <p:txBody>
+          <a:bodyPr wrap="square" rtlCol="0" anchor="ctr"/>
+          <a:lstStyle/>
+          <a:p>
+            <a:pPr indent="0" marL="0">
+              <a:buNone/>
+            </a:pPr>
+            <a:r>
+              <a:rPr lang="en-US" sz="800" dirty="0">
+                <a:solidFill>
+                  <a:srgbClr val="A9B3B6"/>
+                </a:solidFill>
+                <a:latin typeface="Inter" pitchFamily="34" charset="0"/>
+                <a:ea typeface="Inter" pitchFamily="34" charset="-122"/>
+                <a:cs typeface="Inter" pitchFamily="34" charset="-120"/>
+              </a:rPr>
+              <a:t>Project Qlarity  •  MCG Technology Architecture  •  Qlik Cloud</a:t>
+            </a:r>
+            <a:endParaRPr lang="en-US" sz="800" dirty="0"/>
+          </a:p>
+        </p:txBody>
+      </p:sp>
+      <p:sp>
+        <p:nvSpPr>
+          <p:cNvPr id="6" name="Text 3"/>
+          <p:cNvSpPr/>
+          <p:nvPr/>
+        </p:nvSpPr>
+        <p:spPr>
+          <a:xfrm>
+            <a:off x="10972800" y="6510528"/>
+            <a:ext cx="914400" cy="256032"/>
+          </a:xfrm>
+          <a:prstGeom prst="rect">
+            <a:avLst/>
+          </a:prstGeom>
+          <a:noFill/>
+          <a:ln/>
+        </p:spPr>
+        <p:txBody>
+          <a:bodyPr wrap="square" rtlCol="0" anchor="ctr"/>
+          <a:lstStyle/>
+          <a:p>
+            <a:pPr algn="r" indent="0" marL="0">
+              <a:buNone/>
+            </a:pPr>
+            <a:r>
+              <a:rPr lang="en-US" sz="800" dirty="0">
+                <a:solidFill>
+                  <a:srgbClr val="A9B3B6"/>
+                </a:solidFill>
+                <a:latin typeface="Inter" pitchFamily="34" charset="0"/>
+                <a:ea typeface="Inter" pitchFamily="34" charset="-122"/>
+                <a:cs typeface="Inter" pitchFamily="34" charset="-120"/>
+              </a:rPr>
+              <a:t>16</a:t>
+            </a:r>
+            <a:endParaRPr lang="en-US" sz="800" dirty="0"/>
+          </a:p>
+        </p:txBody>
+      </p:sp>
+      <p:sp>
+        <p:nvSpPr>
+          <p:cNvPr id="7" name="Text 4"/>
+          <p:cNvSpPr/>
+          <p:nvPr/>
+        </p:nvSpPr>
+        <p:spPr>
+          <a:xfrm>
+            <a:off x="548640" y="228600"/>
+            <a:ext cx="10972800" cy="548640"/>
+          </a:xfrm>
+          <a:prstGeom prst="rect">
+            <a:avLst/>
+          </a:prstGeom>
+          <a:noFill/>
+          <a:ln/>
+        </p:spPr>
+        <p:txBody>
+          <a:bodyPr wrap="square" rtlCol="0" anchor="ctr"/>
+          <a:lstStyle/>
+          <a:p>
+            <a:pPr indent="0" marL="0">
+              <a:buNone/>
+            </a:pPr>
+            <a:r>
+              <a:rPr lang="en-US" sz="2200" b="1" dirty="0">
+                <a:solidFill>
+                  <a:srgbClr val="19416C"/>
+                </a:solidFill>
+                <a:latin typeface="Inter" pitchFamily="34" charset="0"/>
+                <a:ea typeface="Inter" pitchFamily="34" charset="-122"/>
+                <a:cs typeface="Inter" pitchFamily="34" charset="-120"/>
+              </a:rPr>
+              <a:t>Deploy Console: Stewardship</a:t>
+            </a:r>
+            <a:endParaRPr lang="en-US" sz="2200" dirty="0"/>
+          </a:p>
+        </p:txBody>
+      </p:sp>
+      <p:sp>
+        <p:nvSpPr>
+          <p:cNvPr id="8" name="Text 5"/>
+          <p:cNvSpPr/>
+          <p:nvPr/>
+        </p:nvSpPr>
+        <p:spPr>
+          <a:xfrm>
+            <a:off x="548640" y="749808"/>
+            <a:ext cx="11064240" cy="292608"/>
+          </a:xfrm>
+          <a:prstGeom prst="rect">
+            <a:avLst/>
+          </a:prstGeom>
+          <a:noFill/>
+          <a:ln/>
+        </p:spPr>
+        <p:txBody>
+          <a:bodyPr wrap="square" rtlCol="0" anchor="ctr"/>
+          <a:lstStyle/>
+          <a:p>
+            <a:pPr indent="0" marL="0">
+              <a:buNone/>
+            </a:pPr>
+            <a:r>
+              <a:rPr lang="en-US" sz="1100" dirty="0">
+                <a:solidFill>
+                  <a:srgbClr val="454659"/>
+                </a:solidFill>
+                <a:latin typeface="Inter" pitchFamily="34" charset="0"/>
+                <a:ea typeface="Inter" pitchFamily="34" charset="-122"/>
+                <a:cs typeface="Inter" pitchFamily="34" charset="-120"/>
+              </a:rPr>
+              <a:t>Sprint settings and the 12-column record schema the Talend job emits.</a:t>
+            </a:r>
+            <a:endParaRPr lang="en-US" sz="1100" dirty="0"/>
+          </a:p>
+        </p:txBody>
+      </p:sp>
+      <p:sp>
+        <p:nvSpPr>
+          <p:cNvPr id="9" name="Shape 6"/>
+          <p:cNvSpPr/>
+          <p:nvPr/>
+        </p:nvSpPr>
+        <p:spPr>
+          <a:xfrm>
+            <a:off x="1344168" y="1133856"/>
+            <a:ext cx="7754112" cy="4901184"/>
+          </a:xfrm>
+          <a:prstGeom prst="roundRect">
+            <a:avLst>
+              <a:gd name="adj" fmla="val 746"/>
+            </a:avLst>
+          </a:prstGeom>
+          <a:solidFill>
+            <a:srgbClr val="FFFFFF"/>
+          </a:solidFill>
+          <a:ln w="12700">
+            <a:solidFill>
+              <a:srgbClr val="A9B3B6"/>
+            </a:solidFill>
+            <a:prstDash val="solid"/>
+          </a:ln>
+          <a:effectLst>
+            <a:outerShdw sx="100000" sy="100000" kx="0" ky="0" algn="bl" rotWithShape="0" blurRad="76200" dist="25400" dir="16200000">
+              <a:srgbClr val="000000">
+                <a:alpha val="18000"/>
+              </a:srgbClr>
+            </a:outerShdw>
+          </a:effectLst>
+        </p:spPr>
+      </p:sp>
+      <p:pic>
+        <p:nvPicPr>
+          <p:cNvPr id="10" name="Image 1" descr="C:\Claude\MCG Full Stack\generators\assets\screenshots\deploy-ui-stewardship.png">    </p:cNvPr>
+          <p:cNvPicPr>
+            <a:picLocks noChangeAspect="1"/>
+          </p:cNvPicPr>
+          <p:nvPr/>
+        </p:nvPicPr>
+        <p:blipFill>
+          <a:blip r:embed="rId2"/>
+          <a:stretch>
+            <a:fillRect/>
+          </a:stretch>
+        </p:blipFill>
+        <p:spPr>
+          <a:xfrm>
+            <a:off x="1417320" y="1207008"/>
+            <a:ext cx="7607808" cy="4754880"/>
+          </a:xfrm>
+          <a:prstGeom prst="rect">
+            <a:avLst/>
+          </a:prstGeom>
+        </p:spPr>
+      </p:pic>
+      <p:sp>
+        <p:nvSpPr>
+          <p:cNvPr id="11" name="Text 7"/>
+          <p:cNvSpPr/>
+          <p:nvPr/>
+        </p:nvSpPr>
+        <p:spPr>
+          <a:xfrm>
+            <a:off x="1344168" y="6089904"/>
+            <a:ext cx="7754112" cy="274320"/>
+          </a:xfrm>
+          <a:prstGeom prst="rect">
+            <a:avLst/>
+          </a:prstGeom>
+          <a:noFill/>
+          <a:ln/>
+        </p:spPr>
+        <p:txBody>
+          <a:bodyPr wrap="square" rtlCol="0" anchor="t"/>
+          <a:lstStyle/>
+          <a:p>
+            <a:pPr algn="ctr" indent="0" marL="0">
+              <a:buNone/>
+            </a:pPr>
+            <a:r>
+              <a:rPr lang="en-US" sz="1000" i="1" dirty="0">
+                <a:solidFill>
+                  <a:srgbClr val="6B7280"/>
+                </a:solidFill>
+                <a:latin typeface="Inter" pitchFamily="34" charset="0"/>
+                <a:ea typeface="Inter" pitchFamily="34" charset="-122"/>
+                <a:cs typeface="Inter" pitchFamily="34" charset="-120"/>
+              </a:rPr>
+              <a:t>The Stewardship wizard page — sprint settings and the 12-column record schema</a:t>
+            </a:r>
+            <a:endParaRPr lang="en-US" sz="1000" dirty="0"/>
           </a:p>
         </p:txBody>
       </p:sp>

--- a/MCG_Technology_Architecture.pptx
+++ b/MCG_Technology_Architecture.pptx
@@ -7354,7 +7354,7 @@
                 <a:ea typeface="Inter" pitchFamily="34" charset="-122"/>
                 <a:cs typeface="Inter" pitchFamily="34" charset="-120"/>
               </a:rPr>
-              <a:t>PostgreSQL CDC + Salesforce incremental sync</a:t>
+              <a:t>PostgreSQL CDC + Meridian CRM incremental sync</a:t>
             </a:r>
             <a:endParaRPr lang="en-US" sz="1000" dirty="0"/>
           </a:p>
@@ -7518,7 +7518,7 @@
                 <a:ea typeface="Inter" pitchFamily="34" charset="-122"/>
                 <a:cs typeface="Inter" pitchFamily="34" charset="-120"/>
               </a:rPr>
-              <a:t>Pipeline 6: sf_contacts (API, 15 min)</a:t>
+              <a:t>Pipeline 6: crm_contacts (API, 15 min)</a:t>
             </a:r>
             <a:endParaRPr lang="en-US" sz="1100" dirty="0"/>
           </a:p>
@@ -7559,7 +7559,7 @@
                 <a:ea typeface="Inter" pitchFamily="34" charset="-122"/>
                 <a:cs typeface="Inter" pitchFamily="34" charset="-120"/>
               </a:rPr>
-              <a:t>Pipeline 7: sf_orders (API, 15 min)</a:t>
+              <a:t>Pipeline 7: crm_orders (API, 15 min)</a:t>
             </a:r>
             <a:endParaRPr lang="en-US" sz="1100" dirty="0"/>
           </a:p>
@@ -7600,7 +7600,7 @@
                 <a:ea typeface="Inter" pitchFamily="34" charset="-122"/>
                 <a:cs typeface="Inter" pitchFamily="34" charset="-120"/>
               </a:rPr>
-              <a:t>Pipeline 8: sf_products (API, 15 min)</a:t>
+              <a:t>Pipeline 8: crm_products (API, 15 min)</a:t>
             </a:r>
             <a:endParaRPr lang="en-US" sz="1100" dirty="0"/>
           </a:p>
@@ -8725,7 +8725,7 @@
                 <a:ea typeface="Inter" pitchFamily="34" charset="-122"/>
                 <a:cs typeface="Inter" pitchFamily="34" charset="-120"/>
               </a:rPr>
-              <a:t>PostgreSQL WMS (CDC)  •  Apache Kafka 2 topics (streaming)  •  Salesforce CRM (API)</a:t>
+              <a:t>PostgreSQL WMS (CDC)  •  Apache Kafka 2 topics (streaming)  •  Meridian CRM (API)</a:t>
             </a:r>
             <a:endParaRPr lang="en-US" sz="1100" dirty="0"/>
           </a:p>
@@ -11064,7 +11064,7 @@
                 <a:ea typeface="Inter" pitchFamily="34" charset="-122"/>
                 <a:cs typeface="Inter" pitchFamily="34" charset="-120"/>
               </a:rPr>
-              <a:t>Salesforce CRM</a:t>
+              <a:t>Meridian CRM</a:t>
             </a:r>
             <a:endParaRPr lang="en-US" sz="1200" dirty="0"/>
           </a:p>
@@ -14830,7 +14830,7 @@
                 <a:ea typeface="Inter" pitchFamily="34" charset="-122"/>
                 <a:cs typeface="Inter" pitchFamily="34" charset="-120"/>
               </a:rPr>
-              <a:t>Salesforce CRM</a:t>
+              <a:t>Meridian CRM</a:t>
             </a:r>
             <a:endParaRPr lang="en-US" sz="1400" dirty="0"/>
           </a:p>
@@ -15040,7 +15040,7 @@
                 <a:ea typeface="Inter" pitchFamily="34" charset="-122"/>
                 <a:cs typeface="Inter" pitchFamily="34" charset="-120"/>
               </a:rPr>
-              <a:t>MCG_Order__c</a:t>
+              <a:t>crm_orders</a:t>
             </a:r>
             <a:endParaRPr lang="en-US" sz="1100" dirty="0"/>
           </a:p>
@@ -15145,7 +15145,7 @@
                 <a:ea typeface="Inter" pitchFamily="34" charset="-122"/>
                 <a:cs typeface="Inter" pitchFamily="34" charset="-120"/>
               </a:rPr>
-              <a:t>MCG_Product__c</a:t>
+              <a:t>crm_products</a:t>
             </a:r>
             <a:endParaRPr lang="en-US" sz="1100" dirty="0"/>
           </a:p>
@@ -16579,7 +16579,7 @@
                 <a:ea typeface="Inter" pitchFamily="34" charset="-122"/>
                 <a:cs typeface="Inter" pitchFamily="34" charset="-120"/>
               </a:rPr>
-              <a:t>Data Movement gateway connections are created in the Data Integration UI (the public REST API cannot bind them) — the deploy script skips them with guidance. Kafka sources need a Data Gateway - Streaming; Salesforce/S3/Athena are credentialed connectors.</a:t>
+              <a:t>Data Movement gateway connections are created in the Data Integration UI (the public REST API cannot bind them) — the deploy script skips them with guidance. Kafka sources need a Data Gateway - Streaming; S3/Athena are credentialed connectors.</a:t>
             </a:r>
             <a:endParaRPr lang="en-US" sz="1050" dirty="0"/>
           </a:p>
@@ -17183,7 +17183,7 @@
                 <a:ea typeface="Inter" pitchFamily="34" charset="-122"/>
                 <a:cs typeface="Inter" pitchFamily="34" charset="-120"/>
               </a:rPr>
-              <a:t>sf_contacts (API)</a:t>
+              <a:t>crm_contacts (API)</a:t>
             </a:r>
             <a:endParaRPr lang="en-US" sz="1000" dirty="0"/>
           </a:p>
@@ -17249,7 +17249,7 @@
                 <a:ea typeface="Inter" pitchFamily="34" charset="-122"/>
                 <a:cs typeface="Inter" pitchFamily="34" charset="-120"/>
               </a:rPr>
-              <a:t>sf_orders (API)</a:t>
+              <a:t>crm_orders (API)</a:t>
             </a:r>
             <a:endParaRPr lang="en-US" sz="1000" dirty="0"/>
           </a:p>
@@ -17315,7 +17315,7 @@
                 <a:ea typeface="Inter" pitchFamily="34" charset="-122"/>
                 <a:cs typeface="Inter" pitchFamily="34" charset="-120"/>
               </a:rPr>
-              <a:t>sf_products (API)</a:t>
+              <a:t>crm_products (API)</a:t>
             </a:r>
             <a:endParaRPr lang="en-US" sz="1000" dirty="0"/>
           </a:p>
